--- a/assets/investor-deck/Tecnotitan-Investor-Deck-ES.pptx
+++ b/assets/investor-deck/Tecnotitan-Investor-Deck-ES.pptx
@@ -2,24 +2,24 @@
 <file path=ppt/presentation.xml><?xml version="1.0" encoding="utf-8"?>
 <p:presentation xmlns:p="http://schemas.openxmlformats.org/presentationml/2006/main">
   <p:sldMasterIdLst>
-    <p:sldMasterId xmlns:r="http://schemas.openxmlformats.org/officeDocument/2006/relationships" id="2147483648" r:id="Rf17d4d29fbb94c5e"/>
+    <p:sldMasterId xmlns:r="http://schemas.openxmlformats.org/officeDocument/2006/relationships" id="2147483648" r:id="R415773dd8c264665"/>
   </p:sldMasterIdLst>
   <p:notesMasterIdLst>
-    <p:notesMasterId xmlns:r="http://schemas.openxmlformats.org/officeDocument/2006/relationships" r:id="Rb2c3f37150174e8a"/>
+    <p:notesMasterId xmlns:r="http://schemas.openxmlformats.org/officeDocument/2006/relationships" r:id="R58ed9e65d3114510"/>
   </p:notesMasterIdLst>
   <p:sldIdLst>
-    <p:sldId xmlns:r="http://schemas.openxmlformats.org/officeDocument/2006/relationships" id="256" r:id="Raa0faa175f9e4e52"/>
-    <p:sldId xmlns:r="http://schemas.openxmlformats.org/officeDocument/2006/relationships" id="257" r:id="R77b6a12169c6439c"/>
-    <p:sldId xmlns:r="http://schemas.openxmlformats.org/officeDocument/2006/relationships" id="258" r:id="Rbb610b4be83c4b2a"/>
-    <p:sldId xmlns:r="http://schemas.openxmlformats.org/officeDocument/2006/relationships" id="259" r:id="Rae70bc1581f440d5"/>
-    <p:sldId xmlns:r="http://schemas.openxmlformats.org/officeDocument/2006/relationships" id="260" r:id="R61f3392a65a14a0e"/>
-    <p:sldId xmlns:r="http://schemas.openxmlformats.org/officeDocument/2006/relationships" id="261" r:id="Rd89501a99df546cc"/>
-    <p:sldId xmlns:r="http://schemas.openxmlformats.org/officeDocument/2006/relationships" id="262" r:id="R84001194882a44e4"/>
-    <p:sldId xmlns:r="http://schemas.openxmlformats.org/officeDocument/2006/relationships" id="263" r:id="Rf2d0924e2ef640c1"/>
-    <p:sldId xmlns:r="http://schemas.openxmlformats.org/officeDocument/2006/relationships" id="264" r:id="R60d9f85b14614743"/>
-    <p:sldId xmlns:r="http://schemas.openxmlformats.org/officeDocument/2006/relationships" id="265" r:id="Rb6b5a708625c41d9"/>
-    <p:sldId xmlns:r="http://schemas.openxmlformats.org/officeDocument/2006/relationships" id="266" r:id="R13b40baeaf854e27"/>
-    <p:sldId xmlns:r="http://schemas.openxmlformats.org/officeDocument/2006/relationships" id="267" r:id="R1996e6d756064ba1"/>
+    <p:sldId xmlns:r="http://schemas.openxmlformats.org/officeDocument/2006/relationships" id="256" r:id="R30af14802f024815"/>
+    <p:sldId xmlns:r="http://schemas.openxmlformats.org/officeDocument/2006/relationships" id="257" r:id="R28a5db9038324c03"/>
+    <p:sldId xmlns:r="http://schemas.openxmlformats.org/officeDocument/2006/relationships" id="258" r:id="R1669e85907684f4f"/>
+    <p:sldId xmlns:r="http://schemas.openxmlformats.org/officeDocument/2006/relationships" id="259" r:id="R7e35ca2a0a2c43cb"/>
+    <p:sldId xmlns:r="http://schemas.openxmlformats.org/officeDocument/2006/relationships" id="260" r:id="R16eaf0ca09544572"/>
+    <p:sldId xmlns:r="http://schemas.openxmlformats.org/officeDocument/2006/relationships" id="261" r:id="R1f0943379b984514"/>
+    <p:sldId xmlns:r="http://schemas.openxmlformats.org/officeDocument/2006/relationships" id="262" r:id="R2eff50bb1cca4cd3"/>
+    <p:sldId xmlns:r="http://schemas.openxmlformats.org/officeDocument/2006/relationships" id="263" r:id="Raad83ecc270e4475"/>
+    <p:sldId xmlns:r="http://schemas.openxmlformats.org/officeDocument/2006/relationships" id="264" r:id="R70ffbf07dc0a4cd7"/>
+    <p:sldId xmlns:r="http://schemas.openxmlformats.org/officeDocument/2006/relationships" id="265" r:id="Rf5ba58a584af4061"/>
+    <p:sldId xmlns:r="http://schemas.openxmlformats.org/officeDocument/2006/relationships" id="266" r:id="Ra4291e060cc74014"/>
+    <p:sldId xmlns:r="http://schemas.openxmlformats.org/officeDocument/2006/relationships" id="267" r:id="R44ac9a09d69a4ae5"/>
   </p:sldIdLst>
   <p:sldSz cx="12192000" cy="6858000"/>
   <p:notesSz cx="6858000" cy="9144000"/>
@@ -1292,7 +1292,7 @@
   </p:cSld>
   <p:clrMap bg1="lt1" tx1="dk1" bg2="lt2" tx2="dk2" accent1="accent1" accent2="accent2" accent3="accent3" accent4="accent4" accent5="accent5" accent6="accent6" hlink="hlink" folHlink="folHlink"/>
   <p:sldLayoutIdLst>
-    <p:sldLayoutId xmlns:r="http://schemas.openxmlformats.org/officeDocument/2006/relationships" id="2147483649" r:id="R0ba7d2599e4a472e"/>
+    <p:sldLayoutId xmlns:r="http://schemas.openxmlformats.org/officeDocument/2006/relationships" id="2147483649" r:id="R65a1f1c9a044410d"/>
   </p:sldLayoutIdLst>
   <p:txStyles>
     <p:titleStyle>
@@ -1794,7 +1794,7 @@
           <p:nvPr/>
         </p:nvPicPr>
         <p:blipFill>
-          <a:blip xmlns:r="http://schemas.openxmlformats.org/officeDocument/2006/relationships" xmlns:a="http://schemas.openxmlformats.org/drawingml/2006/main" r:embed="R773c01d6adf94db3"/>
+          <a:blip xmlns:r="http://schemas.openxmlformats.org/officeDocument/2006/relationships" xmlns:a="http://schemas.openxmlformats.org/drawingml/2006/main" r:embed="R893a4839d4384458"/>
           <a:srcRect xmlns:a="http://schemas.openxmlformats.org/drawingml/2006/main" l="0" t="7813" r="0" b="7813"/>
           <a:stretch xmlns:a="http://schemas.openxmlformats.org/drawingml/2006/main">
             <a:fillRect l="0" t="0" r="0" b="0"/>
@@ -1815,7 +1815,7 @@
           <p:cNvPr id="2" name="">
             <a:extLst xmlns:a="http://schemas.openxmlformats.org/drawingml/2006/main">
               <a:ext uri="{FF2B5EF4-FFF2-40B4-BE49-F238E27FC236}">
-                <a16:creationId xmlns:a16="http://schemas.microsoft.com/office/drawing/2014/main" id="{4065216A-F50E-4931-B259-B276EF2F839D}"/>
+                <a16:creationId xmlns:a16="http://schemas.microsoft.com/office/drawing/2014/main" id="{FF5EBB51-CCB4-4E10-9CDC-FC1720771C77}"/>
               </a:ext>
             </a:extLst>
           </p:cNvPr>
@@ -1852,7 +1852,7 @@
           <p:cNvPr id="3" name="">
             <a:extLst xmlns:a="http://schemas.openxmlformats.org/drawingml/2006/main">
               <a:ext uri="{FF2B5EF4-FFF2-40B4-BE49-F238E27FC236}">
-                <a16:creationId xmlns:a16="http://schemas.microsoft.com/office/drawing/2014/main" id="{7AA220A7-5669-46B4-91A5-BBB7CED5C22B}"/>
+                <a16:creationId xmlns:a16="http://schemas.microsoft.com/office/drawing/2014/main" id="{FAD35A3B-1962-41FB-BFBC-3787E9D06CC2}"/>
               </a:ext>
             </a:extLst>
           </p:cNvPr>
@@ -1889,7 +1889,7 @@
           <p:cNvPr id="4" name="">
             <a:extLst xmlns:a="http://schemas.openxmlformats.org/drawingml/2006/main">
               <a:ext uri="{FF2B5EF4-FFF2-40B4-BE49-F238E27FC236}">
-                <a16:creationId xmlns:a16="http://schemas.microsoft.com/office/drawing/2014/main" id="{DCC9234A-55FB-42E6-BF8E-6F5598590449}"/>
+                <a16:creationId xmlns:a16="http://schemas.microsoft.com/office/drawing/2014/main" id="{6C4C08D1-0118-436A-AA54-FB535D8F6A1C}"/>
               </a:ext>
             </a:extLst>
           </p:cNvPr>
@@ -1953,7 +1953,7 @@
           <p:cNvPr id="5" name="">
             <a:extLst xmlns:a="http://schemas.openxmlformats.org/drawingml/2006/main">
               <a:ext uri="{FF2B5EF4-FFF2-40B4-BE49-F238E27FC236}">
-                <a16:creationId xmlns:a16="http://schemas.microsoft.com/office/drawing/2014/main" id="{F4C977E0-C595-40C5-B55B-C20942EE04E0}"/>
+                <a16:creationId xmlns:a16="http://schemas.microsoft.com/office/drawing/2014/main" id="{B02779FF-AA29-47BB-8FD0-E7215E6A88B0}"/>
               </a:ext>
             </a:extLst>
           </p:cNvPr>
@@ -2017,7 +2017,7 @@
           <p:cNvPr id="6" name="">
             <a:extLst xmlns:a="http://schemas.openxmlformats.org/drawingml/2006/main">
               <a:ext uri="{FF2B5EF4-FFF2-40B4-BE49-F238E27FC236}">
-                <a16:creationId xmlns:a16="http://schemas.microsoft.com/office/drawing/2014/main" id="{10F9918A-8674-47FA-8AD7-56FDE30BFE3F}"/>
+                <a16:creationId xmlns:a16="http://schemas.microsoft.com/office/drawing/2014/main" id="{B1188675-8EA0-44E3-9FFE-ADF9B833C742}"/>
               </a:ext>
             </a:extLst>
           </p:cNvPr>
@@ -2050,7 +2050,7 @@
           <p:cNvPr id="7" name="">
             <a:extLst xmlns:a="http://schemas.openxmlformats.org/drawingml/2006/main">
               <a:ext uri="{FF2B5EF4-FFF2-40B4-BE49-F238E27FC236}">
-                <a16:creationId xmlns:a16="http://schemas.microsoft.com/office/drawing/2014/main" id="{A29DCF8C-7B78-4D2A-91FD-7C02B314FE9C}"/>
+                <a16:creationId xmlns:a16="http://schemas.microsoft.com/office/drawing/2014/main" id="{6EB2C7CA-9037-4BCB-8BBB-A7B91B11BB2D}"/>
               </a:ext>
             </a:extLst>
           </p:cNvPr>
@@ -2114,7 +2114,7 @@
           <p:cNvPr id="8" name="">
             <a:extLst xmlns:a="http://schemas.openxmlformats.org/drawingml/2006/main">
               <a:ext uri="{FF2B5EF4-FFF2-40B4-BE49-F238E27FC236}">
-                <a16:creationId xmlns:a16="http://schemas.microsoft.com/office/drawing/2014/main" id="{FD879AFC-4019-418B-B09D-4E4E207DE10D}"/>
+                <a16:creationId xmlns:a16="http://schemas.microsoft.com/office/drawing/2014/main" id="{75DA2EC8-A9C5-4AC7-9A6D-913D961E29D3}"/>
               </a:ext>
             </a:extLst>
           </p:cNvPr>
@@ -2178,7 +2178,7 @@
           <p:cNvPr id="9" name="">
             <a:extLst xmlns:a="http://schemas.openxmlformats.org/drawingml/2006/main">
               <a:ext uri="{FF2B5EF4-FFF2-40B4-BE49-F238E27FC236}">
-                <a16:creationId xmlns:a16="http://schemas.microsoft.com/office/drawing/2014/main" id="{65FC5495-50A3-4791-9FFA-F3B445B7C775}"/>
+                <a16:creationId xmlns:a16="http://schemas.microsoft.com/office/drawing/2014/main" id="{ABDE50DB-3EE9-4BCB-BB52-4F7A08EAA0DC}"/>
               </a:ext>
             </a:extLst>
           </p:cNvPr>
@@ -2213,7 +2213,7 @@
           <p:cNvPr id="10" name="">
             <a:extLst xmlns:a="http://schemas.openxmlformats.org/drawingml/2006/main">
               <a:ext uri="{FF2B5EF4-FFF2-40B4-BE49-F238E27FC236}">
-                <a16:creationId xmlns:a16="http://schemas.microsoft.com/office/drawing/2014/main" id="{094A818D-3A8A-4480-8AEC-0082D3427DC9}"/>
+                <a16:creationId xmlns:a16="http://schemas.microsoft.com/office/drawing/2014/main" id="{79BB107B-05DE-455F-8094-7B0229E659E3}"/>
               </a:ext>
             </a:extLst>
           </p:cNvPr>
@@ -2277,7 +2277,7 @@
           <p:cNvPr id="11" name="">
             <a:extLst xmlns:a="http://schemas.openxmlformats.org/drawingml/2006/main">
               <a:ext uri="{FF2B5EF4-FFF2-40B4-BE49-F238E27FC236}">
-                <a16:creationId xmlns:a16="http://schemas.microsoft.com/office/drawing/2014/main" id="{B8A14488-EE70-4317-A3F4-F10C9CBDF0BD}"/>
+                <a16:creationId xmlns:a16="http://schemas.microsoft.com/office/drawing/2014/main" id="{C669ECD6-7B1B-4441-BCA1-4CAA171B39C5}"/>
               </a:ext>
             </a:extLst>
           </p:cNvPr>
@@ -2312,7 +2312,7 @@
           <p:cNvPr id="12" name="">
             <a:extLst xmlns:a="http://schemas.openxmlformats.org/drawingml/2006/main">
               <a:ext uri="{FF2B5EF4-FFF2-40B4-BE49-F238E27FC236}">
-                <a16:creationId xmlns:a16="http://schemas.microsoft.com/office/drawing/2014/main" id="{B2B12D32-F5AB-4AC6-957B-A1A5EB0670AD}"/>
+                <a16:creationId xmlns:a16="http://schemas.microsoft.com/office/drawing/2014/main" id="{8C5F48C6-DCE7-434B-987C-67D604A6E6D7}"/>
               </a:ext>
             </a:extLst>
           </p:cNvPr>
@@ -2376,7 +2376,7 @@
           <p:cNvPr id="13" name="">
             <a:extLst xmlns:a="http://schemas.openxmlformats.org/drawingml/2006/main">
               <a:ext uri="{FF2B5EF4-FFF2-40B4-BE49-F238E27FC236}">
-                <a16:creationId xmlns:a16="http://schemas.microsoft.com/office/drawing/2014/main" id="{CAD43AE7-A491-4020-BA60-7B6C0AF516CF}"/>
+                <a16:creationId xmlns:a16="http://schemas.microsoft.com/office/drawing/2014/main" id="{483561CF-132F-47D9-9FEF-DD71D787E58D}"/>
               </a:ext>
             </a:extLst>
           </p:cNvPr>
@@ -2411,7 +2411,7 @@
           <p:cNvPr id="14" name="">
             <a:extLst xmlns:a="http://schemas.openxmlformats.org/drawingml/2006/main">
               <a:ext uri="{FF2B5EF4-FFF2-40B4-BE49-F238E27FC236}">
-                <a16:creationId xmlns:a16="http://schemas.microsoft.com/office/drawing/2014/main" id="{35F8DA94-9D98-4717-AC6C-2971C01D2592}"/>
+                <a16:creationId xmlns:a16="http://schemas.microsoft.com/office/drawing/2014/main" id="{9DE0CAFB-647A-4AA0-929D-CF72D1AE7ECB}"/>
               </a:ext>
             </a:extLst>
           </p:cNvPr>
@@ -2475,7 +2475,7 @@
           <p:cNvPr id="15" name="">
             <a:extLst xmlns:a="http://schemas.openxmlformats.org/drawingml/2006/main">
               <a:ext uri="{FF2B5EF4-FFF2-40B4-BE49-F238E27FC236}">
-                <a16:creationId xmlns:a16="http://schemas.microsoft.com/office/drawing/2014/main" id="{18D3928A-1FC6-4056-A048-4F86180C2C41}"/>
+                <a16:creationId xmlns:a16="http://schemas.microsoft.com/office/drawing/2014/main" id="{3D8595F3-BAF3-42AF-B7BA-060448F16393}"/>
               </a:ext>
             </a:extLst>
           </p:cNvPr>
@@ -2539,7 +2539,7 @@
           <p:cNvPr id="16" name="">
             <a:extLst xmlns:a="http://schemas.openxmlformats.org/drawingml/2006/main">
               <a:ext uri="{FF2B5EF4-FFF2-40B4-BE49-F238E27FC236}">
-                <a16:creationId xmlns:a16="http://schemas.microsoft.com/office/drawing/2014/main" id="{C84CF8C0-8D49-4443-9C0C-4D496A21C4D2}"/>
+                <a16:creationId xmlns:a16="http://schemas.microsoft.com/office/drawing/2014/main" id="{EDA903B1-9BCC-4BC5-9E20-E58C42F60ABF}"/>
               </a:ext>
             </a:extLst>
           </p:cNvPr>
@@ -2574,7 +2574,7 @@
           <p:cNvPr id="17" name="">
             <a:extLst xmlns:a="http://schemas.openxmlformats.org/drawingml/2006/main">
               <a:ext uri="{FF2B5EF4-FFF2-40B4-BE49-F238E27FC236}">
-                <a16:creationId xmlns:a16="http://schemas.microsoft.com/office/drawing/2014/main" id="{CE086387-C375-4671-9D7F-794BC0810D7A}"/>
+                <a16:creationId xmlns:a16="http://schemas.microsoft.com/office/drawing/2014/main" id="{59768E5F-5F36-47EB-BA58-075EFD98F76A}"/>
               </a:ext>
             </a:extLst>
           </p:cNvPr>
@@ -2638,7 +2638,7 @@
           <p:cNvPr id="18" name="">
             <a:extLst xmlns:a="http://schemas.openxmlformats.org/drawingml/2006/main">
               <a:ext uri="{FF2B5EF4-FFF2-40B4-BE49-F238E27FC236}">
-                <a16:creationId xmlns:a16="http://schemas.microsoft.com/office/drawing/2014/main" id="{2F2AAC5B-FA34-4B5D-B9F5-EDFF54CF9180}"/>
+                <a16:creationId xmlns:a16="http://schemas.microsoft.com/office/drawing/2014/main" id="{18612E2A-8734-4F85-A575-332A1AB7DD08}"/>
               </a:ext>
             </a:extLst>
           </p:cNvPr>
@@ -2702,7 +2702,7 @@
           <p:cNvPr id="19" name="">
             <a:extLst xmlns:a="http://schemas.openxmlformats.org/drawingml/2006/main">
               <a:ext uri="{FF2B5EF4-FFF2-40B4-BE49-F238E27FC236}">
-                <a16:creationId xmlns:a16="http://schemas.microsoft.com/office/drawing/2014/main" id="{C291168F-81CD-4307-8497-A1D477E6D9D6}"/>
+                <a16:creationId xmlns:a16="http://schemas.microsoft.com/office/drawing/2014/main" id="{67CCD17A-BF83-460C-A66D-286CA91F1B52}"/>
               </a:ext>
             </a:extLst>
           </p:cNvPr>
@@ -2737,7 +2737,7 @@
           <p:cNvPr id="20" name="">
             <a:extLst xmlns:a="http://schemas.openxmlformats.org/drawingml/2006/main">
               <a:ext uri="{FF2B5EF4-FFF2-40B4-BE49-F238E27FC236}">
-                <a16:creationId xmlns:a16="http://schemas.microsoft.com/office/drawing/2014/main" id="{32C04CFD-584D-4CEF-A742-813C2393140A}"/>
+                <a16:creationId xmlns:a16="http://schemas.microsoft.com/office/drawing/2014/main" id="{637F67C5-1122-4506-9948-53CF92385CBF}"/>
               </a:ext>
             </a:extLst>
           </p:cNvPr>
@@ -2801,7 +2801,7 @@
           <p:cNvPr id="21" name="">
             <a:extLst xmlns:a="http://schemas.openxmlformats.org/drawingml/2006/main">
               <a:ext uri="{FF2B5EF4-FFF2-40B4-BE49-F238E27FC236}">
-                <a16:creationId xmlns:a16="http://schemas.microsoft.com/office/drawing/2014/main" id="{7AF90060-B934-4DE6-9CD4-6781685E89D5}"/>
+                <a16:creationId xmlns:a16="http://schemas.microsoft.com/office/drawing/2014/main" id="{FFEAE4FF-75F1-4CD0-A4FF-8849CA22E6D8}"/>
               </a:ext>
             </a:extLst>
           </p:cNvPr>
@@ -2865,7 +2865,7 @@
           <p:cNvPr id="22" name="">
             <a:extLst xmlns:a="http://schemas.openxmlformats.org/drawingml/2006/main">
               <a:ext uri="{FF2B5EF4-FFF2-40B4-BE49-F238E27FC236}">
-                <a16:creationId xmlns:a16="http://schemas.microsoft.com/office/drawing/2014/main" id="{FF8D9CCE-B645-4B0C-8643-B46C77678226}"/>
+                <a16:creationId xmlns:a16="http://schemas.microsoft.com/office/drawing/2014/main" id="{0B6C6408-C8B8-4883-B99D-5E0DBF1F3E7A}"/>
               </a:ext>
             </a:extLst>
           </p:cNvPr>
@@ -2929,7 +2929,7 @@
           <p:cNvPr id="23" name="">
             <a:extLst xmlns:a="http://schemas.openxmlformats.org/drawingml/2006/main">
               <a:ext uri="{FF2B5EF4-FFF2-40B4-BE49-F238E27FC236}">
-                <a16:creationId xmlns:a16="http://schemas.microsoft.com/office/drawing/2014/main" id="{021F110F-2474-44DB-B1DF-BA75759DD6B1}"/>
+                <a16:creationId xmlns:a16="http://schemas.microsoft.com/office/drawing/2014/main" id="{0F032CB8-1A77-4A26-9700-0478E9EF367B}"/>
               </a:ext>
             </a:extLst>
           </p:cNvPr>
@@ -2962,7 +2962,7 @@
           <p:cNvPr id="24" name="">
             <a:extLst xmlns:a="http://schemas.openxmlformats.org/drawingml/2006/main">
               <a:ext uri="{FF2B5EF4-FFF2-40B4-BE49-F238E27FC236}">
-                <a16:creationId xmlns:a16="http://schemas.microsoft.com/office/drawing/2014/main" id="{1D2FA4F7-780D-4415-BC35-2B4D05EEDCFD}"/>
+                <a16:creationId xmlns:a16="http://schemas.microsoft.com/office/drawing/2014/main" id="{B71A6351-54BA-4359-9ECD-68307F39C3AE}"/>
               </a:ext>
             </a:extLst>
           </p:cNvPr>
@@ -3026,7 +3026,7 @@
           <p:cNvPr id="25" name="">
             <a:extLst xmlns:a="http://schemas.openxmlformats.org/drawingml/2006/main">
               <a:ext uri="{FF2B5EF4-FFF2-40B4-BE49-F238E27FC236}">
-                <a16:creationId xmlns:a16="http://schemas.microsoft.com/office/drawing/2014/main" id="{FD63B9AB-C029-4796-AB82-023FBD3E270A}"/>
+                <a16:creationId xmlns:a16="http://schemas.microsoft.com/office/drawing/2014/main" id="{89FC7486-6B8C-45D1-B44E-28F64F39AFF9}"/>
               </a:ext>
             </a:extLst>
           </p:cNvPr>
@@ -3088,7 +3088,7 @@
     </p:spTree>
     <p:extLst>
       <p:ext uri="{BB962C8B-B14F-4D97-AF65-F5344CB8AC3E}">
-        <p14:creationId xmlns:p14="http://schemas.microsoft.com/office/powerpoint/2010/main" val="411014188"/>
+        <p14:creationId xmlns:p14="http://schemas.microsoft.com/office/powerpoint/2010/main" val="1228210679"/>
       </p:ext>
     </p:extLst>
   </p:cSld>
@@ -3116,7 +3116,7 @@
           <p:nvPr/>
         </p:nvPicPr>
         <p:blipFill>
-          <a:blip xmlns:r="http://schemas.openxmlformats.org/officeDocument/2006/relationships" xmlns:a="http://schemas.openxmlformats.org/drawingml/2006/main" r:embed="Ra5c89d37d7fa42aa"/>
+          <a:blip xmlns:r="http://schemas.openxmlformats.org/officeDocument/2006/relationships" xmlns:a="http://schemas.openxmlformats.org/drawingml/2006/main" r:embed="Rd8c212da109b470a"/>
           <a:srcRect xmlns:a="http://schemas.openxmlformats.org/drawingml/2006/main" l="0" t="27" r="0" b="27"/>
           <a:stretch xmlns:a="http://schemas.openxmlformats.org/drawingml/2006/main">
             <a:fillRect l="0" t="0" r="0" b="0"/>
@@ -3137,7 +3137,7 @@
           <p:cNvPr id="2" name="">
             <a:extLst xmlns:a="http://schemas.openxmlformats.org/drawingml/2006/main">
               <a:ext uri="{FF2B5EF4-FFF2-40B4-BE49-F238E27FC236}">
-                <a16:creationId xmlns:a16="http://schemas.microsoft.com/office/drawing/2014/main" id="{229A66FD-B4A3-420F-8BA3-91C214AB59D8}"/>
+                <a16:creationId xmlns:a16="http://schemas.microsoft.com/office/drawing/2014/main" id="{43484AFB-A24E-49D7-856D-515883C0DC1F}"/>
               </a:ext>
             </a:extLst>
           </p:cNvPr>
@@ -3174,7 +3174,7 @@
           <p:cNvPr id="3" name="">
             <a:extLst xmlns:a="http://schemas.openxmlformats.org/drawingml/2006/main">
               <a:ext uri="{FF2B5EF4-FFF2-40B4-BE49-F238E27FC236}">
-                <a16:creationId xmlns:a16="http://schemas.microsoft.com/office/drawing/2014/main" id="{0F92354F-089C-48B0-8060-6764C9145413}"/>
+                <a16:creationId xmlns:a16="http://schemas.microsoft.com/office/drawing/2014/main" id="{74963651-6DD9-4BD0-8B82-A982588E57CB}"/>
               </a:ext>
             </a:extLst>
           </p:cNvPr>
@@ -3211,7 +3211,7 @@
           <p:cNvPr id="4" name="">
             <a:extLst xmlns:a="http://schemas.openxmlformats.org/drawingml/2006/main">
               <a:ext uri="{FF2B5EF4-FFF2-40B4-BE49-F238E27FC236}">
-                <a16:creationId xmlns:a16="http://schemas.microsoft.com/office/drawing/2014/main" id="{66DA34A6-7B2B-4507-B3E2-35A5FDBCFD19}"/>
+                <a16:creationId xmlns:a16="http://schemas.microsoft.com/office/drawing/2014/main" id="{CBB6D17B-1B17-4C7E-80BF-E28CA994BBF8}"/>
               </a:ext>
             </a:extLst>
           </p:cNvPr>
@@ -3275,7 +3275,7 @@
           <p:cNvPr id="5" name="">
             <a:extLst xmlns:a="http://schemas.openxmlformats.org/drawingml/2006/main">
               <a:ext uri="{FF2B5EF4-FFF2-40B4-BE49-F238E27FC236}">
-                <a16:creationId xmlns:a16="http://schemas.microsoft.com/office/drawing/2014/main" id="{E7A92BE9-31E6-4121-9303-32F3E8D5F566}"/>
+                <a16:creationId xmlns:a16="http://schemas.microsoft.com/office/drawing/2014/main" id="{C73C8794-FDF8-4234-9F17-2D65FC8E1041}"/>
               </a:ext>
             </a:extLst>
           </p:cNvPr>
@@ -3339,7 +3339,7 @@
           <p:cNvPr id="6" name="">
             <a:extLst xmlns:a="http://schemas.openxmlformats.org/drawingml/2006/main">
               <a:ext uri="{FF2B5EF4-FFF2-40B4-BE49-F238E27FC236}">
-                <a16:creationId xmlns:a16="http://schemas.microsoft.com/office/drawing/2014/main" id="{5EB1B481-5F2D-4B53-9F5A-97FFF45D05FE}"/>
+                <a16:creationId xmlns:a16="http://schemas.microsoft.com/office/drawing/2014/main" id="{2B8DC5A7-A10E-4D4A-9BBB-58594AC1AB97}"/>
               </a:ext>
             </a:extLst>
           </p:cNvPr>
@@ -3403,7 +3403,7 @@
           <p:cNvPr id="7" name="">
             <a:extLst xmlns:a="http://schemas.openxmlformats.org/drawingml/2006/main">
               <a:ext uri="{FF2B5EF4-FFF2-40B4-BE49-F238E27FC236}">
-                <a16:creationId xmlns:a16="http://schemas.microsoft.com/office/drawing/2014/main" id="{A2D328C7-5837-4CC5-A295-3967F9B3D9A3}"/>
+                <a16:creationId xmlns:a16="http://schemas.microsoft.com/office/drawing/2014/main" id="{75600F2A-55E4-4600-9BA9-6E79ED832D9E}"/>
               </a:ext>
             </a:extLst>
           </p:cNvPr>
@@ -3438,7 +3438,7 @@
           <p:cNvPr id="8" name="">
             <a:extLst xmlns:a="http://schemas.openxmlformats.org/drawingml/2006/main">
               <a:ext uri="{FF2B5EF4-FFF2-40B4-BE49-F238E27FC236}">
-                <a16:creationId xmlns:a16="http://schemas.microsoft.com/office/drawing/2014/main" id="{112AA9F1-631B-4FAD-BA4C-222960B11C5C}"/>
+                <a16:creationId xmlns:a16="http://schemas.microsoft.com/office/drawing/2014/main" id="{3C765C50-D4A8-491D-83DD-DAF7A40DF6A0}"/>
               </a:ext>
             </a:extLst>
           </p:cNvPr>
@@ -3502,7 +3502,7 @@
           <p:cNvPr id="9" name="">
             <a:extLst xmlns:a="http://schemas.openxmlformats.org/drawingml/2006/main">
               <a:ext uri="{FF2B5EF4-FFF2-40B4-BE49-F238E27FC236}">
-                <a16:creationId xmlns:a16="http://schemas.microsoft.com/office/drawing/2014/main" id="{671B3216-CAB9-402B-9AA9-7809FBC1CE21}"/>
+                <a16:creationId xmlns:a16="http://schemas.microsoft.com/office/drawing/2014/main" id="{5786C700-7728-4432-B97A-B3D8986E2FDE}"/>
               </a:ext>
             </a:extLst>
           </p:cNvPr>
@@ -3537,7 +3537,7 @@
           <p:cNvPr id="10" name="">
             <a:extLst xmlns:a="http://schemas.openxmlformats.org/drawingml/2006/main">
               <a:ext uri="{FF2B5EF4-FFF2-40B4-BE49-F238E27FC236}">
-                <a16:creationId xmlns:a16="http://schemas.microsoft.com/office/drawing/2014/main" id="{DC310EE8-CF30-446F-A314-247C5DC76FD6}"/>
+                <a16:creationId xmlns:a16="http://schemas.microsoft.com/office/drawing/2014/main" id="{59A30117-B9C0-4875-AEB0-FB1E59C786D9}"/>
               </a:ext>
             </a:extLst>
           </p:cNvPr>
@@ -3601,7 +3601,7 @@
           <p:cNvPr id="11" name="">
             <a:extLst xmlns:a="http://schemas.openxmlformats.org/drawingml/2006/main">
               <a:ext uri="{FF2B5EF4-FFF2-40B4-BE49-F238E27FC236}">
-                <a16:creationId xmlns:a16="http://schemas.microsoft.com/office/drawing/2014/main" id="{4D911106-1FFB-40BD-A2B4-EBD7605A7120}"/>
+                <a16:creationId xmlns:a16="http://schemas.microsoft.com/office/drawing/2014/main" id="{BCFC96B5-7B42-4206-8F2C-9D58070817CB}"/>
               </a:ext>
             </a:extLst>
           </p:cNvPr>
@@ -3636,7 +3636,7 @@
           <p:cNvPr id="12" name="">
             <a:extLst xmlns:a="http://schemas.openxmlformats.org/drawingml/2006/main">
               <a:ext uri="{FF2B5EF4-FFF2-40B4-BE49-F238E27FC236}">
-                <a16:creationId xmlns:a16="http://schemas.microsoft.com/office/drawing/2014/main" id="{CFBD10F4-FC80-42EC-A834-90F9C722AD12}"/>
+                <a16:creationId xmlns:a16="http://schemas.microsoft.com/office/drawing/2014/main" id="{0130D9C7-A23E-420C-883C-D77B9B9450AD}"/>
               </a:ext>
             </a:extLst>
           </p:cNvPr>
@@ -3700,7 +3700,7 @@
           <p:cNvPr id="13" name="">
             <a:extLst xmlns:a="http://schemas.openxmlformats.org/drawingml/2006/main">
               <a:ext uri="{FF2B5EF4-FFF2-40B4-BE49-F238E27FC236}">
-                <a16:creationId xmlns:a16="http://schemas.microsoft.com/office/drawing/2014/main" id="{B9E37786-C0BD-49C5-807E-07C28014410D}"/>
+                <a16:creationId xmlns:a16="http://schemas.microsoft.com/office/drawing/2014/main" id="{2909A034-74B2-44FC-AA68-5F0B31988891}"/>
               </a:ext>
             </a:extLst>
           </p:cNvPr>
@@ -3735,7 +3735,7 @@
           <p:cNvPr id="14" name="">
             <a:extLst xmlns:a="http://schemas.openxmlformats.org/drawingml/2006/main">
               <a:ext uri="{FF2B5EF4-FFF2-40B4-BE49-F238E27FC236}">
-                <a16:creationId xmlns:a16="http://schemas.microsoft.com/office/drawing/2014/main" id="{CDD1ABF3-269A-4E40-8F81-B908C6C8880E}"/>
+                <a16:creationId xmlns:a16="http://schemas.microsoft.com/office/drawing/2014/main" id="{EB9E7983-9879-445C-AF82-774C9AE04D9B}"/>
               </a:ext>
             </a:extLst>
           </p:cNvPr>
@@ -3799,7 +3799,7 @@
           <p:cNvPr id="15" name="">
             <a:extLst xmlns:a="http://schemas.openxmlformats.org/drawingml/2006/main">
               <a:ext uri="{FF2B5EF4-FFF2-40B4-BE49-F238E27FC236}">
-                <a16:creationId xmlns:a16="http://schemas.microsoft.com/office/drawing/2014/main" id="{894FE0D7-1C66-4C70-969F-7DD79698C7D0}"/>
+                <a16:creationId xmlns:a16="http://schemas.microsoft.com/office/drawing/2014/main" id="{53B2B939-18C1-4102-B886-1B3DA870B328}"/>
               </a:ext>
             </a:extLst>
           </p:cNvPr>
@@ -3863,7 +3863,7 @@
           <p:cNvPr id="16" name="">
             <a:extLst xmlns:a="http://schemas.openxmlformats.org/drawingml/2006/main">
               <a:ext uri="{FF2B5EF4-FFF2-40B4-BE49-F238E27FC236}">
-                <a16:creationId xmlns:a16="http://schemas.microsoft.com/office/drawing/2014/main" id="{01EEBCBB-EFEB-431F-BB9D-7433CDE6AB54}"/>
+                <a16:creationId xmlns:a16="http://schemas.microsoft.com/office/drawing/2014/main" id="{1EA13817-1F8F-4719-A2F4-F9839F468F77}"/>
               </a:ext>
             </a:extLst>
           </p:cNvPr>
@@ -3927,7 +3927,7 @@
           <p:cNvPr id="17" name="">
             <a:extLst xmlns:a="http://schemas.openxmlformats.org/drawingml/2006/main">
               <a:ext uri="{FF2B5EF4-FFF2-40B4-BE49-F238E27FC236}">
-                <a16:creationId xmlns:a16="http://schemas.microsoft.com/office/drawing/2014/main" id="{17DD4691-1260-44D5-A5FD-E10652C74857}"/>
+                <a16:creationId xmlns:a16="http://schemas.microsoft.com/office/drawing/2014/main" id="{21B45E6D-42D3-4DFC-8EC9-F5D6238FA224}"/>
               </a:ext>
             </a:extLst>
           </p:cNvPr>
@@ -3960,7 +3960,7 @@
           <p:cNvPr id="18" name="">
             <a:extLst xmlns:a="http://schemas.openxmlformats.org/drawingml/2006/main">
               <a:ext uri="{FF2B5EF4-FFF2-40B4-BE49-F238E27FC236}">
-                <a16:creationId xmlns:a16="http://schemas.microsoft.com/office/drawing/2014/main" id="{CC366C69-64AC-4EC7-A54D-E7A8FD85F9B7}"/>
+                <a16:creationId xmlns:a16="http://schemas.microsoft.com/office/drawing/2014/main" id="{30E83286-63CB-4061-A8A8-A7F73D37A11A}"/>
               </a:ext>
             </a:extLst>
           </p:cNvPr>
@@ -4024,7 +4024,7 @@
           <p:cNvPr id="19" name="">
             <a:extLst xmlns:a="http://schemas.openxmlformats.org/drawingml/2006/main">
               <a:ext uri="{FF2B5EF4-FFF2-40B4-BE49-F238E27FC236}">
-                <a16:creationId xmlns:a16="http://schemas.microsoft.com/office/drawing/2014/main" id="{181C449C-FC5D-4A16-8266-E65176F9DE52}"/>
+                <a16:creationId xmlns:a16="http://schemas.microsoft.com/office/drawing/2014/main" id="{5A451E9A-5C32-433F-AA01-207B369AF412}"/>
               </a:ext>
             </a:extLst>
           </p:cNvPr>
@@ -4086,7 +4086,7 @@
     </p:spTree>
     <p:extLst>
       <p:ext uri="{BB962C8B-B14F-4D97-AF65-F5344CB8AC3E}">
-        <p14:creationId xmlns:p14="http://schemas.microsoft.com/office/powerpoint/2010/main" val="951910122"/>
+        <p14:creationId xmlns:p14="http://schemas.microsoft.com/office/powerpoint/2010/main" val="868516791"/>
       </p:ext>
     </p:extLst>
   </p:cSld>
@@ -4114,7 +4114,7 @@
           <p:nvPr/>
         </p:nvPicPr>
         <p:blipFill>
-          <a:blip xmlns:r="http://schemas.openxmlformats.org/officeDocument/2006/relationships" xmlns:a="http://schemas.openxmlformats.org/drawingml/2006/main" r:embed="Rdcd4eede9e59446d"/>
+          <a:blip xmlns:r="http://schemas.openxmlformats.org/officeDocument/2006/relationships" xmlns:a="http://schemas.openxmlformats.org/drawingml/2006/main" r:embed="R544e65d6e2b14c4b"/>
           <a:srcRect xmlns:a="http://schemas.openxmlformats.org/drawingml/2006/main" l="0" t="27" r="0" b="27"/>
           <a:stretch xmlns:a="http://schemas.openxmlformats.org/drawingml/2006/main">
             <a:fillRect l="0" t="0" r="0" b="0"/>
@@ -4135,7 +4135,7 @@
           <p:cNvPr id="2" name="">
             <a:extLst xmlns:a="http://schemas.openxmlformats.org/drawingml/2006/main">
               <a:ext uri="{FF2B5EF4-FFF2-40B4-BE49-F238E27FC236}">
-                <a16:creationId xmlns:a16="http://schemas.microsoft.com/office/drawing/2014/main" id="{44370CCA-9E64-42B5-B2CF-D18BCF90107D}"/>
+                <a16:creationId xmlns:a16="http://schemas.microsoft.com/office/drawing/2014/main" id="{FAD3AA69-9670-4ED8-A4D4-8F4780B1B5B0}"/>
               </a:ext>
             </a:extLst>
           </p:cNvPr>
@@ -4172,7 +4172,7 @@
           <p:cNvPr id="3" name="">
             <a:extLst xmlns:a="http://schemas.openxmlformats.org/drawingml/2006/main">
               <a:ext uri="{FF2B5EF4-FFF2-40B4-BE49-F238E27FC236}">
-                <a16:creationId xmlns:a16="http://schemas.microsoft.com/office/drawing/2014/main" id="{BA1998D3-A6AC-4418-8E54-2DD0A108FC53}"/>
+                <a16:creationId xmlns:a16="http://schemas.microsoft.com/office/drawing/2014/main" id="{66442106-5A1D-42B0-803C-A8DABA4F2E05}"/>
               </a:ext>
             </a:extLst>
           </p:cNvPr>
@@ -4209,7 +4209,7 @@
           <p:cNvPr id="4" name="">
             <a:extLst xmlns:a="http://schemas.openxmlformats.org/drawingml/2006/main">
               <a:ext uri="{FF2B5EF4-FFF2-40B4-BE49-F238E27FC236}">
-                <a16:creationId xmlns:a16="http://schemas.microsoft.com/office/drawing/2014/main" id="{BC15807C-C12F-4412-B538-A8D35F37CB10}"/>
+                <a16:creationId xmlns:a16="http://schemas.microsoft.com/office/drawing/2014/main" id="{BD1F17A5-C66B-4513-ACD3-5D3B092F4823}"/>
               </a:ext>
             </a:extLst>
           </p:cNvPr>
@@ -4273,7 +4273,7 @@
           <p:cNvPr id="5" name="">
             <a:extLst xmlns:a="http://schemas.openxmlformats.org/drawingml/2006/main">
               <a:ext uri="{FF2B5EF4-FFF2-40B4-BE49-F238E27FC236}">
-                <a16:creationId xmlns:a16="http://schemas.microsoft.com/office/drawing/2014/main" id="{C78213DF-0562-4213-B98B-499C9A7265EA}"/>
+                <a16:creationId xmlns:a16="http://schemas.microsoft.com/office/drawing/2014/main" id="{69940A5B-4183-48D0-8693-B945A8205223}"/>
               </a:ext>
             </a:extLst>
           </p:cNvPr>
@@ -4337,7 +4337,7 @@
           <p:cNvPr id="6" name="">
             <a:extLst xmlns:a="http://schemas.openxmlformats.org/drawingml/2006/main">
               <a:ext uri="{FF2B5EF4-FFF2-40B4-BE49-F238E27FC236}">
-                <a16:creationId xmlns:a16="http://schemas.microsoft.com/office/drawing/2014/main" id="{FAD7ECA3-1B30-40B6-AFE7-6D47D55FAC2C}"/>
+                <a16:creationId xmlns:a16="http://schemas.microsoft.com/office/drawing/2014/main" id="{EF88A100-5F63-4B74-815E-028C6BEFD60B}"/>
               </a:ext>
             </a:extLst>
           </p:cNvPr>
@@ -4401,7 +4401,7 @@
           <p:cNvPr id="7" name="">
             <a:extLst xmlns:a="http://schemas.openxmlformats.org/drawingml/2006/main">
               <a:ext uri="{FF2B5EF4-FFF2-40B4-BE49-F238E27FC236}">
-                <a16:creationId xmlns:a16="http://schemas.microsoft.com/office/drawing/2014/main" id="{957091BA-93CC-438D-BB1F-93E5BF4B267A}"/>
+                <a16:creationId xmlns:a16="http://schemas.microsoft.com/office/drawing/2014/main" id="{E108BB51-E39D-4290-9D1E-F0139091D34B}"/>
               </a:ext>
             </a:extLst>
           </p:cNvPr>
@@ -4436,7 +4436,7 @@
           <p:cNvPr id="8" name="">
             <a:extLst xmlns:a="http://schemas.openxmlformats.org/drawingml/2006/main">
               <a:ext uri="{FF2B5EF4-FFF2-40B4-BE49-F238E27FC236}">
-                <a16:creationId xmlns:a16="http://schemas.microsoft.com/office/drawing/2014/main" id="{15265C34-039C-4702-9445-DA41D17194B3}"/>
+                <a16:creationId xmlns:a16="http://schemas.microsoft.com/office/drawing/2014/main" id="{6435D544-D98E-49CD-AAFF-698BC6477DF9}"/>
               </a:ext>
             </a:extLst>
           </p:cNvPr>
@@ -4500,7 +4500,7 @@
           <p:cNvPr id="9" name="">
             <a:extLst xmlns:a="http://schemas.openxmlformats.org/drawingml/2006/main">
               <a:ext uri="{FF2B5EF4-FFF2-40B4-BE49-F238E27FC236}">
-                <a16:creationId xmlns:a16="http://schemas.microsoft.com/office/drawing/2014/main" id="{28907000-CBB1-4138-B228-9E5CCF736F46}"/>
+                <a16:creationId xmlns:a16="http://schemas.microsoft.com/office/drawing/2014/main" id="{E2C07A7D-8931-420E-A7CA-4FA4EDE75C84}"/>
               </a:ext>
             </a:extLst>
           </p:cNvPr>
@@ -4564,7 +4564,7 @@
           <p:cNvPr id="10" name="">
             <a:extLst xmlns:a="http://schemas.openxmlformats.org/drawingml/2006/main">
               <a:ext uri="{FF2B5EF4-FFF2-40B4-BE49-F238E27FC236}">
-                <a16:creationId xmlns:a16="http://schemas.microsoft.com/office/drawing/2014/main" id="{F0397511-1713-451A-B00D-C0F7C282A871}"/>
+                <a16:creationId xmlns:a16="http://schemas.microsoft.com/office/drawing/2014/main" id="{FAFEA11B-32CF-4A54-8ED3-62BA9142DC70}"/>
               </a:ext>
             </a:extLst>
           </p:cNvPr>
@@ -4597,7 +4597,7 @@
           <p:cNvPr id="11" name="">
             <a:extLst xmlns:a="http://schemas.openxmlformats.org/drawingml/2006/main">
               <a:ext uri="{FF2B5EF4-FFF2-40B4-BE49-F238E27FC236}">
-                <a16:creationId xmlns:a16="http://schemas.microsoft.com/office/drawing/2014/main" id="{BFBF7535-DB04-4882-A915-971C04F3F881}"/>
+                <a16:creationId xmlns:a16="http://schemas.microsoft.com/office/drawing/2014/main" id="{3E66E201-7F60-4F88-8A99-EDA5D5E7D967}"/>
               </a:ext>
             </a:extLst>
           </p:cNvPr>
@@ -4632,7 +4632,7 @@
           <p:cNvPr id="12" name="">
             <a:extLst xmlns:a="http://schemas.openxmlformats.org/drawingml/2006/main">
               <a:ext uri="{FF2B5EF4-FFF2-40B4-BE49-F238E27FC236}">
-                <a16:creationId xmlns:a16="http://schemas.microsoft.com/office/drawing/2014/main" id="{581DE7F4-A8D1-4062-9F85-8557ECF1C80E}"/>
+                <a16:creationId xmlns:a16="http://schemas.microsoft.com/office/drawing/2014/main" id="{89850983-5284-46BD-815E-B53066F94B57}"/>
               </a:ext>
             </a:extLst>
           </p:cNvPr>
@@ -4696,7 +4696,7 @@
           <p:cNvPr id="13" name="">
             <a:extLst xmlns:a="http://schemas.openxmlformats.org/drawingml/2006/main">
               <a:ext uri="{FF2B5EF4-FFF2-40B4-BE49-F238E27FC236}">
-                <a16:creationId xmlns:a16="http://schemas.microsoft.com/office/drawing/2014/main" id="{C5161987-B140-4388-A528-60D87F1E7BD1}"/>
+                <a16:creationId xmlns:a16="http://schemas.microsoft.com/office/drawing/2014/main" id="{6A6422C4-1202-4169-A12B-9975E9C4EE99}"/>
               </a:ext>
             </a:extLst>
           </p:cNvPr>
@@ -4760,7 +4760,7 @@
           <p:cNvPr id="14" name="">
             <a:extLst xmlns:a="http://schemas.openxmlformats.org/drawingml/2006/main">
               <a:ext uri="{FF2B5EF4-FFF2-40B4-BE49-F238E27FC236}">
-                <a16:creationId xmlns:a16="http://schemas.microsoft.com/office/drawing/2014/main" id="{B1326688-97D1-414D-B1CB-1965CD35D332}"/>
+                <a16:creationId xmlns:a16="http://schemas.microsoft.com/office/drawing/2014/main" id="{E27BD1F8-0BFA-4131-8634-7BEA1023242F}"/>
               </a:ext>
             </a:extLst>
           </p:cNvPr>
@@ -4793,7 +4793,7 @@
           <p:cNvPr id="15" name="">
             <a:extLst xmlns:a="http://schemas.openxmlformats.org/drawingml/2006/main">
               <a:ext uri="{FF2B5EF4-FFF2-40B4-BE49-F238E27FC236}">
-                <a16:creationId xmlns:a16="http://schemas.microsoft.com/office/drawing/2014/main" id="{17B8FBF5-BCF1-4C7A-B987-E8AE78CC333B}"/>
+                <a16:creationId xmlns:a16="http://schemas.microsoft.com/office/drawing/2014/main" id="{F0E8523D-47DB-4288-A0E1-F0199C74EDCB}"/>
               </a:ext>
             </a:extLst>
           </p:cNvPr>
@@ -4828,7 +4828,7 @@
           <p:cNvPr id="16" name="">
             <a:extLst xmlns:a="http://schemas.openxmlformats.org/drawingml/2006/main">
               <a:ext uri="{FF2B5EF4-FFF2-40B4-BE49-F238E27FC236}">
-                <a16:creationId xmlns:a16="http://schemas.microsoft.com/office/drawing/2014/main" id="{F3B1CE97-A20C-4914-A6AC-5F3CCC809B5B}"/>
+                <a16:creationId xmlns:a16="http://schemas.microsoft.com/office/drawing/2014/main" id="{ED107D01-CA3C-4291-8ECC-2B9D78C324B5}"/>
               </a:ext>
             </a:extLst>
           </p:cNvPr>
@@ -4892,7 +4892,7 @@
           <p:cNvPr id="17" name="">
             <a:extLst xmlns:a="http://schemas.openxmlformats.org/drawingml/2006/main">
               <a:ext uri="{FF2B5EF4-FFF2-40B4-BE49-F238E27FC236}">
-                <a16:creationId xmlns:a16="http://schemas.microsoft.com/office/drawing/2014/main" id="{1B629BFD-5967-4EF0-BEB4-F8D671C23317}"/>
+                <a16:creationId xmlns:a16="http://schemas.microsoft.com/office/drawing/2014/main" id="{7135CA87-CE38-49C5-ADE0-08BCCB1FA325}"/>
               </a:ext>
             </a:extLst>
           </p:cNvPr>
@@ -4956,7 +4956,7 @@
           <p:cNvPr id="18" name="">
             <a:extLst xmlns:a="http://schemas.openxmlformats.org/drawingml/2006/main">
               <a:ext uri="{FF2B5EF4-FFF2-40B4-BE49-F238E27FC236}">
-                <a16:creationId xmlns:a16="http://schemas.microsoft.com/office/drawing/2014/main" id="{B01ADDA3-7435-4D3A-B981-B46F3F768019}"/>
+                <a16:creationId xmlns:a16="http://schemas.microsoft.com/office/drawing/2014/main" id="{8B4314D8-045B-4F09-9507-358082E26D9C}"/>
               </a:ext>
             </a:extLst>
           </p:cNvPr>
@@ -5020,7 +5020,7 @@
           <p:cNvPr id="19" name="">
             <a:extLst xmlns:a="http://schemas.openxmlformats.org/drawingml/2006/main">
               <a:ext uri="{FF2B5EF4-FFF2-40B4-BE49-F238E27FC236}">
-                <a16:creationId xmlns:a16="http://schemas.microsoft.com/office/drawing/2014/main" id="{DBDD189D-6731-403E-ABEA-4F71AFCF24EA}"/>
+                <a16:creationId xmlns:a16="http://schemas.microsoft.com/office/drawing/2014/main" id="{DB6048D2-474A-4F63-8C4A-FD0D37C0EBCD}"/>
               </a:ext>
             </a:extLst>
           </p:cNvPr>
@@ -5053,7 +5053,7 @@
           <p:cNvPr id="20" name="">
             <a:extLst xmlns:a="http://schemas.openxmlformats.org/drawingml/2006/main">
               <a:ext uri="{FF2B5EF4-FFF2-40B4-BE49-F238E27FC236}">
-                <a16:creationId xmlns:a16="http://schemas.microsoft.com/office/drawing/2014/main" id="{8CC64A01-5E24-414E-B6B0-15044D8D96DF}"/>
+                <a16:creationId xmlns:a16="http://schemas.microsoft.com/office/drawing/2014/main" id="{AB81A72F-BF5F-45BB-B705-FB21715357CD}"/>
               </a:ext>
             </a:extLst>
           </p:cNvPr>
@@ -5117,7 +5117,7 @@
           <p:cNvPr id="21" name="">
             <a:extLst xmlns:a="http://schemas.openxmlformats.org/drawingml/2006/main">
               <a:ext uri="{FF2B5EF4-FFF2-40B4-BE49-F238E27FC236}">
-                <a16:creationId xmlns:a16="http://schemas.microsoft.com/office/drawing/2014/main" id="{19079D9D-3BD5-43E7-8FE5-787A52306314}"/>
+                <a16:creationId xmlns:a16="http://schemas.microsoft.com/office/drawing/2014/main" id="{B9B29F34-3821-4606-BEA9-5CA5832210CC}"/>
               </a:ext>
             </a:extLst>
           </p:cNvPr>
@@ -5179,7 +5179,7 @@
     </p:spTree>
     <p:extLst>
       <p:ext uri="{BB962C8B-B14F-4D97-AF65-F5344CB8AC3E}">
-        <p14:creationId xmlns:p14="http://schemas.microsoft.com/office/powerpoint/2010/main" val="1714545939"/>
+        <p14:creationId xmlns:p14="http://schemas.microsoft.com/office/powerpoint/2010/main" val="994893613"/>
       </p:ext>
     </p:extLst>
   </p:cSld>
@@ -5207,7 +5207,7 @@
           <p:nvPr/>
         </p:nvPicPr>
         <p:blipFill>
-          <a:blip xmlns:r="http://schemas.openxmlformats.org/officeDocument/2006/relationships" xmlns:a="http://schemas.openxmlformats.org/drawingml/2006/main" r:embed="Rcfbb6cceac164115"/>
+          <a:blip xmlns:r="http://schemas.openxmlformats.org/officeDocument/2006/relationships" xmlns:a="http://schemas.openxmlformats.org/drawingml/2006/main" r:embed="Rfb3631af62af41b8"/>
           <a:srcRect xmlns:a="http://schemas.openxmlformats.org/drawingml/2006/main" l="0" t="27" r="0" b="27"/>
           <a:stretch xmlns:a="http://schemas.openxmlformats.org/drawingml/2006/main">
             <a:fillRect l="0" t="0" r="0" b="0"/>
@@ -5228,7 +5228,7 @@
           <p:cNvPr id="2" name="">
             <a:extLst xmlns:a="http://schemas.openxmlformats.org/drawingml/2006/main">
               <a:ext uri="{FF2B5EF4-FFF2-40B4-BE49-F238E27FC236}">
-                <a16:creationId xmlns:a16="http://schemas.microsoft.com/office/drawing/2014/main" id="{53385680-600A-4A82-9155-7740E3112E9D}"/>
+                <a16:creationId xmlns:a16="http://schemas.microsoft.com/office/drawing/2014/main" id="{82AE966D-CE01-420E-A3B7-21BF5FEF8DB0}"/>
               </a:ext>
             </a:extLst>
           </p:cNvPr>
@@ -5265,7 +5265,7 @@
           <p:cNvPr id="3" name="">
             <a:extLst xmlns:a="http://schemas.openxmlformats.org/drawingml/2006/main">
               <a:ext uri="{FF2B5EF4-FFF2-40B4-BE49-F238E27FC236}">
-                <a16:creationId xmlns:a16="http://schemas.microsoft.com/office/drawing/2014/main" id="{A70BCBA2-96EC-4103-835D-CD5A44E9C354}"/>
+                <a16:creationId xmlns:a16="http://schemas.microsoft.com/office/drawing/2014/main" id="{1E463B2B-BDC4-42C2-BE51-31871D3458CC}"/>
               </a:ext>
             </a:extLst>
           </p:cNvPr>
@@ -5302,7 +5302,7 @@
           <p:cNvPr id="4" name="">
             <a:extLst xmlns:a="http://schemas.openxmlformats.org/drawingml/2006/main">
               <a:ext uri="{FF2B5EF4-FFF2-40B4-BE49-F238E27FC236}">
-                <a16:creationId xmlns:a16="http://schemas.microsoft.com/office/drawing/2014/main" id="{0D9A6795-BE04-444E-9828-4AB7DF144CAB}"/>
+                <a16:creationId xmlns:a16="http://schemas.microsoft.com/office/drawing/2014/main" id="{58B5D711-85CA-4AF7-9834-9972574391CF}"/>
               </a:ext>
             </a:extLst>
           </p:cNvPr>
@@ -5366,7 +5366,7 @@
           <p:cNvPr id="5" name="">
             <a:extLst xmlns:a="http://schemas.openxmlformats.org/drawingml/2006/main">
               <a:ext uri="{FF2B5EF4-FFF2-40B4-BE49-F238E27FC236}">
-                <a16:creationId xmlns:a16="http://schemas.microsoft.com/office/drawing/2014/main" id="{E9B97D37-FF48-49ED-A302-AE6FCA785920}"/>
+                <a16:creationId xmlns:a16="http://schemas.microsoft.com/office/drawing/2014/main" id="{4EF6FA61-0447-47A2-9287-01261E27F80F}"/>
               </a:ext>
             </a:extLst>
           </p:cNvPr>
@@ -5430,7 +5430,7 @@
           <p:cNvPr id="6" name="">
             <a:extLst xmlns:a="http://schemas.openxmlformats.org/drawingml/2006/main">
               <a:ext uri="{FF2B5EF4-FFF2-40B4-BE49-F238E27FC236}">
-                <a16:creationId xmlns:a16="http://schemas.microsoft.com/office/drawing/2014/main" id="{ACFCE3E6-47D9-4E5B-A772-2F9E99CD462D}"/>
+                <a16:creationId xmlns:a16="http://schemas.microsoft.com/office/drawing/2014/main" id="{8260F2BD-2E6B-4551-BE04-03D8E7817276}"/>
               </a:ext>
             </a:extLst>
           </p:cNvPr>
@@ -5494,7 +5494,7 @@
           <p:cNvPr id="7" name="">
             <a:extLst xmlns:a="http://schemas.openxmlformats.org/drawingml/2006/main">
               <a:ext uri="{FF2B5EF4-FFF2-40B4-BE49-F238E27FC236}">
-                <a16:creationId xmlns:a16="http://schemas.microsoft.com/office/drawing/2014/main" id="{C19E91ED-7851-4DB7-8DE9-13DC26875164}"/>
+                <a16:creationId xmlns:a16="http://schemas.microsoft.com/office/drawing/2014/main" id="{6B52D6AC-A64F-42A8-9184-07357974BCE9}"/>
               </a:ext>
             </a:extLst>
           </p:cNvPr>
@@ -5529,7 +5529,7 @@
           <p:cNvPr id="8" name="">
             <a:extLst xmlns:a="http://schemas.openxmlformats.org/drawingml/2006/main">
               <a:ext uri="{FF2B5EF4-FFF2-40B4-BE49-F238E27FC236}">
-                <a16:creationId xmlns:a16="http://schemas.microsoft.com/office/drawing/2014/main" id="{4850F241-C750-4072-8370-16C1500CDF79}"/>
+                <a16:creationId xmlns:a16="http://schemas.microsoft.com/office/drawing/2014/main" id="{01991691-D134-41A1-B0B6-3F27C722477C}"/>
               </a:ext>
             </a:extLst>
           </p:cNvPr>
@@ -5593,7 +5593,7 @@
           <p:cNvPr id="9" name="">
             <a:extLst xmlns:a="http://schemas.openxmlformats.org/drawingml/2006/main">
               <a:ext uri="{FF2B5EF4-FFF2-40B4-BE49-F238E27FC236}">
-                <a16:creationId xmlns:a16="http://schemas.microsoft.com/office/drawing/2014/main" id="{E5F0CA41-7861-4B42-923C-20779EE80C3B}"/>
+                <a16:creationId xmlns:a16="http://schemas.microsoft.com/office/drawing/2014/main" id="{9B816170-9D51-48FC-9F33-11667F0DB4CD}"/>
               </a:ext>
             </a:extLst>
           </p:cNvPr>
@@ -5657,7 +5657,7 @@
           <p:cNvPr id="10" name="">
             <a:extLst xmlns:a="http://schemas.openxmlformats.org/drawingml/2006/main">
               <a:ext uri="{FF2B5EF4-FFF2-40B4-BE49-F238E27FC236}">
-                <a16:creationId xmlns:a16="http://schemas.microsoft.com/office/drawing/2014/main" id="{A75C5295-DFA7-422F-8CEC-963DBE104D0B}"/>
+                <a16:creationId xmlns:a16="http://schemas.microsoft.com/office/drawing/2014/main" id="{43AD8AA8-A409-4CB5-9959-25EEF8ADA568}"/>
               </a:ext>
             </a:extLst>
           </p:cNvPr>
@@ -5692,7 +5692,7 @@
           <p:cNvPr id="11" name="">
             <a:extLst xmlns:a="http://schemas.openxmlformats.org/drawingml/2006/main">
               <a:ext uri="{FF2B5EF4-FFF2-40B4-BE49-F238E27FC236}">
-                <a16:creationId xmlns:a16="http://schemas.microsoft.com/office/drawing/2014/main" id="{84DCD466-AE80-4FF4-9C32-3753D33EB3D1}"/>
+                <a16:creationId xmlns:a16="http://schemas.microsoft.com/office/drawing/2014/main" id="{A21E2C76-80FC-4F4D-8F66-1B8BF0778C62}"/>
               </a:ext>
             </a:extLst>
           </p:cNvPr>
@@ -5756,7 +5756,7 @@
           <p:cNvPr id="12" name="">
             <a:extLst xmlns:a="http://schemas.openxmlformats.org/drawingml/2006/main">
               <a:ext uri="{FF2B5EF4-FFF2-40B4-BE49-F238E27FC236}">
-                <a16:creationId xmlns:a16="http://schemas.microsoft.com/office/drawing/2014/main" id="{D726831C-9353-4113-8917-FED3F8ECAEE0}"/>
+                <a16:creationId xmlns:a16="http://schemas.microsoft.com/office/drawing/2014/main" id="{186DE425-3456-45AE-A2B8-EBB723CF8D37}"/>
               </a:ext>
             </a:extLst>
           </p:cNvPr>
@@ -5820,7 +5820,7 @@
           <p:cNvPr id="13" name="">
             <a:extLst xmlns:a="http://schemas.openxmlformats.org/drawingml/2006/main">
               <a:ext uri="{FF2B5EF4-FFF2-40B4-BE49-F238E27FC236}">
-                <a16:creationId xmlns:a16="http://schemas.microsoft.com/office/drawing/2014/main" id="{263129C7-5D05-402B-8915-7EEA729279CD}"/>
+                <a16:creationId xmlns:a16="http://schemas.microsoft.com/office/drawing/2014/main" id="{08E49673-88C5-480E-83BB-ABE4CEA1BBC5}"/>
               </a:ext>
             </a:extLst>
           </p:cNvPr>
@@ -5855,7 +5855,7 @@
           <p:cNvPr id="14" name="">
             <a:extLst xmlns:a="http://schemas.openxmlformats.org/drawingml/2006/main">
               <a:ext uri="{FF2B5EF4-FFF2-40B4-BE49-F238E27FC236}">
-                <a16:creationId xmlns:a16="http://schemas.microsoft.com/office/drawing/2014/main" id="{866922EA-2172-4DD0-BDCF-FED91755E468}"/>
+                <a16:creationId xmlns:a16="http://schemas.microsoft.com/office/drawing/2014/main" id="{2E295EE7-8644-4FDF-B37D-E91924CF2556}"/>
               </a:ext>
             </a:extLst>
           </p:cNvPr>
@@ -5919,7 +5919,7 @@
           <p:cNvPr id="15" name="">
             <a:extLst xmlns:a="http://schemas.openxmlformats.org/drawingml/2006/main">
               <a:ext uri="{FF2B5EF4-FFF2-40B4-BE49-F238E27FC236}">
-                <a16:creationId xmlns:a16="http://schemas.microsoft.com/office/drawing/2014/main" id="{A21CDBD8-17D4-47B5-8A13-DEB2E344DBA1}"/>
+                <a16:creationId xmlns:a16="http://schemas.microsoft.com/office/drawing/2014/main" id="{5CEE60D8-9FE9-4146-BB45-DCC75E9C767E}"/>
               </a:ext>
             </a:extLst>
           </p:cNvPr>
@@ -5983,7 +5983,7 @@
           <p:cNvPr id="16" name="">
             <a:extLst xmlns:a="http://schemas.openxmlformats.org/drawingml/2006/main">
               <a:ext uri="{FF2B5EF4-FFF2-40B4-BE49-F238E27FC236}">
-                <a16:creationId xmlns:a16="http://schemas.microsoft.com/office/drawing/2014/main" id="{AE20DB12-844E-4468-B4BB-3D9C4B3E5B3D}"/>
+                <a16:creationId xmlns:a16="http://schemas.microsoft.com/office/drawing/2014/main" id="{351DEC95-692E-4B84-8466-BDEC41BB3E96}"/>
               </a:ext>
             </a:extLst>
           </p:cNvPr>
@@ -6018,7 +6018,7 @@
           <p:cNvPr id="17" name="">
             <a:extLst xmlns:a="http://schemas.openxmlformats.org/drawingml/2006/main">
               <a:ext uri="{FF2B5EF4-FFF2-40B4-BE49-F238E27FC236}">
-                <a16:creationId xmlns:a16="http://schemas.microsoft.com/office/drawing/2014/main" id="{8817DEE2-3D71-49D9-BE9A-8F7321D58BA6}"/>
+                <a16:creationId xmlns:a16="http://schemas.microsoft.com/office/drawing/2014/main" id="{686C02EA-0C4F-44D1-B74C-57761FE1BAAF}"/>
               </a:ext>
             </a:extLst>
           </p:cNvPr>
@@ -6082,7 +6082,7 @@
           <p:cNvPr id="18" name="">
             <a:extLst xmlns:a="http://schemas.openxmlformats.org/drawingml/2006/main">
               <a:ext uri="{FF2B5EF4-FFF2-40B4-BE49-F238E27FC236}">
-                <a16:creationId xmlns:a16="http://schemas.microsoft.com/office/drawing/2014/main" id="{6392C4E4-0DE8-49B8-BC05-2DC6D2938FC9}"/>
+                <a16:creationId xmlns:a16="http://schemas.microsoft.com/office/drawing/2014/main" id="{1191AE9B-B8C0-4BF4-BA18-C5C22CC532DC}"/>
               </a:ext>
             </a:extLst>
           </p:cNvPr>
@@ -6146,7 +6146,7 @@
           <p:cNvPr id="19" name="">
             <a:extLst xmlns:a="http://schemas.openxmlformats.org/drawingml/2006/main">
               <a:ext uri="{FF2B5EF4-FFF2-40B4-BE49-F238E27FC236}">
-                <a16:creationId xmlns:a16="http://schemas.microsoft.com/office/drawing/2014/main" id="{F8A8CA38-F0F9-4E37-9671-BE835764EAD0}"/>
+                <a16:creationId xmlns:a16="http://schemas.microsoft.com/office/drawing/2014/main" id="{B3840031-9864-4253-BBDF-6F0C7625D227}"/>
               </a:ext>
             </a:extLst>
           </p:cNvPr>
@@ -6181,7 +6181,7 @@
           <p:cNvPr id="20" name="">
             <a:extLst xmlns:a="http://schemas.openxmlformats.org/drawingml/2006/main">
               <a:ext uri="{FF2B5EF4-FFF2-40B4-BE49-F238E27FC236}">
-                <a16:creationId xmlns:a16="http://schemas.microsoft.com/office/drawing/2014/main" id="{F993B641-C401-4D34-94EB-F3E6E3091B0A}"/>
+                <a16:creationId xmlns:a16="http://schemas.microsoft.com/office/drawing/2014/main" id="{AB72E8EE-2DAD-4D8C-8449-AD63EC8EB085}"/>
               </a:ext>
             </a:extLst>
           </p:cNvPr>
@@ -6245,7 +6245,7 @@
           <p:cNvPr id="21" name="">
             <a:extLst xmlns:a="http://schemas.openxmlformats.org/drawingml/2006/main">
               <a:ext uri="{FF2B5EF4-FFF2-40B4-BE49-F238E27FC236}">
-                <a16:creationId xmlns:a16="http://schemas.microsoft.com/office/drawing/2014/main" id="{07BA70E0-23B1-4EAC-8DE2-75F03BF2A219}"/>
+                <a16:creationId xmlns:a16="http://schemas.microsoft.com/office/drawing/2014/main" id="{689126C0-0454-4AB7-A21A-9CF0AF96F813}"/>
               </a:ext>
             </a:extLst>
           </p:cNvPr>
@@ -6309,7 +6309,7 @@
           <p:cNvPr id="22" name="">
             <a:extLst xmlns:a="http://schemas.openxmlformats.org/drawingml/2006/main">
               <a:ext uri="{FF2B5EF4-FFF2-40B4-BE49-F238E27FC236}">
-                <a16:creationId xmlns:a16="http://schemas.microsoft.com/office/drawing/2014/main" id="{F4D2C39D-8F45-4480-B502-3097528AEA27}"/>
+                <a16:creationId xmlns:a16="http://schemas.microsoft.com/office/drawing/2014/main" id="{32DF025F-85FC-47BB-A617-852EE720BC84}"/>
               </a:ext>
             </a:extLst>
           </p:cNvPr>
@@ -6342,7 +6342,7 @@
           <p:cNvPr id="23" name="">
             <a:extLst xmlns:a="http://schemas.openxmlformats.org/drawingml/2006/main">
               <a:ext uri="{FF2B5EF4-FFF2-40B4-BE49-F238E27FC236}">
-                <a16:creationId xmlns:a16="http://schemas.microsoft.com/office/drawing/2014/main" id="{CC6CEB26-8D26-4376-97CD-65EFD02C4A96}"/>
+                <a16:creationId xmlns:a16="http://schemas.microsoft.com/office/drawing/2014/main" id="{19916A69-BBA8-438E-BC9C-29AC54FDFB98}"/>
               </a:ext>
             </a:extLst>
           </p:cNvPr>
@@ -6406,7 +6406,7 @@
           <p:cNvPr id="24" name="">
             <a:extLst xmlns:a="http://schemas.openxmlformats.org/drawingml/2006/main">
               <a:ext uri="{FF2B5EF4-FFF2-40B4-BE49-F238E27FC236}">
-                <a16:creationId xmlns:a16="http://schemas.microsoft.com/office/drawing/2014/main" id="{D414DB8F-EBEC-4A07-929E-A1B31F5196D2}"/>
+                <a16:creationId xmlns:a16="http://schemas.microsoft.com/office/drawing/2014/main" id="{54EE6A33-CD04-4899-A54E-462D4BB3EC99}"/>
               </a:ext>
             </a:extLst>
           </p:cNvPr>
@@ -6468,7 +6468,7 @@
     </p:spTree>
     <p:extLst>
       <p:ext uri="{BB962C8B-B14F-4D97-AF65-F5344CB8AC3E}">
-        <p14:creationId xmlns:p14="http://schemas.microsoft.com/office/powerpoint/2010/main" val="892620247"/>
+        <p14:creationId xmlns:p14="http://schemas.microsoft.com/office/powerpoint/2010/main" val="1369636273"/>
       </p:ext>
     </p:extLst>
   </p:cSld>
@@ -6496,7 +6496,7 @@
           <p:nvPr/>
         </p:nvPicPr>
         <p:blipFill>
-          <a:blip xmlns:r="http://schemas.openxmlformats.org/officeDocument/2006/relationships" xmlns:a="http://schemas.openxmlformats.org/drawingml/2006/main" r:embed="R22c56ef803f7490a"/>
+          <a:blip xmlns:r="http://schemas.openxmlformats.org/officeDocument/2006/relationships" xmlns:a="http://schemas.openxmlformats.org/drawingml/2006/main" r:embed="R704825a94df14046"/>
           <a:srcRect xmlns:a="http://schemas.openxmlformats.org/drawingml/2006/main" l="0" t="27" r="0" b="27"/>
           <a:stretch xmlns:a="http://schemas.openxmlformats.org/drawingml/2006/main">
             <a:fillRect l="0" t="0" r="0" b="0"/>
@@ -6517,7 +6517,7 @@
           <p:cNvPr id="2" name="">
             <a:extLst xmlns:a="http://schemas.openxmlformats.org/drawingml/2006/main">
               <a:ext uri="{FF2B5EF4-FFF2-40B4-BE49-F238E27FC236}">
-                <a16:creationId xmlns:a16="http://schemas.microsoft.com/office/drawing/2014/main" id="{4E18AF91-EFE9-4137-BB04-C883DA2ACE4C}"/>
+                <a16:creationId xmlns:a16="http://schemas.microsoft.com/office/drawing/2014/main" id="{8DAFCB52-87F4-44A8-91A4-341674B6203B}"/>
               </a:ext>
             </a:extLst>
           </p:cNvPr>
@@ -6554,7 +6554,7 @@
           <p:cNvPr id="3" name="">
             <a:extLst xmlns:a="http://schemas.openxmlformats.org/drawingml/2006/main">
               <a:ext uri="{FF2B5EF4-FFF2-40B4-BE49-F238E27FC236}">
-                <a16:creationId xmlns:a16="http://schemas.microsoft.com/office/drawing/2014/main" id="{237A1ADA-4DBE-47FF-99FA-5A3B6D76E2AA}"/>
+                <a16:creationId xmlns:a16="http://schemas.microsoft.com/office/drawing/2014/main" id="{4485BDB6-1114-4DB9-AC51-ED60725842D1}"/>
               </a:ext>
             </a:extLst>
           </p:cNvPr>
@@ -6591,7 +6591,7 @@
           <p:cNvPr id="4" name="">
             <a:extLst xmlns:a="http://schemas.openxmlformats.org/drawingml/2006/main">
               <a:ext uri="{FF2B5EF4-FFF2-40B4-BE49-F238E27FC236}">
-                <a16:creationId xmlns:a16="http://schemas.microsoft.com/office/drawing/2014/main" id="{2BE3B245-3ABF-40DD-8000-BC1ABFB541FF}"/>
+                <a16:creationId xmlns:a16="http://schemas.microsoft.com/office/drawing/2014/main" id="{1C48A1FE-D6AA-4E1E-AD47-4C2DEB00945F}"/>
               </a:ext>
             </a:extLst>
           </p:cNvPr>
@@ -6655,7 +6655,7 @@
           <p:cNvPr id="5" name="">
             <a:extLst xmlns:a="http://schemas.openxmlformats.org/drawingml/2006/main">
               <a:ext uri="{FF2B5EF4-FFF2-40B4-BE49-F238E27FC236}">
-                <a16:creationId xmlns:a16="http://schemas.microsoft.com/office/drawing/2014/main" id="{88D00337-A718-4033-9195-77A6E1122AE6}"/>
+                <a16:creationId xmlns:a16="http://schemas.microsoft.com/office/drawing/2014/main" id="{FF3398EB-4D43-48E7-AF1E-39CB59A28CE4}"/>
               </a:ext>
             </a:extLst>
           </p:cNvPr>
@@ -6719,7 +6719,7 @@
           <p:cNvPr id="6" name="">
             <a:extLst xmlns:a="http://schemas.openxmlformats.org/drawingml/2006/main">
               <a:ext uri="{FF2B5EF4-FFF2-40B4-BE49-F238E27FC236}">
-                <a16:creationId xmlns:a16="http://schemas.microsoft.com/office/drawing/2014/main" id="{DDEECEA2-241D-48E6-B015-47690D9D3FCD}"/>
+                <a16:creationId xmlns:a16="http://schemas.microsoft.com/office/drawing/2014/main" id="{11B76497-7D49-41B6-A992-5E11CBA92ECC}"/>
               </a:ext>
             </a:extLst>
           </p:cNvPr>
@@ -6783,7 +6783,7 @@
           <p:cNvPr id="7" name="">
             <a:extLst xmlns:a="http://schemas.openxmlformats.org/drawingml/2006/main">
               <a:ext uri="{FF2B5EF4-FFF2-40B4-BE49-F238E27FC236}">
-                <a16:creationId xmlns:a16="http://schemas.microsoft.com/office/drawing/2014/main" id="{84EF8B39-8B79-4090-B4C0-1D1D897E4364}"/>
+                <a16:creationId xmlns:a16="http://schemas.microsoft.com/office/drawing/2014/main" id="{26D36ABD-D039-4E74-8A7D-C227E64864F1}"/>
               </a:ext>
             </a:extLst>
           </p:cNvPr>
@@ -6818,7 +6818,7 @@
           <p:cNvPr id="8" name="">
             <a:extLst xmlns:a="http://schemas.openxmlformats.org/drawingml/2006/main">
               <a:ext uri="{FF2B5EF4-FFF2-40B4-BE49-F238E27FC236}">
-                <a16:creationId xmlns:a16="http://schemas.microsoft.com/office/drawing/2014/main" id="{AF280FE5-8B7E-4CEB-8677-0754CED64ABE}"/>
+                <a16:creationId xmlns:a16="http://schemas.microsoft.com/office/drawing/2014/main" id="{087429B1-0AB5-4B9A-9E1D-FE17CA8888AC}"/>
               </a:ext>
             </a:extLst>
           </p:cNvPr>
@@ -6882,7 +6882,7 @@
           <p:cNvPr id="9" name="">
             <a:extLst xmlns:a="http://schemas.openxmlformats.org/drawingml/2006/main">
               <a:ext uri="{FF2B5EF4-FFF2-40B4-BE49-F238E27FC236}">
-                <a16:creationId xmlns:a16="http://schemas.microsoft.com/office/drawing/2014/main" id="{6A9CE9F0-3AAF-4BE1-8462-9519D40EB0D5}"/>
+                <a16:creationId xmlns:a16="http://schemas.microsoft.com/office/drawing/2014/main" id="{5E4764A0-81CD-4C08-9D95-87F5A5952D3D}"/>
               </a:ext>
             </a:extLst>
           </p:cNvPr>
@@ -6946,7 +6946,7 @@
           <p:cNvPr id="10" name="">
             <a:extLst xmlns:a="http://schemas.openxmlformats.org/drawingml/2006/main">
               <a:ext uri="{FF2B5EF4-FFF2-40B4-BE49-F238E27FC236}">
-                <a16:creationId xmlns:a16="http://schemas.microsoft.com/office/drawing/2014/main" id="{51FF9F92-FD74-4C51-AEBA-F89C6FA51430}"/>
+                <a16:creationId xmlns:a16="http://schemas.microsoft.com/office/drawing/2014/main" id="{28C0CD84-8609-4C11-A8C9-61B16032142F}"/>
               </a:ext>
             </a:extLst>
           </p:cNvPr>
@@ -6979,7 +6979,7 @@
           <p:cNvPr id="11" name="">
             <a:extLst xmlns:a="http://schemas.openxmlformats.org/drawingml/2006/main">
               <a:ext uri="{FF2B5EF4-FFF2-40B4-BE49-F238E27FC236}">
-                <a16:creationId xmlns:a16="http://schemas.microsoft.com/office/drawing/2014/main" id="{D41EB544-EF4A-4ABE-91BE-D795EA286351}"/>
+                <a16:creationId xmlns:a16="http://schemas.microsoft.com/office/drawing/2014/main" id="{4557D168-DFD3-4742-95C4-53A0D3224308}"/>
               </a:ext>
             </a:extLst>
           </p:cNvPr>
@@ -7014,7 +7014,7 @@
           <p:cNvPr id="12" name="">
             <a:extLst xmlns:a="http://schemas.openxmlformats.org/drawingml/2006/main">
               <a:ext uri="{FF2B5EF4-FFF2-40B4-BE49-F238E27FC236}">
-                <a16:creationId xmlns:a16="http://schemas.microsoft.com/office/drawing/2014/main" id="{222F9446-77EE-4727-86AB-CCEAFB5AFF80}"/>
+                <a16:creationId xmlns:a16="http://schemas.microsoft.com/office/drawing/2014/main" id="{2610525F-1082-462F-A706-993696B31247}"/>
               </a:ext>
             </a:extLst>
           </p:cNvPr>
@@ -7078,7 +7078,7 @@
           <p:cNvPr id="13" name="">
             <a:extLst xmlns:a="http://schemas.openxmlformats.org/drawingml/2006/main">
               <a:ext uri="{FF2B5EF4-FFF2-40B4-BE49-F238E27FC236}">
-                <a16:creationId xmlns:a16="http://schemas.microsoft.com/office/drawing/2014/main" id="{98AB61E1-27E9-4207-A6CE-32690521133C}"/>
+                <a16:creationId xmlns:a16="http://schemas.microsoft.com/office/drawing/2014/main" id="{50B797EE-9307-481C-88F2-AD6870BD9972}"/>
               </a:ext>
             </a:extLst>
           </p:cNvPr>
@@ -7142,7 +7142,7 @@
           <p:cNvPr id="14" name="">
             <a:extLst xmlns:a="http://schemas.openxmlformats.org/drawingml/2006/main">
               <a:ext uri="{FF2B5EF4-FFF2-40B4-BE49-F238E27FC236}">
-                <a16:creationId xmlns:a16="http://schemas.microsoft.com/office/drawing/2014/main" id="{F91204F8-01DD-4AD9-8D4B-6EF4157AB756}"/>
+                <a16:creationId xmlns:a16="http://schemas.microsoft.com/office/drawing/2014/main" id="{27FB9579-06C2-40D0-9DC9-430CC626E3BD}"/>
               </a:ext>
             </a:extLst>
           </p:cNvPr>
@@ -7175,7 +7175,7 @@
           <p:cNvPr id="15" name="">
             <a:extLst xmlns:a="http://schemas.openxmlformats.org/drawingml/2006/main">
               <a:ext uri="{FF2B5EF4-FFF2-40B4-BE49-F238E27FC236}">
-                <a16:creationId xmlns:a16="http://schemas.microsoft.com/office/drawing/2014/main" id="{A815F487-212B-4656-8899-7AF2CF6EC2E3}"/>
+                <a16:creationId xmlns:a16="http://schemas.microsoft.com/office/drawing/2014/main" id="{FCA8200A-5E4A-4970-B78C-CFF37D12E0B7}"/>
               </a:ext>
             </a:extLst>
           </p:cNvPr>
@@ -7210,7 +7210,7 @@
           <p:cNvPr id="16" name="">
             <a:extLst xmlns:a="http://schemas.openxmlformats.org/drawingml/2006/main">
               <a:ext uri="{FF2B5EF4-FFF2-40B4-BE49-F238E27FC236}">
-                <a16:creationId xmlns:a16="http://schemas.microsoft.com/office/drawing/2014/main" id="{5BB6805C-4A51-4408-962E-3C6E33D5961D}"/>
+                <a16:creationId xmlns:a16="http://schemas.microsoft.com/office/drawing/2014/main" id="{774F726E-B6EB-416D-955D-B665CE7134C1}"/>
               </a:ext>
             </a:extLst>
           </p:cNvPr>
@@ -7274,7 +7274,7 @@
           <p:cNvPr id="17" name="">
             <a:extLst xmlns:a="http://schemas.openxmlformats.org/drawingml/2006/main">
               <a:ext uri="{FF2B5EF4-FFF2-40B4-BE49-F238E27FC236}">
-                <a16:creationId xmlns:a16="http://schemas.microsoft.com/office/drawing/2014/main" id="{127CF802-5B0D-4F7D-9E8C-B99B0CC5F401}"/>
+                <a16:creationId xmlns:a16="http://schemas.microsoft.com/office/drawing/2014/main" id="{542626EF-29E6-4555-AE12-29D5087E65F2}"/>
               </a:ext>
             </a:extLst>
           </p:cNvPr>
@@ -7338,7 +7338,7 @@
           <p:cNvPr id="18" name="">
             <a:extLst xmlns:a="http://schemas.openxmlformats.org/drawingml/2006/main">
               <a:ext uri="{FF2B5EF4-FFF2-40B4-BE49-F238E27FC236}">
-                <a16:creationId xmlns:a16="http://schemas.microsoft.com/office/drawing/2014/main" id="{640939AE-B2ED-4E9C-A39F-F0DE4AFDCD05}"/>
+                <a16:creationId xmlns:a16="http://schemas.microsoft.com/office/drawing/2014/main" id="{4ECD9513-9E41-4544-AD7C-83EE372665E6}"/>
               </a:ext>
             </a:extLst>
           </p:cNvPr>
@@ -7402,7 +7402,7 @@
           <p:cNvPr id="19" name="">
             <a:extLst xmlns:a="http://schemas.openxmlformats.org/drawingml/2006/main">
               <a:ext uri="{FF2B5EF4-FFF2-40B4-BE49-F238E27FC236}">
-                <a16:creationId xmlns:a16="http://schemas.microsoft.com/office/drawing/2014/main" id="{56C89783-2443-47A2-A194-52528A4E39DE}"/>
+                <a16:creationId xmlns:a16="http://schemas.microsoft.com/office/drawing/2014/main" id="{5A4BC0D1-C483-4435-BCC4-DBE45932680F}"/>
               </a:ext>
             </a:extLst>
           </p:cNvPr>
@@ -7435,7 +7435,7 @@
           <p:cNvPr id="20" name="">
             <a:extLst xmlns:a="http://schemas.openxmlformats.org/drawingml/2006/main">
               <a:ext uri="{FF2B5EF4-FFF2-40B4-BE49-F238E27FC236}">
-                <a16:creationId xmlns:a16="http://schemas.microsoft.com/office/drawing/2014/main" id="{A665E40E-C017-4AC7-8BEB-8AEFA4BDB7C2}"/>
+                <a16:creationId xmlns:a16="http://schemas.microsoft.com/office/drawing/2014/main" id="{EC17DC1F-E56C-41FE-8894-F49793EEF206}"/>
               </a:ext>
             </a:extLst>
           </p:cNvPr>
@@ -7499,7 +7499,7 @@
           <p:cNvPr id="21" name="">
             <a:extLst xmlns:a="http://schemas.openxmlformats.org/drawingml/2006/main">
               <a:ext uri="{FF2B5EF4-FFF2-40B4-BE49-F238E27FC236}">
-                <a16:creationId xmlns:a16="http://schemas.microsoft.com/office/drawing/2014/main" id="{8B5132B9-EB6F-4780-BE0B-0960502E23D0}"/>
+                <a16:creationId xmlns:a16="http://schemas.microsoft.com/office/drawing/2014/main" id="{C86EAEC6-E5A1-4BF6-921F-E7AFD8A40E92}"/>
               </a:ext>
             </a:extLst>
           </p:cNvPr>
@@ -7561,7 +7561,7 @@
     </p:spTree>
     <p:extLst>
       <p:ext uri="{BB962C8B-B14F-4D97-AF65-F5344CB8AC3E}">
-        <p14:creationId xmlns:p14="http://schemas.microsoft.com/office/powerpoint/2010/main" val="1240411515"/>
+        <p14:creationId xmlns:p14="http://schemas.microsoft.com/office/powerpoint/2010/main" val="161858412"/>
       </p:ext>
     </p:extLst>
   </p:cSld>
@@ -7589,7 +7589,7 @@
           <p:nvPr/>
         </p:nvPicPr>
         <p:blipFill>
-          <a:blip xmlns:r="http://schemas.openxmlformats.org/officeDocument/2006/relationships" xmlns:a="http://schemas.openxmlformats.org/drawingml/2006/main" r:embed="R0057652b29e24f38"/>
+          <a:blip xmlns:r="http://schemas.openxmlformats.org/officeDocument/2006/relationships" xmlns:a="http://schemas.openxmlformats.org/drawingml/2006/main" r:embed="R66f8ca0628d74f89"/>
           <a:srcRect xmlns:a="http://schemas.openxmlformats.org/drawingml/2006/main" l="0" t="27" r="0" b="27"/>
           <a:stretch xmlns:a="http://schemas.openxmlformats.org/drawingml/2006/main">
             <a:fillRect l="0" t="0" r="0" b="0"/>
@@ -7610,7 +7610,7 @@
           <p:cNvPr id="2" name="">
             <a:extLst xmlns:a="http://schemas.openxmlformats.org/drawingml/2006/main">
               <a:ext uri="{FF2B5EF4-FFF2-40B4-BE49-F238E27FC236}">
-                <a16:creationId xmlns:a16="http://schemas.microsoft.com/office/drawing/2014/main" id="{3C846C1F-32CC-4B87-A700-4E59279721CB}"/>
+                <a16:creationId xmlns:a16="http://schemas.microsoft.com/office/drawing/2014/main" id="{9464961F-6FCD-4A97-81D7-E8988C675191}"/>
               </a:ext>
             </a:extLst>
           </p:cNvPr>
@@ -7647,7 +7647,7 @@
           <p:cNvPr id="3" name="">
             <a:extLst xmlns:a="http://schemas.openxmlformats.org/drawingml/2006/main">
               <a:ext uri="{FF2B5EF4-FFF2-40B4-BE49-F238E27FC236}">
-                <a16:creationId xmlns:a16="http://schemas.microsoft.com/office/drawing/2014/main" id="{9D37C981-4E4F-436E-8436-FE7B80C0C76E}"/>
+                <a16:creationId xmlns:a16="http://schemas.microsoft.com/office/drawing/2014/main" id="{81F425E8-8EEA-46CC-AEDF-7A716D450FD9}"/>
               </a:ext>
             </a:extLst>
           </p:cNvPr>
@@ -7684,7 +7684,7 @@
           <p:cNvPr id="4" name="">
             <a:extLst xmlns:a="http://schemas.openxmlformats.org/drawingml/2006/main">
               <a:ext uri="{FF2B5EF4-FFF2-40B4-BE49-F238E27FC236}">
-                <a16:creationId xmlns:a16="http://schemas.microsoft.com/office/drawing/2014/main" id="{D040E019-79A6-4EB4-A485-13A3FE183020}"/>
+                <a16:creationId xmlns:a16="http://schemas.microsoft.com/office/drawing/2014/main" id="{116FD328-CD09-4471-B9C9-C002FAEB4BEF}"/>
               </a:ext>
             </a:extLst>
           </p:cNvPr>
@@ -7748,7 +7748,7 @@
           <p:cNvPr id="5" name="">
             <a:extLst xmlns:a="http://schemas.openxmlformats.org/drawingml/2006/main">
               <a:ext uri="{FF2B5EF4-FFF2-40B4-BE49-F238E27FC236}">
-                <a16:creationId xmlns:a16="http://schemas.microsoft.com/office/drawing/2014/main" id="{3EF4C50E-DC36-460C-BD50-7AB7570C04A4}"/>
+                <a16:creationId xmlns:a16="http://schemas.microsoft.com/office/drawing/2014/main" id="{F87B6D23-B25E-4B21-9690-F9334118451B}"/>
               </a:ext>
             </a:extLst>
           </p:cNvPr>
@@ -7812,7 +7812,7 @@
           <p:cNvPr id="6" name="">
             <a:extLst xmlns:a="http://schemas.openxmlformats.org/drawingml/2006/main">
               <a:ext uri="{FF2B5EF4-FFF2-40B4-BE49-F238E27FC236}">
-                <a16:creationId xmlns:a16="http://schemas.microsoft.com/office/drawing/2014/main" id="{D2981886-BA6B-417F-908B-9C1A150D7485}"/>
+                <a16:creationId xmlns:a16="http://schemas.microsoft.com/office/drawing/2014/main" id="{5EE09E84-C4A0-4B17-85FA-2E6C159146D1}"/>
               </a:ext>
             </a:extLst>
           </p:cNvPr>
@@ -7876,7 +7876,7 @@
           <p:cNvPr id="7" name="">
             <a:extLst xmlns:a="http://schemas.openxmlformats.org/drawingml/2006/main">
               <a:ext uri="{FF2B5EF4-FFF2-40B4-BE49-F238E27FC236}">
-                <a16:creationId xmlns:a16="http://schemas.microsoft.com/office/drawing/2014/main" id="{7E3E19E1-4924-485A-9D6C-9CA71431EBAE}"/>
+                <a16:creationId xmlns:a16="http://schemas.microsoft.com/office/drawing/2014/main" id="{82BB3D64-195A-4CA2-A3CE-1C218D253EBD}"/>
               </a:ext>
             </a:extLst>
           </p:cNvPr>
@@ -7911,7 +7911,7 @@
           <p:cNvPr id="8" name="">
             <a:extLst xmlns:a="http://schemas.openxmlformats.org/drawingml/2006/main">
               <a:ext uri="{FF2B5EF4-FFF2-40B4-BE49-F238E27FC236}">
-                <a16:creationId xmlns:a16="http://schemas.microsoft.com/office/drawing/2014/main" id="{946366B6-4800-489F-8FA9-AE607BC5C076}"/>
+                <a16:creationId xmlns:a16="http://schemas.microsoft.com/office/drawing/2014/main" id="{D01FA10E-9ECF-4E0A-8D76-80C02C22C0B7}"/>
               </a:ext>
             </a:extLst>
           </p:cNvPr>
@@ -7975,7 +7975,7 @@
           <p:cNvPr id="9" name="">
             <a:extLst xmlns:a="http://schemas.openxmlformats.org/drawingml/2006/main">
               <a:ext uri="{FF2B5EF4-FFF2-40B4-BE49-F238E27FC236}">
-                <a16:creationId xmlns:a16="http://schemas.microsoft.com/office/drawing/2014/main" id="{09AB229E-4013-40FD-8799-689A429936F7}"/>
+                <a16:creationId xmlns:a16="http://schemas.microsoft.com/office/drawing/2014/main" id="{9C7207AE-F6B0-44A1-ABFD-8F8082469A68}"/>
               </a:ext>
             </a:extLst>
           </p:cNvPr>
@@ -8039,7 +8039,7 @@
           <p:cNvPr id="10" name="">
             <a:extLst xmlns:a="http://schemas.openxmlformats.org/drawingml/2006/main">
               <a:ext uri="{FF2B5EF4-FFF2-40B4-BE49-F238E27FC236}">
-                <a16:creationId xmlns:a16="http://schemas.microsoft.com/office/drawing/2014/main" id="{5BFECE99-2E03-4DFB-B39A-CC1A45AF17BD}"/>
+                <a16:creationId xmlns:a16="http://schemas.microsoft.com/office/drawing/2014/main" id="{0E17CF7F-A7E5-485B-AD7F-CE51A34D9E9A}"/>
               </a:ext>
             </a:extLst>
           </p:cNvPr>
@@ -8074,7 +8074,7 @@
           <p:cNvPr id="11" name="">
             <a:extLst xmlns:a="http://schemas.openxmlformats.org/drawingml/2006/main">
               <a:ext uri="{FF2B5EF4-FFF2-40B4-BE49-F238E27FC236}">
-                <a16:creationId xmlns:a16="http://schemas.microsoft.com/office/drawing/2014/main" id="{C7DC516D-10F6-4E97-B7C1-E47BCE0F5346}"/>
+                <a16:creationId xmlns:a16="http://schemas.microsoft.com/office/drawing/2014/main" id="{9BC9FF2E-193A-4DF8-8812-7A4D5B8232A2}"/>
               </a:ext>
             </a:extLst>
           </p:cNvPr>
@@ -8138,7 +8138,7 @@
           <p:cNvPr id="12" name="">
             <a:extLst xmlns:a="http://schemas.openxmlformats.org/drawingml/2006/main">
               <a:ext uri="{FF2B5EF4-FFF2-40B4-BE49-F238E27FC236}">
-                <a16:creationId xmlns:a16="http://schemas.microsoft.com/office/drawing/2014/main" id="{1844B072-E9FF-463D-9715-1E8DAC548766}"/>
+                <a16:creationId xmlns:a16="http://schemas.microsoft.com/office/drawing/2014/main" id="{16C903C6-C0AF-4FBF-BDC8-1C078D124950}"/>
               </a:ext>
             </a:extLst>
           </p:cNvPr>
@@ -8202,7 +8202,7 @@
           <p:cNvPr id="13" name="">
             <a:extLst xmlns:a="http://schemas.openxmlformats.org/drawingml/2006/main">
               <a:ext uri="{FF2B5EF4-FFF2-40B4-BE49-F238E27FC236}">
-                <a16:creationId xmlns:a16="http://schemas.microsoft.com/office/drawing/2014/main" id="{C531170A-6C8C-4933-9E27-71130F1E6428}"/>
+                <a16:creationId xmlns:a16="http://schemas.microsoft.com/office/drawing/2014/main" id="{35E8F129-D6AF-44D5-AD5C-123C3D2159FC}"/>
               </a:ext>
             </a:extLst>
           </p:cNvPr>
@@ -8237,7 +8237,7 @@
           <p:cNvPr id="14" name="">
             <a:extLst xmlns:a="http://schemas.openxmlformats.org/drawingml/2006/main">
               <a:ext uri="{FF2B5EF4-FFF2-40B4-BE49-F238E27FC236}">
-                <a16:creationId xmlns:a16="http://schemas.microsoft.com/office/drawing/2014/main" id="{150B4291-F4F0-4FC6-85B8-2A7C664AD301}"/>
+                <a16:creationId xmlns:a16="http://schemas.microsoft.com/office/drawing/2014/main" id="{7A2BF7BC-60EE-473C-9AAA-A9AD19A021FE}"/>
               </a:ext>
             </a:extLst>
           </p:cNvPr>
@@ -8301,7 +8301,7 @@
           <p:cNvPr id="15" name="">
             <a:extLst xmlns:a="http://schemas.openxmlformats.org/drawingml/2006/main">
               <a:ext uri="{FF2B5EF4-FFF2-40B4-BE49-F238E27FC236}">
-                <a16:creationId xmlns:a16="http://schemas.microsoft.com/office/drawing/2014/main" id="{6BF5B081-B39B-4153-8169-51401E52617C}"/>
+                <a16:creationId xmlns:a16="http://schemas.microsoft.com/office/drawing/2014/main" id="{329131A3-2B91-4579-B39E-A681F94E3EDA}"/>
               </a:ext>
             </a:extLst>
           </p:cNvPr>
@@ -8365,7 +8365,7 @@
           <p:cNvPr id="16" name="">
             <a:extLst xmlns:a="http://schemas.openxmlformats.org/drawingml/2006/main">
               <a:ext uri="{FF2B5EF4-FFF2-40B4-BE49-F238E27FC236}">
-                <a16:creationId xmlns:a16="http://schemas.microsoft.com/office/drawing/2014/main" id="{91A0733E-0ADF-4FC7-B820-78C9C913EE1C}"/>
+                <a16:creationId xmlns:a16="http://schemas.microsoft.com/office/drawing/2014/main" id="{E2C0B02A-4FCB-45E7-8DC7-CB12ADA0D629}"/>
               </a:ext>
             </a:extLst>
           </p:cNvPr>
@@ -8400,7 +8400,7 @@
           <p:cNvPr id="17" name="">
             <a:extLst xmlns:a="http://schemas.openxmlformats.org/drawingml/2006/main">
               <a:ext uri="{FF2B5EF4-FFF2-40B4-BE49-F238E27FC236}">
-                <a16:creationId xmlns:a16="http://schemas.microsoft.com/office/drawing/2014/main" id="{1F7125F9-3EFC-4448-8B51-AAFFCABEB1F1}"/>
+                <a16:creationId xmlns:a16="http://schemas.microsoft.com/office/drawing/2014/main" id="{4DEA75AD-325A-42AB-985A-E4D0468DCD80}"/>
               </a:ext>
             </a:extLst>
           </p:cNvPr>
@@ -8464,7 +8464,7 @@
           <p:cNvPr id="18" name="">
             <a:extLst xmlns:a="http://schemas.openxmlformats.org/drawingml/2006/main">
               <a:ext uri="{FF2B5EF4-FFF2-40B4-BE49-F238E27FC236}">
-                <a16:creationId xmlns:a16="http://schemas.microsoft.com/office/drawing/2014/main" id="{940114B7-03E5-440D-98B7-98B90450066A}"/>
+                <a16:creationId xmlns:a16="http://schemas.microsoft.com/office/drawing/2014/main" id="{7461C6DE-C457-4A9C-B0D3-514574710897}"/>
               </a:ext>
             </a:extLst>
           </p:cNvPr>
@@ -8528,7 +8528,7 @@
           <p:cNvPr id="19" name="">
             <a:extLst xmlns:a="http://schemas.openxmlformats.org/drawingml/2006/main">
               <a:ext uri="{FF2B5EF4-FFF2-40B4-BE49-F238E27FC236}">
-                <a16:creationId xmlns:a16="http://schemas.microsoft.com/office/drawing/2014/main" id="{D2877636-5309-4D6A-9B3A-6A8B4F873892}"/>
+                <a16:creationId xmlns:a16="http://schemas.microsoft.com/office/drawing/2014/main" id="{9932EB7C-41CB-42D0-8DD3-E83D0D8E175E}"/>
               </a:ext>
             </a:extLst>
           </p:cNvPr>
@@ -8592,7 +8592,7 @@
           <p:cNvPr id="20" name="">
             <a:extLst xmlns:a="http://schemas.openxmlformats.org/drawingml/2006/main">
               <a:ext uri="{FF2B5EF4-FFF2-40B4-BE49-F238E27FC236}">
-                <a16:creationId xmlns:a16="http://schemas.microsoft.com/office/drawing/2014/main" id="{1B0E18F0-60CC-46F1-8B1A-7102AC55D188}"/>
+                <a16:creationId xmlns:a16="http://schemas.microsoft.com/office/drawing/2014/main" id="{483AE8E1-1B5F-45EA-99C8-234EB10938C4}"/>
               </a:ext>
             </a:extLst>
           </p:cNvPr>
@@ -8625,7 +8625,7 @@
           <p:cNvPr id="21" name="">
             <a:extLst xmlns:a="http://schemas.openxmlformats.org/drawingml/2006/main">
               <a:ext uri="{FF2B5EF4-FFF2-40B4-BE49-F238E27FC236}">
-                <a16:creationId xmlns:a16="http://schemas.microsoft.com/office/drawing/2014/main" id="{70F335E8-3F21-4742-BA97-0EB020BAB0A5}"/>
+                <a16:creationId xmlns:a16="http://schemas.microsoft.com/office/drawing/2014/main" id="{5C121F3D-396E-4787-8CC2-CF341A7F35F1}"/>
               </a:ext>
             </a:extLst>
           </p:cNvPr>
@@ -8658,7 +8658,7 @@
           <p:cNvPr id="22" name="">
             <a:extLst xmlns:a="http://schemas.openxmlformats.org/drawingml/2006/main">
               <a:ext uri="{FF2B5EF4-FFF2-40B4-BE49-F238E27FC236}">
-                <a16:creationId xmlns:a16="http://schemas.microsoft.com/office/drawing/2014/main" id="{8473784C-0B19-4387-A322-9E0646298E88}"/>
+                <a16:creationId xmlns:a16="http://schemas.microsoft.com/office/drawing/2014/main" id="{3E96550C-E44E-4DDF-9881-2A2C2846C66B}"/>
               </a:ext>
             </a:extLst>
           </p:cNvPr>
@@ -8722,7 +8722,7 @@
           <p:cNvPr id="23" name="">
             <a:extLst xmlns:a="http://schemas.openxmlformats.org/drawingml/2006/main">
               <a:ext uri="{FF2B5EF4-FFF2-40B4-BE49-F238E27FC236}">
-                <a16:creationId xmlns:a16="http://schemas.microsoft.com/office/drawing/2014/main" id="{53A27D0C-343C-4C08-B734-2CD38C2EEBCD}"/>
+                <a16:creationId xmlns:a16="http://schemas.microsoft.com/office/drawing/2014/main" id="{CD0F6518-C33D-4FDF-B1A9-E9E742CE7D9C}"/>
               </a:ext>
             </a:extLst>
           </p:cNvPr>
@@ -8755,7 +8755,7 @@
           <p:cNvPr id="24" name="">
             <a:extLst xmlns:a="http://schemas.openxmlformats.org/drawingml/2006/main">
               <a:ext uri="{FF2B5EF4-FFF2-40B4-BE49-F238E27FC236}">
-                <a16:creationId xmlns:a16="http://schemas.microsoft.com/office/drawing/2014/main" id="{D36E41C8-6D26-464F-BD23-2671CBFCB865}"/>
+                <a16:creationId xmlns:a16="http://schemas.microsoft.com/office/drawing/2014/main" id="{32BA541C-3E99-42A0-ABA1-6E800D908EBB}"/>
               </a:ext>
             </a:extLst>
           </p:cNvPr>
@@ -8788,7 +8788,7 @@
           <p:cNvPr id="25" name="">
             <a:extLst xmlns:a="http://schemas.openxmlformats.org/drawingml/2006/main">
               <a:ext uri="{FF2B5EF4-FFF2-40B4-BE49-F238E27FC236}">
-                <a16:creationId xmlns:a16="http://schemas.microsoft.com/office/drawing/2014/main" id="{E34BCB17-7EB4-4D1B-A0E2-C1D6B174E20A}"/>
+                <a16:creationId xmlns:a16="http://schemas.microsoft.com/office/drawing/2014/main" id="{F8731AF2-A203-4088-A18C-66B25A7321BF}"/>
               </a:ext>
             </a:extLst>
           </p:cNvPr>
@@ -8852,7 +8852,7 @@
           <p:cNvPr id="26" name="">
             <a:extLst xmlns:a="http://schemas.openxmlformats.org/drawingml/2006/main">
               <a:ext uri="{FF2B5EF4-FFF2-40B4-BE49-F238E27FC236}">
-                <a16:creationId xmlns:a16="http://schemas.microsoft.com/office/drawing/2014/main" id="{A0AE8FD2-4813-4633-AD56-FEC49D68B53B}"/>
+                <a16:creationId xmlns:a16="http://schemas.microsoft.com/office/drawing/2014/main" id="{107D983E-E816-48AB-A513-84E194F23E05}"/>
               </a:ext>
             </a:extLst>
           </p:cNvPr>
@@ -8885,7 +8885,7 @@
           <p:cNvPr id="27" name="">
             <a:extLst xmlns:a="http://schemas.openxmlformats.org/drawingml/2006/main">
               <a:ext uri="{FF2B5EF4-FFF2-40B4-BE49-F238E27FC236}">
-                <a16:creationId xmlns:a16="http://schemas.microsoft.com/office/drawing/2014/main" id="{472C769C-0533-4895-81D0-CD9B1C2BED99}"/>
+                <a16:creationId xmlns:a16="http://schemas.microsoft.com/office/drawing/2014/main" id="{A076F7AC-FF91-4545-AFD8-66A2D42C9FFE}"/>
               </a:ext>
             </a:extLst>
           </p:cNvPr>
@@ -8918,7 +8918,7 @@
           <p:cNvPr id="28" name="">
             <a:extLst xmlns:a="http://schemas.openxmlformats.org/drawingml/2006/main">
               <a:ext uri="{FF2B5EF4-FFF2-40B4-BE49-F238E27FC236}">
-                <a16:creationId xmlns:a16="http://schemas.microsoft.com/office/drawing/2014/main" id="{9835F8DC-1936-459C-AA76-A260F5EA110F}"/>
+                <a16:creationId xmlns:a16="http://schemas.microsoft.com/office/drawing/2014/main" id="{2F6BAC17-F1D9-404E-BEB3-C4140A3CBE5C}"/>
               </a:ext>
             </a:extLst>
           </p:cNvPr>
@@ -8982,7 +8982,7 @@
           <p:cNvPr id="29" name="">
             <a:extLst xmlns:a="http://schemas.openxmlformats.org/drawingml/2006/main">
               <a:ext uri="{FF2B5EF4-FFF2-40B4-BE49-F238E27FC236}">
-                <a16:creationId xmlns:a16="http://schemas.microsoft.com/office/drawing/2014/main" id="{F32EB017-4035-4200-971C-A39635180234}"/>
+                <a16:creationId xmlns:a16="http://schemas.microsoft.com/office/drawing/2014/main" id="{F52F4EBD-5EE1-4792-8680-D58AB3DE7B6C}"/>
               </a:ext>
             </a:extLst>
           </p:cNvPr>
@@ -9015,7 +9015,7 @@
           <p:cNvPr id="30" name="">
             <a:extLst xmlns:a="http://schemas.openxmlformats.org/drawingml/2006/main">
               <a:ext uri="{FF2B5EF4-FFF2-40B4-BE49-F238E27FC236}">
-                <a16:creationId xmlns:a16="http://schemas.microsoft.com/office/drawing/2014/main" id="{39A82290-9571-4F38-8D51-6ABDF5194E7D}"/>
+                <a16:creationId xmlns:a16="http://schemas.microsoft.com/office/drawing/2014/main" id="{875861F0-6065-40C5-89AC-7A0F15414D6F}"/>
               </a:ext>
             </a:extLst>
           </p:cNvPr>
@@ -9079,7 +9079,7 @@
           <p:cNvPr id="31" name="">
             <a:extLst xmlns:a="http://schemas.openxmlformats.org/drawingml/2006/main">
               <a:ext uri="{FF2B5EF4-FFF2-40B4-BE49-F238E27FC236}">
-                <a16:creationId xmlns:a16="http://schemas.microsoft.com/office/drawing/2014/main" id="{6AADF830-938B-46E1-AEF0-B11C71E192F5}"/>
+                <a16:creationId xmlns:a16="http://schemas.microsoft.com/office/drawing/2014/main" id="{8966AF0C-0F8E-4096-BC08-891F07374286}"/>
               </a:ext>
             </a:extLst>
           </p:cNvPr>
@@ -9141,7 +9141,7 @@
     </p:spTree>
     <p:extLst>
       <p:ext uri="{BB962C8B-B14F-4D97-AF65-F5344CB8AC3E}">
-        <p14:creationId xmlns:p14="http://schemas.microsoft.com/office/powerpoint/2010/main" val="1536448275"/>
+        <p14:creationId xmlns:p14="http://schemas.microsoft.com/office/powerpoint/2010/main" val="661304783"/>
       </p:ext>
     </p:extLst>
   </p:cSld>
@@ -9169,7 +9169,7 @@
           <p:nvPr/>
         </p:nvPicPr>
         <p:blipFill>
-          <a:blip xmlns:r="http://schemas.openxmlformats.org/officeDocument/2006/relationships" xmlns:a="http://schemas.openxmlformats.org/drawingml/2006/main" r:embed="R2fc771650e394c22"/>
+          <a:blip xmlns:r="http://schemas.openxmlformats.org/officeDocument/2006/relationships" xmlns:a="http://schemas.openxmlformats.org/drawingml/2006/main" r:embed="R43203c3d6b514a28"/>
           <a:srcRect xmlns:a="http://schemas.openxmlformats.org/drawingml/2006/main" l="0" t="7813" r="0" b="7813"/>
           <a:stretch xmlns:a="http://schemas.openxmlformats.org/drawingml/2006/main">
             <a:fillRect l="0" t="0" r="0" b="0"/>
@@ -9190,7 +9190,7 @@
           <p:cNvPr id="2" name="">
             <a:extLst xmlns:a="http://schemas.openxmlformats.org/drawingml/2006/main">
               <a:ext uri="{FF2B5EF4-FFF2-40B4-BE49-F238E27FC236}">
-                <a16:creationId xmlns:a16="http://schemas.microsoft.com/office/drawing/2014/main" id="{1C74AA8C-510C-42DC-8DD6-2896B65AF234}"/>
+                <a16:creationId xmlns:a16="http://schemas.microsoft.com/office/drawing/2014/main" id="{6E35A6F2-40A2-4BF3-966E-885C74440E1B}"/>
               </a:ext>
             </a:extLst>
           </p:cNvPr>
@@ -9227,7 +9227,7 @@
           <p:cNvPr id="3" name="">
             <a:extLst xmlns:a="http://schemas.openxmlformats.org/drawingml/2006/main">
               <a:ext uri="{FF2B5EF4-FFF2-40B4-BE49-F238E27FC236}">
-                <a16:creationId xmlns:a16="http://schemas.microsoft.com/office/drawing/2014/main" id="{BEDE0D84-5E65-4C99-A30E-C3C99097999D}"/>
+                <a16:creationId xmlns:a16="http://schemas.microsoft.com/office/drawing/2014/main" id="{A4E3A516-37E6-4B49-A22F-FEBF5D50F8E9}"/>
               </a:ext>
             </a:extLst>
           </p:cNvPr>
@@ -9264,7 +9264,7 @@
           <p:cNvPr id="4" name="">
             <a:extLst xmlns:a="http://schemas.openxmlformats.org/drawingml/2006/main">
               <a:ext uri="{FF2B5EF4-FFF2-40B4-BE49-F238E27FC236}">
-                <a16:creationId xmlns:a16="http://schemas.microsoft.com/office/drawing/2014/main" id="{DAC3D04E-1445-4800-8F8A-842ED678A44D}"/>
+                <a16:creationId xmlns:a16="http://schemas.microsoft.com/office/drawing/2014/main" id="{E853B830-85AF-46B3-9F36-7B4ED38A5BB6}"/>
               </a:ext>
             </a:extLst>
           </p:cNvPr>
@@ -9328,7 +9328,7 @@
           <p:cNvPr id="5" name="">
             <a:extLst xmlns:a="http://schemas.openxmlformats.org/drawingml/2006/main">
               <a:ext uri="{FF2B5EF4-FFF2-40B4-BE49-F238E27FC236}">
-                <a16:creationId xmlns:a16="http://schemas.microsoft.com/office/drawing/2014/main" id="{17EE2E9A-B3E6-4F42-8D83-719116A1E515}"/>
+                <a16:creationId xmlns:a16="http://schemas.microsoft.com/office/drawing/2014/main" id="{18D4A86B-FED6-4B71-A0D0-969A79058A52}"/>
               </a:ext>
             </a:extLst>
           </p:cNvPr>
@@ -9392,7 +9392,7 @@
           <p:cNvPr id="6" name="">
             <a:extLst xmlns:a="http://schemas.openxmlformats.org/drawingml/2006/main">
               <a:ext uri="{FF2B5EF4-FFF2-40B4-BE49-F238E27FC236}">
-                <a16:creationId xmlns:a16="http://schemas.microsoft.com/office/drawing/2014/main" id="{58441852-56AE-452A-A40F-F3CAFC2D7F94}"/>
+                <a16:creationId xmlns:a16="http://schemas.microsoft.com/office/drawing/2014/main" id="{61D238A3-10C0-4256-9F0F-DFB23D5691A2}"/>
               </a:ext>
             </a:extLst>
           </p:cNvPr>
@@ -9456,7 +9456,7 @@
           <p:cNvPr id="7" name="">
             <a:extLst xmlns:a="http://schemas.openxmlformats.org/drawingml/2006/main">
               <a:ext uri="{FF2B5EF4-FFF2-40B4-BE49-F238E27FC236}">
-                <a16:creationId xmlns:a16="http://schemas.microsoft.com/office/drawing/2014/main" id="{FAC2AEA2-A240-48D3-9C8D-B5A494873CC5}"/>
+                <a16:creationId xmlns:a16="http://schemas.microsoft.com/office/drawing/2014/main" id="{90559AB8-EC56-415F-AA6E-4C34C9E78E2C}"/>
               </a:ext>
             </a:extLst>
           </p:cNvPr>
@@ -9491,7 +9491,7 @@
           <p:cNvPr id="8" name="">
             <a:extLst xmlns:a="http://schemas.openxmlformats.org/drawingml/2006/main">
               <a:ext uri="{FF2B5EF4-FFF2-40B4-BE49-F238E27FC236}">
-                <a16:creationId xmlns:a16="http://schemas.microsoft.com/office/drawing/2014/main" id="{D952B4AA-60F9-4C3B-BACE-E2B4D90189CA}"/>
+                <a16:creationId xmlns:a16="http://schemas.microsoft.com/office/drawing/2014/main" id="{A63D3A5B-760F-4B8F-AC8B-63407D9527B6}"/>
               </a:ext>
             </a:extLst>
           </p:cNvPr>
@@ -9555,7 +9555,7 @@
           <p:cNvPr id="9" name="">
             <a:extLst xmlns:a="http://schemas.openxmlformats.org/drawingml/2006/main">
               <a:ext uri="{FF2B5EF4-FFF2-40B4-BE49-F238E27FC236}">
-                <a16:creationId xmlns:a16="http://schemas.microsoft.com/office/drawing/2014/main" id="{ED73AB1E-502B-49F5-9032-CB74958A3B70}"/>
+                <a16:creationId xmlns:a16="http://schemas.microsoft.com/office/drawing/2014/main" id="{F09F3F6B-7EB1-46CF-B34F-00F4E0182507}"/>
               </a:ext>
             </a:extLst>
           </p:cNvPr>
@@ -9619,7 +9619,7 @@
           <p:cNvPr id="10" name="">
             <a:extLst xmlns:a="http://schemas.openxmlformats.org/drawingml/2006/main">
               <a:ext uri="{FF2B5EF4-FFF2-40B4-BE49-F238E27FC236}">
-                <a16:creationId xmlns:a16="http://schemas.microsoft.com/office/drawing/2014/main" id="{0DA172C4-8EE6-446E-A480-035E0AD6235C}"/>
+                <a16:creationId xmlns:a16="http://schemas.microsoft.com/office/drawing/2014/main" id="{764F3DB0-72D1-4C51-AC5A-FE40438C0710}"/>
               </a:ext>
             </a:extLst>
           </p:cNvPr>
@@ -9652,7 +9652,7 @@
           <p:cNvPr id="11" name="">
             <a:extLst xmlns:a="http://schemas.openxmlformats.org/drawingml/2006/main">
               <a:ext uri="{FF2B5EF4-FFF2-40B4-BE49-F238E27FC236}">
-                <a16:creationId xmlns:a16="http://schemas.microsoft.com/office/drawing/2014/main" id="{82BF52A9-BC15-4E31-ACB4-DF97A8B61992}"/>
+                <a16:creationId xmlns:a16="http://schemas.microsoft.com/office/drawing/2014/main" id="{C8C521BC-E5F5-4320-886D-7D5242732BAE}"/>
               </a:ext>
             </a:extLst>
           </p:cNvPr>
@@ -9687,7 +9687,7 @@
           <p:cNvPr id="12" name="">
             <a:extLst xmlns:a="http://schemas.openxmlformats.org/drawingml/2006/main">
               <a:ext uri="{FF2B5EF4-FFF2-40B4-BE49-F238E27FC236}">
-                <a16:creationId xmlns:a16="http://schemas.microsoft.com/office/drawing/2014/main" id="{8FC07782-E93D-443F-9A34-5043546BAE21}"/>
+                <a16:creationId xmlns:a16="http://schemas.microsoft.com/office/drawing/2014/main" id="{E375ADE6-81B9-4717-A377-D149943CF7E3}"/>
               </a:ext>
             </a:extLst>
           </p:cNvPr>
@@ -9751,7 +9751,7 @@
           <p:cNvPr id="13" name="">
             <a:extLst xmlns:a="http://schemas.openxmlformats.org/drawingml/2006/main">
               <a:ext uri="{FF2B5EF4-FFF2-40B4-BE49-F238E27FC236}">
-                <a16:creationId xmlns:a16="http://schemas.microsoft.com/office/drawing/2014/main" id="{41FAAD97-D958-4095-96EA-56D16A7D2597}"/>
+                <a16:creationId xmlns:a16="http://schemas.microsoft.com/office/drawing/2014/main" id="{02DBBEEE-A1F6-44B4-B884-3750E164ECAA}"/>
               </a:ext>
             </a:extLst>
           </p:cNvPr>
@@ -9815,7 +9815,7 @@
           <p:cNvPr id="14" name="">
             <a:extLst xmlns:a="http://schemas.openxmlformats.org/drawingml/2006/main">
               <a:ext uri="{FF2B5EF4-FFF2-40B4-BE49-F238E27FC236}">
-                <a16:creationId xmlns:a16="http://schemas.microsoft.com/office/drawing/2014/main" id="{A6A2339E-F33F-4792-BB05-24FE5F8270A2}"/>
+                <a16:creationId xmlns:a16="http://schemas.microsoft.com/office/drawing/2014/main" id="{17CC56BB-FC1B-4CFB-9037-1036F2812E89}"/>
               </a:ext>
             </a:extLst>
           </p:cNvPr>
@@ -9848,7 +9848,7 @@
           <p:cNvPr id="15" name="">
             <a:extLst xmlns:a="http://schemas.openxmlformats.org/drawingml/2006/main">
               <a:ext uri="{FF2B5EF4-FFF2-40B4-BE49-F238E27FC236}">
-                <a16:creationId xmlns:a16="http://schemas.microsoft.com/office/drawing/2014/main" id="{59272126-F3F5-44AE-82C7-900CB8ED93B5}"/>
+                <a16:creationId xmlns:a16="http://schemas.microsoft.com/office/drawing/2014/main" id="{C56CBE4D-8A77-423A-80B2-4631D31A703A}"/>
               </a:ext>
             </a:extLst>
           </p:cNvPr>
@@ -9883,7 +9883,7 @@
           <p:cNvPr id="16" name="">
             <a:extLst xmlns:a="http://schemas.openxmlformats.org/drawingml/2006/main">
               <a:ext uri="{FF2B5EF4-FFF2-40B4-BE49-F238E27FC236}">
-                <a16:creationId xmlns:a16="http://schemas.microsoft.com/office/drawing/2014/main" id="{37DFC56B-86BE-49AB-86CF-FBB5F45EC154}"/>
+                <a16:creationId xmlns:a16="http://schemas.microsoft.com/office/drawing/2014/main" id="{4570A1C2-839B-4C1F-A832-A42C5B949108}"/>
               </a:ext>
             </a:extLst>
           </p:cNvPr>
@@ -9947,7 +9947,7 @@
           <p:cNvPr id="17" name="">
             <a:extLst xmlns:a="http://schemas.openxmlformats.org/drawingml/2006/main">
               <a:ext uri="{FF2B5EF4-FFF2-40B4-BE49-F238E27FC236}">
-                <a16:creationId xmlns:a16="http://schemas.microsoft.com/office/drawing/2014/main" id="{0D040BA1-6418-40CA-ABF4-01691DA53A1F}"/>
+                <a16:creationId xmlns:a16="http://schemas.microsoft.com/office/drawing/2014/main" id="{B7B983A2-F140-4F99-98CC-2ACBAE5A565D}"/>
               </a:ext>
             </a:extLst>
           </p:cNvPr>
@@ -10011,7 +10011,7 @@
           <p:cNvPr id="18" name="">
             <a:extLst xmlns:a="http://schemas.openxmlformats.org/drawingml/2006/main">
               <a:ext uri="{FF2B5EF4-FFF2-40B4-BE49-F238E27FC236}">
-                <a16:creationId xmlns:a16="http://schemas.microsoft.com/office/drawing/2014/main" id="{C43D33C1-2ABF-4532-9B81-A050144F8CAB}"/>
+                <a16:creationId xmlns:a16="http://schemas.microsoft.com/office/drawing/2014/main" id="{1FBCC75E-70AF-4B10-9A9D-4F422F7C0FE4}"/>
               </a:ext>
             </a:extLst>
           </p:cNvPr>
@@ -10044,7 +10044,7 @@
           <p:cNvPr id="19" name="">
             <a:extLst xmlns:a="http://schemas.openxmlformats.org/drawingml/2006/main">
               <a:ext uri="{FF2B5EF4-FFF2-40B4-BE49-F238E27FC236}">
-                <a16:creationId xmlns:a16="http://schemas.microsoft.com/office/drawing/2014/main" id="{5C8C0C82-FAA4-451D-9468-8EF056EDDF99}"/>
+                <a16:creationId xmlns:a16="http://schemas.microsoft.com/office/drawing/2014/main" id="{757F4C94-2A90-47AB-8355-62D4261490F9}"/>
               </a:ext>
             </a:extLst>
           </p:cNvPr>
@@ -10079,7 +10079,7 @@
           <p:cNvPr id="20" name="">
             <a:extLst xmlns:a="http://schemas.openxmlformats.org/drawingml/2006/main">
               <a:ext uri="{FF2B5EF4-FFF2-40B4-BE49-F238E27FC236}">
-                <a16:creationId xmlns:a16="http://schemas.microsoft.com/office/drawing/2014/main" id="{79D79A4E-7D2C-455A-9C74-F5EEA57E6FA0}"/>
+                <a16:creationId xmlns:a16="http://schemas.microsoft.com/office/drawing/2014/main" id="{356FBEED-F03C-4364-AB89-1558F7B7F482}"/>
               </a:ext>
             </a:extLst>
           </p:cNvPr>
@@ -10143,7 +10143,7 @@
           <p:cNvPr id="21" name="">
             <a:extLst xmlns:a="http://schemas.openxmlformats.org/drawingml/2006/main">
               <a:ext uri="{FF2B5EF4-FFF2-40B4-BE49-F238E27FC236}">
-                <a16:creationId xmlns:a16="http://schemas.microsoft.com/office/drawing/2014/main" id="{C8C1E351-DB82-420C-88FB-30A40BBBD308}"/>
+                <a16:creationId xmlns:a16="http://schemas.microsoft.com/office/drawing/2014/main" id="{7964E8C7-A136-443B-B7AF-6D5421F27C95}"/>
               </a:ext>
             </a:extLst>
           </p:cNvPr>
@@ -10207,7 +10207,7 @@
           <p:cNvPr id="22" name="">
             <a:extLst xmlns:a="http://schemas.openxmlformats.org/drawingml/2006/main">
               <a:ext uri="{FF2B5EF4-FFF2-40B4-BE49-F238E27FC236}">
-                <a16:creationId xmlns:a16="http://schemas.microsoft.com/office/drawing/2014/main" id="{ACEE0B16-7761-498A-9B88-5C8B8026DE40}"/>
+                <a16:creationId xmlns:a16="http://schemas.microsoft.com/office/drawing/2014/main" id="{A01767ED-BC4C-4B7A-9E02-8054FB5A8A4A}"/>
               </a:ext>
             </a:extLst>
           </p:cNvPr>
@@ -10271,7 +10271,7 @@
           <p:cNvPr id="23" name="">
             <a:extLst xmlns:a="http://schemas.openxmlformats.org/drawingml/2006/main">
               <a:ext uri="{FF2B5EF4-FFF2-40B4-BE49-F238E27FC236}">
-                <a16:creationId xmlns:a16="http://schemas.microsoft.com/office/drawing/2014/main" id="{174C1DE7-EC1E-4EA4-A7CD-83BDEE9E1AF2}"/>
+                <a16:creationId xmlns:a16="http://schemas.microsoft.com/office/drawing/2014/main" id="{BC94E5F1-44FB-47CB-B60C-5F4B1640EC5C}"/>
               </a:ext>
             </a:extLst>
           </p:cNvPr>
@@ -10335,7 +10335,7 @@
           <p:cNvPr id="24" name="">
             <a:extLst xmlns:a="http://schemas.openxmlformats.org/drawingml/2006/main">
               <a:ext uri="{FF2B5EF4-FFF2-40B4-BE49-F238E27FC236}">
-                <a16:creationId xmlns:a16="http://schemas.microsoft.com/office/drawing/2014/main" id="{91935A99-3110-4411-A430-8560DD781E65}"/>
+                <a16:creationId xmlns:a16="http://schemas.microsoft.com/office/drawing/2014/main" id="{7CA35382-A8F8-47EF-BB3E-D56670498882}"/>
               </a:ext>
             </a:extLst>
           </p:cNvPr>
@@ -10368,7 +10368,7 @@
           <p:cNvPr id="25" name="">
             <a:extLst xmlns:a="http://schemas.openxmlformats.org/drawingml/2006/main">
               <a:ext uri="{FF2B5EF4-FFF2-40B4-BE49-F238E27FC236}">
-                <a16:creationId xmlns:a16="http://schemas.microsoft.com/office/drawing/2014/main" id="{DD3940BF-491F-412A-A9D6-6FF9F729F1C1}"/>
+                <a16:creationId xmlns:a16="http://schemas.microsoft.com/office/drawing/2014/main" id="{991A38D5-7E7E-4B06-8863-F9AA313A3A2E}"/>
               </a:ext>
             </a:extLst>
           </p:cNvPr>
@@ -10432,7 +10432,7 @@
           <p:cNvPr id="26" name="">
             <a:extLst xmlns:a="http://schemas.openxmlformats.org/drawingml/2006/main">
               <a:ext uri="{FF2B5EF4-FFF2-40B4-BE49-F238E27FC236}">
-                <a16:creationId xmlns:a16="http://schemas.microsoft.com/office/drawing/2014/main" id="{DA8B3CDF-7683-4DEC-AAA1-44D372AFD112}"/>
+                <a16:creationId xmlns:a16="http://schemas.microsoft.com/office/drawing/2014/main" id="{FF7FE730-5D63-4BC3-A924-9A27E7326F7A}"/>
               </a:ext>
             </a:extLst>
           </p:cNvPr>
@@ -10494,7 +10494,7 @@
     </p:spTree>
     <p:extLst>
       <p:ext uri="{BB962C8B-B14F-4D97-AF65-F5344CB8AC3E}">
-        <p14:creationId xmlns:p14="http://schemas.microsoft.com/office/powerpoint/2010/main" val="1522936208"/>
+        <p14:creationId xmlns:p14="http://schemas.microsoft.com/office/powerpoint/2010/main" val="2127644319"/>
       </p:ext>
     </p:extLst>
   </p:cSld>
@@ -10522,7 +10522,7 @@
           <p:nvPr/>
         </p:nvPicPr>
         <p:blipFill>
-          <a:blip xmlns:r="http://schemas.openxmlformats.org/officeDocument/2006/relationships" xmlns:a="http://schemas.openxmlformats.org/drawingml/2006/main" r:embed="Rb76edd0d8ee34bf2"/>
+          <a:blip xmlns:r="http://schemas.openxmlformats.org/officeDocument/2006/relationships" xmlns:a="http://schemas.openxmlformats.org/drawingml/2006/main" r:embed="Ra6e0cca346784799"/>
           <a:srcRect xmlns:a="http://schemas.openxmlformats.org/drawingml/2006/main" l="0" t="7813" r="0" b="7813"/>
           <a:stretch xmlns:a="http://schemas.openxmlformats.org/drawingml/2006/main">
             <a:fillRect l="0" t="0" r="0" b="0"/>
@@ -10543,7 +10543,7 @@
           <p:cNvPr id="2" name="">
             <a:extLst xmlns:a="http://schemas.openxmlformats.org/drawingml/2006/main">
               <a:ext uri="{FF2B5EF4-FFF2-40B4-BE49-F238E27FC236}">
-                <a16:creationId xmlns:a16="http://schemas.microsoft.com/office/drawing/2014/main" id="{A18C549A-2ECF-43A7-8E67-6D0DCE3E98E8}"/>
+                <a16:creationId xmlns:a16="http://schemas.microsoft.com/office/drawing/2014/main" id="{E82F071E-FD08-4D82-9E64-3F997E9B9BA7}"/>
               </a:ext>
             </a:extLst>
           </p:cNvPr>
@@ -10580,7 +10580,7 @@
           <p:cNvPr id="3" name="">
             <a:extLst xmlns:a="http://schemas.openxmlformats.org/drawingml/2006/main">
               <a:ext uri="{FF2B5EF4-FFF2-40B4-BE49-F238E27FC236}">
-                <a16:creationId xmlns:a16="http://schemas.microsoft.com/office/drawing/2014/main" id="{80DA0FE6-A181-4AA6-97FB-BCFE3DF6A0E3}"/>
+                <a16:creationId xmlns:a16="http://schemas.microsoft.com/office/drawing/2014/main" id="{49AB3D6E-C924-4599-892E-161BDC710108}"/>
               </a:ext>
             </a:extLst>
           </p:cNvPr>
@@ -10617,7 +10617,7 @@
           <p:cNvPr id="4" name="">
             <a:extLst xmlns:a="http://schemas.openxmlformats.org/drawingml/2006/main">
               <a:ext uri="{FF2B5EF4-FFF2-40B4-BE49-F238E27FC236}">
-                <a16:creationId xmlns:a16="http://schemas.microsoft.com/office/drawing/2014/main" id="{105058FF-B877-486A-A077-F1F23607724A}"/>
+                <a16:creationId xmlns:a16="http://schemas.microsoft.com/office/drawing/2014/main" id="{AEC7C752-41C3-4AA9-9517-4208CE6E6DB5}"/>
               </a:ext>
             </a:extLst>
           </p:cNvPr>
@@ -10681,7 +10681,7 @@
           <p:cNvPr id="5" name="">
             <a:extLst xmlns:a="http://schemas.openxmlformats.org/drawingml/2006/main">
               <a:ext uri="{FF2B5EF4-FFF2-40B4-BE49-F238E27FC236}">
-                <a16:creationId xmlns:a16="http://schemas.microsoft.com/office/drawing/2014/main" id="{4FACEF7C-5C86-415B-A2A0-A8DE203D5B29}"/>
+                <a16:creationId xmlns:a16="http://schemas.microsoft.com/office/drawing/2014/main" id="{AF918B58-70FF-4DDE-B177-419388569EE7}"/>
               </a:ext>
             </a:extLst>
           </p:cNvPr>
@@ -10745,7 +10745,7 @@
           <p:cNvPr id="6" name="">
             <a:extLst xmlns:a="http://schemas.openxmlformats.org/drawingml/2006/main">
               <a:ext uri="{FF2B5EF4-FFF2-40B4-BE49-F238E27FC236}">
-                <a16:creationId xmlns:a16="http://schemas.microsoft.com/office/drawing/2014/main" id="{A8BFAAA9-9D64-47B0-9494-7AA623B3600F}"/>
+                <a16:creationId xmlns:a16="http://schemas.microsoft.com/office/drawing/2014/main" id="{F94B7512-1D03-436D-8E7C-E2A5C2895F0E}"/>
               </a:ext>
             </a:extLst>
           </p:cNvPr>
@@ -10809,7 +10809,7 @@
           <p:cNvPr id="7" name="">
             <a:extLst xmlns:a="http://schemas.openxmlformats.org/drawingml/2006/main">
               <a:ext uri="{FF2B5EF4-FFF2-40B4-BE49-F238E27FC236}">
-                <a16:creationId xmlns:a16="http://schemas.microsoft.com/office/drawing/2014/main" id="{24CF29BD-3D6F-4DFA-BC25-A357A3D0FBEC}"/>
+                <a16:creationId xmlns:a16="http://schemas.microsoft.com/office/drawing/2014/main" id="{51E4BCDC-62C0-44AB-9400-5AEDF1DF0BDD}"/>
               </a:ext>
             </a:extLst>
           </p:cNvPr>
@@ -10844,7 +10844,7 @@
           <p:cNvPr id="8" name="">
             <a:extLst xmlns:a="http://schemas.openxmlformats.org/drawingml/2006/main">
               <a:ext uri="{FF2B5EF4-FFF2-40B4-BE49-F238E27FC236}">
-                <a16:creationId xmlns:a16="http://schemas.microsoft.com/office/drawing/2014/main" id="{F3B5109C-A8C2-4F5F-AE40-A112362F8117}"/>
+                <a16:creationId xmlns:a16="http://schemas.microsoft.com/office/drawing/2014/main" id="{A496A089-9685-46AB-BA61-64DF54F328AA}"/>
               </a:ext>
             </a:extLst>
           </p:cNvPr>
@@ -10908,7 +10908,7 @@
           <p:cNvPr id="9" name="">
             <a:extLst xmlns:a="http://schemas.openxmlformats.org/drawingml/2006/main">
               <a:ext uri="{FF2B5EF4-FFF2-40B4-BE49-F238E27FC236}">
-                <a16:creationId xmlns:a16="http://schemas.microsoft.com/office/drawing/2014/main" id="{0AFCC458-6EA4-48AE-9872-A9272BC11F7B}"/>
+                <a16:creationId xmlns:a16="http://schemas.microsoft.com/office/drawing/2014/main" id="{826B6730-C12E-44A2-845D-767F95F5F393}"/>
               </a:ext>
             </a:extLst>
           </p:cNvPr>
@@ -10943,7 +10943,7 @@
           <p:cNvPr id="10" name="">
             <a:extLst xmlns:a="http://schemas.openxmlformats.org/drawingml/2006/main">
               <a:ext uri="{FF2B5EF4-FFF2-40B4-BE49-F238E27FC236}">
-                <a16:creationId xmlns:a16="http://schemas.microsoft.com/office/drawing/2014/main" id="{BE753C17-7B5E-4045-9689-6440AD3AD9EF}"/>
+                <a16:creationId xmlns:a16="http://schemas.microsoft.com/office/drawing/2014/main" id="{BCC82F2D-0AE7-4369-A23F-A6C296B9DEB4}"/>
               </a:ext>
             </a:extLst>
           </p:cNvPr>
@@ -11007,7 +11007,7 @@
           <p:cNvPr id="11" name="">
             <a:extLst xmlns:a="http://schemas.openxmlformats.org/drawingml/2006/main">
               <a:ext uri="{FF2B5EF4-FFF2-40B4-BE49-F238E27FC236}">
-                <a16:creationId xmlns:a16="http://schemas.microsoft.com/office/drawing/2014/main" id="{7B3518BB-653F-4271-A1F5-6597537ED880}"/>
+                <a16:creationId xmlns:a16="http://schemas.microsoft.com/office/drawing/2014/main" id="{CB76B878-8C71-41EE-94C8-959D7E4072BF}"/>
               </a:ext>
             </a:extLst>
           </p:cNvPr>
@@ -11042,7 +11042,7 @@
           <p:cNvPr id="12" name="">
             <a:extLst xmlns:a="http://schemas.openxmlformats.org/drawingml/2006/main">
               <a:ext uri="{FF2B5EF4-FFF2-40B4-BE49-F238E27FC236}">
-                <a16:creationId xmlns:a16="http://schemas.microsoft.com/office/drawing/2014/main" id="{E1626934-AD38-46B0-9055-3D1371BA8B17}"/>
+                <a16:creationId xmlns:a16="http://schemas.microsoft.com/office/drawing/2014/main" id="{E0073F5D-9765-44B7-A1F4-8C56A0F7B54A}"/>
               </a:ext>
             </a:extLst>
           </p:cNvPr>
@@ -11106,7 +11106,7 @@
           <p:cNvPr id="13" name="">
             <a:extLst xmlns:a="http://schemas.openxmlformats.org/drawingml/2006/main">
               <a:ext uri="{FF2B5EF4-FFF2-40B4-BE49-F238E27FC236}">
-                <a16:creationId xmlns:a16="http://schemas.microsoft.com/office/drawing/2014/main" id="{2E8D9FFD-018F-4361-A61C-24154C2A2BFC}"/>
+                <a16:creationId xmlns:a16="http://schemas.microsoft.com/office/drawing/2014/main" id="{362DD20F-3BD1-4418-A278-CF84926D94CC}"/>
               </a:ext>
             </a:extLst>
           </p:cNvPr>
@@ -11141,7 +11141,7 @@
           <p:cNvPr id="14" name="">
             <a:extLst xmlns:a="http://schemas.openxmlformats.org/drawingml/2006/main">
               <a:ext uri="{FF2B5EF4-FFF2-40B4-BE49-F238E27FC236}">
-                <a16:creationId xmlns:a16="http://schemas.microsoft.com/office/drawing/2014/main" id="{8214250B-BC72-4690-8E6D-ECAA556AACEF}"/>
+                <a16:creationId xmlns:a16="http://schemas.microsoft.com/office/drawing/2014/main" id="{199D417A-95DE-412A-A0B3-05465844DDCD}"/>
               </a:ext>
             </a:extLst>
           </p:cNvPr>
@@ -11205,7 +11205,7 @@
           <p:cNvPr id="15" name="">
             <a:extLst xmlns:a="http://schemas.openxmlformats.org/drawingml/2006/main">
               <a:ext uri="{FF2B5EF4-FFF2-40B4-BE49-F238E27FC236}">
-                <a16:creationId xmlns:a16="http://schemas.microsoft.com/office/drawing/2014/main" id="{7F0BA743-7DFF-4A86-9510-6AE531670F54}"/>
+                <a16:creationId xmlns:a16="http://schemas.microsoft.com/office/drawing/2014/main" id="{E25DCEB6-79C0-4C28-A1BC-02F9EF4D9125}"/>
               </a:ext>
             </a:extLst>
           </p:cNvPr>
@@ -11240,7 +11240,7 @@
           <p:cNvPr id="16" name="">
             <a:extLst xmlns:a="http://schemas.openxmlformats.org/drawingml/2006/main">
               <a:ext uri="{FF2B5EF4-FFF2-40B4-BE49-F238E27FC236}">
-                <a16:creationId xmlns:a16="http://schemas.microsoft.com/office/drawing/2014/main" id="{B881F0D0-508A-4982-94F2-D0BF773F2220}"/>
+                <a16:creationId xmlns:a16="http://schemas.microsoft.com/office/drawing/2014/main" id="{B050AC90-01BB-4DD0-9FC7-9BA228410887}"/>
               </a:ext>
             </a:extLst>
           </p:cNvPr>
@@ -11304,7 +11304,7 @@
           <p:cNvPr id="17" name="">
             <a:extLst xmlns:a="http://schemas.openxmlformats.org/drawingml/2006/main">
               <a:ext uri="{FF2B5EF4-FFF2-40B4-BE49-F238E27FC236}">
-                <a16:creationId xmlns:a16="http://schemas.microsoft.com/office/drawing/2014/main" id="{E2C08CEE-4229-4A40-9867-896D85C0B71F}"/>
+                <a16:creationId xmlns:a16="http://schemas.microsoft.com/office/drawing/2014/main" id="{10645555-D0E0-402C-A51E-59DE4C371557}"/>
               </a:ext>
             </a:extLst>
           </p:cNvPr>
@@ -11339,7 +11339,7 @@
           <p:cNvPr id="18" name="">
             <a:extLst xmlns:a="http://schemas.openxmlformats.org/drawingml/2006/main">
               <a:ext uri="{FF2B5EF4-FFF2-40B4-BE49-F238E27FC236}">
-                <a16:creationId xmlns:a16="http://schemas.microsoft.com/office/drawing/2014/main" id="{F44C1D22-B96B-4357-90CE-935C0450F4C6}"/>
+                <a16:creationId xmlns:a16="http://schemas.microsoft.com/office/drawing/2014/main" id="{7701059E-246C-4E2D-A270-095E50CAC7D2}"/>
               </a:ext>
             </a:extLst>
           </p:cNvPr>
@@ -11403,7 +11403,7 @@
           <p:cNvPr id="19" name="">
             <a:extLst xmlns:a="http://schemas.openxmlformats.org/drawingml/2006/main">
               <a:ext uri="{FF2B5EF4-FFF2-40B4-BE49-F238E27FC236}">
-                <a16:creationId xmlns:a16="http://schemas.microsoft.com/office/drawing/2014/main" id="{57F36418-B7D4-4C32-AED5-1B909D42AC4D}"/>
+                <a16:creationId xmlns:a16="http://schemas.microsoft.com/office/drawing/2014/main" id="{349A0DF3-6496-4DB4-AE58-29C3DC088FF7}"/>
               </a:ext>
             </a:extLst>
           </p:cNvPr>
@@ -11467,7 +11467,7 @@
           <p:cNvPr id="20" name="">
             <a:extLst xmlns:a="http://schemas.openxmlformats.org/drawingml/2006/main">
               <a:ext uri="{FF2B5EF4-FFF2-40B4-BE49-F238E27FC236}">
-                <a16:creationId xmlns:a16="http://schemas.microsoft.com/office/drawing/2014/main" id="{AEB8F109-917F-44A2-85F3-6701279EA3B5}"/>
+                <a16:creationId xmlns:a16="http://schemas.microsoft.com/office/drawing/2014/main" id="{07CF53FB-A01D-4FCB-91D9-298A51A761AF}"/>
               </a:ext>
             </a:extLst>
           </p:cNvPr>
@@ -11500,7 +11500,7 @@
           <p:cNvPr id="21" name="">
             <a:extLst xmlns:a="http://schemas.openxmlformats.org/drawingml/2006/main">
               <a:ext uri="{FF2B5EF4-FFF2-40B4-BE49-F238E27FC236}">
-                <a16:creationId xmlns:a16="http://schemas.microsoft.com/office/drawing/2014/main" id="{94391B16-3488-4C04-B22A-DE37A98147E4}"/>
+                <a16:creationId xmlns:a16="http://schemas.microsoft.com/office/drawing/2014/main" id="{C63B4DE7-FCEC-4F31-9F26-66D8543FB592}"/>
               </a:ext>
             </a:extLst>
           </p:cNvPr>
@@ -11564,7 +11564,7 @@
           <p:cNvPr id="22" name="">
             <a:extLst xmlns:a="http://schemas.openxmlformats.org/drawingml/2006/main">
               <a:ext uri="{FF2B5EF4-FFF2-40B4-BE49-F238E27FC236}">
-                <a16:creationId xmlns:a16="http://schemas.microsoft.com/office/drawing/2014/main" id="{3934B813-C1C7-4C41-824E-54E3266762E0}"/>
+                <a16:creationId xmlns:a16="http://schemas.microsoft.com/office/drawing/2014/main" id="{4E35709F-080B-41CB-986D-FEA0E7293389}"/>
               </a:ext>
             </a:extLst>
           </p:cNvPr>
@@ -11626,7 +11626,7 @@
     </p:spTree>
     <p:extLst>
       <p:ext uri="{BB962C8B-B14F-4D97-AF65-F5344CB8AC3E}">
-        <p14:creationId xmlns:p14="http://schemas.microsoft.com/office/powerpoint/2010/main" val="2092354042"/>
+        <p14:creationId xmlns:p14="http://schemas.microsoft.com/office/powerpoint/2010/main" val="1765403744"/>
       </p:ext>
     </p:extLst>
   </p:cSld>
@@ -11654,7 +11654,7 @@
           <p:nvPr/>
         </p:nvPicPr>
         <p:blipFill>
-          <a:blip xmlns:r="http://schemas.openxmlformats.org/officeDocument/2006/relationships" xmlns:a="http://schemas.openxmlformats.org/drawingml/2006/main" r:embed="Rffa9eb803b544ed3"/>
+          <a:blip xmlns:r="http://schemas.openxmlformats.org/officeDocument/2006/relationships" xmlns:a="http://schemas.openxmlformats.org/drawingml/2006/main" r:embed="Rb04b64f900724dd4"/>
           <a:srcRect xmlns:a="http://schemas.openxmlformats.org/drawingml/2006/main" l="0" t="27" r="0" b="27"/>
           <a:stretch xmlns:a="http://schemas.openxmlformats.org/drawingml/2006/main">
             <a:fillRect l="0" t="0" r="0" b="0"/>
@@ -11675,7 +11675,7 @@
           <p:cNvPr id="2" name="">
             <a:extLst xmlns:a="http://schemas.openxmlformats.org/drawingml/2006/main">
               <a:ext uri="{FF2B5EF4-FFF2-40B4-BE49-F238E27FC236}">
-                <a16:creationId xmlns:a16="http://schemas.microsoft.com/office/drawing/2014/main" id="{92CF5E32-8385-4755-8754-0E275203A7F0}"/>
+                <a16:creationId xmlns:a16="http://schemas.microsoft.com/office/drawing/2014/main" id="{1995E36B-7D30-406F-9337-790336C53133}"/>
               </a:ext>
             </a:extLst>
           </p:cNvPr>
@@ -11712,7 +11712,7 @@
           <p:cNvPr id="3" name="">
             <a:extLst xmlns:a="http://schemas.openxmlformats.org/drawingml/2006/main">
               <a:ext uri="{FF2B5EF4-FFF2-40B4-BE49-F238E27FC236}">
-                <a16:creationId xmlns:a16="http://schemas.microsoft.com/office/drawing/2014/main" id="{A15BD3BC-CE08-40FE-88B9-4423EBF9E974}"/>
+                <a16:creationId xmlns:a16="http://schemas.microsoft.com/office/drawing/2014/main" id="{26B483CF-BEFA-49EB-8183-B322DC804F66}"/>
               </a:ext>
             </a:extLst>
           </p:cNvPr>
@@ -11749,7 +11749,7 @@
           <p:cNvPr id="4" name="">
             <a:extLst xmlns:a="http://schemas.openxmlformats.org/drawingml/2006/main">
               <a:ext uri="{FF2B5EF4-FFF2-40B4-BE49-F238E27FC236}">
-                <a16:creationId xmlns:a16="http://schemas.microsoft.com/office/drawing/2014/main" id="{131AE6DE-15FF-4762-B95F-FFD9132634EB}"/>
+                <a16:creationId xmlns:a16="http://schemas.microsoft.com/office/drawing/2014/main" id="{24EFEBC3-E5B1-48EE-AE0C-22EE8E748E32}"/>
               </a:ext>
             </a:extLst>
           </p:cNvPr>
@@ -11813,7 +11813,7 @@
           <p:cNvPr id="5" name="">
             <a:extLst xmlns:a="http://schemas.openxmlformats.org/drawingml/2006/main">
               <a:ext uri="{FF2B5EF4-FFF2-40B4-BE49-F238E27FC236}">
-                <a16:creationId xmlns:a16="http://schemas.microsoft.com/office/drawing/2014/main" id="{814118C6-41DD-41F6-88CA-40113954873C}"/>
+                <a16:creationId xmlns:a16="http://schemas.microsoft.com/office/drawing/2014/main" id="{715B8F56-7AF4-4618-AE1E-3CF4FC27C02A}"/>
               </a:ext>
             </a:extLst>
           </p:cNvPr>
@@ -11877,7 +11877,7 @@
           <p:cNvPr id="6" name="">
             <a:extLst xmlns:a="http://schemas.openxmlformats.org/drawingml/2006/main">
               <a:ext uri="{FF2B5EF4-FFF2-40B4-BE49-F238E27FC236}">
-                <a16:creationId xmlns:a16="http://schemas.microsoft.com/office/drawing/2014/main" id="{A4D56344-B7C8-4698-AA69-D67857375E50}"/>
+                <a16:creationId xmlns:a16="http://schemas.microsoft.com/office/drawing/2014/main" id="{3C917423-FA0C-4598-AC14-006C45373901}"/>
               </a:ext>
             </a:extLst>
           </p:cNvPr>
@@ -11941,7 +11941,7 @@
           <p:cNvPr id="7" name="">
             <a:extLst xmlns:a="http://schemas.openxmlformats.org/drawingml/2006/main">
               <a:ext uri="{FF2B5EF4-FFF2-40B4-BE49-F238E27FC236}">
-                <a16:creationId xmlns:a16="http://schemas.microsoft.com/office/drawing/2014/main" id="{48CE30D9-F38A-4810-AB49-11AA57DC722F}"/>
+                <a16:creationId xmlns:a16="http://schemas.microsoft.com/office/drawing/2014/main" id="{C971C7D7-BB48-41DB-900D-CCFD1DBA1633}"/>
               </a:ext>
             </a:extLst>
           </p:cNvPr>
@@ -11976,7 +11976,7 @@
           <p:cNvPr id="8" name="">
             <a:extLst xmlns:a="http://schemas.openxmlformats.org/drawingml/2006/main">
               <a:ext uri="{FF2B5EF4-FFF2-40B4-BE49-F238E27FC236}">
-                <a16:creationId xmlns:a16="http://schemas.microsoft.com/office/drawing/2014/main" id="{C479EE51-A953-47E5-A4E1-78E464818A06}"/>
+                <a16:creationId xmlns:a16="http://schemas.microsoft.com/office/drawing/2014/main" id="{69D3E92F-9670-49FD-A309-CB813B88A213}"/>
               </a:ext>
             </a:extLst>
           </p:cNvPr>
@@ -12040,7 +12040,7 @@
           <p:cNvPr id="9" name="">
             <a:extLst xmlns:a="http://schemas.openxmlformats.org/drawingml/2006/main">
               <a:ext uri="{FF2B5EF4-FFF2-40B4-BE49-F238E27FC236}">
-                <a16:creationId xmlns:a16="http://schemas.microsoft.com/office/drawing/2014/main" id="{85EE7821-1F5E-46CE-B155-BB819CAF33B4}"/>
+                <a16:creationId xmlns:a16="http://schemas.microsoft.com/office/drawing/2014/main" id="{36386521-8324-422F-935C-438FA04C15DF}"/>
               </a:ext>
             </a:extLst>
           </p:cNvPr>
@@ -12104,7 +12104,7 @@
           <p:cNvPr id="10" name="">
             <a:extLst xmlns:a="http://schemas.openxmlformats.org/drawingml/2006/main">
               <a:ext uri="{FF2B5EF4-FFF2-40B4-BE49-F238E27FC236}">
-                <a16:creationId xmlns:a16="http://schemas.microsoft.com/office/drawing/2014/main" id="{5E36F2EC-502D-46CD-AC2A-136387CFD660}"/>
+                <a16:creationId xmlns:a16="http://schemas.microsoft.com/office/drawing/2014/main" id="{844EE5A1-39B6-4258-B8BC-9D3721ED19A3}"/>
               </a:ext>
             </a:extLst>
           </p:cNvPr>
@@ -12137,7 +12137,7 @@
           <p:cNvPr id="11" name="">
             <a:extLst xmlns:a="http://schemas.openxmlformats.org/drawingml/2006/main">
               <a:ext uri="{FF2B5EF4-FFF2-40B4-BE49-F238E27FC236}">
-                <a16:creationId xmlns:a16="http://schemas.microsoft.com/office/drawing/2014/main" id="{1ED35BC2-DAF7-40D9-8A2B-E7A9F807ACF2}"/>
+                <a16:creationId xmlns:a16="http://schemas.microsoft.com/office/drawing/2014/main" id="{8737B2B0-6C49-4B1E-B861-B082BD58F984}"/>
               </a:ext>
             </a:extLst>
           </p:cNvPr>
@@ -12172,7 +12172,7 @@
           <p:cNvPr id="12" name="">
             <a:extLst xmlns:a="http://schemas.openxmlformats.org/drawingml/2006/main">
               <a:ext uri="{FF2B5EF4-FFF2-40B4-BE49-F238E27FC236}">
-                <a16:creationId xmlns:a16="http://schemas.microsoft.com/office/drawing/2014/main" id="{A22A5C39-3DBD-475D-8E60-D99C3AD3C360}"/>
+                <a16:creationId xmlns:a16="http://schemas.microsoft.com/office/drawing/2014/main" id="{6CBF9014-D835-494F-B9C2-AC057DFC061A}"/>
               </a:ext>
             </a:extLst>
           </p:cNvPr>
@@ -12236,7 +12236,7 @@
           <p:cNvPr id="13" name="">
             <a:extLst xmlns:a="http://schemas.openxmlformats.org/drawingml/2006/main">
               <a:ext uri="{FF2B5EF4-FFF2-40B4-BE49-F238E27FC236}">
-                <a16:creationId xmlns:a16="http://schemas.microsoft.com/office/drawing/2014/main" id="{4A9F515C-1D8F-42E7-8B2A-D14805ABFB9B}"/>
+                <a16:creationId xmlns:a16="http://schemas.microsoft.com/office/drawing/2014/main" id="{074E6E0A-862B-423C-B22A-E2C285686304}"/>
               </a:ext>
             </a:extLst>
           </p:cNvPr>
@@ -12300,7 +12300,7 @@
           <p:cNvPr id="14" name="">
             <a:extLst xmlns:a="http://schemas.openxmlformats.org/drawingml/2006/main">
               <a:ext uri="{FF2B5EF4-FFF2-40B4-BE49-F238E27FC236}">
-                <a16:creationId xmlns:a16="http://schemas.microsoft.com/office/drawing/2014/main" id="{1D2BCBFA-4B62-4172-86BE-14EFE56CF447}"/>
+                <a16:creationId xmlns:a16="http://schemas.microsoft.com/office/drawing/2014/main" id="{D4768FCA-901B-48C4-B53A-F0E291C235FF}"/>
               </a:ext>
             </a:extLst>
           </p:cNvPr>
@@ -12333,7 +12333,7 @@
           <p:cNvPr id="15" name="">
             <a:extLst xmlns:a="http://schemas.openxmlformats.org/drawingml/2006/main">
               <a:ext uri="{FF2B5EF4-FFF2-40B4-BE49-F238E27FC236}">
-                <a16:creationId xmlns:a16="http://schemas.microsoft.com/office/drawing/2014/main" id="{848ADC4A-F666-42F9-A09D-EC24453735F3}"/>
+                <a16:creationId xmlns:a16="http://schemas.microsoft.com/office/drawing/2014/main" id="{39D25BDF-8E36-4318-9E78-0FF53D0F52B6}"/>
               </a:ext>
             </a:extLst>
           </p:cNvPr>
@@ -12368,7 +12368,7 @@
           <p:cNvPr id="16" name="">
             <a:extLst xmlns:a="http://schemas.openxmlformats.org/drawingml/2006/main">
               <a:ext uri="{FF2B5EF4-FFF2-40B4-BE49-F238E27FC236}">
-                <a16:creationId xmlns:a16="http://schemas.microsoft.com/office/drawing/2014/main" id="{EDC510D1-CDD2-4061-A767-974489793483}"/>
+                <a16:creationId xmlns:a16="http://schemas.microsoft.com/office/drawing/2014/main" id="{206E2542-51AA-4582-8A33-3D3C3DD7A725}"/>
               </a:ext>
             </a:extLst>
           </p:cNvPr>
@@ -12432,7 +12432,7 @@
           <p:cNvPr id="17" name="">
             <a:extLst xmlns:a="http://schemas.openxmlformats.org/drawingml/2006/main">
               <a:ext uri="{FF2B5EF4-FFF2-40B4-BE49-F238E27FC236}">
-                <a16:creationId xmlns:a16="http://schemas.microsoft.com/office/drawing/2014/main" id="{991751AA-79E8-4197-A394-8C1B407BF71C}"/>
+                <a16:creationId xmlns:a16="http://schemas.microsoft.com/office/drawing/2014/main" id="{FDD661B7-F207-4953-980A-F3F3A358600E}"/>
               </a:ext>
             </a:extLst>
           </p:cNvPr>
@@ -12496,7 +12496,7 @@
           <p:cNvPr id="18" name="">
             <a:extLst xmlns:a="http://schemas.openxmlformats.org/drawingml/2006/main">
               <a:ext uri="{FF2B5EF4-FFF2-40B4-BE49-F238E27FC236}">
-                <a16:creationId xmlns:a16="http://schemas.microsoft.com/office/drawing/2014/main" id="{EC94FF7B-B4B9-4184-BC0D-92E15F3AF392}"/>
+                <a16:creationId xmlns:a16="http://schemas.microsoft.com/office/drawing/2014/main" id="{E217133A-F8C1-4C5B-8082-20F1129AF8FF}"/>
               </a:ext>
             </a:extLst>
           </p:cNvPr>
@@ -12529,7 +12529,7 @@
           <p:cNvPr id="19" name="">
             <a:extLst xmlns:a="http://schemas.openxmlformats.org/drawingml/2006/main">
               <a:ext uri="{FF2B5EF4-FFF2-40B4-BE49-F238E27FC236}">
-                <a16:creationId xmlns:a16="http://schemas.microsoft.com/office/drawing/2014/main" id="{7EF16D22-F7C8-4DC5-B11D-A6CB6A096488}"/>
+                <a16:creationId xmlns:a16="http://schemas.microsoft.com/office/drawing/2014/main" id="{9769F091-581F-471F-AE8B-903FE7F988B2}"/>
               </a:ext>
             </a:extLst>
           </p:cNvPr>
@@ -12564,7 +12564,7 @@
           <p:cNvPr id="20" name="">
             <a:extLst xmlns:a="http://schemas.openxmlformats.org/drawingml/2006/main">
               <a:ext uri="{FF2B5EF4-FFF2-40B4-BE49-F238E27FC236}">
-                <a16:creationId xmlns:a16="http://schemas.microsoft.com/office/drawing/2014/main" id="{8E6B4C85-7E54-4CEC-BA29-F769F06FFCF8}"/>
+                <a16:creationId xmlns:a16="http://schemas.microsoft.com/office/drawing/2014/main" id="{72C67C64-BDF7-474E-8863-34F33FB0C4AE}"/>
               </a:ext>
             </a:extLst>
           </p:cNvPr>
@@ -12628,7 +12628,7 @@
           <p:cNvPr id="21" name="">
             <a:extLst xmlns:a="http://schemas.openxmlformats.org/drawingml/2006/main">
               <a:ext uri="{FF2B5EF4-FFF2-40B4-BE49-F238E27FC236}">
-                <a16:creationId xmlns:a16="http://schemas.microsoft.com/office/drawing/2014/main" id="{DA9D04E5-C7D2-40EB-855D-42D528681B00}"/>
+                <a16:creationId xmlns:a16="http://schemas.microsoft.com/office/drawing/2014/main" id="{90F8D647-1B9D-40DA-B902-B492BF78D8C8}"/>
               </a:ext>
             </a:extLst>
           </p:cNvPr>
@@ -12692,7 +12692,7 @@
           <p:cNvPr id="22" name="">
             <a:extLst xmlns:a="http://schemas.openxmlformats.org/drawingml/2006/main">
               <a:ext uri="{FF2B5EF4-FFF2-40B4-BE49-F238E27FC236}">
-                <a16:creationId xmlns:a16="http://schemas.microsoft.com/office/drawing/2014/main" id="{49FD2BED-B4DC-43C9-9789-6C575E1A75DD}"/>
+                <a16:creationId xmlns:a16="http://schemas.microsoft.com/office/drawing/2014/main" id="{EF87AB4E-9F9A-4220-9C56-3B8D8842EC8B}"/>
               </a:ext>
             </a:extLst>
           </p:cNvPr>
@@ -12756,7 +12756,7 @@
           <p:cNvPr id="23" name="">
             <a:extLst xmlns:a="http://schemas.openxmlformats.org/drawingml/2006/main">
               <a:ext uri="{FF2B5EF4-FFF2-40B4-BE49-F238E27FC236}">
-                <a16:creationId xmlns:a16="http://schemas.microsoft.com/office/drawing/2014/main" id="{0B623693-B264-465F-95F2-6A4058284E49}"/>
+                <a16:creationId xmlns:a16="http://schemas.microsoft.com/office/drawing/2014/main" id="{312BA286-8588-4664-8635-F0D4597EE48A}"/>
               </a:ext>
             </a:extLst>
           </p:cNvPr>
@@ -12820,7 +12820,7 @@
           <p:cNvPr id="24" name="">
             <a:extLst xmlns:a="http://schemas.openxmlformats.org/drawingml/2006/main">
               <a:ext uri="{FF2B5EF4-FFF2-40B4-BE49-F238E27FC236}">
-                <a16:creationId xmlns:a16="http://schemas.microsoft.com/office/drawing/2014/main" id="{BB49E315-0117-4777-9FBD-985C632E8F09}"/>
+                <a16:creationId xmlns:a16="http://schemas.microsoft.com/office/drawing/2014/main" id="{10758D8F-DA71-4402-9AA0-0CE354116143}"/>
               </a:ext>
             </a:extLst>
           </p:cNvPr>
@@ -12853,7 +12853,7 @@
           <p:cNvPr id="25" name="">
             <a:extLst xmlns:a="http://schemas.openxmlformats.org/drawingml/2006/main">
               <a:ext uri="{FF2B5EF4-FFF2-40B4-BE49-F238E27FC236}">
-                <a16:creationId xmlns:a16="http://schemas.microsoft.com/office/drawing/2014/main" id="{09054B3B-1B63-4B50-A416-85E6C6255269}"/>
+                <a16:creationId xmlns:a16="http://schemas.microsoft.com/office/drawing/2014/main" id="{8AEE91E7-EE28-4E93-A1EA-C3F5101934A4}"/>
               </a:ext>
             </a:extLst>
           </p:cNvPr>
@@ -12917,7 +12917,7 @@
           <p:cNvPr id="26" name="">
             <a:extLst xmlns:a="http://schemas.openxmlformats.org/drawingml/2006/main">
               <a:ext uri="{FF2B5EF4-FFF2-40B4-BE49-F238E27FC236}">
-                <a16:creationId xmlns:a16="http://schemas.microsoft.com/office/drawing/2014/main" id="{14593B99-6EC4-4C32-85FA-00B6B722C6EC}"/>
+                <a16:creationId xmlns:a16="http://schemas.microsoft.com/office/drawing/2014/main" id="{6E015783-89A1-4E83-9DE8-AE48A60A54AA}"/>
               </a:ext>
             </a:extLst>
           </p:cNvPr>
@@ -12979,7 +12979,7 @@
     </p:spTree>
     <p:extLst>
       <p:ext uri="{BB962C8B-B14F-4D97-AF65-F5344CB8AC3E}">
-        <p14:creationId xmlns:p14="http://schemas.microsoft.com/office/powerpoint/2010/main" val="698733599"/>
+        <p14:creationId xmlns:p14="http://schemas.microsoft.com/office/powerpoint/2010/main" val="1915069386"/>
       </p:ext>
     </p:extLst>
   </p:cSld>
@@ -13007,7 +13007,7 @@
           <p:nvPr/>
         </p:nvPicPr>
         <p:blipFill>
-          <a:blip xmlns:r="http://schemas.openxmlformats.org/officeDocument/2006/relationships" xmlns:a="http://schemas.openxmlformats.org/drawingml/2006/main" r:embed="Rdd428c62469d49c3"/>
+          <a:blip xmlns:r="http://schemas.openxmlformats.org/officeDocument/2006/relationships" xmlns:a="http://schemas.openxmlformats.org/drawingml/2006/main" r:embed="Rfb8bee0fb0c34d71"/>
           <a:srcRect xmlns:a="http://schemas.openxmlformats.org/drawingml/2006/main" l="0" t="27" r="0" b="27"/>
           <a:stretch xmlns:a="http://schemas.openxmlformats.org/drawingml/2006/main">
             <a:fillRect l="0" t="0" r="0" b="0"/>
@@ -13028,7 +13028,7 @@
           <p:cNvPr id="2" name="">
             <a:extLst xmlns:a="http://schemas.openxmlformats.org/drawingml/2006/main">
               <a:ext uri="{FF2B5EF4-FFF2-40B4-BE49-F238E27FC236}">
-                <a16:creationId xmlns:a16="http://schemas.microsoft.com/office/drawing/2014/main" id="{E2D307E5-3C8A-4044-AF98-B55EEE38509A}"/>
+                <a16:creationId xmlns:a16="http://schemas.microsoft.com/office/drawing/2014/main" id="{CE645B36-724E-4C4B-A7B5-56D3A0DEFC1A}"/>
               </a:ext>
             </a:extLst>
           </p:cNvPr>
@@ -13065,7 +13065,7 @@
           <p:cNvPr id="3" name="">
             <a:extLst xmlns:a="http://schemas.openxmlformats.org/drawingml/2006/main">
               <a:ext uri="{FF2B5EF4-FFF2-40B4-BE49-F238E27FC236}">
-                <a16:creationId xmlns:a16="http://schemas.microsoft.com/office/drawing/2014/main" id="{9672742E-AB78-44C6-BB8A-50265E527AE2}"/>
+                <a16:creationId xmlns:a16="http://schemas.microsoft.com/office/drawing/2014/main" id="{6D795C58-DC5F-4A8F-8499-D5D9429F122F}"/>
               </a:ext>
             </a:extLst>
           </p:cNvPr>
@@ -13102,7 +13102,7 @@
           <p:cNvPr id="4" name="">
             <a:extLst xmlns:a="http://schemas.openxmlformats.org/drawingml/2006/main">
               <a:ext uri="{FF2B5EF4-FFF2-40B4-BE49-F238E27FC236}">
-                <a16:creationId xmlns:a16="http://schemas.microsoft.com/office/drawing/2014/main" id="{6725EA54-E328-4C6A-81C8-FB5F3C6F38B2}"/>
+                <a16:creationId xmlns:a16="http://schemas.microsoft.com/office/drawing/2014/main" id="{F02722CF-08F8-4118-887C-59EBD52358EA}"/>
               </a:ext>
             </a:extLst>
           </p:cNvPr>
@@ -13166,7 +13166,7 @@
           <p:cNvPr id="5" name="">
             <a:extLst xmlns:a="http://schemas.openxmlformats.org/drawingml/2006/main">
               <a:ext uri="{FF2B5EF4-FFF2-40B4-BE49-F238E27FC236}">
-                <a16:creationId xmlns:a16="http://schemas.microsoft.com/office/drawing/2014/main" id="{19CB9BA8-597C-409C-BB0E-D774DF2CCFDA}"/>
+                <a16:creationId xmlns:a16="http://schemas.microsoft.com/office/drawing/2014/main" id="{DD507589-0053-4E13-A46F-BEA7707F3429}"/>
               </a:ext>
             </a:extLst>
           </p:cNvPr>
@@ -13230,7 +13230,7 @@
           <p:cNvPr id="6" name="">
             <a:extLst xmlns:a="http://schemas.openxmlformats.org/drawingml/2006/main">
               <a:ext uri="{FF2B5EF4-FFF2-40B4-BE49-F238E27FC236}">
-                <a16:creationId xmlns:a16="http://schemas.microsoft.com/office/drawing/2014/main" id="{0809AEF6-4E2B-44F1-8D60-8548F4DAEDD3}"/>
+                <a16:creationId xmlns:a16="http://schemas.microsoft.com/office/drawing/2014/main" id="{C51BEB9B-4C13-44D5-AD3E-C8F23E4732D1}"/>
               </a:ext>
             </a:extLst>
           </p:cNvPr>
@@ -13294,19 +13294,19 @@
           <p:cNvPr id="7" name="">
             <a:extLst xmlns:a="http://schemas.openxmlformats.org/drawingml/2006/main">
               <a:ext uri="{FF2B5EF4-FFF2-40B4-BE49-F238E27FC236}">
-                <a16:creationId xmlns:a16="http://schemas.microsoft.com/office/drawing/2014/main" id="{A8DD08F8-A131-431C-9D17-FFBDD2C8DDD1}"/>
-              </a:ext>
-            </a:extLst>
-          </p:cNvPr>
-          <p:cNvSpPr>
-            <a:spLocks xmlns:a="http://schemas.openxmlformats.org/drawingml/2006/main" noGrp="1"/>
-          </p:cNvSpPr>
-          <p:nvPr/>
-        </p:nvSpPr>
-        <p:spPr>
-          <a:xfrm xmlns:a="http://schemas.openxmlformats.org/drawingml/2006/main">
-            <a:off x="4705350" y="3505200"/>
-            <a:ext cx="2247900" cy="990600"/>
+                <a16:creationId xmlns:a16="http://schemas.microsoft.com/office/drawing/2014/main" id="{8300D06C-8C35-43B8-ABB1-BA5FBC663441}"/>
+              </a:ext>
+            </a:extLst>
+          </p:cNvPr>
+          <p:cNvSpPr>
+            <a:spLocks xmlns:a="http://schemas.openxmlformats.org/drawingml/2006/main" noGrp="1"/>
+          </p:cNvSpPr>
+          <p:nvPr/>
+        </p:nvSpPr>
+        <p:spPr>
+          <a:xfrm xmlns:a="http://schemas.openxmlformats.org/drawingml/2006/main">
+            <a:off x="4514850" y="3371850"/>
+            <a:ext cx="3143250" cy="876300"/>
           </a:xfrm>
           <a:prstGeom xmlns:a="http://schemas.openxmlformats.org/drawingml/2006/main" prst="rect">
             <a:avLst/>
@@ -13316,7 +13316,7 @@
               <a:alpha val="93333"/>
             </a:srgbClr>
           </a:solidFill>
-          <a:ln xmlns:a="http://schemas.openxmlformats.org/drawingml/2006/main" w="9525">
+          <a:ln xmlns:a="http://schemas.openxmlformats.org/drawingml/2006/main" w="19050">
             <a:solidFill>
               <a:srgbClr val="55E6FF"/>
             </a:solidFill>
@@ -13329,19 +13329,19 @@
           <p:cNvPr id="8" name="">
             <a:extLst xmlns:a="http://schemas.openxmlformats.org/drawingml/2006/main">
               <a:ext uri="{FF2B5EF4-FFF2-40B4-BE49-F238E27FC236}">
-                <a16:creationId xmlns:a16="http://schemas.microsoft.com/office/drawing/2014/main" id="{8C113182-D875-4E80-8C71-BB537CDAF6EB}"/>
-              </a:ext>
-            </a:extLst>
-          </p:cNvPr>
-          <p:cNvSpPr>
-            <a:spLocks xmlns:a="http://schemas.openxmlformats.org/drawingml/2006/main" noGrp="1"/>
-          </p:cNvSpPr>
-          <p:nvPr/>
-        </p:nvSpPr>
-        <p:spPr>
-          <a:xfrm xmlns:a="http://schemas.openxmlformats.org/drawingml/2006/main">
-            <a:off x="4991100" y="3676650"/>
-            <a:ext cx="1676400" cy="647700"/>
+                <a16:creationId xmlns:a16="http://schemas.microsoft.com/office/drawing/2014/main" id="{11F61D3D-8340-439F-B432-BEB32C8E57F6}"/>
+              </a:ext>
+            </a:extLst>
+          </p:cNvPr>
+          <p:cNvSpPr>
+            <a:spLocks xmlns:a="http://schemas.openxmlformats.org/drawingml/2006/main" noGrp="1"/>
+          </p:cNvSpPr>
+          <p:nvPr/>
+        </p:nvSpPr>
+        <p:spPr>
+          <a:xfrm xmlns:a="http://schemas.openxmlformats.org/drawingml/2006/main">
+            <a:off x="4953000" y="3581400"/>
+            <a:ext cx="2266950" cy="514350"/>
           </a:xfrm>
           <a:prstGeom xmlns:a="http://schemas.openxmlformats.org/drawingml/2006/main" prst="rect">
             <a:avLst/>
@@ -13365,7 +13365,7 @@
           <a:lstStyle xmlns:a="http://schemas.openxmlformats.org/drawingml/2006/main"/>
           <a:p xmlns:a="http://schemas.openxmlformats.org/drawingml/2006/main">
             <a:pPr algn="ctr">
-              <a:defRPr sz="1650" b="1">
+              <a:defRPr sz="1800" b="1">
                 <a:solidFill>
                   <a:srgbClr val="EAF8FF"/>
                 </a:solidFill>
@@ -13375,7 +13375,7 @@
               </a:defRPr>
             </a:pPr>
             <a:r>
-              <a:rPr sz="1650" b="1">
+              <a:rPr sz="1800" b="1">
                 <a:solidFill>
                   <a:srgbClr val="EAF8FF"/>
                 </a:solidFill>
@@ -13388,7 +13388,7 @@
           </a:p>
           <a:p xmlns:a="http://schemas.openxmlformats.org/drawingml/2006/main">
             <a:pPr algn="ctr">
-              <a:defRPr sz="1650" b="1">
+              <a:defRPr sz="1800" b="1">
                 <a:solidFill>
                   <a:srgbClr val="EAF8FF"/>
                 </a:solidFill>
@@ -13398,7 +13398,7 @@
               </a:defRPr>
             </a:pPr>
             <a:r>
-              <a:rPr sz="1650" b="1">
+              <a:rPr sz="1800" b="1">
                 <a:solidFill>
                   <a:srgbClr val="EAF8FF"/>
                 </a:solidFill>
@@ -13416,19 +13416,83 @@
           <p:cNvPr id="9" name="">
             <a:extLst xmlns:a="http://schemas.openxmlformats.org/drawingml/2006/main">
               <a:ext uri="{FF2B5EF4-FFF2-40B4-BE49-F238E27FC236}">
-                <a16:creationId xmlns:a16="http://schemas.microsoft.com/office/drawing/2014/main" id="{19536BB0-670E-4A31-AE29-A7DC610A2074}"/>
-              </a:ext>
-            </a:extLst>
-          </p:cNvPr>
-          <p:cNvSpPr>
-            <a:spLocks xmlns:a="http://schemas.openxmlformats.org/drawingml/2006/main" noGrp="1"/>
-          </p:cNvSpPr>
-          <p:nvPr/>
-        </p:nvSpPr>
-        <p:spPr>
-          <a:xfrm xmlns:a="http://schemas.openxmlformats.org/drawingml/2006/main">
-            <a:off x="4781550" y="2133600"/>
-            <a:ext cx="2095500" cy="647700"/>
+                <a16:creationId xmlns:a16="http://schemas.microsoft.com/office/drawing/2014/main" id="{80209EB8-9440-4D41-982A-8286FF0ABBA1}"/>
+              </a:ext>
+            </a:extLst>
+          </p:cNvPr>
+          <p:cNvSpPr>
+            <a:spLocks xmlns:a="http://schemas.openxmlformats.org/drawingml/2006/main" noGrp="1"/>
+          </p:cNvSpPr>
+          <p:nvPr/>
+        </p:nvSpPr>
+        <p:spPr>
+          <a:xfrm xmlns:a="http://schemas.openxmlformats.org/drawingml/2006/main">
+            <a:off x="4171950" y="4457700"/>
+            <a:ext cx="3848100" cy="228600"/>
+          </a:xfrm>
+          <a:prstGeom xmlns:a="http://schemas.openxmlformats.org/drawingml/2006/main" prst="rect">
+            <a:avLst/>
+          </a:prstGeom>
+          <a:solidFill xmlns:a="http://schemas.openxmlformats.org/drawingml/2006/main">
+            <a:srgbClr val="000000">
+              <a:alpha val="0"/>
+            </a:srgbClr>
+          </a:solidFill>
+          <a:ln xmlns:a="http://schemas.openxmlformats.org/drawingml/2006/main" w="0">
+            <a:solidFill>
+              <a:srgbClr val="000000">
+                <a:alpha val="0"/>
+              </a:srgbClr>
+            </a:solidFill>
+            <a:prstDash val="solid"/>
+          </a:ln>
+        </p:spPr>
+        <p:txBody>
+          <a:bodyPr xmlns:a="http://schemas.openxmlformats.org/drawingml/2006/main" lIns="0" tIns="0" rIns="0" bIns="0" anchor="t"/>
+          <a:lstStyle xmlns:a="http://schemas.openxmlformats.org/drawingml/2006/main"/>
+          <a:p xmlns:a="http://schemas.openxmlformats.org/drawingml/2006/main">
+            <a:pPr algn="ctr">
+              <a:defRPr sz="1125" b="1">
+                <a:solidFill>
+                  <a:srgbClr val="55E6FF"/>
+                </a:solidFill>
+                <a:latin typeface="Aptos"/>
+                <a:ea typeface="Aptos"/>
+                <a:cs typeface="Aptos"/>
+              </a:defRPr>
+            </a:pPr>
+            <a:r>
+              <a:rPr sz="1125" b="1">
+                <a:solidFill>
+                  <a:srgbClr val="55E6FF"/>
+                </a:solidFill>
+                <a:latin typeface="Aptos"/>
+                <a:ea typeface="Aptos"/>
+                <a:cs typeface="Aptos"/>
+              </a:rPr>
+              <a:t>Shared IP, data and reusable playbooks</a:t>
+            </a:r>
+          </a:p>
+        </p:txBody>
+      </p:sp>
+      <p:sp>
+        <p:nvSpPr>
+          <p:cNvPr id="10" name="">
+            <a:extLst xmlns:a="http://schemas.openxmlformats.org/drawingml/2006/main">
+              <a:ext uri="{FF2B5EF4-FFF2-40B4-BE49-F238E27FC236}">
+                <a16:creationId xmlns:a16="http://schemas.microsoft.com/office/drawing/2014/main" id="{FCEDDDB9-DD5E-4159-85CF-6BEF1EFBDE53}"/>
+              </a:ext>
+            </a:extLst>
+          </p:cNvPr>
+          <p:cNvSpPr>
+            <a:spLocks xmlns:a="http://schemas.openxmlformats.org/drawingml/2006/main" noGrp="1"/>
+          </p:cNvSpPr>
+          <p:nvPr/>
+        </p:nvSpPr>
+        <p:spPr>
+          <a:xfrm xmlns:a="http://schemas.openxmlformats.org/drawingml/2006/main">
+            <a:off x="723900" y="5143500"/>
+            <a:ext cx="2038350" cy="723900"/>
           </a:xfrm>
           <a:prstGeom xmlns:a="http://schemas.openxmlformats.org/drawingml/2006/main" prst="rect">
             <a:avLst/>
@@ -13448,22 +13512,22 @@
       </p:sp>
       <p:sp>
         <p:nvSpPr>
-          <p:cNvPr id="10" name="">
-            <a:extLst xmlns:a="http://schemas.openxmlformats.org/drawingml/2006/main">
-              <a:ext uri="{FF2B5EF4-FFF2-40B4-BE49-F238E27FC236}">
-                <a16:creationId xmlns:a16="http://schemas.microsoft.com/office/drawing/2014/main" id="{DBA248C8-E297-4AFF-AD60-26E03E9C30E8}"/>
-              </a:ext>
-            </a:extLst>
-          </p:cNvPr>
-          <p:cNvSpPr>
-            <a:spLocks xmlns:a="http://schemas.openxmlformats.org/drawingml/2006/main" noGrp="1"/>
-          </p:cNvSpPr>
-          <p:nvPr/>
-        </p:nvSpPr>
-        <p:spPr>
-          <a:xfrm xmlns:a="http://schemas.openxmlformats.org/drawingml/2006/main">
-            <a:off x="4953000" y="2305050"/>
-            <a:ext cx="1752600" cy="247650"/>
+          <p:cNvPr id="11" name="">
+            <a:extLst xmlns:a="http://schemas.openxmlformats.org/drawingml/2006/main">
+              <a:ext uri="{FF2B5EF4-FFF2-40B4-BE49-F238E27FC236}">
+                <a16:creationId xmlns:a16="http://schemas.microsoft.com/office/drawing/2014/main" id="{46E900CE-5AF5-4F54-A202-D75F6FF0E9B8}"/>
+              </a:ext>
+            </a:extLst>
+          </p:cNvPr>
+          <p:cNvSpPr>
+            <a:spLocks xmlns:a="http://schemas.openxmlformats.org/drawingml/2006/main" noGrp="1"/>
+          </p:cNvSpPr>
+          <p:nvPr/>
+        </p:nvSpPr>
+        <p:spPr>
+          <a:xfrm xmlns:a="http://schemas.openxmlformats.org/drawingml/2006/main">
+            <a:off x="857250" y="5353050"/>
+            <a:ext cx="1771650" cy="266700"/>
           </a:xfrm>
           <a:prstGeom xmlns:a="http://schemas.openxmlformats.org/drawingml/2006/main" prst="rect">
             <a:avLst/>
@@ -13512,22 +13576,22 @@
       </p:sp>
       <p:sp>
         <p:nvSpPr>
-          <p:cNvPr id="11" name="">
-            <a:extLst xmlns:a="http://schemas.openxmlformats.org/drawingml/2006/main">
-              <a:ext uri="{FF2B5EF4-FFF2-40B4-BE49-F238E27FC236}">
-                <a16:creationId xmlns:a16="http://schemas.microsoft.com/office/drawing/2014/main" id="{F77D58D6-7DEA-4B81-B652-E813C9B22616}"/>
-              </a:ext>
-            </a:extLst>
-          </p:cNvPr>
-          <p:cNvSpPr>
-            <a:spLocks xmlns:a="http://schemas.openxmlformats.org/drawingml/2006/main" noGrp="1"/>
-          </p:cNvSpPr>
-          <p:nvPr/>
-        </p:nvSpPr>
-        <p:spPr>
-          <a:xfrm xmlns:a="http://schemas.openxmlformats.org/drawingml/2006/main">
-            <a:off x="5829300" y="2457450"/>
-            <a:ext cx="19050" cy="19050"/>
+          <p:cNvPr id="12" name="">
+            <a:extLst xmlns:a="http://schemas.openxmlformats.org/drawingml/2006/main">
+              <a:ext uri="{FF2B5EF4-FFF2-40B4-BE49-F238E27FC236}">
+                <a16:creationId xmlns:a16="http://schemas.microsoft.com/office/drawing/2014/main" id="{B85EEB06-26A1-49FA-8B93-01B6ABBC911D}"/>
+              </a:ext>
+            </a:extLst>
+          </p:cNvPr>
+          <p:cNvSpPr>
+            <a:spLocks xmlns:a="http://schemas.openxmlformats.org/drawingml/2006/main" noGrp="1"/>
+          </p:cNvSpPr>
+          <p:nvPr/>
+        </p:nvSpPr>
+        <p:spPr>
+          <a:xfrm xmlns:a="http://schemas.openxmlformats.org/drawingml/2006/main">
+            <a:off x="1733550" y="4762500"/>
+            <a:ext cx="19050" cy="381000"/>
           </a:xfrm>
           <a:prstGeom xmlns:a="http://schemas.openxmlformats.org/drawingml/2006/main" prst="rect">
             <a:avLst/>
@@ -13545,22 +13609,22 @@
       </p:sp>
       <p:sp>
         <p:nvSpPr>
-          <p:cNvPr id="12" name="">
-            <a:extLst xmlns:a="http://schemas.openxmlformats.org/drawingml/2006/main">
-              <a:ext uri="{FF2B5EF4-FFF2-40B4-BE49-F238E27FC236}">
-                <a16:creationId xmlns:a16="http://schemas.microsoft.com/office/drawing/2014/main" id="{A9F483DE-82DB-4CDB-BDF1-D48605D5038D}"/>
-              </a:ext>
-            </a:extLst>
-          </p:cNvPr>
-          <p:cNvSpPr>
-            <a:spLocks xmlns:a="http://schemas.openxmlformats.org/drawingml/2006/main" noGrp="1"/>
-          </p:cNvSpPr>
-          <p:nvPr/>
-        </p:nvSpPr>
-        <p:spPr>
-          <a:xfrm xmlns:a="http://schemas.openxmlformats.org/drawingml/2006/main">
-            <a:off x="7879664" y="3199821"/>
-            <a:ext cx="2095500" cy="647700"/>
+          <p:cNvPr id="13" name="">
+            <a:extLst xmlns:a="http://schemas.openxmlformats.org/drawingml/2006/main">
+              <a:ext uri="{FF2B5EF4-FFF2-40B4-BE49-F238E27FC236}">
+                <a16:creationId xmlns:a16="http://schemas.microsoft.com/office/drawing/2014/main" id="{B5BBFFFC-EC2A-474F-94C8-79D4A2323510}"/>
+              </a:ext>
+            </a:extLst>
+          </p:cNvPr>
+          <p:cNvSpPr>
+            <a:spLocks xmlns:a="http://schemas.openxmlformats.org/drawingml/2006/main" noGrp="1"/>
+          </p:cNvSpPr>
+          <p:nvPr/>
+        </p:nvSpPr>
+        <p:spPr>
+          <a:xfrm xmlns:a="http://schemas.openxmlformats.org/drawingml/2006/main">
+            <a:off x="2895600" y="5143500"/>
+            <a:ext cx="2038350" cy="723900"/>
           </a:xfrm>
           <a:prstGeom xmlns:a="http://schemas.openxmlformats.org/drawingml/2006/main" prst="rect">
             <a:avLst/>
@@ -13580,22 +13644,154 @@
       </p:sp>
       <p:sp>
         <p:nvSpPr>
-          <p:cNvPr id="13" name="">
-            <a:extLst xmlns:a="http://schemas.openxmlformats.org/drawingml/2006/main">
-              <a:ext uri="{FF2B5EF4-FFF2-40B4-BE49-F238E27FC236}">
-                <a16:creationId xmlns:a16="http://schemas.microsoft.com/office/drawing/2014/main" id="{787CDDBF-E5DB-463E-8C09-1E85A7A75B3F}"/>
-              </a:ext>
-            </a:extLst>
-          </p:cNvPr>
-          <p:cNvSpPr>
-            <a:spLocks xmlns:a="http://schemas.openxmlformats.org/drawingml/2006/main" noGrp="1"/>
-          </p:cNvSpPr>
-          <p:nvPr/>
-        </p:nvSpPr>
-        <p:spPr>
-          <a:xfrm xmlns:a="http://schemas.openxmlformats.org/drawingml/2006/main">
-            <a:off x="8051114" y="3371271"/>
-            <a:ext cx="1752600" cy="247650"/>
+          <p:cNvPr id="14" name="">
+            <a:extLst xmlns:a="http://schemas.openxmlformats.org/drawingml/2006/main">
+              <a:ext uri="{FF2B5EF4-FFF2-40B4-BE49-F238E27FC236}">
+                <a16:creationId xmlns:a16="http://schemas.microsoft.com/office/drawing/2014/main" id="{61301CA2-6070-48A2-9622-7BFC3EC5BE48}"/>
+              </a:ext>
+            </a:extLst>
+          </p:cNvPr>
+          <p:cNvSpPr>
+            <a:spLocks xmlns:a="http://schemas.openxmlformats.org/drawingml/2006/main" noGrp="1"/>
+          </p:cNvSpPr>
+          <p:nvPr/>
+        </p:nvSpPr>
+        <p:spPr>
+          <a:xfrm xmlns:a="http://schemas.openxmlformats.org/drawingml/2006/main">
+            <a:off x="3028950" y="5353050"/>
+            <a:ext cx="1771650" cy="266700"/>
+          </a:xfrm>
+          <a:prstGeom xmlns:a="http://schemas.openxmlformats.org/drawingml/2006/main" prst="rect">
+            <a:avLst/>
+          </a:prstGeom>
+          <a:solidFill xmlns:a="http://schemas.openxmlformats.org/drawingml/2006/main">
+            <a:srgbClr val="000000">
+              <a:alpha val="0"/>
+            </a:srgbClr>
+          </a:solidFill>
+          <a:ln xmlns:a="http://schemas.openxmlformats.org/drawingml/2006/main" w="0">
+            <a:solidFill>
+              <a:srgbClr val="000000">
+                <a:alpha val="0"/>
+              </a:srgbClr>
+            </a:solidFill>
+            <a:prstDash val="solid"/>
+          </a:ln>
+        </p:spPr>
+        <p:txBody>
+          <a:bodyPr xmlns:a="http://schemas.openxmlformats.org/drawingml/2006/main" lIns="0" tIns="0" rIns="0" bIns="0" anchor="t"/>
+          <a:lstStyle xmlns:a="http://schemas.openxmlformats.org/drawingml/2006/main"/>
+          <a:p xmlns:a="http://schemas.openxmlformats.org/drawingml/2006/main">
+            <a:pPr algn="ctr">
+              <a:defRPr sz="1125" b="1">
+                <a:solidFill>
+                  <a:srgbClr val="EAF8FF"/>
+                </a:solidFill>
+                <a:latin typeface="Aptos"/>
+                <a:ea typeface="Aptos"/>
+                <a:cs typeface="Aptos"/>
+              </a:defRPr>
+            </a:pPr>
+            <a:r>
+              <a:rPr sz="1125" b="1">
+                <a:solidFill>
+                  <a:srgbClr val="EAF8FF"/>
+                </a:solidFill>
+                <a:latin typeface="Aptos"/>
+                <a:ea typeface="Aptos"/>
+                <a:cs typeface="Aptos"/>
+              </a:rPr>
+              <a:t>Inteligencia artificial</a:t>
+            </a:r>
+          </a:p>
+        </p:txBody>
+      </p:sp>
+      <p:sp>
+        <p:nvSpPr>
+          <p:cNvPr id="15" name="">
+            <a:extLst xmlns:a="http://schemas.openxmlformats.org/drawingml/2006/main">
+              <a:ext uri="{FF2B5EF4-FFF2-40B4-BE49-F238E27FC236}">
+                <a16:creationId xmlns:a16="http://schemas.microsoft.com/office/drawing/2014/main" id="{41E98AD7-3BEE-4A1A-887B-189C84732DF7}"/>
+              </a:ext>
+            </a:extLst>
+          </p:cNvPr>
+          <p:cNvSpPr>
+            <a:spLocks xmlns:a="http://schemas.openxmlformats.org/drawingml/2006/main" noGrp="1"/>
+          </p:cNvSpPr>
+          <p:nvPr/>
+        </p:nvSpPr>
+        <p:spPr>
+          <a:xfrm xmlns:a="http://schemas.openxmlformats.org/drawingml/2006/main">
+            <a:off x="3905250" y="4762500"/>
+            <a:ext cx="19050" cy="381000"/>
+          </a:xfrm>
+          <a:prstGeom xmlns:a="http://schemas.openxmlformats.org/drawingml/2006/main" prst="rect">
+            <a:avLst/>
+          </a:prstGeom>
+          <a:solidFill xmlns:a="http://schemas.openxmlformats.org/drawingml/2006/main">
+            <a:srgbClr val="285563"/>
+          </a:solidFill>
+          <a:ln xmlns:a="http://schemas.openxmlformats.org/drawingml/2006/main" w="0">
+            <a:solidFill>
+              <a:srgbClr val="285563"/>
+            </a:solidFill>
+            <a:prstDash val="solid"/>
+          </a:ln>
+        </p:spPr>
+      </p:sp>
+      <p:sp>
+        <p:nvSpPr>
+          <p:cNvPr id="16" name="">
+            <a:extLst xmlns:a="http://schemas.openxmlformats.org/drawingml/2006/main">
+              <a:ext uri="{FF2B5EF4-FFF2-40B4-BE49-F238E27FC236}">
+                <a16:creationId xmlns:a16="http://schemas.microsoft.com/office/drawing/2014/main" id="{A18CCAD6-0069-4BBE-9132-E2F10AB0E451}"/>
+              </a:ext>
+            </a:extLst>
+          </p:cNvPr>
+          <p:cNvSpPr>
+            <a:spLocks xmlns:a="http://schemas.openxmlformats.org/drawingml/2006/main" noGrp="1"/>
+          </p:cNvSpPr>
+          <p:nvPr/>
+        </p:nvSpPr>
+        <p:spPr>
+          <a:xfrm xmlns:a="http://schemas.openxmlformats.org/drawingml/2006/main">
+            <a:off x="5067300" y="5143500"/>
+            <a:ext cx="2038350" cy="723900"/>
+          </a:xfrm>
+          <a:prstGeom xmlns:a="http://schemas.openxmlformats.org/drawingml/2006/main" prst="rect">
+            <a:avLst/>
+          </a:prstGeom>
+          <a:solidFill xmlns:a="http://schemas.openxmlformats.org/drawingml/2006/main">
+            <a:srgbClr val="081A23">
+              <a:alpha val="86667"/>
+            </a:srgbClr>
+          </a:solidFill>
+          <a:ln xmlns:a="http://schemas.openxmlformats.org/drawingml/2006/main" w="9525">
+            <a:solidFill>
+              <a:srgbClr val="25505B"/>
+            </a:solidFill>
+            <a:prstDash val="solid"/>
+          </a:ln>
+        </p:spPr>
+      </p:sp>
+      <p:sp>
+        <p:nvSpPr>
+          <p:cNvPr id="17" name="">
+            <a:extLst xmlns:a="http://schemas.openxmlformats.org/drawingml/2006/main">
+              <a:ext uri="{FF2B5EF4-FFF2-40B4-BE49-F238E27FC236}">
+                <a16:creationId xmlns:a16="http://schemas.microsoft.com/office/drawing/2014/main" id="{864E7D60-3119-4C10-9AB7-D040EC7DD04B}"/>
+              </a:ext>
+            </a:extLst>
+          </p:cNvPr>
+          <p:cNvSpPr>
+            <a:spLocks xmlns:a="http://schemas.openxmlformats.org/drawingml/2006/main" noGrp="1"/>
+          </p:cNvSpPr>
+          <p:nvPr/>
+        </p:nvSpPr>
+        <p:spPr>
+          <a:xfrm xmlns:a="http://schemas.openxmlformats.org/drawingml/2006/main">
+            <a:off x="5200650" y="5353050"/>
+            <a:ext cx="1771650" cy="266700"/>
           </a:xfrm>
           <a:prstGeom xmlns:a="http://schemas.openxmlformats.org/drawingml/2006/main" prst="rect">
             <a:avLst/>
@@ -13637,29 +13833,29 @@
                 <a:ea typeface="Aptos"/>
                 <a:cs typeface="Aptos"/>
               </a:rPr>
-              <a:t>Inteligencia artificial</a:t>
+              <a:t>Videojuegos</a:t>
             </a:r>
           </a:p>
         </p:txBody>
       </p:sp>
       <p:sp>
         <p:nvSpPr>
-          <p:cNvPr id="14" name="">
-            <a:extLst xmlns:a="http://schemas.openxmlformats.org/drawingml/2006/main">
-              <a:ext uri="{FF2B5EF4-FFF2-40B4-BE49-F238E27FC236}">
-                <a16:creationId xmlns:a16="http://schemas.microsoft.com/office/drawing/2014/main" id="{B30B4EAE-1B93-4B56-9096-7B651D43A77F}"/>
-              </a:ext>
-            </a:extLst>
-          </p:cNvPr>
-          <p:cNvSpPr>
-            <a:spLocks xmlns:a="http://schemas.openxmlformats.org/drawingml/2006/main" noGrp="1"/>
-          </p:cNvSpPr>
-          <p:nvPr/>
-        </p:nvSpPr>
-        <p:spPr>
-          <a:xfrm xmlns:a="http://schemas.openxmlformats.org/drawingml/2006/main">
-            <a:off x="5829300" y="3523671"/>
-            <a:ext cx="3098114" cy="19050"/>
+          <p:cNvPr id="18" name="">
+            <a:extLst xmlns:a="http://schemas.openxmlformats.org/drawingml/2006/main">
+              <a:ext uri="{FF2B5EF4-FFF2-40B4-BE49-F238E27FC236}">
+                <a16:creationId xmlns:a16="http://schemas.microsoft.com/office/drawing/2014/main" id="{35F3FAF6-19BF-4693-8596-7AB4382B1CF0}"/>
+              </a:ext>
+            </a:extLst>
+          </p:cNvPr>
+          <p:cNvSpPr>
+            <a:spLocks xmlns:a="http://schemas.openxmlformats.org/drawingml/2006/main" noGrp="1"/>
+          </p:cNvSpPr>
+          <p:nvPr/>
+        </p:nvSpPr>
+        <p:spPr>
+          <a:xfrm xmlns:a="http://schemas.openxmlformats.org/drawingml/2006/main">
+            <a:off x="6076950" y="4762500"/>
+            <a:ext cx="19050" cy="381000"/>
           </a:xfrm>
           <a:prstGeom xmlns:a="http://schemas.openxmlformats.org/drawingml/2006/main" prst="rect">
             <a:avLst/>
@@ -13677,22 +13873,22 @@
       </p:sp>
       <p:sp>
         <p:nvSpPr>
-          <p:cNvPr id="15" name="">
-            <a:extLst xmlns:a="http://schemas.openxmlformats.org/drawingml/2006/main">
-              <a:ext uri="{FF2B5EF4-FFF2-40B4-BE49-F238E27FC236}">
-                <a16:creationId xmlns:a16="http://schemas.microsoft.com/office/drawing/2014/main" id="{201E9037-BBE4-411B-B187-5995E29604BF}"/>
-              </a:ext>
-            </a:extLst>
-          </p:cNvPr>
-          <p:cNvSpPr>
-            <a:spLocks xmlns:a="http://schemas.openxmlformats.org/drawingml/2006/main" noGrp="1"/>
-          </p:cNvSpPr>
-          <p:nvPr/>
-        </p:nvSpPr>
-        <p:spPr>
-          <a:xfrm xmlns:a="http://schemas.openxmlformats.org/drawingml/2006/main">
-            <a:off x="6696290" y="4925004"/>
-            <a:ext cx="2095500" cy="647700"/>
+          <p:cNvPr id="19" name="">
+            <a:extLst xmlns:a="http://schemas.openxmlformats.org/drawingml/2006/main">
+              <a:ext uri="{FF2B5EF4-FFF2-40B4-BE49-F238E27FC236}">
+                <a16:creationId xmlns:a16="http://schemas.microsoft.com/office/drawing/2014/main" id="{2772CD0D-429C-4AB1-9AFF-9BE0A48DA110}"/>
+              </a:ext>
+            </a:extLst>
+          </p:cNvPr>
+          <p:cNvSpPr>
+            <a:spLocks xmlns:a="http://schemas.openxmlformats.org/drawingml/2006/main" noGrp="1"/>
+          </p:cNvSpPr>
+          <p:nvPr/>
+        </p:nvSpPr>
+        <p:spPr>
+          <a:xfrm xmlns:a="http://schemas.openxmlformats.org/drawingml/2006/main">
+            <a:off x="7239000" y="5143500"/>
+            <a:ext cx="2038350" cy="723900"/>
           </a:xfrm>
           <a:prstGeom xmlns:a="http://schemas.openxmlformats.org/drawingml/2006/main" prst="rect">
             <a:avLst/>
@@ -13712,22 +13908,22 @@
       </p:sp>
       <p:sp>
         <p:nvSpPr>
-          <p:cNvPr id="16" name="">
-            <a:extLst xmlns:a="http://schemas.openxmlformats.org/drawingml/2006/main">
-              <a:ext uri="{FF2B5EF4-FFF2-40B4-BE49-F238E27FC236}">
-                <a16:creationId xmlns:a16="http://schemas.microsoft.com/office/drawing/2014/main" id="{3C9369BE-BA83-44C5-A393-FD12678C25BF}"/>
-              </a:ext>
-            </a:extLst>
-          </p:cNvPr>
-          <p:cNvSpPr>
-            <a:spLocks xmlns:a="http://schemas.openxmlformats.org/drawingml/2006/main" noGrp="1"/>
-          </p:cNvSpPr>
-          <p:nvPr/>
-        </p:nvSpPr>
-        <p:spPr>
-          <a:xfrm xmlns:a="http://schemas.openxmlformats.org/drawingml/2006/main">
-            <a:off x="6867740" y="5096454"/>
-            <a:ext cx="1752600" cy="247650"/>
+          <p:cNvPr id="20" name="">
+            <a:extLst xmlns:a="http://schemas.openxmlformats.org/drawingml/2006/main">
+              <a:ext uri="{FF2B5EF4-FFF2-40B4-BE49-F238E27FC236}">
+                <a16:creationId xmlns:a16="http://schemas.microsoft.com/office/drawing/2014/main" id="{69A8588D-1713-4751-8EED-6AD0B23A7C37}"/>
+              </a:ext>
+            </a:extLst>
+          </p:cNvPr>
+          <p:cNvSpPr>
+            <a:spLocks xmlns:a="http://schemas.openxmlformats.org/drawingml/2006/main" noGrp="1"/>
+          </p:cNvSpPr>
+          <p:nvPr/>
+        </p:nvSpPr>
+        <p:spPr>
+          <a:xfrm xmlns:a="http://schemas.openxmlformats.org/drawingml/2006/main">
+            <a:off x="7372350" y="5353050"/>
+            <a:ext cx="1771650" cy="266700"/>
           </a:xfrm>
           <a:prstGeom xmlns:a="http://schemas.openxmlformats.org/drawingml/2006/main" prst="rect">
             <a:avLst/>
@@ -13769,29 +13965,29 @@
                 <a:ea typeface="Aptos"/>
                 <a:cs typeface="Aptos"/>
               </a:rPr>
-              <a:t>Videojuegos</a:t>
+              <a:t>Robótica</a:t>
             </a:r>
           </a:p>
         </p:txBody>
       </p:sp>
       <p:sp>
         <p:nvSpPr>
-          <p:cNvPr id="17" name="">
-            <a:extLst xmlns:a="http://schemas.openxmlformats.org/drawingml/2006/main">
-              <a:ext uri="{FF2B5EF4-FFF2-40B4-BE49-F238E27FC236}">
-                <a16:creationId xmlns:a16="http://schemas.microsoft.com/office/drawing/2014/main" id="{830E0F2E-28CF-4AFE-AC48-47B4AE0CCBD6}"/>
-              </a:ext>
-            </a:extLst>
-          </p:cNvPr>
-          <p:cNvSpPr>
-            <a:spLocks xmlns:a="http://schemas.openxmlformats.org/drawingml/2006/main" noGrp="1"/>
-          </p:cNvSpPr>
-          <p:nvPr/>
-        </p:nvSpPr>
-        <p:spPr>
-          <a:xfrm xmlns:a="http://schemas.openxmlformats.org/drawingml/2006/main">
-            <a:off x="5829300" y="4000500"/>
-            <a:ext cx="1914740" cy="19050"/>
+          <p:cNvPr id="21" name="">
+            <a:extLst xmlns:a="http://schemas.openxmlformats.org/drawingml/2006/main">
+              <a:ext uri="{FF2B5EF4-FFF2-40B4-BE49-F238E27FC236}">
+                <a16:creationId xmlns:a16="http://schemas.microsoft.com/office/drawing/2014/main" id="{87A22466-8FEF-4CFF-83DE-F010058BAA02}"/>
+              </a:ext>
+            </a:extLst>
+          </p:cNvPr>
+          <p:cNvSpPr>
+            <a:spLocks xmlns:a="http://schemas.openxmlformats.org/drawingml/2006/main" noGrp="1"/>
+          </p:cNvSpPr>
+          <p:nvPr/>
+        </p:nvSpPr>
+        <p:spPr>
+          <a:xfrm xmlns:a="http://schemas.openxmlformats.org/drawingml/2006/main">
+            <a:off x="8248650" y="4762500"/>
+            <a:ext cx="19050" cy="381000"/>
           </a:xfrm>
           <a:prstGeom xmlns:a="http://schemas.openxmlformats.org/drawingml/2006/main" prst="rect">
             <a:avLst/>
@@ -13809,22 +14005,22 @@
       </p:sp>
       <p:sp>
         <p:nvSpPr>
-          <p:cNvPr id="18" name="">
-            <a:extLst xmlns:a="http://schemas.openxmlformats.org/drawingml/2006/main">
-              <a:ext uri="{FF2B5EF4-FFF2-40B4-BE49-F238E27FC236}">
-                <a16:creationId xmlns:a16="http://schemas.microsoft.com/office/drawing/2014/main" id="{CFA1007F-015E-46DB-BA7F-75A84E2D800A}"/>
-              </a:ext>
-            </a:extLst>
-          </p:cNvPr>
-          <p:cNvSpPr>
-            <a:spLocks xmlns:a="http://schemas.openxmlformats.org/drawingml/2006/main" noGrp="1"/>
-          </p:cNvSpPr>
-          <p:nvPr/>
-        </p:nvSpPr>
-        <p:spPr>
-          <a:xfrm xmlns:a="http://schemas.openxmlformats.org/drawingml/2006/main">
-            <a:off x="2866810" y="4925004"/>
-            <a:ext cx="2095500" cy="647700"/>
+          <p:cNvPr id="22" name="">
+            <a:extLst xmlns:a="http://schemas.openxmlformats.org/drawingml/2006/main">
+              <a:ext uri="{FF2B5EF4-FFF2-40B4-BE49-F238E27FC236}">
+                <a16:creationId xmlns:a16="http://schemas.microsoft.com/office/drawing/2014/main" id="{C260D860-221B-4869-B911-FC629FD98DD2}"/>
+              </a:ext>
+            </a:extLst>
+          </p:cNvPr>
+          <p:cNvSpPr>
+            <a:spLocks xmlns:a="http://schemas.openxmlformats.org/drawingml/2006/main" noGrp="1"/>
+          </p:cNvSpPr>
+          <p:nvPr/>
+        </p:nvSpPr>
+        <p:spPr>
+          <a:xfrm xmlns:a="http://schemas.openxmlformats.org/drawingml/2006/main">
+            <a:off x="9410700" y="5143500"/>
+            <a:ext cx="2038350" cy="723900"/>
           </a:xfrm>
           <a:prstGeom xmlns:a="http://schemas.openxmlformats.org/drawingml/2006/main" prst="rect">
             <a:avLst/>
@@ -13844,22 +14040,22 @@
       </p:sp>
       <p:sp>
         <p:nvSpPr>
-          <p:cNvPr id="19" name="">
-            <a:extLst xmlns:a="http://schemas.openxmlformats.org/drawingml/2006/main">
-              <a:ext uri="{FF2B5EF4-FFF2-40B4-BE49-F238E27FC236}">
-                <a16:creationId xmlns:a16="http://schemas.microsoft.com/office/drawing/2014/main" id="{C49BE09D-7864-4798-A13A-647ADD04FB04}"/>
-              </a:ext>
-            </a:extLst>
-          </p:cNvPr>
-          <p:cNvSpPr>
-            <a:spLocks xmlns:a="http://schemas.openxmlformats.org/drawingml/2006/main" noGrp="1"/>
-          </p:cNvSpPr>
-          <p:nvPr/>
-        </p:nvSpPr>
-        <p:spPr>
-          <a:xfrm xmlns:a="http://schemas.openxmlformats.org/drawingml/2006/main">
-            <a:off x="3038260" y="5096454"/>
-            <a:ext cx="1752600" cy="247650"/>
+          <p:cNvPr id="23" name="">
+            <a:extLst xmlns:a="http://schemas.openxmlformats.org/drawingml/2006/main">
+              <a:ext uri="{FF2B5EF4-FFF2-40B4-BE49-F238E27FC236}">
+                <a16:creationId xmlns:a16="http://schemas.microsoft.com/office/drawing/2014/main" id="{1F1C1CB3-51C4-4670-A8E9-F5036AE15670}"/>
+              </a:ext>
+            </a:extLst>
+          </p:cNvPr>
+          <p:cNvSpPr>
+            <a:spLocks xmlns:a="http://schemas.openxmlformats.org/drawingml/2006/main" noGrp="1"/>
+          </p:cNvSpPr>
+          <p:nvPr/>
+        </p:nvSpPr>
+        <p:spPr>
+          <a:xfrm xmlns:a="http://schemas.openxmlformats.org/drawingml/2006/main">
+            <a:off x="9544050" y="5353050"/>
+            <a:ext cx="1771650" cy="266700"/>
           </a:xfrm>
           <a:prstGeom xmlns:a="http://schemas.openxmlformats.org/drawingml/2006/main" prst="rect">
             <a:avLst/>
@@ -13883,7 +14079,7 @@
           <a:lstStyle xmlns:a="http://schemas.openxmlformats.org/drawingml/2006/main"/>
           <a:p xmlns:a="http://schemas.openxmlformats.org/drawingml/2006/main">
             <a:pPr algn="ctr">
-              <a:defRPr sz="1275" b="1">
+              <a:defRPr sz="1125" b="1">
                 <a:solidFill>
                   <a:srgbClr val="EAF8FF"/>
                 </a:solidFill>
@@ -13893,139 +14089,7 @@
               </a:defRPr>
             </a:pPr>
             <a:r>
-              <a:rPr sz="1275" b="1">
-                <a:solidFill>
-                  <a:srgbClr val="EAF8FF"/>
-                </a:solidFill>
-                <a:latin typeface="Aptos"/>
-                <a:ea typeface="Aptos"/>
-                <a:cs typeface="Aptos"/>
-              </a:rPr>
-              <a:t>Robótica</a:t>
-            </a:r>
-          </a:p>
-        </p:txBody>
-      </p:sp>
-      <p:sp>
-        <p:nvSpPr>
-          <p:cNvPr id="20" name="">
-            <a:extLst xmlns:a="http://schemas.openxmlformats.org/drawingml/2006/main">
-              <a:ext uri="{FF2B5EF4-FFF2-40B4-BE49-F238E27FC236}">
-                <a16:creationId xmlns:a16="http://schemas.microsoft.com/office/drawing/2014/main" id="{FC2CDFC3-A311-4911-9360-0110EC057B93}"/>
-              </a:ext>
-            </a:extLst>
-          </p:cNvPr>
-          <p:cNvSpPr>
-            <a:spLocks xmlns:a="http://schemas.openxmlformats.org/drawingml/2006/main" noGrp="1"/>
-          </p:cNvSpPr>
-          <p:nvPr/>
-        </p:nvSpPr>
-        <p:spPr>
-          <a:xfrm xmlns:a="http://schemas.openxmlformats.org/drawingml/2006/main">
-            <a:off x="3914560" y="4000500"/>
-            <a:ext cx="1914740" cy="19050"/>
-          </a:xfrm>
-          <a:prstGeom xmlns:a="http://schemas.openxmlformats.org/drawingml/2006/main" prst="rect">
-            <a:avLst/>
-          </a:prstGeom>
-          <a:solidFill xmlns:a="http://schemas.openxmlformats.org/drawingml/2006/main">
-            <a:srgbClr val="285563"/>
-          </a:solidFill>
-          <a:ln xmlns:a="http://schemas.openxmlformats.org/drawingml/2006/main" w="0">
-            <a:solidFill>
-              <a:srgbClr val="285563"/>
-            </a:solidFill>
-            <a:prstDash val="solid"/>
-          </a:ln>
-        </p:spPr>
-      </p:sp>
-      <p:sp>
-        <p:nvSpPr>
-          <p:cNvPr id="21" name="">
-            <a:extLst xmlns:a="http://schemas.openxmlformats.org/drawingml/2006/main">
-              <a:ext uri="{FF2B5EF4-FFF2-40B4-BE49-F238E27FC236}">
-                <a16:creationId xmlns:a16="http://schemas.microsoft.com/office/drawing/2014/main" id="{A6663463-274C-409F-937F-115D20AFABF3}"/>
-              </a:ext>
-            </a:extLst>
-          </p:cNvPr>
-          <p:cNvSpPr>
-            <a:spLocks xmlns:a="http://schemas.openxmlformats.org/drawingml/2006/main" noGrp="1"/>
-          </p:cNvSpPr>
-          <p:nvPr/>
-        </p:nvSpPr>
-        <p:spPr>
-          <a:xfrm xmlns:a="http://schemas.openxmlformats.org/drawingml/2006/main">
-            <a:off x="1683436" y="3199821"/>
-            <a:ext cx="2095500" cy="647700"/>
-          </a:xfrm>
-          <a:prstGeom xmlns:a="http://schemas.openxmlformats.org/drawingml/2006/main" prst="rect">
-            <a:avLst/>
-          </a:prstGeom>
-          <a:solidFill xmlns:a="http://schemas.openxmlformats.org/drawingml/2006/main">
-            <a:srgbClr val="081A23">
-              <a:alpha val="86667"/>
-            </a:srgbClr>
-          </a:solidFill>
-          <a:ln xmlns:a="http://schemas.openxmlformats.org/drawingml/2006/main" w="9525">
-            <a:solidFill>
-              <a:srgbClr val="25505B"/>
-            </a:solidFill>
-            <a:prstDash val="solid"/>
-          </a:ln>
-        </p:spPr>
-      </p:sp>
-      <p:sp>
-        <p:nvSpPr>
-          <p:cNvPr id="22" name="">
-            <a:extLst xmlns:a="http://schemas.openxmlformats.org/drawingml/2006/main">
-              <a:ext uri="{FF2B5EF4-FFF2-40B4-BE49-F238E27FC236}">
-                <a16:creationId xmlns:a16="http://schemas.microsoft.com/office/drawing/2014/main" id="{5A114069-6D9C-4E78-B1C5-633EC9AB252D}"/>
-              </a:ext>
-            </a:extLst>
-          </p:cNvPr>
-          <p:cNvSpPr>
-            <a:spLocks xmlns:a="http://schemas.openxmlformats.org/drawingml/2006/main" noGrp="1"/>
-          </p:cNvSpPr>
-          <p:nvPr/>
-        </p:nvSpPr>
-        <p:spPr>
-          <a:xfrm xmlns:a="http://schemas.openxmlformats.org/drawingml/2006/main">
-            <a:off x="1854886" y="3371271"/>
-            <a:ext cx="1752600" cy="247650"/>
-          </a:xfrm>
-          <a:prstGeom xmlns:a="http://schemas.openxmlformats.org/drawingml/2006/main" prst="rect">
-            <a:avLst/>
-          </a:prstGeom>
-          <a:solidFill xmlns:a="http://schemas.openxmlformats.org/drawingml/2006/main">
-            <a:srgbClr val="000000">
-              <a:alpha val="0"/>
-            </a:srgbClr>
-          </a:solidFill>
-          <a:ln xmlns:a="http://schemas.openxmlformats.org/drawingml/2006/main" w="0">
-            <a:solidFill>
-              <a:srgbClr val="000000">
-                <a:alpha val="0"/>
-              </a:srgbClr>
-            </a:solidFill>
-            <a:prstDash val="solid"/>
-          </a:ln>
-        </p:spPr>
-        <p:txBody>
-          <a:bodyPr xmlns:a="http://schemas.openxmlformats.org/drawingml/2006/main" lIns="0" tIns="0" rIns="0" bIns="0" anchor="t"/>
-          <a:lstStyle xmlns:a="http://schemas.openxmlformats.org/drawingml/2006/main"/>
-          <a:p xmlns:a="http://schemas.openxmlformats.org/drawingml/2006/main">
-            <a:pPr algn="ctr">
-              <a:defRPr sz="1275" b="1">
-                <a:solidFill>
-                  <a:srgbClr val="EAF8FF"/>
-                </a:solidFill>
-                <a:latin typeface="Aptos"/>
-                <a:ea typeface="Aptos"/>
-                <a:cs typeface="Aptos"/>
-              </a:defRPr>
-            </a:pPr>
-            <a:r>
-              <a:rPr sz="1275" b="1">
+              <a:rPr sz="1125" b="1">
                 <a:solidFill>
                   <a:srgbClr val="EAF8FF"/>
                 </a:solidFill>
@@ -14040,22 +14104,22 @@
       </p:sp>
       <p:sp>
         <p:nvSpPr>
-          <p:cNvPr id="23" name="">
-            <a:extLst xmlns:a="http://schemas.openxmlformats.org/drawingml/2006/main">
-              <a:ext uri="{FF2B5EF4-FFF2-40B4-BE49-F238E27FC236}">
-                <a16:creationId xmlns:a16="http://schemas.microsoft.com/office/drawing/2014/main" id="{E434389E-5B8E-4ABA-9CD7-A54F004F0DF6}"/>
-              </a:ext>
-            </a:extLst>
-          </p:cNvPr>
-          <p:cNvSpPr>
-            <a:spLocks xmlns:a="http://schemas.openxmlformats.org/drawingml/2006/main" noGrp="1"/>
-          </p:cNvSpPr>
-          <p:nvPr/>
-        </p:nvSpPr>
-        <p:spPr>
-          <a:xfrm xmlns:a="http://schemas.openxmlformats.org/drawingml/2006/main">
-            <a:off x="2731186" y="3523671"/>
-            <a:ext cx="3098114" cy="19050"/>
+          <p:cNvPr id="24" name="">
+            <a:extLst xmlns:a="http://schemas.openxmlformats.org/drawingml/2006/main">
+              <a:ext uri="{FF2B5EF4-FFF2-40B4-BE49-F238E27FC236}">
+                <a16:creationId xmlns:a16="http://schemas.microsoft.com/office/drawing/2014/main" id="{03157B53-9FF2-44B1-9580-1750CFF3D08E}"/>
+              </a:ext>
+            </a:extLst>
+          </p:cNvPr>
+          <p:cNvSpPr>
+            <a:spLocks xmlns:a="http://schemas.openxmlformats.org/drawingml/2006/main" noGrp="1"/>
+          </p:cNvSpPr>
+          <p:nvPr/>
+        </p:nvSpPr>
+        <p:spPr>
+          <a:xfrm xmlns:a="http://schemas.openxmlformats.org/drawingml/2006/main">
+            <a:off x="10420350" y="4762500"/>
+            <a:ext cx="19050" cy="381000"/>
           </a:xfrm>
           <a:prstGeom xmlns:a="http://schemas.openxmlformats.org/drawingml/2006/main" prst="rect">
             <a:avLst/>
@@ -14073,10 +14137,43 @@
       </p:sp>
       <p:sp>
         <p:nvSpPr>
-          <p:cNvPr id="24" name="">
-            <a:extLst xmlns:a="http://schemas.openxmlformats.org/drawingml/2006/main">
-              <a:ext uri="{FF2B5EF4-FFF2-40B4-BE49-F238E27FC236}">
-                <a16:creationId xmlns:a16="http://schemas.microsoft.com/office/drawing/2014/main" id="{23F3F4BF-3BBB-47E8-8594-65D2530608C2}"/>
+          <p:cNvPr id="25" name="">
+            <a:extLst xmlns:a="http://schemas.openxmlformats.org/drawingml/2006/main">
+              <a:ext uri="{FF2B5EF4-FFF2-40B4-BE49-F238E27FC236}">
+                <a16:creationId xmlns:a16="http://schemas.microsoft.com/office/drawing/2014/main" id="{1E6256AC-7B4E-4FAC-BF0B-2503B08A4ECC}"/>
+              </a:ext>
+            </a:extLst>
+          </p:cNvPr>
+          <p:cNvSpPr>
+            <a:spLocks xmlns:a="http://schemas.openxmlformats.org/drawingml/2006/main" noGrp="1"/>
+          </p:cNvSpPr>
+          <p:nvPr/>
+        </p:nvSpPr>
+        <p:spPr>
+          <a:xfrm xmlns:a="http://schemas.openxmlformats.org/drawingml/2006/main">
+            <a:off x="1743075" y="4762500"/>
+            <a:ext cx="8686800" cy="19050"/>
+          </a:xfrm>
+          <a:prstGeom xmlns:a="http://schemas.openxmlformats.org/drawingml/2006/main" prst="rect">
+            <a:avLst/>
+          </a:prstGeom>
+          <a:solidFill xmlns:a="http://schemas.openxmlformats.org/drawingml/2006/main">
+            <a:srgbClr val="285563"/>
+          </a:solidFill>
+          <a:ln xmlns:a="http://schemas.openxmlformats.org/drawingml/2006/main" w="0">
+            <a:solidFill>
+              <a:srgbClr val="285563"/>
+            </a:solidFill>
+            <a:prstDash val="solid"/>
+          </a:ln>
+        </p:spPr>
+      </p:sp>
+      <p:sp>
+        <p:nvSpPr>
+          <p:cNvPr id="26" name="">
+            <a:extLst xmlns:a="http://schemas.openxmlformats.org/drawingml/2006/main">
+              <a:ext uri="{FF2B5EF4-FFF2-40B4-BE49-F238E27FC236}">
+                <a16:creationId xmlns:a16="http://schemas.microsoft.com/office/drawing/2014/main" id="{E3C735F4-25AF-486F-B0D6-69F28FCC3446}"/>
               </a:ext>
             </a:extLst>
           </p:cNvPr>
@@ -14137,10 +14234,10 @@
       </p:sp>
       <p:sp>
         <p:nvSpPr>
-          <p:cNvPr id="25" name="">
-            <a:extLst xmlns:a="http://schemas.openxmlformats.org/drawingml/2006/main">
-              <a:ext uri="{FF2B5EF4-FFF2-40B4-BE49-F238E27FC236}">
-                <a16:creationId xmlns:a16="http://schemas.microsoft.com/office/drawing/2014/main" id="{6331E489-FF18-4937-8C25-7130CD7FDB15}"/>
+          <p:cNvPr id="27" name="">
+            <a:extLst xmlns:a="http://schemas.openxmlformats.org/drawingml/2006/main">
+              <a:ext uri="{FF2B5EF4-FFF2-40B4-BE49-F238E27FC236}">
+                <a16:creationId xmlns:a16="http://schemas.microsoft.com/office/drawing/2014/main" id="{D1912798-91C8-461E-9B0A-478A36FCD476}"/>
               </a:ext>
             </a:extLst>
           </p:cNvPr>
@@ -14170,10 +14267,10 @@
       </p:sp>
       <p:sp>
         <p:nvSpPr>
-          <p:cNvPr id="26" name="">
-            <a:extLst xmlns:a="http://schemas.openxmlformats.org/drawingml/2006/main">
-              <a:ext uri="{FF2B5EF4-FFF2-40B4-BE49-F238E27FC236}">
-                <a16:creationId xmlns:a16="http://schemas.microsoft.com/office/drawing/2014/main" id="{64211377-0507-410E-A527-B4530894C3C3}"/>
+          <p:cNvPr id="28" name="">
+            <a:extLst xmlns:a="http://schemas.openxmlformats.org/drawingml/2006/main">
+              <a:ext uri="{FF2B5EF4-FFF2-40B4-BE49-F238E27FC236}">
+                <a16:creationId xmlns:a16="http://schemas.microsoft.com/office/drawing/2014/main" id="{FE9D0A1D-739F-465C-AB06-96DD07F277F4}"/>
               </a:ext>
             </a:extLst>
           </p:cNvPr>
@@ -14234,10 +14331,10 @@
       </p:sp>
       <p:sp>
         <p:nvSpPr>
-          <p:cNvPr id="27" name="">
-            <a:extLst xmlns:a="http://schemas.openxmlformats.org/drawingml/2006/main">
-              <a:ext uri="{FF2B5EF4-FFF2-40B4-BE49-F238E27FC236}">
-                <a16:creationId xmlns:a16="http://schemas.microsoft.com/office/drawing/2014/main" id="{36E20954-E5AE-41D7-A289-E84961AEBD77}"/>
+          <p:cNvPr id="29" name="">
+            <a:extLst xmlns:a="http://schemas.openxmlformats.org/drawingml/2006/main">
+              <a:ext uri="{FF2B5EF4-FFF2-40B4-BE49-F238E27FC236}">
+                <a16:creationId xmlns:a16="http://schemas.microsoft.com/office/drawing/2014/main" id="{F8DE9EFB-4698-4269-8E7F-D23D1D925B12}"/>
               </a:ext>
             </a:extLst>
           </p:cNvPr>
@@ -14299,7 +14396,7 @@
     </p:spTree>
     <p:extLst>
       <p:ext uri="{BB962C8B-B14F-4D97-AF65-F5344CB8AC3E}">
-        <p14:creationId xmlns:p14="http://schemas.microsoft.com/office/powerpoint/2010/main" val="480322707"/>
+        <p14:creationId xmlns:p14="http://schemas.microsoft.com/office/powerpoint/2010/main" val="694798692"/>
       </p:ext>
     </p:extLst>
   </p:cSld>
@@ -14327,7 +14424,7 @@
           <p:nvPr/>
         </p:nvPicPr>
         <p:blipFill>
-          <a:blip xmlns:r="http://schemas.openxmlformats.org/officeDocument/2006/relationships" xmlns:a="http://schemas.openxmlformats.org/drawingml/2006/main" r:embed="R0836378538c440f7"/>
+          <a:blip xmlns:r="http://schemas.openxmlformats.org/officeDocument/2006/relationships" xmlns:a="http://schemas.openxmlformats.org/drawingml/2006/main" r:embed="R2ff62a413bdb4213"/>
           <a:srcRect xmlns:a="http://schemas.openxmlformats.org/drawingml/2006/main" l="0" t="27" r="0" b="27"/>
           <a:stretch xmlns:a="http://schemas.openxmlformats.org/drawingml/2006/main">
             <a:fillRect l="0" t="0" r="0" b="0"/>
@@ -14348,7 +14445,7 @@
           <p:cNvPr id="2" name="">
             <a:extLst xmlns:a="http://schemas.openxmlformats.org/drawingml/2006/main">
               <a:ext uri="{FF2B5EF4-FFF2-40B4-BE49-F238E27FC236}">
-                <a16:creationId xmlns:a16="http://schemas.microsoft.com/office/drawing/2014/main" id="{8DB7B63C-2CB6-42AB-B90A-513BAE2EEF19}"/>
+                <a16:creationId xmlns:a16="http://schemas.microsoft.com/office/drawing/2014/main" id="{A3CF6F8C-3699-4185-8825-A0EAD16BE197}"/>
               </a:ext>
             </a:extLst>
           </p:cNvPr>
@@ -14385,7 +14482,7 @@
           <p:cNvPr id="3" name="">
             <a:extLst xmlns:a="http://schemas.openxmlformats.org/drawingml/2006/main">
               <a:ext uri="{FF2B5EF4-FFF2-40B4-BE49-F238E27FC236}">
-                <a16:creationId xmlns:a16="http://schemas.microsoft.com/office/drawing/2014/main" id="{12B2102A-D2EC-4427-80AA-1F0DEEFB0738}"/>
+                <a16:creationId xmlns:a16="http://schemas.microsoft.com/office/drawing/2014/main" id="{68DBC356-5D0A-4480-93C4-5264B1796624}"/>
               </a:ext>
             </a:extLst>
           </p:cNvPr>
@@ -14422,7 +14519,7 @@
           <p:cNvPr id="4" name="">
             <a:extLst xmlns:a="http://schemas.openxmlformats.org/drawingml/2006/main">
               <a:ext uri="{FF2B5EF4-FFF2-40B4-BE49-F238E27FC236}">
-                <a16:creationId xmlns:a16="http://schemas.microsoft.com/office/drawing/2014/main" id="{836E0F72-2562-435F-B032-60BD00DF1577}"/>
+                <a16:creationId xmlns:a16="http://schemas.microsoft.com/office/drawing/2014/main" id="{A585A944-923D-4D23-87DA-751F9B9E6EBB}"/>
               </a:ext>
             </a:extLst>
           </p:cNvPr>
@@ -14486,7 +14583,7 @@
           <p:cNvPr id="5" name="">
             <a:extLst xmlns:a="http://schemas.openxmlformats.org/drawingml/2006/main">
               <a:ext uri="{FF2B5EF4-FFF2-40B4-BE49-F238E27FC236}">
-                <a16:creationId xmlns:a16="http://schemas.microsoft.com/office/drawing/2014/main" id="{FD8C4866-A4F2-4226-AE77-2EE19FAFDE41}"/>
+                <a16:creationId xmlns:a16="http://schemas.microsoft.com/office/drawing/2014/main" id="{AC679EE7-2689-4086-AD1C-CC4B695BB669}"/>
               </a:ext>
             </a:extLst>
           </p:cNvPr>
@@ -14550,7 +14647,7 @@
           <p:cNvPr id="6" name="">
             <a:extLst xmlns:a="http://schemas.openxmlformats.org/drawingml/2006/main">
               <a:ext uri="{FF2B5EF4-FFF2-40B4-BE49-F238E27FC236}">
-                <a16:creationId xmlns:a16="http://schemas.microsoft.com/office/drawing/2014/main" id="{AA51A796-BBF5-4010-B71D-F320970C4C7F}"/>
+                <a16:creationId xmlns:a16="http://schemas.microsoft.com/office/drawing/2014/main" id="{3D13370B-E737-4A22-9D99-4074EF8EB690}"/>
               </a:ext>
             </a:extLst>
           </p:cNvPr>
@@ -14614,7 +14711,7 @@
           <p:cNvPr id="7" name="">
             <a:extLst xmlns:a="http://schemas.openxmlformats.org/drawingml/2006/main">
               <a:ext uri="{FF2B5EF4-FFF2-40B4-BE49-F238E27FC236}">
-                <a16:creationId xmlns:a16="http://schemas.microsoft.com/office/drawing/2014/main" id="{068A92F5-4827-480A-805C-ED362157E060}"/>
+                <a16:creationId xmlns:a16="http://schemas.microsoft.com/office/drawing/2014/main" id="{99D54DD7-322C-4D63-A058-545DFD578D53}"/>
               </a:ext>
             </a:extLst>
           </p:cNvPr>
@@ -14649,7 +14746,7 @@
           <p:cNvPr id="8" name="">
             <a:extLst xmlns:a="http://schemas.openxmlformats.org/drawingml/2006/main">
               <a:ext uri="{FF2B5EF4-FFF2-40B4-BE49-F238E27FC236}">
-                <a16:creationId xmlns:a16="http://schemas.microsoft.com/office/drawing/2014/main" id="{F5B277D2-A6B9-447C-8547-33D5AACBFC03}"/>
+                <a16:creationId xmlns:a16="http://schemas.microsoft.com/office/drawing/2014/main" id="{D424CD8D-F0E1-4C1C-99FB-BC897F3839D1}"/>
               </a:ext>
             </a:extLst>
           </p:cNvPr>
@@ -14713,7 +14810,7 @@
           <p:cNvPr id="9" name="">
             <a:extLst xmlns:a="http://schemas.openxmlformats.org/drawingml/2006/main">
               <a:ext uri="{FF2B5EF4-FFF2-40B4-BE49-F238E27FC236}">
-                <a16:creationId xmlns:a16="http://schemas.microsoft.com/office/drawing/2014/main" id="{D460FC35-9C58-4DDB-8747-C67947951A0C}"/>
+                <a16:creationId xmlns:a16="http://schemas.microsoft.com/office/drawing/2014/main" id="{3366D032-D474-45E0-9F2C-E61006DB0446}"/>
               </a:ext>
             </a:extLst>
           </p:cNvPr>
@@ -14777,7 +14874,7 @@
           <p:cNvPr id="10" name="">
             <a:extLst xmlns:a="http://schemas.openxmlformats.org/drawingml/2006/main">
               <a:ext uri="{FF2B5EF4-FFF2-40B4-BE49-F238E27FC236}">
-                <a16:creationId xmlns:a16="http://schemas.microsoft.com/office/drawing/2014/main" id="{E8CDC180-5CC9-4FDF-ACD1-D40C691D1E3D}"/>
+                <a16:creationId xmlns:a16="http://schemas.microsoft.com/office/drawing/2014/main" id="{2FB732BD-48F3-4095-9FE2-950B5B5DB349}"/>
               </a:ext>
             </a:extLst>
           </p:cNvPr>
@@ -14810,7 +14907,7 @@
           <p:cNvPr id="11" name="">
             <a:extLst xmlns:a="http://schemas.openxmlformats.org/drawingml/2006/main">
               <a:ext uri="{FF2B5EF4-FFF2-40B4-BE49-F238E27FC236}">
-                <a16:creationId xmlns:a16="http://schemas.microsoft.com/office/drawing/2014/main" id="{B8EDA079-2856-49A3-8752-AD225AF01058}"/>
+                <a16:creationId xmlns:a16="http://schemas.microsoft.com/office/drawing/2014/main" id="{A1D4481B-5C5B-41C3-9D15-2ADB8CCBA7A6}"/>
               </a:ext>
             </a:extLst>
           </p:cNvPr>
@@ -14845,7 +14942,7 @@
           <p:cNvPr id="12" name="">
             <a:extLst xmlns:a="http://schemas.openxmlformats.org/drawingml/2006/main">
               <a:ext uri="{FF2B5EF4-FFF2-40B4-BE49-F238E27FC236}">
-                <a16:creationId xmlns:a16="http://schemas.microsoft.com/office/drawing/2014/main" id="{DD927150-8DB9-4938-839E-327CEE683540}"/>
+                <a16:creationId xmlns:a16="http://schemas.microsoft.com/office/drawing/2014/main" id="{216DDC12-A058-4FD4-BE74-B46CF4C10D3E}"/>
               </a:ext>
             </a:extLst>
           </p:cNvPr>
@@ -14909,7 +15006,7 @@
           <p:cNvPr id="13" name="">
             <a:extLst xmlns:a="http://schemas.openxmlformats.org/drawingml/2006/main">
               <a:ext uri="{FF2B5EF4-FFF2-40B4-BE49-F238E27FC236}">
-                <a16:creationId xmlns:a16="http://schemas.microsoft.com/office/drawing/2014/main" id="{E4C67F25-8E50-4F64-99E5-587C5A0768D4}"/>
+                <a16:creationId xmlns:a16="http://schemas.microsoft.com/office/drawing/2014/main" id="{256B59E5-0721-49B1-BA2B-D3FFFA4CC895}"/>
               </a:ext>
             </a:extLst>
           </p:cNvPr>
@@ -14973,7 +15070,7 @@
           <p:cNvPr id="14" name="">
             <a:extLst xmlns:a="http://schemas.openxmlformats.org/drawingml/2006/main">
               <a:ext uri="{FF2B5EF4-FFF2-40B4-BE49-F238E27FC236}">
-                <a16:creationId xmlns:a16="http://schemas.microsoft.com/office/drawing/2014/main" id="{D026A6EE-D2C7-4FEB-AE24-7901A39EEF8C}"/>
+                <a16:creationId xmlns:a16="http://schemas.microsoft.com/office/drawing/2014/main" id="{AB1143D6-B52F-4348-AE57-CBAA65A85502}"/>
               </a:ext>
             </a:extLst>
           </p:cNvPr>
@@ -15006,7 +15103,7 @@
           <p:cNvPr id="15" name="">
             <a:extLst xmlns:a="http://schemas.openxmlformats.org/drawingml/2006/main">
               <a:ext uri="{FF2B5EF4-FFF2-40B4-BE49-F238E27FC236}">
-                <a16:creationId xmlns:a16="http://schemas.microsoft.com/office/drawing/2014/main" id="{32997273-8802-442A-A527-DF0C2EF5C189}"/>
+                <a16:creationId xmlns:a16="http://schemas.microsoft.com/office/drawing/2014/main" id="{3978694A-30F7-41CC-ACE2-AA881C9A0900}"/>
               </a:ext>
             </a:extLst>
           </p:cNvPr>
@@ -15041,7 +15138,7 @@
           <p:cNvPr id="16" name="">
             <a:extLst xmlns:a="http://schemas.openxmlformats.org/drawingml/2006/main">
               <a:ext uri="{FF2B5EF4-FFF2-40B4-BE49-F238E27FC236}">
-                <a16:creationId xmlns:a16="http://schemas.microsoft.com/office/drawing/2014/main" id="{A2598D27-7769-4455-815E-F9AEEE6CAB33}"/>
+                <a16:creationId xmlns:a16="http://schemas.microsoft.com/office/drawing/2014/main" id="{8ACC972B-2555-459D-80A4-F507533AE8A9}"/>
               </a:ext>
             </a:extLst>
           </p:cNvPr>
@@ -15105,7 +15202,7 @@
           <p:cNvPr id="17" name="">
             <a:extLst xmlns:a="http://schemas.openxmlformats.org/drawingml/2006/main">
               <a:ext uri="{FF2B5EF4-FFF2-40B4-BE49-F238E27FC236}">
-                <a16:creationId xmlns:a16="http://schemas.microsoft.com/office/drawing/2014/main" id="{B3826C41-FAA3-4E68-8354-93D8CADA9DA9}"/>
+                <a16:creationId xmlns:a16="http://schemas.microsoft.com/office/drawing/2014/main" id="{570ED729-5425-4E45-9B15-DE0FA7EB51E5}"/>
               </a:ext>
             </a:extLst>
           </p:cNvPr>
@@ -15169,7 +15266,7 @@
           <p:cNvPr id="18" name="">
             <a:extLst xmlns:a="http://schemas.openxmlformats.org/drawingml/2006/main">
               <a:ext uri="{FF2B5EF4-FFF2-40B4-BE49-F238E27FC236}">
-                <a16:creationId xmlns:a16="http://schemas.microsoft.com/office/drawing/2014/main" id="{49C56196-B678-451B-AD15-76204DDC39F7}"/>
+                <a16:creationId xmlns:a16="http://schemas.microsoft.com/office/drawing/2014/main" id="{027FD8F7-7B21-4EF5-9DB4-435FD29B97A1}"/>
               </a:ext>
             </a:extLst>
           </p:cNvPr>
@@ -15202,7 +15299,7 @@
           <p:cNvPr id="19" name="">
             <a:extLst xmlns:a="http://schemas.openxmlformats.org/drawingml/2006/main">
               <a:ext uri="{FF2B5EF4-FFF2-40B4-BE49-F238E27FC236}">
-                <a16:creationId xmlns:a16="http://schemas.microsoft.com/office/drawing/2014/main" id="{6BD7F72A-7232-46AA-BB1E-78DD82A8119B}"/>
+                <a16:creationId xmlns:a16="http://schemas.microsoft.com/office/drawing/2014/main" id="{B3A6A308-B004-43BA-ADB3-FE81AE3E56C7}"/>
               </a:ext>
             </a:extLst>
           </p:cNvPr>
@@ -15237,7 +15334,7 @@
           <p:cNvPr id="20" name="">
             <a:extLst xmlns:a="http://schemas.openxmlformats.org/drawingml/2006/main">
               <a:ext uri="{FF2B5EF4-FFF2-40B4-BE49-F238E27FC236}">
-                <a16:creationId xmlns:a16="http://schemas.microsoft.com/office/drawing/2014/main" id="{B4D4037B-6010-44B9-A2FC-1B853F89D42C}"/>
+                <a16:creationId xmlns:a16="http://schemas.microsoft.com/office/drawing/2014/main" id="{57E55927-2E16-491A-8CFD-96F360736C3A}"/>
               </a:ext>
             </a:extLst>
           </p:cNvPr>
@@ -15301,7 +15398,7 @@
           <p:cNvPr id="21" name="">
             <a:extLst xmlns:a="http://schemas.openxmlformats.org/drawingml/2006/main">
               <a:ext uri="{FF2B5EF4-FFF2-40B4-BE49-F238E27FC236}">
-                <a16:creationId xmlns:a16="http://schemas.microsoft.com/office/drawing/2014/main" id="{6E0D84BE-9AA0-44FB-9B76-19A1B5E90FD2}"/>
+                <a16:creationId xmlns:a16="http://schemas.microsoft.com/office/drawing/2014/main" id="{1C5D58E0-5204-4523-B6A1-3A3329BF0392}"/>
               </a:ext>
             </a:extLst>
           </p:cNvPr>
@@ -15365,7 +15462,7 @@
           <p:cNvPr id="22" name="">
             <a:extLst xmlns:a="http://schemas.openxmlformats.org/drawingml/2006/main">
               <a:ext uri="{FF2B5EF4-FFF2-40B4-BE49-F238E27FC236}">
-                <a16:creationId xmlns:a16="http://schemas.microsoft.com/office/drawing/2014/main" id="{30011C68-95C0-4475-B827-96686479E61F}"/>
+                <a16:creationId xmlns:a16="http://schemas.microsoft.com/office/drawing/2014/main" id="{0E3DA905-0D89-43B2-A521-D2D608F007B4}"/>
               </a:ext>
             </a:extLst>
           </p:cNvPr>
@@ -15429,7 +15526,7 @@
           <p:cNvPr id="23" name="">
             <a:extLst xmlns:a="http://schemas.openxmlformats.org/drawingml/2006/main">
               <a:ext uri="{FF2B5EF4-FFF2-40B4-BE49-F238E27FC236}">
-                <a16:creationId xmlns:a16="http://schemas.microsoft.com/office/drawing/2014/main" id="{2775DC01-2FE8-4004-AC64-49AE09348656}"/>
+                <a16:creationId xmlns:a16="http://schemas.microsoft.com/office/drawing/2014/main" id="{2EF7674C-1F2D-430E-A166-F451663155B0}"/>
               </a:ext>
             </a:extLst>
           </p:cNvPr>
@@ -15493,7 +15590,7 @@
           <p:cNvPr id="24" name="">
             <a:extLst xmlns:a="http://schemas.openxmlformats.org/drawingml/2006/main">
               <a:ext uri="{FF2B5EF4-FFF2-40B4-BE49-F238E27FC236}">
-                <a16:creationId xmlns:a16="http://schemas.microsoft.com/office/drawing/2014/main" id="{F5C179F9-401C-4B6F-B6E7-C7CD6B4B1ECC}"/>
+                <a16:creationId xmlns:a16="http://schemas.microsoft.com/office/drawing/2014/main" id="{06821C6C-07DC-4593-98D0-F657EB2AF74C}"/>
               </a:ext>
             </a:extLst>
           </p:cNvPr>
@@ -15526,7 +15623,7 @@
           <p:cNvPr id="25" name="">
             <a:extLst xmlns:a="http://schemas.openxmlformats.org/drawingml/2006/main">
               <a:ext uri="{FF2B5EF4-FFF2-40B4-BE49-F238E27FC236}">
-                <a16:creationId xmlns:a16="http://schemas.microsoft.com/office/drawing/2014/main" id="{4B11D40D-9B82-4982-880C-46D0A493B101}"/>
+                <a16:creationId xmlns:a16="http://schemas.microsoft.com/office/drawing/2014/main" id="{4FB4C8C5-BAC6-46B7-9760-C0F03B274F9B}"/>
               </a:ext>
             </a:extLst>
           </p:cNvPr>
@@ -15590,7 +15687,7 @@
           <p:cNvPr id="26" name="">
             <a:extLst xmlns:a="http://schemas.openxmlformats.org/drawingml/2006/main">
               <a:ext uri="{FF2B5EF4-FFF2-40B4-BE49-F238E27FC236}">
-                <a16:creationId xmlns:a16="http://schemas.microsoft.com/office/drawing/2014/main" id="{DF9929DC-5F8B-421F-925F-C73C37A4F621}"/>
+                <a16:creationId xmlns:a16="http://schemas.microsoft.com/office/drawing/2014/main" id="{4C55C432-F9DC-4E11-A1B4-C0C0D5622AFA}"/>
               </a:ext>
             </a:extLst>
           </p:cNvPr>
@@ -15652,7 +15749,7 @@
     </p:spTree>
     <p:extLst>
       <p:ext uri="{BB962C8B-B14F-4D97-AF65-F5344CB8AC3E}">
-        <p14:creationId xmlns:p14="http://schemas.microsoft.com/office/powerpoint/2010/main" val="432248921"/>
+        <p14:creationId xmlns:p14="http://schemas.microsoft.com/office/powerpoint/2010/main" val="1906997076"/>
       </p:ext>
     </p:extLst>
   </p:cSld>
@@ -15680,7 +15777,7 @@
           <p:nvPr/>
         </p:nvPicPr>
         <p:blipFill>
-          <a:blip xmlns:r="http://schemas.openxmlformats.org/officeDocument/2006/relationships" xmlns:a="http://schemas.openxmlformats.org/drawingml/2006/main" r:embed="R6542330d81524708"/>
+          <a:blip xmlns:r="http://schemas.openxmlformats.org/officeDocument/2006/relationships" xmlns:a="http://schemas.openxmlformats.org/drawingml/2006/main" r:embed="R39d98dc718634992"/>
           <a:srcRect xmlns:a="http://schemas.openxmlformats.org/drawingml/2006/main" l="0" t="7813" r="0" b="7813"/>
           <a:stretch xmlns:a="http://schemas.openxmlformats.org/drawingml/2006/main">
             <a:fillRect l="0" t="0" r="0" b="0"/>
@@ -15701,7 +15798,7 @@
           <p:cNvPr id="2" name="">
             <a:extLst xmlns:a="http://schemas.openxmlformats.org/drawingml/2006/main">
               <a:ext uri="{FF2B5EF4-FFF2-40B4-BE49-F238E27FC236}">
-                <a16:creationId xmlns:a16="http://schemas.microsoft.com/office/drawing/2014/main" id="{5CA56698-0686-4CCE-96CD-291B710E6601}"/>
+                <a16:creationId xmlns:a16="http://schemas.microsoft.com/office/drawing/2014/main" id="{BE58ED1B-25E0-4752-B4AA-B861DD7C14AB}"/>
               </a:ext>
             </a:extLst>
           </p:cNvPr>
@@ -15738,7 +15835,7 @@
           <p:cNvPr id="3" name="">
             <a:extLst xmlns:a="http://schemas.openxmlformats.org/drawingml/2006/main">
               <a:ext uri="{FF2B5EF4-FFF2-40B4-BE49-F238E27FC236}">
-                <a16:creationId xmlns:a16="http://schemas.microsoft.com/office/drawing/2014/main" id="{5ECC9A07-FF85-4763-BB8B-E988F9DB9961}"/>
+                <a16:creationId xmlns:a16="http://schemas.microsoft.com/office/drawing/2014/main" id="{2705682D-9CC1-425D-87D6-3A6D3F9F9939}"/>
               </a:ext>
             </a:extLst>
           </p:cNvPr>
@@ -15775,7 +15872,7 @@
           <p:cNvPr id="4" name="">
             <a:extLst xmlns:a="http://schemas.openxmlformats.org/drawingml/2006/main">
               <a:ext uri="{FF2B5EF4-FFF2-40B4-BE49-F238E27FC236}">
-                <a16:creationId xmlns:a16="http://schemas.microsoft.com/office/drawing/2014/main" id="{BB781ED2-16B5-476E-AD74-F7CB0CC811E0}"/>
+                <a16:creationId xmlns:a16="http://schemas.microsoft.com/office/drawing/2014/main" id="{2B180913-5F2C-4BFB-8D6B-7DC760C4CF07}"/>
               </a:ext>
             </a:extLst>
           </p:cNvPr>
@@ -15839,7 +15936,7 @@
           <p:cNvPr id="5" name="">
             <a:extLst xmlns:a="http://schemas.openxmlformats.org/drawingml/2006/main">
               <a:ext uri="{FF2B5EF4-FFF2-40B4-BE49-F238E27FC236}">
-                <a16:creationId xmlns:a16="http://schemas.microsoft.com/office/drawing/2014/main" id="{94D5C86C-F037-4A2B-BB07-7546FFEB69D9}"/>
+                <a16:creationId xmlns:a16="http://schemas.microsoft.com/office/drawing/2014/main" id="{AB862D1F-1F48-45A4-890D-1ECD6F81A5E6}"/>
               </a:ext>
             </a:extLst>
           </p:cNvPr>
@@ -15903,7 +16000,7 @@
           <p:cNvPr id="6" name="">
             <a:extLst xmlns:a="http://schemas.openxmlformats.org/drawingml/2006/main">
               <a:ext uri="{FF2B5EF4-FFF2-40B4-BE49-F238E27FC236}">
-                <a16:creationId xmlns:a16="http://schemas.microsoft.com/office/drawing/2014/main" id="{965C636E-43B8-4EFE-9503-D6991150CCB8}"/>
+                <a16:creationId xmlns:a16="http://schemas.microsoft.com/office/drawing/2014/main" id="{34D4370A-7CE2-4024-B733-08C66EBB686E}"/>
               </a:ext>
             </a:extLst>
           </p:cNvPr>
@@ -15967,7 +16064,7 @@
           <p:cNvPr id="7" name="">
             <a:extLst xmlns:a="http://schemas.openxmlformats.org/drawingml/2006/main">
               <a:ext uri="{FF2B5EF4-FFF2-40B4-BE49-F238E27FC236}">
-                <a16:creationId xmlns:a16="http://schemas.microsoft.com/office/drawing/2014/main" id="{25E4D943-23C9-4B64-8B4E-E27F56D3F3E6}"/>
+                <a16:creationId xmlns:a16="http://schemas.microsoft.com/office/drawing/2014/main" id="{9BDEB56D-DC10-4139-A8E9-E3BDD0D4FCEE}"/>
               </a:ext>
             </a:extLst>
           </p:cNvPr>
@@ -16002,7 +16099,7 @@
           <p:cNvPr id="8" name="">
             <a:extLst xmlns:a="http://schemas.openxmlformats.org/drawingml/2006/main">
               <a:ext uri="{FF2B5EF4-FFF2-40B4-BE49-F238E27FC236}">
-                <a16:creationId xmlns:a16="http://schemas.microsoft.com/office/drawing/2014/main" id="{8E138179-FA85-42C7-8089-E266D0D345DE}"/>
+                <a16:creationId xmlns:a16="http://schemas.microsoft.com/office/drawing/2014/main" id="{48E36B2A-94D3-49CC-B2F9-527B83A6475F}"/>
               </a:ext>
             </a:extLst>
           </p:cNvPr>
@@ -16066,7 +16163,7 @@
           <p:cNvPr id="9" name="">
             <a:extLst xmlns:a="http://schemas.openxmlformats.org/drawingml/2006/main">
               <a:ext uri="{FF2B5EF4-FFF2-40B4-BE49-F238E27FC236}">
-                <a16:creationId xmlns:a16="http://schemas.microsoft.com/office/drawing/2014/main" id="{CC257555-C68E-4DAC-96F8-A20551FE6126}"/>
+                <a16:creationId xmlns:a16="http://schemas.microsoft.com/office/drawing/2014/main" id="{B9A261FF-AEC6-4B81-90B7-748F3E7D4DB4}"/>
               </a:ext>
             </a:extLst>
           </p:cNvPr>
@@ -16130,7 +16227,7 @@
           <p:cNvPr id="10" name="">
             <a:extLst xmlns:a="http://schemas.openxmlformats.org/drawingml/2006/main">
               <a:ext uri="{FF2B5EF4-FFF2-40B4-BE49-F238E27FC236}">
-                <a16:creationId xmlns:a16="http://schemas.microsoft.com/office/drawing/2014/main" id="{7CC8C920-28DD-4C87-938C-C907E553835A}"/>
+                <a16:creationId xmlns:a16="http://schemas.microsoft.com/office/drawing/2014/main" id="{E7D4E63A-1E3E-4FB2-8A14-FC94AA7B425C}"/>
               </a:ext>
             </a:extLst>
           </p:cNvPr>
@@ -16165,7 +16262,7 @@
           <p:cNvPr id="11" name="">
             <a:extLst xmlns:a="http://schemas.openxmlformats.org/drawingml/2006/main">
               <a:ext uri="{FF2B5EF4-FFF2-40B4-BE49-F238E27FC236}">
-                <a16:creationId xmlns:a16="http://schemas.microsoft.com/office/drawing/2014/main" id="{133C5DDF-E685-4B7A-954F-17901AF2FEA2}"/>
+                <a16:creationId xmlns:a16="http://schemas.microsoft.com/office/drawing/2014/main" id="{9F060FE6-B0DF-49FB-9630-4462B17DBCF7}"/>
               </a:ext>
             </a:extLst>
           </p:cNvPr>
@@ -16229,7 +16326,7 @@
           <p:cNvPr id="12" name="">
             <a:extLst xmlns:a="http://schemas.openxmlformats.org/drawingml/2006/main">
               <a:ext uri="{FF2B5EF4-FFF2-40B4-BE49-F238E27FC236}">
-                <a16:creationId xmlns:a16="http://schemas.microsoft.com/office/drawing/2014/main" id="{35DC406E-969C-4146-9CEE-1166E3794189}"/>
+                <a16:creationId xmlns:a16="http://schemas.microsoft.com/office/drawing/2014/main" id="{6F1532C0-42B7-41F0-B915-0B1A46E57BF4}"/>
               </a:ext>
             </a:extLst>
           </p:cNvPr>
@@ -16293,7 +16390,7 @@
           <p:cNvPr id="13" name="">
             <a:extLst xmlns:a="http://schemas.openxmlformats.org/drawingml/2006/main">
               <a:ext uri="{FF2B5EF4-FFF2-40B4-BE49-F238E27FC236}">
-                <a16:creationId xmlns:a16="http://schemas.microsoft.com/office/drawing/2014/main" id="{D2A64918-6590-48BF-B72E-67BCCB742D7F}"/>
+                <a16:creationId xmlns:a16="http://schemas.microsoft.com/office/drawing/2014/main" id="{A18F9616-94E3-4F2B-B47B-0FE5238C56DB}"/>
               </a:ext>
             </a:extLst>
           </p:cNvPr>
@@ -16328,7 +16425,7 @@
           <p:cNvPr id="14" name="">
             <a:extLst xmlns:a="http://schemas.openxmlformats.org/drawingml/2006/main">
               <a:ext uri="{FF2B5EF4-FFF2-40B4-BE49-F238E27FC236}">
-                <a16:creationId xmlns:a16="http://schemas.microsoft.com/office/drawing/2014/main" id="{7815220A-00C0-4B80-B6F7-2ADBF3CE4D8E}"/>
+                <a16:creationId xmlns:a16="http://schemas.microsoft.com/office/drawing/2014/main" id="{7450E1CB-CE99-4D1B-96BD-44326398D28C}"/>
               </a:ext>
             </a:extLst>
           </p:cNvPr>
@@ -16392,7 +16489,7 @@
           <p:cNvPr id="15" name="">
             <a:extLst xmlns:a="http://schemas.openxmlformats.org/drawingml/2006/main">
               <a:ext uri="{FF2B5EF4-FFF2-40B4-BE49-F238E27FC236}">
-                <a16:creationId xmlns:a16="http://schemas.microsoft.com/office/drawing/2014/main" id="{0CFF6FAE-27F2-475B-BBAB-33B235E54776}"/>
+                <a16:creationId xmlns:a16="http://schemas.microsoft.com/office/drawing/2014/main" id="{FDF446A8-E225-4659-9D9A-F30A770BDDD5}"/>
               </a:ext>
             </a:extLst>
           </p:cNvPr>
@@ -16456,7 +16553,7 @@
           <p:cNvPr id="16" name="">
             <a:extLst xmlns:a="http://schemas.openxmlformats.org/drawingml/2006/main">
               <a:ext uri="{FF2B5EF4-FFF2-40B4-BE49-F238E27FC236}">
-                <a16:creationId xmlns:a16="http://schemas.microsoft.com/office/drawing/2014/main" id="{B56FD08B-D882-4E37-801E-5B5D3E2788BA}"/>
+                <a16:creationId xmlns:a16="http://schemas.microsoft.com/office/drawing/2014/main" id="{145B1464-2170-4138-8674-D56CF4317AB6}"/>
               </a:ext>
             </a:extLst>
           </p:cNvPr>
@@ -16491,7 +16588,7 @@
           <p:cNvPr id="17" name="">
             <a:extLst xmlns:a="http://schemas.openxmlformats.org/drawingml/2006/main">
               <a:ext uri="{FF2B5EF4-FFF2-40B4-BE49-F238E27FC236}">
-                <a16:creationId xmlns:a16="http://schemas.microsoft.com/office/drawing/2014/main" id="{7F65CBE6-BB4E-4653-B940-5A2BC05E3318}"/>
+                <a16:creationId xmlns:a16="http://schemas.microsoft.com/office/drawing/2014/main" id="{D081642D-00AD-4A78-A981-12688C4FE245}"/>
               </a:ext>
             </a:extLst>
           </p:cNvPr>
@@ -16555,7 +16652,7 @@
           <p:cNvPr id="18" name="">
             <a:extLst xmlns:a="http://schemas.openxmlformats.org/drawingml/2006/main">
               <a:ext uri="{FF2B5EF4-FFF2-40B4-BE49-F238E27FC236}">
-                <a16:creationId xmlns:a16="http://schemas.microsoft.com/office/drawing/2014/main" id="{B48DBEA0-ADB9-49D1-AC77-E3C2416B33E3}"/>
+                <a16:creationId xmlns:a16="http://schemas.microsoft.com/office/drawing/2014/main" id="{30F4BF8F-820A-4EE9-868E-3849D356647A}"/>
               </a:ext>
             </a:extLst>
           </p:cNvPr>
@@ -16619,7 +16716,7 @@
           <p:cNvPr id="19" name="">
             <a:extLst xmlns:a="http://schemas.openxmlformats.org/drawingml/2006/main">
               <a:ext uri="{FF2B5EF4-FFF2-40B4-BE49-F238E27FC236}">
-                <a16:creationId xmlns:a16="http://schemas.microsoft.com/office/drawing/2014/main" id="{838D05E1-1927-44DB-B2E2-94045C1AA8E2}"/>
+                <a16:creationId xmlns:a16="http://schemas.microsoft.com/office/drawing/2014/main" id="{C96B56D3-2964-487C-89BD-56237B3F0841}"/>
               </a:ext>
             </a:extLst>
           </p:cNvPr>
@@ -16654,7 +16751,7 @@
           <p:cNvPr id="20" name="">
             <a:extLst xmlns:a="http://schemas.openxmlformats.org/drawingml/2006/main">
               <a:ext uri="{FF2B5EF4-FFF2-40B4-BE49-F238E27FC236}">
-                <a16:creationId xmlns:a16="http://schemas.microsoft.com/office/drawing/2014/main" id="{6EDED8C9-3931-4BFB-88D0-FB9CF0250269}"/>
+                <a16:creationId xmlns:a16="http://schemas.microsoft.com/office/drawing/2014/main" id="{85ED77E1-24F1-40ED-A6C0-C8C47E8E5B13}"/>
               </a:ext>
             </a:extLst>
           </p:cNvPr>
@@ -16718,7 +16815,7 @@
           <p:cNvPr id="21" name="">
             <a:extLst xmlns:a="http://schemas.openxmlformats.org/drawingml/2006/main">
               <a:ext uri="{FF2B5EF4-FFF2-40B4-BE49-F238E27FC236}">
-                <a16:creationId xmlns:a16="http://schemas.microsoft.com/office/drawing/2014/main" id="{8E18D12F-3691-4950-9AFF-61B3186DD1DA}"/>
+                <a16:creationId xmlns:a16="http://schemas.microsoft.com/office/drawing/2014/main" id="{2ED20D4C-C242-4C25-8F00-DB2A0DB6A69E}"/>
               </a:ext>
             </a:extLst>
           </p:cNvPr>
@@ -16782,7 +16879,7 @@
           <p:cNvPr id="22" name="">
             <a:extLst xmlns:a="http://schemas.openxmlformats.org/drawingml/2006/main">
               <a:ext uri="{FF2B5EF4-FFF2-40B4-BE49-F238E27FC236}">
-                <a16:creationId xmlns:a16="http://schemas.microsoft.com/office/drawing/2014/main" id="{E9BFFE3E-A3BA-4E1D-A6F7-DE70701572EB}"/>
+                <a16:creationId xmlns:a16="http://schemas.microsoft.com/office/drawing/2014/main" id="{96B655B5-A6AE-43B4-941B-AB246297BCC5}"/>
               </a:ext>
             </a:extLst>
           </p:cNvPr>
@@ -16815,7 +16912,7 @@
           <p:cNvPr id="23" name="">
             <a:extLst xmlns:a="http://schemas.openxmlformats.org/drawingml/2006/main">
               <a:ext uri="{FF2B5EF4-FFF2-40B4-BE49-F238E27FC236}">
-                <a16:creationId xmlns:a16="http://schemas.microsoft.com/office/drawing/2014/main" id="{91FCAE6D-F19D-4CBE-8749-3F69E5C9A693}"/>
+                <a16:creationId xmlns:a16="http://schemas.microsoft.com/office/drawing/2014/main" id="{062C80BE-4E39-4D30-BE26-6B4D729FF465}"/>
               </a:ext>
             </a:extLst>
           </p:cNvPr>
@@ -16850,7 +16947,7 @@
           <p:cNvPr id="24" name="">
             <a:extLst xmlns:a="http://schemas.openxmlformats.org/drawingml/2006/main">
               <a:ext uri="{FF2B5EF4-FFF2-40B4-BE49-F238E27FC236}">
-                <a16:creationId xmlns:a16="http://schemas.microsoft.com/office/drawing/2014/main" id="{CC7F0D8A-AC8F-4056-902C-92071D5EB593}"/>
+                <a16:creationId xmlns:a16="http://schemas.microsoft.com/office/drawing/2014/main" id="{9072F729-8970-4900-954F-D132E1F0EA17}"/>
               </a:ext>
             </a:extLst>
           </p:cNvPr>
@@ -16914,7 +17011,7 @@
           <p:cNvPr id="25" name="">
             <a:extLst xmlns:a="http://schemas.openxmlformats.org/drawingml/2006/main">
               <a:ext uri="{FF2B5EF4-FFF2-40B4-BE49-F238E27FC236}">
-                <a16:creationId xmlns:a16="http://schemas.microsoft.com/office/drawing/2014/main" id="{730A7412-FEBD-484F-815C-3BBC71E8FAF4}"/>
+                <a16:creationId xmlns:a16="http://schemas.microsoft.com/office/drawing/2014/main" id="{AF3055E0-B70A-4290-99FF-9A2E68E63682}"/>
               </a:ext>
             </a:extLst>
           </p:cNvPr>
@@ -16978,7 +17075,7 @@
           <p:cNvPr id="26" name="">
             <a:extLst xmlns:a="http://schemas.openxmlformats.org/drawingml/2006/main">
               <a:ext uri="{FF2B5EF4-FFF2-40B4-BE49-F238E27FC236}">
-                <a16:creationId xmlns:a16="http://schemas.microsoft.com/office/drawing/2014/main" id="{FD01AA55-DB94-4C35-9297-0699C25EBDC6}"/>
+                <a16:creationId xmlns:a16="http://schemas.microsoft.com/office/drawing/2014/main" id="{0B8A8940-F11B-456D-9905-ECD12F7D9549}"/>
               </a:ext>
             </a:extLst>
           </p:cNvPr>
@@ -17011,7 +17108,7 @@
           <p:cNvPr id="27" name="">
             <a:extLst xmlns:a="http://schemas.openxmlformats.org/drawingml/2006/main">
               <a:ext uri="{FF2B5EF4-FFF2-40B4-BE49-F238E27FC236}">
-                <a16:creationId xmlns:a16="http://schemas.microsoft.com/office/drawing/2014/main" id="{99EE6877-7638-4D92-8E27-43E60302F9DC}"/>
+                <a16:creationId xmlns:a16="http://schemas.microsoft.com/office/drawing/2014/main" id="{C953653D-7751-4A12-8B1C-A28764DF3A49}"/>
               </a:ext>
             </a:extLst>
           </p:cNvPr>
@@ -17046,7 +17143,7 @@
           <p:cNvPr id="28" name="">
             <a:extLst xmlns:a="http://schemas.openxmlformats.org/drawingml/2006/main">
               <a:ext uri="{FF2B5EF4-FFF2-40B4-BE49-F238E27FC236}">
-                <a16:creationId xmlns:a16="http://schemas.microsoft.com/office/drawing/2014/main" id="{1F6985D5-996F-4AE0-85EF-6D5ADAE770E4}"/>
+                <a16:creationId xmlns:a16="http://schemas.microsoft.com/office/drawing/2014/main" id="{BA3AD2F0-3594-4219-A83F-007DB6A1F98A}"/>
               </a:ext>
             </a:extLst>
           </p:cNvPr>
@@ -17110,7 +17207,7 @@
           <p:cNvPr id="29" name="">
             <a:extLst xmlns:a="http://schemas.openxmlformats.org/drawingml/2006/main">
               <a:ext uri="{FF2B5EF4-FFF2-40B4-BE49-F238E27FC236}">
-                <a16:creationId xmlns:a16="http://schemas.microsoft.com/office/drawing/2014/main" id="{ED9D233D-1453-47BD-8AA3-830D1FFE7011}"/>
+                <a16:creationId xmlns:a16="http://schemas.microsoft.com/office/drawing/2014/main" id="{830E2E53-AED9-4BB7-8B28-691FFDD15CAB}"/>
               </a:ext>
             </a:extLst>
           </p:cNvPr>
@@ -17174,7 +17271,7 @@
           <p:cNvPr id="30" name="">
             <a:extLst xmlns:a="http://schemas.openxmlformats.org/drawingml/2006/main">
               <a:ext uri="{FF2B5EF4-FFF2-40B4-BE49-F238E27FC236}">
-                <a16:creationId xmlns:a16="http://schemas.microsoft.com/office/drawing/2014/main" id="{E89EA457-A593-4DED-81F2-5ABEFA15E5F9}"/>
+                <a16:creationId xmlns:a16="http://schemas.microsoft.com/office/drawing/2014/main" id="{78DF734C-E671-4BFE-801B-A366C9F8D98C}"/>
               </a:ext>
             </a:extLst>
           </p:cNvPr>
@@ -17207,7 +17304,7 @@
           <p:cNvPr id="31" name="">
             <a:extLst xmlns:a="http://schemas.openxmlformats.org/drawingml/2006/main">
               <a:ext uri="{FF2B5EF4-FFF2-40B4-BE49-F238E27FC236}">
-                <a16:creationId xmlns:a16="http://schemas.microsoft.com/office/drawing/2014/main" id="{87147237-BFC8-4B72-BDE1-8FD2DAC06219}"/>
+                <a16:creationId xmlns:a16="http://schemas.microsoft.com/office/drawing/2014/main" id="{FE0A710D-9DA3-4ABF-98C6-DA8515B7FDEA}"/>
               </a:ext>
             </a:extLst>
           </p:cNvPr>
@@ -17242,7 +17339,7 @@
           <p:cNvPr id="32" name="">
             <a:extLst xmlns:a="http://schemas.openxmlformats.org/drawingml/2006/main">
               <a:ext uri="{FF2B5EF4-FFF2-40B4-BE49-F238E27FC236}">
-                <a16:creationId xmlns:a16="http://schemas.microsoft.com/office/drawing/2014/main" id="{1BD328B8-A007-46AE-B7DF-5E89E78C4DE3}"/>
+                <a16:creationId xmlns:a16="http://schemas.microsoft.com/office/drawing/2014/main" id="{70A2560F-F6FA-40E1-A12B-673089C8D761}"/>
               </a:ext>
             </a:extLst>
           </p:cNvPr>
@@ -17306,7 +17403,7 @@
           <p:cNvPr id="33" name="">
             <a:extLst xmlns:a="http://schemas.openxmlformats.org/drawingml/2006/main">
               <a:ext uri="{FF2B5EF4-FFF2-40B4-BE49-F238E27FC236}">
-                <a16:creationId xmlns:a16="http://schemas.microsoft.com/office/drawing/2014/main" id="{CB379BD2-2EBC-417D-9560-2126D5C20A35}"/>
+                <a16:creationId xmlns:a16="http://schemas.microsoft.com/office/drawing/2014/main" id="{72F64A18-295A-45AE-828D-491AD31D6083}"/>
               </a:ext>
             </a:extLst>
           </p:cNvPr>
@@ -17370,7 +17467,7 @@
           <p:cNvPr id="34" name="">
             <a:extLst xmlns:a="http://schemas.openxmlformats.org/drawingml/2006/main">
               <a:ext uri="{FF2B5EF4-FFF2-40B4-BE49-F238E27FC236}">
-                <a16:creationId xmlns:a16="http://schemas.microsoft.com/office/drawing/2014/main" id="{4D5815FA-F5D7-4DCF-9156-565A8476FC66}"/>
+                <a16:creationId xmlns:a16="http://schemas.microsoft.com/office/drawing/2014/main" id="{1D07030D-D993-4F35-AA76-9F602C6E35F2}"/>
               </a:ext>
             </a:extLst>
           </p:cNvPr>
@@ -17434,7 +17531,7 @@
           <p:cNvPr id="35" name="">
             <a:extLst xmlns:a="http://schemas.openxmlformats.org/drawingml/2006/main">
               <a:ext uri="{FF2B5EF4-FFF2-40B4-BE49-F238E27FC236}">
-                <a16:creationId xmlns:a16="http://schemas.microsoft.com/office/drawing/2014/main" id="{0FF2AE13-C9A3-49FF-B097-9C2482703771}"/>
+                <a16:creationId xmlns:a16="http://schemas.microsoft.com/office/drawing/2014/main" id="{36A021CA-82F8-48E1-9F8F-54BB59F3996D}"/>
               </a:ext>
             </a:extLst>
           </p:cNvPr>
@@ -17467,7 +17564,7 @@
           <p:cNvPr id="36" name="">
             <a:extLst xmlns:a="http://schemas.openxmlformats.org/drawingml/2006/main">
               <a:ext uri="{FF2B5EF4-FFF2-40B4-BE49-F238E27FC236}">
-                <a16:creationId xmlns:a16="http://schemas.microsoft.com/office/drawing/2014/main" id="{BF4C0619-02AC-489F-9121-D61148E80A0C}"/>
+                <a16:creationId xmlns:a16="http://schemas.microsoft.com/office/drawing/2014/main" id="{0B3F581C-C4C9-49EA-9229-38604AD92F37}"/>
               </a:ext>
             </a:extLst>
           </p:cNvPr>
@@ -17531,7 +17628,7 @@
           <p:cNvPr id="37" name="">
             <a:extLst xmlns:a="http://schemas.openxmlformats.org/drawingml/2006/main">
               <a:ext uri="{FF2B5EF4-FFF2-40B4-BE49-F238E27FC236}">
-                <a16:creationId xmlns:a16="http://schemas.microsoft.com/office/drawing/2014/main" id="{48B83B9F-3AB4-4C08-B25A-0D66B11A06EB}"/>
+                <a16:creationId xmlns:a16="http://schemas.microsoft.com/office/drawing/2014/main" id="{7B11AB57-68EE-405A-A38D-93467E71EC33}"/>
               </a:ext>
             </a:extLst>
           </p:cNvPr>
@@ -17593,7 +17690,7 @@
     </p:spTree>
     <p:extLst>
       <p:ext uri="{BB962C8B-B14F-4D97-AF65-F5344CB8AC3E}">
-        <p14:creationId xmlns:p14="http://schemas.microsoft.com/office/powerpoint/2010/main" val="1422898082"/>
+        <p14:creationId xmlns:p14="http://schemas.microsoft.com/office/powerpoint/2010/main" val="508056716"/>
       </p:ext>
     </p:extLst>
   </p:cSld>

--- a/assets/investor-deck/Tecnotitan-Investor-Deck-ES.pptx
+++ b/assets/investor-deck/Tecnotitan-Investor-Deck-ES.pptx
@@ -2,24 +2,24 @@
 <file path=ppt/presentation.xml><?xml version="1.0" encoding="utf-8"?>
 <p:presentation xmlns:p="http://schemas.openxmlformats.org/presentationml/2006/main">
   <p:sldMasterIdLst>
-    <p:sldMasterId xmlns:r="http://schemas.openxmlformats.org/officeDocument/2006/relationships" id="2147483648" r:id="R415773dd8c264665"/>
+    <p:sldMasterId xmlns:r="http://schemas.openxmlformats.org/officeDocument/2006/relationships" id="2147483648" r:id="Rcbfd0ea3a4fc4554"/>
   </p:sldMasterIdLst>
   <p:notesMasterIdLst>
-    <p:notesMasterId xmlns:r="http://schemas.openxmlformats.org/officeDocument/2006/relationships" r:id="R58ed9e65d3114510"/>
+    <p:notesMasterId xmlns:r="http://schemas.openxmlformats.org/officeDocument/2006/relationships" r:id="R9be703abdfe047a0"/>
   </p:notesMasterIdLst>
   <p:sldIdLst>
-    <p:sldId xmlns:r="http://schemas.openxmlformats.org/officeDocument/2006/relationships" id="256" r:id="R30af14802f024815"/>
-    <p:sldId xmlns:r="http://schemas.openxmlformats.org/officeDocument/2006/relationships" id="257" r:id="R28a5db9038324c03"/>
-    <p:sldId xmlns:r="http://schemas.openxmlformats.org/officeDocument/2006/relationships" id="258" r:id="R1669e85907684f4f"/>
-    <p:sldId xmlns:r="http://schemas.openxmlformats.org/officeDocument/2006/relationships" id="259" r:id="R7e35ca2a0a2c43cb"/>
-    <p:sldId xmlns:r="http://schemas.openxmlformats.org/officeDocument/2006/relationships" id="260" r:id="R16eaf0ca09544572"/>
-    <p:sldId xmlns:r="http://schemas.openxmlformats.org/officeDocument/2006/relationships" id="261" r:id="R1f0943379b984514"/>
-    <p:sldId xmlns:r="http://schemas.openxmlformats.org/officeDocument/2006/relationships" id="262" r:id="R2eff50bb1cca4cd3"/>
-    <p:sldId xmlns:r="http://schemas.openxmlformats.org/officeDocument/2006/relationships" id="263" r:id="Raad83ecc270e4475"/>
-    <p:sldId xmlns:r="http://schemas.openxmlformats.org/officeDocument/2006/relationships" id="264" r:id="R70ffbf07dc0a4cd7"/>
-    <p:sldId xmlns:r="http://schemas.openxmlformats.org/officeDocument/2006/relationships" id="265" r:id="Rf5ba58a584af4061"/>
-    <p:sldId xmlns:r="http://schemas.openxmlformats.org/officeDocument/2006/relationships" id="266" r:id="Ra4291e060cc74014"/>
-    <p:sldId xmlns:r="http://schemas.openxmlformats.org/officeDocument/2006/relationships" id="267" r:id="R44ac9a09d69a4ae5"/>
+    <p:sldId xmlns:r="http://schemas.openxmlformats.org/officeDocument/2006/relationships" id="256" r:id="Rb8534f7f2f424d67"/>
+    <p:sldId xmlns:r="http://schemas.openxmlformats.org/officeDocument/2006/relationships" id="257" r:id="Refa6a34f0bbb4375"/>
+    <p:sldId xmlns:r="http://schemas.openxmlformats.org/officeDocument/2006/relationships" id="258" r:id="R387e3874348f434a"/>
+    <p:sldId xmlns:r="http://schemas.openxmlformats.org/officeDocument/2006/relationships" id="259" r:id="R824758f2af3a4a4b"/>
+    <p:sldId xmlns:r="http://schemas.openxmlformats.org/officeDocument/2006/relationships" id="260" r:id="R2078f805c7174f22"/>
+    <p:sldId xmlns:r="http://schemas.openxmlformats.org/officeDocument/2006/relationships" id="261" r:id="Rff537426730842e3"/>
+    <p:sldId xmlns:r="http://schemas.openxmlformats.org/officeDocument/2006/relationships" id="262" r:id="Rcd98465c1344483c"/>
+    <p:sldId xmlns:r="http://schemas.openxmlformats.org/officeDocument/2006/relationships" id="263" r:id="R7a290320399740b3"/>
+    <p:sldId xmlns:r="http://schemas.openxmlformats.org/officeDocument/2006/relationships" id="264" r:id="Rdb995d36dc784cea"/>
+    <p:sldId xmlns:r="http://schemas.openxmlformats.org/officeDocument/2006/relationships" id="265" r:id="R343f38ba7ede454a"/>
+    <p:sldId xmlns:r="http://schemas.openxmlformats.org/officeDocument/2006/relationships" id="266" r:id="Rd795df4b84ce4899"/>
+    <p:sldId xmlns:r="http://schemas.openxmlformats.org/officeDocument/2006/relationships" id="267" r:id="R7f6c50f1f2ef4e4c"/>
   </p:sldIdLst>
   <p:sldSz cx="12192000" cy="6858000"/>
   <p:notesSz cx="6858000" cy="9144000"/>
@@ -1292,7 +1292,7 @@
   </p:cSld>
   <p:clrMap bg1="lt1" tx1="dk1" bg2="lt2" tx2="dk2" accent1="accent1" accent2="accent2" accent3="accent3" accent4="accent4" accent5="accent5" accent6="accent6" hlink="hlink" folHlink="folHlink"/>
   <p:sldLayoutIdLst>
-    <p:sldLayoutId xmlns:r="http://schemas.openxmlformats.org/officeDocument/2006/relationships" id="2147483649" r:id="R65a1f1c9a044410d"/>
+    <p:sldLayoutId xmlns:r="http://schemas.openxmlformats.org/officeDocument/2006/relationships" id="2147483649" r:id="Rba62ee2aa8cb4307"/>
   </p:sldLayoutIdLst>
   <p:txStyles>
     <p:titleStyle>
@@ -1794,7 +1794,7 @@
           <p:nvPr/>
         </p:nvPicPr>
         <p:blipFill>
-          <a:blip xmlns:r="http://schemas.openxmlformats.org/officeDocument/2006/relationships" xmlns:a="http://schemas.openxmlformats.org/drawingml/2006/main" r:embed="R893a4839d4384458"/>
+          <a:blip xmlns:r="http://schemas.openxmlformats.org/officeDocument/2006/relationships" xmlns:a="http://schemas.openxmlformats.org/drawingml/2006/main" r:embed="Rc73f6ee656b94f15"/>
           <a:srcRect xmlns:a="http://schemas.openxmlformats.org/drawingml/2006/main" l="0" t="7813" r="0" b="7813"/>
           <a:stretch xmlns:a="http://schemas.openxmlformats.org/drawingml/2006/main">
             <a:fillRect l="0" t="0" r="0" b="0"/>
@@ -1815,7 +1815,7 @@
           <p:cNvPr id="2" name="">
             <a:extLst xmlns:a="http://schemas.openxmlformats.org/drawingml/2006/main">
               <a:ext uri="{FF2B5EF4-FFF2-40B4-BE49-F238E27FC236}">
-                <a16:creationId xmlns:a16="http://schemas.microsoft.com/office/drawing/2014/main" id="{FF5EBB51-CCB4-4E10-9CDC-FC1720771C77}"/>
+                <a16:creationId xmlns:a16="http://schemas.microsoft.com/office/drawing/2014/main" id="{7C0E72BE-8375-445C-BB29-276AD4C0E769}"/>
               </a:ext>
             </a:extLst>
           </p:cNvPr>
@@ -1852,7 +1852,7 @@
           <p:cNvPr id="3" name="">
             <a:extLst xmlns:a="http://schemas.openxmlformats.org/drawingml/2006/main">
               <a:ext uri="{FF2B5EF4-FFF2-40B4-BE49-F238E27FC236}">
-                <a16:creationId xmlns:a16="http://schemas.microsoft.com/office/drawing/2014/main" id="{FAD35A3B-1962-41FB-BFBC-3787E9D06CC2}"/>
+                <a16:creationId xmlns:a16="http://schemas.microsoft.com/office/drawing/2014/main" id="{114E776B-63A7-40B4-8A73-6269F7117BE5}"/>
               </a:ext>
             </a:extLst>
           </p:cNvPr>
@@ -1889,7 +1889,7 @@
           <p:cNvPr id="4" name="">
             <a:extLst xmlns:a="http://schemas.openxmlformats.org/drawingml/2006/main">
               <a:ext uri="{FF2B5EF4-FFF2-40B4-BE49-F238E27FC236}">
-                <a16:creationId xmlns:a16="http://schemas.microsoft.com/office/drawing/2014/main" id="{6C4C08D1-0118-436A-AA54-FB535D8F6A1C}"/>
+                <a16:creationId xmlns:a16="http://schemas.microsoft.com/office/drawing/2014/main" id="{6283F6C1-9CC0-45F6-9B9A-CF2D51F820F0}"/>
               </a:ext>
             </a:extLst>
           </p:cNvPr>
@@ -1953,7 +1953,7 @@
           <p:cNvPr id="5" name="">
             <a:extLst xmlns:a="http://schemas.openxmlformats.org/drawingml/2006/main">
               <a:ext uri="{FF2B5EF4-FFF2-40B4-BE49-F238E27FC236}">
-                <a16:creationId xmlns:a16="http://schemas.microsoft.com/office/drawing/2014/main" id="{B02779FF-AA29-47BB-8FD0-E7215E6A88B0}"/>
+                <a16:creationId xmlns:a16="http://schemas.microsoft.com/office/drawing/2014/main" id="{082DB8AB-A1EE-4569-AECC-3D8C632F9359}"/>
               </a:ext>
             </a:extLst>
           </p:cNvPr>
@@ -2017,7 +2017,7 @@
           <p:cNvPr id="6" name="">
             <a:extLst xmlns:a="http://schemas.openxmlformats.org/drawingml/2006/main">
               <a:ext uri="{FF2B5EF4-FFF2-40B4-BE49-F238E27FC236}">
-                <a16:creationId xmlns:a16="http://schemas.microsoft.com/office/drawing/2014/main" id="{B1188675-8EA0-44E3-9FFE-ADF9B833C742}"/>
+                <a16:creationId xmlns:a16="http://schemas.microsoft.com/office/drawing/2014/main" id="{670F4B13-C5B0-4AD8-BC86-83E72C58BFE9}"/>
               </a:ext>
             </a:extLst>
           </p:cNvPr>
@@ -2050,7 +2050,7 @@
           <p:cNvPr id="7" name="">
             <a:extLst xmlns:a="http://schemas.openxmlformats.org/drawingml/2006/main">
               <a:ext uri="{FF2B5EF4-FFF2-40B4-BE49-F238E27FC236}">
-                <a16:creationId xmlns:a16="http://schemas.microsoft.com/office/drawing/2014/main" id="{6EB2C7CA-9037-4BCB-8BBB-A7B91B11BB2D}"/>
+                <a16:creationId xmlns:a16="http://schemas.microsoft.com/office/drawing/2014/main" id="{C632BD38-02A0-452A-9974-02D60E4F580B}"/>
               </a:ext>
             </a:extLst>
           </p:cNvPr>
@@ -2114,7 +2114,7 @@
           <p:cNvPr id="8" name="">
             <a:extLst xmlns:a="http://schemas.openxmlformats.org/drawingml/2006/main">
               <a:ext uri="{FF2B5EF4-FFF2-40B4-BE49-F238E27FC236}">
-                <a16:creationId xmlns:a16="http://schemas.microsoft.com/office/drawing/2014/main" id="{75DA2EC8-A9C5-4AC7-9A6D-913D961E29D3}"/>
+                <a16:creationId xmlns:a16="http://schemas.microsoft.com/office/drawing/2014/main" id="{5EB0AD97-371A-431C-859B-108F0C659CF6}"/>
               </a:ext>
             </a:extLst>
           </p:cNvPr>
@@ -2178,7 +2178,7 @@
           <p:cNvPr id="9" name="">
             <a:extLst xmlns:a="http://schemas.openxmlformats.org/drawingml/2006/main">
               <a:ext uri="{FF2B5EF4-FFF2-40B4-BE49-F238E27FC236}">
-                <a16:creationId xmlns:a16="http://schemas.microsoft.com/office/drawing/2014/main" id="{ABDE50DB-3EE9-4BCB-BB52-4F7A08EAA0DC}"/>
+                <a16:creationId xmlns:a16="http://schemas.microsoft.com/office/drawing/2014/main" id="{61E84003-93D7-43DA-B066-A9D5DF6BCB49}"/>
               </a:ext>
             </a:extLst>
           </p:cNvPr>
@@ -2213,7 +2213,7 @@
           <p:cNvPr id="10" name="">
             <a:extLst xmlns:a="http://schemas.openxmlformats.org/drawingml/2006/main">
               <a:ext uri="{FF2B5EF4-FFF2-40B4-BE49-F238E27FC236}">
-                <a16:creationId xmlns:a16="http://schemas.microsoft.com/office/drawing/2014/main" id="{79BB107B-05DE-455F-8094-7B0229E659E3}"/>
+                <a16:creationId xmlns:a16="http://schemas.microsoft.com/office/drawing/2014/main" id="{3EB87D39-454C-4B01-B2DC-9859EC2286F1}"/>
               </a:ext>
             </a:extLst>
           </p:cNvPr>
@@ -2277,7 +2277,7 @@
           <p:cNvPr id="11" name="">
             <a:extLst xmlns:a="http://schemas.openxmlformats.org/drawingml/2006/main">
               <a:ext uri="{FF2B5EF4-FFF2-40B4-BE49-F238E27FC236}">
-                <a16:creationId xmlns:a16="http://schemas.microsoft.com/office/drawing/2014/main" id="{C669ECD6-7B1B-4441-BCA1-4CAA171B39C5}"/>
+                <a16:creationId xmlns:a16="http://schemas.microsoft.com/office/drawing/2014/main" id="{A9842557-3D64-48A1-B678-E3069A2D01C0}"/>
               </a:ext>
             </a:extLst>
           </p:cNvPr>
@@ -2312,7 +2312,7 @@
           <p:cNvPr id="12" name="">
             <a:extLst xmlns:a="http://schemas.openxmlformats.org/drawingml/2006/main">
               <a:ext uri="{FF2B5EF4-FFF2-40B4-BE49-F238E27FC236}">
-                <a16:creationId xmlns:a16="http://schemas.microsoft.com/office/drawing/2014/main" id="{8C5F48C6-DCE7-434B-987C-67D604A6E6D7}"/>
+                <a16:creationId xmlns:a16="http://schemas.microsoft.com/office/drawing/2014/main" id="{036639D3-ABB7-48B5-9EA7-2BB45AB47521}"/>
               </a:ext>
             </a:extLst>
           </p:cNvPr>
@@ -2376,7 +2376,7 @@
           <p:cNvPr id="13" name="">
             <a:extLst xmlns:a="http://schemas.openxmlformats.org/drawingml/2006/main">
               <a:ext uri="{FF2B5EF4-FFF2-40B4-BE49-F238E27FC236}">
-                <a16:creationId xmlns:a16="http://schemas.microsoft.com/office/drawing/2014/main" id="{483561CF-132F-47D9-9FEF-DD71D787E58D}"/>
+                <a16:creationId xmlns:a16="http://schemas.microsoft.com/office/drawing/2014/main" id="{E5CA8E2B-57DE-48CC-BAA7-B2DE510E423B}"/>
               </a:ext>
             </a:extLst>
           </p:cNvPr>
@@ -2411,7 +2411,7 @@
           <p:cNvPr id="14" name="">
             <a:extLst xmlns:a="http://schemas.openxmlformats.org/drawingml/2006/main">
               <a:ext uri="{FF2B5EF4-FFF2-40B4-BE49-F238E27FC236}">
-                <a16:creationId xmlns:a16="http://schemas.microsoft.com/office/drawing/2014/main" id="{9DE0CAFB-647A-4AA0-929D-CF72D1AE7ECB}"/>
+                <a16:creationId xmlns:a16="http://schemas.microsoft.com/office/drawing/2014/main" id="{0AADE6F6-E056-4D6E-8207-14311EA5A975}"/>
               </a:ext>
             </a:extLst>
           </p:cNvPr>
@@ -2475,7 +2475,7 @@
           <p:cNvPr id="15" name="">
             <a:extLst xmlns:a="http://schemas.openxmlformats.org/drawingml/2006/main">
               <a:ext uri="{FF2B5EF4-FFF2-40B4-BE49-F238E27FC236}">
-                <a16:creationId xmlns:a16="http://schemas.microsoft.com/office/drawing/2014/main" id="{3D8595F3-BAF3-42AF-B7BA-060448F16393}"/>
+                <a16:creationId xmlns:a16="http://schemas.microsoft.com/office/drawing/2014/main" id="{E0A446DC-68FE-4017-A5AC-59E9EFB39CDB}"/>
               </a:ext>
             </a:extLst>
           </p:cNvPr>
@@ -2529,7 +2529,7 @@
                 <a:ea typeface="Aptos"/>
                 <a:cs typeface="Aptos"/>
               </a:rPr>
-              <a:t>6 líneas de producto</a:t>
+              <a:t>US$500K pre-seed</a:t>
             </a:r>
           </a:p>
         </p:txBody>
@@ -2539,7 +2539,7 @@
           <p:cNvPr id="16" name="">
             <a:extLst xmlns:a="http://schemas.openxmlformats.org/drawingml/2006/main">
               <a:ext uri="{FF2B5EF4-FFF2-40B4-BE49-F238E27FC236}">
-                <a16:creationId xmlns:a16="http://schemas.microsoft.com/office/drawing/2014/main" id="{EDA903B1-9BCC-4BC5-9E20-E58C42F60ABF}"/>
+                <a16:creationId xmlns:a16="http://schemas.microsoft.com/office/drawing/2014/main" id="{306D9108-8027-4A36-809B-266E2D5BC993}"/>
               </a:ext>
             </a:extLst>
           </p:cNvPr>
@@ -2574,7 +2574,7 @@
           <p:cNvPr id="17" name="">
             <a:extLst xmlns:a="http://schemas.openxmlformats.org/drawingml/2006/main">
               <a:ext uri="{FF2B5EF4-FFF2-40B4-BE49-F238E27FC236}">
-                <a16:creationId xmlns:a16="http://schemas.microsoft.com/office/drawing/2014/main" id="{59768E5F-5F36-47EB-BA58-075EFD98F76A}"/>
+                <a16:creationId xmlns:a16="http://schemas.microsoft.com/office/drawing/2014/main" id="{F9DD9B94-1952-45DA-85CF-D955DA318C3D}"/>
               </a:ext>
             </a:extLst>
           </p:cNvPr>
@@ -2638,7 +2638,7 @@
           <p:cNvPr id="18" name="">
             <a:extLst xmlns:a="http://schemas.openxmlformats.org/drawingml/2006/main">
               <a:ext uri="{FF2B5EF4-FFF2-40B4-BE49-F238E27FC236}">
-                <a16:creationId xmlns:a16="http://schemas.microsoft.com/office/drawing/2014/main" id="{18612E2A-8734-4F85-A575-332A1AB7DD08}"/>
+                <a16:creationId xmlns:a16="http://schemas.microsoft.com/office/drawing/2014/main" id="{02C55C0E-2BFE-48D8-9D6A-1AD85977FCC6}"/>
               </a:ext>
             </a:extLst>
           </p:cNvPr>
@@ -2692,7 +2692,7 @@
                 <a:ea typeface="Aptos"/>
                 <a:cs typeface="Aptos"/>
               </a:rPr>
-              <a:t>5 divisiones tecnológicas</a:t>
+              <a:t>18 meses de runway</a:t>
             </a:r>
           </a:p>
         </p:txBody>
@@ -2702,7 +2702,7 @@
           <p:cNvPr id="19" name="">
             <a:extLst xmlns:a="http://schemas.openxmlformats.org/drawingml/2006/main">
               <a:ext uri="{FF2B5EF4-FFF2-40B4-BE49-F238E27FC236}">
-                <a16:creationId xmlns:a16="http://schemas.microsoft.com/office/drawing/2014/main" id="{67CCD17A-BF83-460C-A66D-286CA91F1B52}"/>
+                <a16:creationId xmlns:a16="http://schemas.microsoft.com/office/drawing/2014/main" id="{F383A52C-B3D5-4E67-92BC-92598898C921}"/>
               </a:ext>
             </a:extLst>
           </p:cNvPr>
@@ -2737,7 +2737,7 @@
           <p:cNvPr id="20" name="">
             <a:extLst xmlns:a="http://schemas.openxmlformats.org/drawingml/2006/main">
               <a:ext uri="{FF2B5EF4-FFF2-40B4-BE49-F238E27FC236}">
-                <a16:creationId xmlns:a16="http://schemas.microsoft.com/office/drawing/2014/main" id="{637F67C5-1122-4506-9948-53CF92385CBF}"/>
+                <a16:creationId xmlns:a16="http://schemas.microsoft.com/office/drawing/2014/main" id="{9C4F9820-00A0-4E46-9373-F54E86314A3B}"/>
               </a:ext>
             </a:extLst>
           </p:cNvPr>
@@ -2801,7 +2801,7 @@
           <p:cNvPr id="21" name="">
             <a:extLst xmlns:a="http://schemas.openxmlformats.org/drawingml/2006/main">
               <a:ext uri="{FF2B5EF4-FFF2-40B4-BE49-F238E27FC236}">
-                <a16:creationId xmlns:a16="http://schemas.microsoft.com/office/drawing/2014/main" id="{FFEAE4FF-75F1-4CD0-A4FF-8849CA22E6D8}"/>
+                <a16:creationId xmlns:a16="http://schemas.microsoft.com/office/drawing/2014/main" id="{D1220BA1-4F35-47FE-AFD5-834DB74C448E}"/>
               </a:ext>
             </a:extLst>
           </p:cNvPr>
@@ -2855,7 +2855,7 @@
                 <a:ea typeface="Aptos"/>
                 <a:cs typeface="Aptos"/>
               </a:rPr>
-              <a:t>Equipo lean en ejecución</a:t>
+              <a:t>6 líneas de producto</a:t>
             </a:r>
           </a:p>
         </p:txBody>
@@ -2865,7 +2865,7 @@
           <p:cNvPr id="22" name="">
             <a:extLst xmlns:a="http://schemas.openxmlformats.org/drawingml/2006/main">
               <a:ext uri="{FF2B5EF4-FFF2-40B4-BE49-F238E27FC236}">
-                <a16:creationId xmlns:a16="http://schemas.microsoft.com/office/drawing/2014/main" id="{0B6C6408-C8B8-4883-B99D-5E0DBF1F3E7A}"/>
+                <a16:creationId xmlns:a16="http://schemas.microsoft.com/office/drawing/2014/main" id="{31A292F4-A7D5-4B6C-9F9F-5BAF8D7C2AB7}"/>
               </a:ext>
             </a:extLst>
           </p:cNvPr>
@@ -2929,7 +2929,7 @@
           <p:cNvPr id="23" name="">
             <a:extLst xmlns:a="http://schemas.openxmlformats.org/drawingml/2006/main">
               <a:ext uri="{FF2B5EF4-FFF2-40B4-BE49-F238E27FC236}">
-                <a16:creationId xmlns:a16="http://schemas.microsoft.com/office/drawing/2014/main" id="{0F032CB8-1A77-4A26-9700-0478E9EF367B}"/>
+                <a16:creationId xmlns:a16="http://schemas.microsoft.com/office/drawing/2014/main" id="{D4CED479-6B1C-49F4-B52D-7C5D3C904888}"/>
               </a:ext>
             </a:extLst>
           </p:cNvPr>
@@ -2962,7 +2962,7 @@
           <p:cNvPr id="24" name="">
             <a:extLst xmlns:a="http://schemas.openxmlformats.org/drawingml/2006/main">
               <a:ext uri="{FF2B5EF4-FFF2-40B4-BE49-F238E27FC236}">
-                <a16:creationId xmlns:a16="http://schemas.microsoft.com/office/drawing/2014/main" id="{B71A6351-54BA-4359-9ECD-68307F39C3AE}"/>
+                <a16:creationId xmlns:a16="http://schemas.microsoft.com/office/drawing/2014/main" id="{EFF46392-0594-462F-90D4-EB65F5F03891}"/>
               </a:ext>
             </a:extLst>
           </p:cNvPr>
@@ -3026,7 +3026,7 @@
           <p:cNvPr id="25" name="">
             <a:extLst xmlns:a="http://schemas.openxmlformats.org/drawingml/2006/main">
               <a:ext uri="{FF2B5EF4-FFF2-40B4-BE49-F238E27FC236}">
-                <a16:creationId xmlns:a16="http://schemas.microsoft.com/office/drawing/2014/main" id="{89FC7486-6B8C-45D1-B44E-28F64F39AFF9}"/>
+                <a16:creationId xmlns:a16="http://schemas.microsoft.com/office/drawing/2014/main" id="{05DA3FB6-EA22-4F81-BAC1-4D47B15AAFF3}"/>
               </a:ext>
             </a:extLst>
           </p:cNvPr>
@@ -3088,7 +3088,7 @@
     </p:spTree>
     <p:extLst>
       <p:ext uri="{BB962C8B-B14F-4D97-AF65-F5344CB8AC3E}">
-        <p14:creationId xmlns:p14="http://schemas.microsoft.com/office/powerpoint/2010/main" val="1228210679"/>
+        <p14:creationId xmlns:p14="http://schemas.microsoft.com/office/powerpoint/2010/main" val="2110873583"/>
       </p:ext>
     </p:extLst>
   </p:cSld>
@@ -3116,7 +3116,7 @@
           <p:nvPr/>
         </p:nvPicPr>
         <p:blipFill>
-          <a:blip xmlns:r="http://schemas.openxmlformats.org/officeDocument/2006/relationships" xmlns:a="http://schemas.openxmlformats.org/drawingml/2006/main" r:embed="Rd8c212da109b470a"/>
+          <a:blip xmlns:r="http://schemas.openxmlformats.org/officeDocument/2006/relationships" xmlns:a="http://schemas.openxmlformats.org/drawingml/2006/main" r:embed="Rbf9e0ceb4af14ff9"/>
           <a:srcRect xmlns:a="http://schemas.openxmlformats.org/drawingml/2006/main" l="0" t="27" r="0" b="27"/>
           <a:stretch xmlns:a="http://schemas.openxmlformats.org/drawingml/2006/main">
             <a:fillRect l="0" t="0" r="0" b="0"/>
@@ -3137,7 +3137,7 @@
           <p:cNvPr id="2" name="">
             <a:extLst xmlns:a="http://schemas.openxmlformats.org/drawingml/2006/main">
               <a:ext uri="{FF2B5EF4-FFF2-40B4-BE49-F238E27FC236}">
-                <a16:creationId xmlns:a16="http://schemas.microsoft.com/office/drawing/2014/main" id="{43484AFB-A24E-49D7-856D-515883C0DC1F}"/>
+                <a16:creationId xmlns:a16="http://schemas.microsoft.com/office/drawing/2014/main" id="{6C73E240-D39F-4A2E-8480-EF388B9750A4}"/>
               </a:ext>
             </a:extLst>
           </p:cNvPr>
@@ -3174,7 +3174,7 @@
           <p:cNvPr id="3" name="">
             <a:extLst xmlns:a="http://schemas.openxmlformats.org/drawingml/2006/main">
               <a:ext uri="{FF2B5EF4-FFF2-40B4-BE49-F238E27FC236}">
-                <a16:creationId xmlns:a16="http://schemas.microsoft.com/office/drawing/2014/main" id="{74963651-6DD9-4BD0-8B82-A982588E57CB}"/>
+                <a16:creationId xmlns:a16="http://schemas.microsoft.com/office/drawing/2014/main" id="{7A0DCE26-BA2D-443A-A4F8-ED83C72F466B}"/>
               </a:ext>
             </a:extLst>
           </p:cNvPr>
@@ -3211,7 +3211,7 @@
           <p:cNvPr id="4" name="">
             <a:extLst xmlns:a="http://schemas.openxmlformats.org/drawingml/2006/main">
               <a:ext uri="{FF2B5EF4-FFF2-40B4-BE49-F238E27FC236}">
-                <a16:creationId xmlns:a16="http://schemas.microsoft.com/office/drawing/2014/main" id="{CBB6D17B-1B17-4C7E-80BF-E28CA994BBF8}"/>
+                <a16:creationId xmlns:a16="http://schemas.microsoft.com/office/drawing/2014/main" id="{E54A1421-1D7A-4C54-B705-DCA735FE5DB2}"/>
               </a:ext>
             </a:extLst>
           </p:cNvPr>
@@ -3275,7 +3275,7 @@
           <p:cNvPr id="5" name="">
             <a:extLst xmlns:a="http://schemas.openxmlformats.org/drawingml/2006/main">
               <a:ext uri="{FF2B5EF4-FFF2-40B4-BE49-F238E27FC236}">
-                <a16:creationId xmlns:a16="http://schemas.microsoft.com/office/drawing/2014/main" id="{C73C8794-FDF8-4234-9F17-2D65FC8E1041}"/>
+                <a16:creationId xmlns:a16="http://schemas.microsoft.com/office/drawing/2014/main" id="{301135EC-AD41-4DA2-870D-96CEFE8FF8E7}"/>
               </a:ext>
             </a:extLst>
           </p:cNvPr>
@@ -3339,7 +3339,7 @@
           <p:cNvPr id="6" name="">
             <a:extLst xmlns:a="http://schemas.openxmlformats.org/drawingml/2006/main">
               <a:ext uri="{FF2B5EF4-FFF2-40B4-BE49-F238E27FC236}">
-                <a16:creationId xmlns:a16="http://schemas.microsoft.com/office/drawing/2014/main" id="{2B8DC5A7-A10E-4D4A-9BBB-58594AC1AB97}"/>
+                <a16:creationId xmlns:a16="http://schemas.microsoft.com/office/drawing/2014/main" id="{EB881740-C0CE-4C1C-8643-41D8F7F3AEFA}"/>
               </a:ext>
             </a:extLst>
           </p:cNvPr>
@@ -3403,7 +3403,7 @@
           <p:cNvPr id="7" name="">
             <a:extLst xmlns:a="http://schemas.openxmlformats.org/drawingml/2006/main">
               <a:ext uri="{FF2B5EF4-FFF2-40B4-BE49-F238E27FC236}">
-                <a16:creationId xmlns:a16="http://schemas.microsoft.com/office/drawing/2014/main" id="{75600F2A-55E4-4600-9BA9-6E79ED832D9E}"/>
+                <a16:creationId xmlns:a16="http://schemas.microsoft.com/office/drawing/2014/main" id="{5867759A-6616-40E1-8FEA-B6830C033893}"/>
               </a:ext>
             </a:extLst>
           </p:cNvPr>
@@ -3438,7 +3438,7 @@
           <p:cNvPr id="8" name="">
             <a:extLst xmlns:a="http://schemas.openxmlformats.org/drawingml/2006/main">
               <a:ext uri="{FF2B5EF4-FFF2-40B4-BE49-F238E27FC236}">
-                <a16:creationId xmlns:a16="http://schemas.microsoft.com/office/drawing/2014/main" id="{3C765C50-D4A8-491D-83DD-DAF7A40DF6A0}"/>
+                <a16:creationId xmlns:a16="http://schemas.microsoft.com/office/drawing/2014/main" id="{6FBC8F4B-F5BE-4F7D-8EED-A02E185C96D8}"/>
               </a:ext>
             </a:extLst>
           </p:cNvPr>
@@ -3502,7 +3502,7 @@
           <p:cNvPr id="9" name="">
             <a:extLst xmlns:a="http://schemas.openxmlformats.org/drawingml/2006/main">
               <a:ext uri="{FF2B5EF4-FFF2-40B4-BE49-F238E27FC236}">
-                <a16:creationId xmlns:a16="http://schemas.microsoft.com/office/drawing/2014/main" id="{5786C700-7728-4432-B97A-B3D8986E2FDE}"/>
+                <a16:creationId xmlns:a16="http://schemas.microsoft.com/office/drawing/2014/main" id="{2AD63AD2-B22F-43C0-A3CC-39A899A6E15F}"/>
               </a:ext>
             </a:extLst>
           </p:cNvPr>
@@ -3537,7 +3537,7 @@
           <p:cNvPr id="10" name="">
             <a:extLst xmlns:a="http://schemas.openxmlformats.org/drawingml/2006/main">
               <a:ext uri="{FF2B5EF4-FFF2-40B4-BE49-F238E27FC236}">
-                <a16:creationId xmlns:a16="http://schemas.microsoft.com/office/drawing/2014/main" id="{59A30117-B9C0-4875-AEB0-FB1E59C786D9}"/>
+                <a16:creationId xmlns:a16="http://schemas.microsoft.com/office/drawing/2014/main" id="{995D579B-784A-48F1-949B-7D8298C71876}"/>
               </a:ext>
             </a:extLst>
           </p:cNvPr>
@@ -3601,7 +3601,7 @@
           <p:cNvPr id="11" name="">
             <a:extLst xmlns:a="http://schemas.openxmlformats.org/drawingml/2006/main">
               <a:ext uri="{FF2B5EF4-FFF2-40B4-BE49-F238E27FC236}">
-                <a16:creationId xmlns:a16="http://schemas.microsoft.com/office/drawing/2014/main" id="{BCFC96B5-7B42-4206-8F2C-9D58070817CB}"/>
+                <a16:creationId xmlns:a16="http://schemas.microsoft.com/office/drawing/2014/main" id="{DC71A293-D2F0-4A26-A13A-D2A5D72F94DB}"/>
               </a:ext>
             </a:extLst>
           </p:cNvPr>
@@ -3636,7 +3636,7 @@
           <p:cNvPr id="12" name="">
             <a:extLst xmlns:a="http://schemas.openxmlformats.org/drawingml/2006/main">
               <a:ext uri="{FF2B5EF4-FFF2-40B4-BE49-F238E27FC236}">
-                <a16:creationId xmlns:a16="http://schemas.microsoft.com/office/drawing/2014/main" id="{0130D9C7-A23E-420C-883C-D77B9B9450AD}"/>
+                <a16:creationId xmlns:a16="http://schemas.microsoft.com/office/drawing/2014/main" id="{35A495C9-811D-4314-BDF8-4695ECF614FD}"/>
               </a:ext>
             </a:extLst>
           </p:cNvPr>
@@ -3700,7 +3700,7 @@
           <p:cNvPr id="13" name="">
             <a:extLst xmlns:a="http://schemas.openxmlformats.org/drawingml/2006/main">
               <a:ext uri="{FF2B5EF4-FFF2-40B4-BE49-F238E27FC236}">
-                <a16:creationId xmlns:a16="http://schemas.microsoft.com/office/drawing/2014/main" id="{2909A034-74B2-44FC-AA68-5F0B31988891}"/>
+                <a16:creationId xmlns:a16="http://schemas.microsoft.com/office/drawing/2014/main" id="{4BA0CC82-BBE0-4A8C-ABC3-1DFE228C836F}"/>
               </a:ext>
             </a:extLst>
           </p:cNvPr>
@@ -3735,7 +3735,7 @@
           <p:cNvPr id="14" name="">
             <a:extLst xmlns:a="http://schemas.openxmlformats.org/drawingml/2006/main">
               <a:ext uri="{FF2B5EF4-FFF2-40B4-BE49-F238E27FC236}">
-                <a16:creationId xmlns:a16="http://schemas.microsoft.com/office/drawing/2014/main" id="{EB9E7983-9879-445C-AF82-774C9AE04D9B}"/>
+                <a16:creationId xmlns:a16="http://schemas.microsoft.com/office/drawing/2014/main" id="{01709780-B9CC-4A59-90FE-9DB5A0444693}"/>
               </a:ext>
             </a:extLst>
           </p:cNvPr>
@@ -3799,7 +3799,7 @@
           <p:cNvPr id="15" name="">
             <a:extLst xmlns:a="http://schemas.openxmlformats.org/drawingml/2006/main">
               <a:ext uri="{FF2B5EF4-FFF2-40B4-BE49-F238E27FC236}">
-                <a16:creationId xmlns:a16="http://schemas.microsoft.com/office/drawing/2014/main" id="{53B2B939-18C1-4102-B886-1B3DA870B328}"/>
+                <a16:creationId xmlns:a16="http://schemas.microsoft.com/office/drawing/2014/main" id="{9E0014A6-AF56-487D-A795-4A155CE23691}"/>
               </a:ext>
             </a:extLst>
           </p:cNvPr>
@@ -3863,7 +3863,7 @@
           <p:cNvPr id="16" name="">
             <a:extLst xmlns:a="http://schemas.openxmlformats.org/drawingml/2006/main">
               <a:ext uri="{FF2B5EF4-FFF2-40B4-BE49-F238E27FC236}">
-                <a16:creationId xmlns:a16="http://schemas.microsoft.com/office/drawing/2014/main" id="{1EA13817-1F8F-4719-A2F4-F9839F468F77}"/>
+                <a16:creationId xmlns:a16="http://schemas.microsoft.com/office/drawing/2014/main" id="{71113D6A-818E-433E-AA26-8C4182F3E310}"/>
               </a:ext>
             </a:extLst>
           </p:cNvPr>
@@ -3927,7 +3927,7 @@
           <p:cNvPr id="17" name="">
             <a:extLst xmlns:a="http://schemas.openxmlformats.org/drawingml/2006/main">
               <a:ext uri="{FF2B5EF4-FFF2-40B4-BE49-F238E27FC236}">
-                <a16:creationId xmlns:a16="http://schemas.microsoft.com/office/drawing/2014/main" id="{21B45E6D-42D3-4DFC-8EC9-F5D6238FA224}"/>
+                <a16:creationId xmlns:a16="http://schemas.microsoft.com/office/drawing/2014/main" id="{DB986414-9951-49C3-A502-657917FB03DF}"/>
               </a:ext>
             </a:extLst>
           </p:cNvPr>
@@ -3960,7 +3960,7 @@
           <p:cNvPr id="18" name="">
             <a:extLst xmlns:a="http://schemas.openxmlformats.org/drawingml/2006/main">
               <a:ext uri="{FF2B5EF4-FFF2-40B4-BE49-F238E27FC236}">
-                <a16:creationId xmlns:a16="http://schemas.microsoft.com/office/drawing/2014/main" id="{30E83286-63CB-4061-A8A8-A7F73D37A11A}"/>
+                <a16:creationId xmlns:a16="http://schemas.microsoft.com/office/drawing/2014/main" id="{C411A510-5E20-47B5-BCE7-2A6187628011}"/>
               </a:ext>
             </a:extLst>
           </p:cNvPr>
@@ -4024,7 +4024,7 @@
           <p:cNvPr id="19" name="">
             <a:extLst xmlns:a="http://schemas.openxmlformats.org/drawingml/2006/main">
               <a:ext uri="{FF2B5EF4-FFF2-40B4-BE49-F238E27FC236}">
-                <a16:creationId xmlns:a16="http://schemas.microsoft.com/office/drawing/2014/main" id="{5A451E9A-5C32-433F-AA01-207B369AF412}"/>
+                <a16:creationId xmlns:a16="http://schemas.microsoft.com/office/drawing/2014/main" id="{5BE64300-BC10-4E10-823F-D2ABA5F4D9CF}"/>
               </a:ext>
             </a:extLst>
           </p:cNvPr>
@@ -4086,7 +4086,7 @@
     </p:spTree>
     <p:extLst>
       <p:ext uri="{BB962C8B-B14F-4D97-AF65-F5344CB8AC3E}">
-        <p14:creationId xmlns:p14="http://schemas.microsoft.com/office/powerpoint/2010/main" val="868516791"/>
+        <p14:creationId xmlns:p14="http://schemas.microsoft.com/office/powerpoint/2010/main" val="562834447"/>
       </p:ext>
     </p:extLst>
   </p:cSld>
@@ -4114,7 +4114,7 @@
           <p:nvPr/>
         </p:nvPicPr>
         <p:blipFill>
-          <a:blip xmlns:r="http://schemas.openxmlformats.org/officeDocument/2006/relationships" xmlns:a="http://schemas.openxmlformats.org/drawingml/2006/main" r:embed="R544e65d6e2b14c4b"/>
+          <a:blip xmlns:r="http://schemas.openxmlformats.org/officeDocument/2006/relationships" xmlns:a="http://schemas.openxmlformats.org/drawingml/2006/main" r:embed="Rfee28f8503d94783"/>
           <a:srcRect xmlns:a="http://schemas.openxmlformats.org/drawingml/2006/main" l="0" t="27" r="0" b="27"/>
           <a:stretch xmlns:a="http://schemas.openxmlformats.org/drawingml/2006/main">
             <a:fillRect l="0" t="0" r="0" b="0"/>
@@ -4135,7 +4135,7 @@
           <p:cNvPr id="2" name="">
             <a:extLst xmlns:a="http://schemas.openxmlformats.org/drawingml/2006/main">
               <a:ext uri="{FF2B5EF4-FFF2-40B4-BE49-F238E27FC236}">
-                <a16:creationId xmlns:a16="http://schemas.microsoft.com/office/drawing/2014/main" id="{FAD3AA69-9670-4ED8-A4D4-8F4780B1B5B0}"/>
+                <a16:creationId xmlns:a16="http://schemas.microsoft.com/office/drawing/2014/main" id="{D35B77F8-8AA4-48D2-BE5E-C93786F46292}"/>
               </a:ext>
             </a:extLst>
           </p:cNvPr>
@@ -4172,7 +4172,7 @@
           <p:cNvPr id="3" name="">
             <a:extLst xmlns:a="http://schemas.openxmlformats.org/drawingml/2006/main">
               <a:ext uri="{FF2B5EF4-FFF2-40B4-BE49-F238E27FC236}">
-                <a16:creationId xmlns:a16="http://schemas.microsoft.com/office/drawing/2014/main" id="{66442106-5A1D-42B0-803C-A8DABA4F2E05}"/>
+                <a16:creationId xmlns:a16="http://schemas.microsoft.com/office/drawing/2014/main" id="{6E1954C3-3380-4604-A761-DF17BC7BF7B1}"/>
               </a:ext>
             </a:extLst>
           </p:cNvPr>
@@ -4209,7 +4209,7 @@
           <p:cNvPr id="4" name="">
             <a:extLst xmlns:a="http://schemas.openxmlformats.org/drawingml/2006/main">
               <a:ext uri="{FF2B5EF4-FFF2-40B4-BE49-F238E27FC236}">
-                <a16:creationId xmlns:a16="http://schemas.microsoft.com/office/drawing/2014/main" id="{BD1F17A5-C66B-4513-ACD3-5D3B092F4823}"/>
+                <a16:creationId xmlns:a16="http://schemas.microsoft.com/office/drawing/2014/main" id="{9C5F2802-BF13-4D38-BA9C-2DD475590872}"/>
               </a:ext>
             </a:extLst>
           </p:cNvPr>
@@ -4273,7 +4273,7 @@
           <p:cNvPr id="5" name="">
             <a:extLst xmlns:a="http://schemas.openxmlformats.org/drawingml/2006/main">
               <a:ext uri="{FF2B5EF4-FFF2-40B4-BE49-F238E27FC236}">
-                <a16:creationId xmlns:a16="http://schemas.microsoft.com/office/drawing/2014/main" id="{69940A5B-4183-48D0-8693-B945A8205223}"/>
+                <a16:creationId xmlns:a16="http://schemas.microsoft.com/office/drawing/2014/main" id="{101801F3-51B6-4919-A438-18574A094D27}"/>
               </a:ext>
             </a:extLst>
           </p:cNvPr>
@@ -4337,7 +4337,7 @@
           <p:cNvPr id="6" name="">
             <a:extLst xmlns:a="http://schemas.openxmlformats.org/drawingml/2006/main">
               <a:ext uri="{FF2B5EF4-FFF2-40B4-BE49-F238E27FC236}">
-                <a16:creationId xmlns:a16="http://schemas.microsoft.com/office/drawing/2014/main" id="{EF88A100-5F63-4B74-815E-028C6BEFD60B}"/>
+                <a16:creationId xmlns:a16="http://schemas.microsoft.com/office/drawing/2014/main" id="{0E2E880E-4763-4675-89AF-A06B90C0712B}"/>
               </a:ext>
             </a:extLst>
           </p:cNvPr>
@@ -4401,7 +4401,7 @@
           <p:cNvPr id="7" name="">
             <a:extLst xmlns:a="http://schemas.openxmlformats.org/drawingml/2006/main">
               <a:ext uri="{FF2B5EF4-FFF2-40B4-BE49-F238E27FC236}">
-                <a16:creationId xmlns:a16="http://schemas.microsoft.com/office/drawing/2014/main" id="{E108BB51-E39D-4290-9D1E-F0139091D34B}"/>
+                <a16:creationId xmlns:a16="http://schemas.microsoft.com/office/drawing/2014/main" id="{1BAF8FA5-D47B-4E2D-84F9-D53416623C4F}"/>
               </a:ext>
             </a:extLst>
           </p:cNvPr>
@@ -4436,7 +4436,7 @@
           <p:cNvPr id="8" name="">
             <a:extLst xmlns:a="http://schemas.openxmlformats.org/drawingml/2006/main">
               <a:ext uri="{FF2B5EF4-FFF2-40B4-BE49-F238E27FC236}">
-                <a16:creationId xmlns:a16="http://schemas.microsoft.com/office/drawing/2014/main" id="{6435D544-D98E-49CD-AAFF-698BC6477DF9}"/>
+                <a16:creationId xmlns:a16="http://schemas.microsoft.com/office/drawing/2014/main" id="{1C6B53DD-2A95-4607-B5D1-81BBD1E15B12}"/>
               </a:ext>
             </a:extLst>
           </p:cNvPr>
@@ -4500,7 +4500,7 @@
           <p:cNvPr id="9" name="">
             <a:extLst xmlns:a="http://schemas.openxmlformats.org/drawingml/2006/main">
               <a:ext uri="{FF2B5EF4-FFF2-40B4-BE49-F238E27FC236}">
-                <a16:creationId xmlns:a16="http://schemas.microsoft.com/office/drawing/2014/main" id="{E2C07A7D-8931-420E-A7CA-4FA4EDE75C84}"/>
+                <a16:creationId xmlns:a16="http://schemas.microsoft.com/office/drawing/2014/main" id="{E5A74631-C82E-4B06-B03A-324079D1A122}"/>
               </a:ext>
             </a:extLst>
           </p:cNvPr>
@@ -4564,7 +4564,7 @@
           <p:cNvPr id="10" name="">
             <a:extLst xmlns:a="http://schemas.openxmlformats.org/drawingml/2006/main">
               <a:ext uri="{FF2B5EF4-FFF2-40B4-BE49-F238E27FC236}">
-                <a16:creationId xmlns:a16="http://schemas.microsoft.com/office/drawing/2014/main" id="{FAFEA11B-32CF-4A54-8ED3-62BA9142DC70}"/>
+                <a16:creationId xmlns:a16="http://schemas.microsoft.com/office/drawing/2014/main" id="{4FA4A273-4C34-4751-AAC7-EE5B3BA265D4}"/>
               </a:ext>
             </a:extLst>
           </p:cNvPr>
@@ -4597,7 +4597,7 @@
           <p:cNvPr id="11" name="">
             <a:extLst xmlns:a="http://schemas.openxmlformats.org/drawingml/2006/main">
               <a:ext uri="{FF2B5EF4-FFF2-40B4-BE49-F238E27FC236}">
-                <a16:creationId xmlns:a16="http://schemas.microsoft.com/office/drawing/2014/main" id="{3E66E201-7F60-4F88-8A99-EDA5D5E7D967}"/>
+                <a16:creationId xmlns:a16="http://schemas.microsoft.com/office/drawing/2014/main" id="{8FB9A8E7-49CF-438E-8088-4F816B6D8EA6}"/>
               </a:ext>
             </a:extLst>
           </p:cNvPr>
@@ -4632,7 +4632,7 @@
           <p:cNvPr id="12" name="">
             <a:extLst xmlns:a="http://schemas.openxmlformats.org/drawingml/2006/main">
               <a:ext uri="{FF2B5EF4-FFF2-40B4-BE49-F238E27FC236}">
-                <a16:creationId xmlns:a16="http://schemas.microsoft.com/office/drawing/2014/main" id="{89850983-5284-46BD-815E-B53066F94B57}"/>
+                <a16:creationId xmlns:a16="http://schemas.microsoft.com/office/drawing/2014/main" id="{81CA1D84-E921-41E3-813A-E4DEFA4B7EB8}"/>
               </a:ext>
             </a:extLst>
           </p:cNvPr>
@@ -4696,7 +4696,7 @@
           <p:cNvPr id="13" name="">
             <a:extLst xmlns:a="http://schemas.openxmlformats.org/drawingml/2006/main">
               <a:ext uri="{FF2B5EF4-FFF2-40B4-BE49-F238E27FC236}">
-                <a16:creationId xmlns:a16="http://schemas.microsoft.com/office/drawing/2014/main" id="{6A6422C4-1202-4169-A12B-9975E9C4EE99}"/>
+                <a16:creationId xmlns:a16="http://schemas.microsoft.com/office/drawing/2014/main" id="{E39AA40F-E714-45C7-883B-B0BFF19E2D4D}"/>
               </a:ext>
             </a:extLst>
           </p:cNvPr>
@@ -4760,7 +4760,7 @@
           <p:cNvPr id="14" name="">
             <a:extLst xmlns:a="http://schemas.openxmlformats.org/drawingml/2006/main">
               <a:ext uri="{FF2B5EF4-FFF2-40B4-BE49-F238E27FC236}">
-                <a16:creationId xmlns:a16="http://schemas.microsoft.com/office/drawing/2014/main" id="{E27BD1F8-0BFA-4131-8634-7BEA1023242F}"/>
+                <a16:creationId xmlns:a16="http://schemas.microsoft.com/office/drawing/2014/main" id="{BE30897D-9E91-48CA-B6E4-9D18A5AFD55E}"/>
               </a:ext>
             </a:extLst>
           </p:cNvPr>
@@ -4793,7 +4793,7 @@
           <p:cNvPr id="15" name="">
             <a:extLst xmlns:a="http://schemas.openxmlformats.org/drawingml/2006/main">
               <a:ext uri="{FF2B5EF4-FFF2-40B4-BE49-F238E27FC236}">
-                <a16:creationId xmlns:a16="http://schemas.microsoft.com/office/drawing/2014/main" id="{F0E8523D-47DB-4288-A0E1-F0199C74EDCB}"/>
+                <a16:creationId xmlns:a16="http://schemas.microsoft.com/office/drawing/2014/main" id="{C31294BF-EBB5-470E-909E-4EC9752576B9}"/>
               </a:ext>
             </a:extLst>
           </p:cNvPr>
@@ -4828,7 +4828,7 @@
           <p:cNvPr id="16" name="">
             <a:extLst xmlns:a="http://schemas.openxmlformats.org/drawingml/2006/main">
               <a:ext uri="{FF2B5EF4-FFF2-40B4-BE49-F238E27FC236}">
-                <a16:creationId xmlns:a16="http://schemas.microsoft.com/office/drawing/2014/main" id="{ED107D01-CA3C-4291-8ECC-2B9D78C324B5}"/>
+                <a16:creationId xmlns:a16="http://schemas.microsoft.com/office/drawing/2014/main" id="{A94C6949-56F6-4972-B044-CF33212D486E}"/>
               </a:ext>
             </a:extLst>
           </p:cNvPr>
@@ -4892,7 +4892,7 @@
           <p:cNvPr id="17" name="">
             <a:extLst xmlns:a="http://schemas.openxmlformats.org/drawingml/2006/main">
               <a:ext uri="{FF2B5EF4-FFF2-40B4-BE49-F238E27FC236}">
-                <a16:creationId xmlns:a16="http://schemas.microsoft.com/office/drawing/2014/main" id="{7135CA87-CE38-49C5-ADE0-08BCCB1FA325}"/>
+                <a16:creationId xmlns:a16="http://schemas.microsoft.com/office/drawing/2014/main" id="{B12FFAA4-38BC-4851-8C92-4FD999345675}"/>
               </a:ext>
             </a:extLst>
           </p:cNvPr>
@@ -4956,7 +4956,7 @@
           <p:cNvPr id="18" name="">
             <a:extLst xmlns:a="http://schemas.openxmlformats.org/drawingml/2006/main">
               <a:ext uri="{FF2B5EF4-FFF2-40B4-BE49-F238E27FC236}">
-                <a16:creationId xmlns:a16="http://schemas.microsoft.com/office/drawing/2014/main" id="{8B4314D8-045B-4F09-9507-358082E26D9C}"/>
+                <a16:creationId xmlns:a16="http://schemas.microsoft.com/office/drawing/2014/main" id="{F271F56E-9299-420E-85E4-A68FB30EC863}"/>
               </a:ext>
             </a:extLst>
           </p:cNvPr>
@@ -5020,7 +5020,7 @@
           <p:cNvPr id="19" name="">
             <a:extLst xmlns:a="http://schemas.openxmlformats.org/drawingml/2006/main">
               <a:ext uri="{FF2B5EF4-FFF2-40B4-BE49-F238E27FC236}">
-                <a16:creationId xmlns:a16="http://schemas.microsoft.com/office/drawing/2014/main" id="{DB6048D2-474A-4F63-8C4A-FD0D37C0EBCD}"/>
+                <a16:creationId xmlns:a16="http://schemas.microsoft.com/office/drawing/2014/main" id="{2AFDFEAE-AFF6-4EE0-B716-8A88590D07D8}"/>
               </a:ext>
             </a:extLst>
           </p:cNvPr>
@@ -5053,7 +5053,7 @@
           <p:cNvPr id="20" name="">
             <a:extLst xmlns:a="http://schemas.openxmlformats.org/drawingml/2006/main">
               <a:ext uri="{FF2B5EF4-FFF2-40B4-BE49-F238E27FC236}">
-                <a16:creationId xmlns:a16="http://schemas.microsoft.com/office/drawing/2014/main" id="{AB81A72F-BF5F-45BB-B705-FB21715357CD}"/>
+                <a16:creationId xmlns:a16="http://schemas.microsoft.com/office/drawing/2014/main" id="{75C32F4A-1555-4B2A-A69C-45157841EF75}"/>
               </a:ext>
             </a:extLst>
           </p:cNvPr>
@@ -5117,7 +5117,7 @@
           <p:cNvPr id="21" name="">
             <a:extLst xmlns:a="http://schemas.openxmlformats.org/drawingml/2006/main">
               <a:ext uri="{FF2B5EF4-FFF2-40B4-BE49-F238E27FC236}">
-                <a16:creationId xmlns:a16="http://schemas.microsoft.com/office/drawing/2014/main" id="{B9B29F34-3821-4606-BEA9-5CA5832210CC}"/>
+                <a16:creationId xmlns:a16="http://schemas.microsoft.com/office/drawing/2014/main" id="{0FBAC45A-6352-4444-8974-F57068054DAD}"/>
               </a:ext>
             </a:extLst>
           </p:cNvPr>
@@ -5179,7 +5179,7 @@
     </p:spTree>
     <p:extLst>
       <p:ext uri="{BB962C8B-B14F-4D97-AF65-F5344CB8AC3E}">
-        <p14:creationId xmlns:p14="http://schemas.microsoft.com/office/powerpoint/2010/main" val="994893613"/>
+        <p14:creationId xmlns:p14="http://schemas.microsoft.com/office/powerpoint/2010/main" val="201226167"/>
       </p:ext>
     </p:extLst>
   </p:cSld>
@@ -5207,7 +5207,7 @@
           <p:nvPr/>
         </p:nvPicPr>
         <p:blipFill>
-          <a:blip xmlns:r="http://schemas.openxmlformats.org/officeDocument/2006/relationships" xmlns:a="http://schemas.openxmlformats.org/drawingml/2006/main" r:embed="Rfb3631af62af41b8"/>
+          <a:blip xmlns:r="http://schemas.openxmlformats.org/officeDocument/2006/relationships" xmlns:a="http://schemas.openxmlformats.org/drawingml/2006/main" r:embed="R5e06b80f533c4e47"/>
           <a:srcRect xmlns:a="http://schemas.openxmlformats.org/drawingml/2006/main" l="0" t="27" r="0" b="27"/>
           <a:stretch xmlns:a="http://schemas.openxmlformats.org/drawingml/2006/main">
             <a:fillRect l="0" t="0" r="0" b="0"/>
@@ -5228,7 +5228,7 @@
           <p:cNvPr id="2" name="">
             <a:extLst xmlns:a="http://schemas.openxmlformats.org/drawingml/2006/main">
               <a:ext uri="{FF2B5EF4-FFF2-40B4-BE49-F238E27FC236}">
-                <a16:creationId xmlns:a16="http://schemas.microsoft.com/office/drawing/2014/main" id="{82AE966D-CE01-420E-A3B7-21BF5FEF8DB0}"/>
+                <a16:creationId xmlns:a16="http://schemas.microsoft.com/office/drawing/2014/main" id="{980D051C-55FE-40E5-AD05-7259C1C82A50}"/>
               </a:ext>
             </a:extLst>
           </p:cNvPr>
@@ -5265,7 +5265,7 @@
           <p:cNvPr id="3" name="">
             <a:extLst xmlns:a="http://schemas.openxmlformats.org/drawingml/2006/main">
               <a:ext uri="{FF2B5EF4-FFF2-40B4-BE49-F238E27FC236}">
-                <a16:creationId xmlns:a16="http://schemas.microsoft.com/office/drawing/2014/main" id="{1E463B2B-BDC4-42C2-BE51-31871D3458CC}"/>
+                <a16:creationId xmlns:a16="http://schemas.microsoft.com/office/drawing/2014/main" id="{407E7403-B043-4F02-906C-D848FBB80E4A}"/>
               </a:ext>
             </a:extLst>
           </p:cNvPr>
@@ -5302,7 +5302,7 @@
           <p:cNvPr id="4" name="">
             <a:extLst xmlns:a="http://schemas.openxmlformats.org/drawingml/2006/main">
               <a:ext uri="{FF2B5EF4-FFF2-40B4-BE49-F238E27FC236}">
-                <a16:creationId xmlns:a16="http://schemas.microsoft.com/office/drawing/2014/main" id="{58B5D711-85CA-4AF7-9834-9972574391CF}"/>
+                <a16:creationId xmlns:a16="http://schemas.microsoft.com/office/drawing/2014/main" id="{D3BE9367-BA77-4BA9-8D49-7892BBACD802}"/>
               </a:ext>
             </a:extLst>
           </p:cNvPr>
@@ -5366,7 +5366,7 @@
           <p:cNvPr id="5" name="">
             <a:extLst xmlns:a="http://schemas.openxmlformats.org/drawingml/2006/main">
               <a:ext uri="{FF2B5EF4-FFF2-40B4-BE49-F238E27FC236}">
-                <a16:creationId xmlns:a16="http://schemas.microsoft.com/office/drawing/2014/main" id="{4EF6FA61-0447-47A2-9287-01261E27F80F}"/>
+                <a16:creationId xmlns:a16="http://schemas.microsoft.com/office/drawing/2014/main" id="{64436EEC-5562-42A2-B55F-85BAF1530907}"/>
               </a:ext>
             </a:extLst>
           </p:cNvPr>
@@ -5420,7 +5420,7 @@
                 <a:ea typeface="Aptos Display"/>
                 <a:cs typeface="Aptos Display"/>
               </a:rPr>
-              <a:t>Buscamos capital y aliados para acelerar producto, ventas y talento</a:t>
+              <a:t>Levantamos US$500K pre-seed para llegar a pilotos pagados y producto repetible</a:t>
             </a:r>
           </a:p>
         </p:txBody>
@@ -5430,7 +5430,7 @@
           <p:cNvPr id="6" name="">
             <a:extLst xmlns:a="http://schemas.openxmlformats.org/drawingml/2006/main">
               <a:ext uri="{FF2B5EF4-FFF2-40B4-BE49-F238E27FC236}">
-                <a16:creationId xmlns:a16="http://schemas.microsoft.com/office/drawing/2014/main" id="{8260F2BD-2E6B-4551-BE04-03D8E7817276}"/>
+                <a16:creationId xmlns:a16="http://schemas.microsoft.com/office/drawing/2014/main" id="{5788B4D4-AC2A-49D0-B800-F59ACC50BFDE}"/>
               </a:ext>
             </a:extLst>
           </p:cNvPr>
@@ -5484,7 +5484,7 @@
                 <a:ea typeface="Aptos"/>
                 <a:cs typeface="Aptos"/>
               </a:rPr>
-              <a:t>Tecnotitan está construyendo una compañía tecnológica multidivisión con ambición global desde Latinoamérica.</a:t>
+              <a:t>La ronda financia 18 meses para convertir servicios de IA y software en productos propios con clientes iniciales, casos de uso medibles y base comercial global.</a:t>
             </a:r>
           </a:p>
         </p:txBody>
@@ -5494,7 +5494,7 @@
           <p:cNvPr id="7" name="">
             <a:extLst xmlns:a="http://schemas.openxmlformats.org/drawingml/2006/main">
               <a:ext uri="{FF2B5EF4-FFF2-40B4-BE49-F238E27FC236}">
-                <a16:creationId xmlns:a16="http://schemas.microsoft.com/office/drawing/2014/main" id="{6B52D6AC-A64F-42A8-9184-07357974BCE9}"/>
+                <a16:creationId xmlns:a16="http://schemas.microsoft.com/office/drawing/2014/main" id="{474E7754-EAEC-41D2-A9D0-FFBCB1111FAE}"/>
               </a:ext>
             </a:extLst>
           </p:cNvPr>
@@ -5529,7 +5529,7 @@
           <p:cNvPr id="8" name="">
             <a:extLst xmlns:a="http://schemas.openxmlformats.org/drawingml/2006/main">
               <a:ext uri="{FF2B5EF4-FFF2-40B4-BE49-F238E27FC236}">
-                <a16:creationId xmlns:a16="http://schemas.microsoft.com/office/drawing/2014/main" id="{01991691-D134-41A1-B0B6-3F27C722477C}"/>
+                <a16:creationId xmlns:a16="http://schemas.microsoft.com/office/drawing/2014/main" id="{67E50453-E928-4046-BA0E-3B2341888CDD}"/>
               </a:ext>
             </a:extLst>
           </p:cNvPr>
@@ -5593,7 +5593,7 @@
           <p:cNvPr id="9" name="">
             <a:extLst xmlns:a="http://schemas.openxmlformats.org/drawingml/2006/main">
               <a:ext uri="{FF2B5EF4-FFF2-40B4-BE49-F238E27FC236}">
-                <a16:creationId xmlns:a16="http://schemas.microsoft.com/office/drawing/2014/main" id="{9B816170-9D51-48FC-9F33-11667F0DB4CD}"/>
+                <a16:creationId xmlns:a16="http://schemas.microsoft.com/office/drawing/2014/main" id="{7903A193-3F68-4E1A-B7F6-50E057D339BB}"/>
               </a:ext>
             </a:extLst>
           </p:cNvPr>
@@ -5647,7 +5647,7 @@
                 <a:ea typeface="Aptos"/>
                 <a:cs typeface="Aptos"/>
               </a:rPr>
-              <a:t>Producto</a:t>
+              <a:t>40% producto e ingeniería</a:t>
             </a:r>
           </a:p>
         </p:txBody>
@@ -5657,7 +5657,7 @@
           <p:cNvPr id="10" name="">
             <a:extLst xmlns:a="http://schemas.openxmlformats.org/drawingml/2006/main">
               <a:ext uri="{FF2B5EF4-FFF2-40B4-BE49-F238E27FC236}">
-                <a16:creationId xmlns:a16="http://schemas.microsoft.com/office/drawing/2014/main" id="{43AD8AA8-A409-4CB5-9959-25EEF8ADA568}"/>
+                <a16:creationId xmlns:a16="http://schemas.microsoft.com/office/drawing/2014/main" id="{4A6B0724-6918-4394-AD45-A11C9F14E532}"/>
               </a:ext>
             </a:extLst>
           </p:cNvPr>
@@ -5692,7 +5692,7 @@
           <p:cNvPr id="11" name="">
             <a:extLst xmlns:a="http://schemas.openxmlformats.org/drawingml/2006/main">
               <a:ext uri="{FF2B5EF4-FFF2-40B4-BE49-F238E27FC236}">
-                <a16:creationId xmlns:a16="http://schemas.microsoft.com/office/drawing/2014/main" id="{A21E2C76-80FC-4F4D-8F66-1B8BF0778C62}"/>
+                <a16:creationId xmlns:a16="http://schemas.microsoft.com/office/drawing/2014/main" id="{FD3283AF-FE80-4F18-B7A9-A4B06555F546}"/>
               </a:ext>
             </a:extLst>
           </p:cNvPr>
@@ -5756,7 +5756,7 @@
           <p:cNvPr id="12" name="">
             <a:extLst xmlns:a="http://schemas.openxmlformats.org/drawingml/2006/main">
               <a:ext uri="{FF2B5EF4-FFF2-40B4-BE49-F238E27FC236}">
-                <a16:creationId xmlns:a16="http://schemas.microsoft.com/office/drawing/2014/main" id="{186DE425-3456-45AE-A2B8-EBB723CF8D37}"/>
+                <a16:creationId xmlns:a16="http://schemas.microsoft.com/office/drawing/2014/main" id="{D0E91AD2-0586-4466-8976-32882FE3ED37}"/>
               </a:ext>
             </a:extLst>
           </p:cNvPr>
@@ -5810,7 +5810,7 @@
                 <a:ea typeface="Aptos"/>
                 <a:cs typeface="Aptos"/>
               </a:rPr>
-              <a:t>Ventas</a:t>
+              <a:t>25% ventas y pilotos</a:t>
             </a:r>
           </a:p>
         </p:txBody>
@@ -5820,7 +5820,7 @@
           <p:cNvPr id="13" name="">
             <a:extLst xmlns:a="http://schemas.openxmlformats.org/drawingml/2006/main">
               <a:ext uri="{FF2B5EF4-FFF2-40B4-BE49-F238E27FC236}">
-                <a16:creationId xmlns:a16="http://schemas.microsoft.com/office/drawing/2014/main" id="{08E49673-88C5-480E-83BB-ABE4CEA1BBC5}"/>
+                <a16:creationId xmlns:a16="http://schemas.microsoft.com/office/drawing/2014/main" id="{5CE65883-E250-46D4-97AC-4817F8C513F5}"/>
               </a:ext>
             </a:extLst>
           </p:cNvPr>
@@ -5855,7 +5855,7 @@
           <p:cNvPr id="14" name="">
             <a:extLst xmlns:a="http://schemas.openxmlformats.org/drawingml/2006/main">
               <a:ext uri="{FF2B5EF4-FFF2-40B4-BE49-F238E27FC236}">
-                <a16:creationId xmlns:a16="http://schemas.microsoft.com/office/drawing/2014/main" id="{2E295EE7-8644-4FDF-B37D-E91924CF2556}"/>
+                <a16:creationId xmlns:a16="http://schemas.microsoft.com/office/drawing/2014/main" id="{13BE3B8F-D8BF-465F-B27A-160EAADF49D6}"/>
               </a:ext>
             </a:extLst>
           </p:cNvPr>
@@ -5919,7 +5919,7 @@
           <p:cNvPr id="15" name="">
             <a:extLst xmlns:a="http://schemas.openxmlformats.org/drawingml/2006/main">
               <a:ext uri="{FF2B5EF4-FFF2-40B4-BE49-F238E27FC236}">
-                <a16:creationId xmlns:a16="http://schemas.microsoft.com/office/drawing/2014/main" id="{5CEE60D8-9FE9-4146-BB45-DCC75E9C767E}"/>
+                <a16:creationId xmlns:a16="http://schemas.microsoft.com/office/drawing/2014/main" id="{9A10885B-95EC-4D65-9285-B93CEEDAE752}"/>
               </a:ext>
             </a:extLst>
           </p:cNvPr>
@@ -5973,7 +5973,7 @@
                 <a:ea typeface="Aptos"/>
                 <a:cs typeface="Aptos"/>
               </a:rPr>
-              <a:t>Talento técnico</a:t>
+              <a:t>20% delivery de IA</a:t>
             </a:r>
           </a:p>
         </p:txBody>
@@ -5983,7 +5983,7 @@
           <p:cNvPr id="16" name="">
             <a:extLst xmlns:a="http://schemas.openxmlformats.org/drawingml/2006/main">
               <a:ext uri="{FF2B5EF4-FFF2-40B4-BE49-F238E27FC236}">
-                <a16:creationId xmlns:a16="http://schemas.microsoft.com/office/drawing/2014/main" id="{351DEC95-692E-4B84-8466-BDEC41BB3E96}"/>
+                <a16:creationId xmlns:a16="http://schemas.microsoft.com/office/drawing/2014/main" id="{AB91F8B0-9C08-4564-95E2-6098F9EB643E}"/>
               </a:ext>
             </a:extLst>
           </p:cNvPr>
@@ -6018,7 +6018,7 @@
           <p:cNvPr id="17" name="">
             <a:extLst xmlns:a="http://schemas.openxmlformats.org/drawingml/2006/main">
               <a:ext uri="{FF2B5EF4-FFF2-40B4-BE49-F238E27FC236}">
-                <a16:creationId xmlns:a16="http://schemas.microsoft.com/office/drawing/2014/main" id="{686C02EA-0C4F-44D1-B74C-57761FE1BAAF}"/>
+                <a16:creationId xmlns:a16="http://schemas.microsoft.com/office/drawing/2014/main" id="{BD713BBA-1138-421C-B8ED-FDFD2F0AC02D}"/>
               </a:ext>
             </a:extLst>
           </p:cNvPr>
@@ -6082,7 +6082,7 @@
           <p:cNvPr id="18" name="">
             <a:extLst xmlns:a="http://schemas.openxmlformats.org/drawingml/2006/main">
               <a:ext uri="{FF2B5EF4-FFF2-40B4-BE49-F238E27FC236}">
-                <a16:creationId xmlns:a16="http://schemas.microsoft.com/office/drawing/2014/main" id="{1191AE9B-B8C0-4BF4-BA18-C5C22CC532DC}"/>
+                <a16:creationId xmlns:a16="http://schemas.microsoft.com/office/drawing/2014/main" id="{616F7936-E734-4621-B7FA-AF0C78E3CD78}"/>
               </a:ext>
             </a:extLst>
           </p:cNvPr>
@@ -6136,7 +6136,7 @@
                 <a:ea typeface="Aptos"/>
                 <a:cs typeface="Aptos"/>
               </a:rPr>
-              <a:t>Data room</a:t>
+              <a:t>15% operaciones y data room</a:t>
             </a:r>
           </a:p>
         </p:txBody>
@@ -6146,7 +6146,7 @@
           <p:cNvPr id="19" name="">
             <a:extLst xmlns:a="http://schemas.openxmlformats.org/drawingml/2006/main">
               <a:ext uri="{FF2B5EF4-FFF2-40B4-BE49-F238E27FC236}">
-                <a16:creationId xmlns:a16="http://schemas.microsoft.com/office/drawing/2014/main" id="{B3840031-9864-4253-BBDF-6F0C7625D227}"/>
+                <a16:creationId xmlns:a16="http://schemas.microsoft.com/office/drawing/2014/main" id="{F71DEA64-62D6-43C4-8212-FAAC08E0F62A}"/>
               </a:ext>
             </a:extLst>
           </p:cNvPr>
@@ -6181,7 +6181,7 @@
           <p:cNvPr id="20" name="">
             <a:extLst xmlns:a="http://schemas.openxmlformats.org/drawingml/2006/main">
               <a:ext uri="{FF2B5EF4-FFF2-40B4-BE49-F238E27FC236}">
-                <a16:creationId xmlns:a16="http://schemas.microsoft.com/office/drawing/2014/main" id="{AB72E8EE-2DAD-4D8C-8449-AD63EC8EB085}"/>
+                <a16:creationId xmlns:a16="http://schemas.microsoft.com/office/drawing/2014/main" id="{67304186-B06A-48FF-ABF3-A276750A57CE}"/>
               </a:ext>
             </a:extLst>
           </p:cNvPr>
@@ -6245,7 +6245,7 @@
           <p:cNvPr id="21" name="">
             <a:extLst xmlns:a="http://schemas.openxmlformats.org/drawingml/2006/main">
               <a:ext uri="{FF2B5EF4-FFF2-40B4-BE49-F238E27FC236}">
-                <a16:creationId xmlns:a16="http://schemas.microsoft.com/office/drawing/2014/main" id="{689126C0-0454-4AB7-A21A-9CF0AF96F813}"/>
+                <a16:creationId xmlns:a16="http://schemas.microsoft.com/office/drawing/2014/main" id="{A213E8FE-2DC2-4E1A-B157-5DE99D4AB661}"/>
               </a:ext>
             </a:extLst>
           </p:cNvPr>
@@ -6309,7 +6309,7 @@
           <p:cNvPr id="22" name="">
             <a:extLst xmlns:a="http://schemas.openxmlformats.org/drawingml/2006/main">
               <a:ext uri="{FF2B5EF4-FFF2-40B4-BE49-F238E27FC236}">
-                <a16:creationId xmlns:a16="http://schemas.microsoft.com/office/drawing/2014/main" id="{32DF025F-85FC-47BB-A617-852EE720BC84}"/>
+                <a16:creationId xmlns:a16="http://schemas.microsoft.com/office/drawing/2014/main" id="{C3FE0937-219B-490E-BA31-56088024F90B}"/>
               </a:ext>
             </a:extLst>
           </p:cNvPr>
@@ -6342,7 +6342,7 @@
           <p:cNvPr id="23" name="">
             <a:extLst xmlns:a="http://schemas.openxmlformats.org/drawingml/2006/main">
               <a:ext uri="{FF2B5EF4-FFF2-40B4-BE49-F238E27FC236}">
-                <a16:creationId xmlns:a16="http://schemas.microsoft.com/office/drawing/2014/main" id="{19916A69-BBA8-438E-BC9C-29AC54FDFB98}"/>
+                <a16:creationId xmlns:a16="http://schemas.microsoft.com/office/drawing/2014/main" id="{F31EACF8-2374-4DAF-8389-444994CE6BBB}"/>
               </a:ext>
             </a:extLst>
           </p:cNvPr>
@@ -6406,7 +6406,7 @@
           <p:cNvPr id="24" name="">
             <a:extLst xmlns:a="http://schemas.openxmlformats.org/drawingml/2006/main">
               <a:ext uri="{FF2B5EF4-FFF2-40B4-BE49-F238E27FC236}">
-                <a16:creationId xmlns:a16="http://schemas.microsoft.com/office/drawing/2014/main" id="{54EE6A33-CD04-4899-A54E-462D4BB3EC99}"/>
+                <a16:creationId xmlns:a16="http://schemas.microsoft.com/office/drawing/2014/main" id="{40E322D5-21AE-47B6-A7A8-5412BB87A3D3}"/>
               </a:ext>
             </a:extLst>
           </p:cNvPr>
@@ -6468,7 +6468,7 @@
     </p:spTree>
     <p:extLst>
       <p:ext uri="{BB962C8B-B14F-4D97-AF65-F5344CB8AC3E}">
-        <p14:creationId xmlns:p14="http://schemas.microsoft.com/office/powerpoint/2010/main" val="1369636273"/>
+        <p14:creationId xmlns:p14="http://schemas.microsoft.com/office/powerpoint/2010/main" val="1204997082"/>
       </p:ext>
     </p:extLst>
   </p:cSld>
@@ -6496,7 +6496,7 @@
           <p:nvPr/>
         </p:nvPicPr>
         <p:blipFill>
-          <a:blip xmlns:r="http://schemas.openxmlformats.org/officeDocument/2006/relationships" xmlns:a="http://schemas.openxmlformats.org/drawingml/2006/main" r:embed="R704825a94df14046"/>
+          <a:blip xmlns:r="http://schemas.openxmlformats.org/officeDocument/2006/relationships" xmlns:a="http://schemas.openxmlformats.org/drawingml/2006/main" r:embed="Re9fddb4c2e684dda"/>
           <a:srcRect xmlns:a="http://schemas.openxmlformats.org/drawingml/2006/main" l="0" t="27" r="0" b="27"/>
           <a:stretch xmlns:a="http://schemas.openxmlformats.org/drawingml/2006/main">
             <a:fillRect l="0" t="0" r="0" b="0"/>
@@ -6517,7 +6517,7 @@
           <p:cNvPr id="2" name="">
             <a:extLst xmlns:a="http://schemas.openxmlformats.org/drawingml/2006/main">
               <a:ext uri="{FF2B5EF4-FFF2-40B4-BE49-F238E27FC236}">
-                <a16:creationId xmlns:a16="http://schemas.microsoft.com/office/drawing/2014/main" id="{8DAFCB52-87F4-44A8-91A4-341674B6203B}"/>
+                <a16:creationId xmlns:a16="http://schemas.microsoft.com/office/drawing/2014/main" id="{0279F719-3660-4E89-A60E-3DA783DAEE37}"/>
               </a:ext>
             </a:extLst>
           </p:cNvPr>
@@ -6554,7 +6554,7 @@
           <p:cNvPr id="3" name="">
             <a:extLst xmlns:a="http://schemas.openxmlformats.org/drawingml/2006/main">
               <a:ext uri="{FF2B5EF4-FFF2-40B4-BE49-F238E27FC236}">
-                <a16:creationId xmlns:a16="http://schemas.microsoft.com/office/drawing/2014/main" id="{4485BDB6-1114-4DB9-AC51-ED60725842D1}"/>
+                <a16:creationId xmlns:a16="http://schemas.microsoft.com/office/drawing/2014/main" id="{BFA62551-5962-4862-BB14-A749A94D1368}"/>
               </a:ext>
             </a:extLst>
           </p:cNvPr>
@@ -6591,7 +6591,7 @@
           <p:cNvPr id="4" name="">
             <a:extLst xmlns:a="http://schemas.openxmlformats.org/drawingml/2006/main">
               <a:ext uri="{FF2B5EF4-FFF2-40B4-BE49-F238E27FC236}">
-                <a16:creationId xmlns:a16="http://schemas.microsoft.com/office/drawing/2014/main" id="{1C48A1FE-D6AA-4E1E-AD47-4C2DEB00945F}"/>
+                <a16:creationId xmlns:a16="http://schemas.microsoft.com/office/drawing/2014/main" id="{59EAADB8-6A70-4A6D-BF13-9AC3E60A7151}"/>
               </a:ext>
             </a:extLst>
           </p:cNvPr>
@@ -6645,7 +6645,7 @@
                 <a:ea typeface="Aptos"/>
                 <a:cs typeface="Aptos"/>
               </a:rPr>
-              <a:t>TESIS</a:t>
+              <a:t>POR QUÉ AHORA</a:t>
             </a:r>
           </a:p>
         </p:txBody>
@@ -6655,7 +6655,7 @@
           <p:cNvPr id="5" name="">
             <a:extLst xmlns:a="http://schemas.openxmlformats.org/drawingml/2006/main">
               <a:ext uri="{FF2B5EF4-FFF2-40B4-BE49-F238E27FC236}">
-                <a16:creationId xmlns:a16="http://schemas.microsoft.com/office/drawing/2014/main" id="{FF3398EB-4D43-48E7-AF1E-39CB59A28CE4}"/>
+                <a16:creationId xmlns:a16="http://schemas.microsoft.com/office/drawing/2014/main" id="{6B243F75-1DCB-4552-B054-54E225AF00D4}"/>
               </a:ext>
             </a:extLst>
           </p:cNvPr>
@@ -6709,7 +6709,7 @@
                 <a:ea typeface="Aptos Display"/>
                 <a:cs typeface="Aptos Display"/>
               </a:rPr>
-              <a:t>Las empresas necesitan builders, no solo consultores</a:t>
+              <a:t>Las empresas necesitan implementar IA, no comprar más presentaciones</a:t>
             </a:r>
           </a:p>
         </p:txBody>
@@ -6719,7 +6719,7 @@
           <p:cNvPr id="6" name="">
             <a:extLst xmlns:a="http://schemas.openxmlformats.org/drawingml/2006/main">
               <a:ext uri="{FF2B5EF4-FFF2-40B4-BE49-F238E27FC236}">
-                <a16:creationId xmlns:a16="http://schemas.microsoft.com/office/drawing/2014/main" id="{11B76497-7D49-41B6-A992-5E11CBA92ECC}"/>
+                <a16:creationId xmlns:a16="http://schemas.microsoft.com/office/drawing/2014/main" id="{72596174-5E9A-4387-8796-F4AE1B9297F6}"/>
               </a:ext>
             </a:extLst>
           </p:cNvPr>
@@ -6773,7 +6773,7 @@
                 <a:ea typeface="Aptos"/>
                 <a:cs typeface="Aptos"/>
               </a:rPr>
-              <a:t>La adopción real de IA exige diagnóstico, software, datos, automatización y cultura operativa trabajando como un sistema.</a:t>
+              <a:t>La presión por adoptar IA está llegando a empresas que todavía operan con procesos manuales, datos dispersos y equipos sin capacidad interna para construir.</a:t>
             </a:r>
           </a:p>
         </p:txBody>
@@ -6783,7 +6783,7 @@
           <p:cNvPr id="7" name="">
             <a:extLst xmlns:a="http://schemas.openxmlformats.org/drawingml/2006/main">
               <a:ext uri="{FF2B5EF4-FFF2-40B4-BE49-F238E27FC236}">
-                <a16:creationId xmlns:a16="http://schemas.microsoft.com/office/drawing/2014/main" id="{26D36ABD-D039-4E74-8A7D-C227E64864F1}"/>
+                <a16:creationId xmlns:a16="http://schemas.microsoft.com/office/drawing/2014/main" id="{64BAA7D7-4C87-4A91-BCB7-EB04B0CFCC81}"/>
               </a:ext>
             </a:extLst>
           </p:cNvPr>
@@ -6818,7 +6818,7 @@
           <p:cNvPr id="8" name="">
             <a:extLst xmlns:a="http://schemas.openxmlformats.org/drawingml/2006/main">
               <a:ext uri="{FF2B5EF4-FFF2-40B4-BE49-F238E27FC236}">
-                <a16:creationId xmlns:a16="http://schemas.microsoft.com/office/drawing/2014/main" id="{087429B1-0AB5-4B9A-9E1D-FE17CA8888AC}"/>
+                <a16:creationId xmlns:a16="http://schemas.microsoft.com/office/drawing/2014/main" id="{CC6CEEC2-C324-4CDB-BFFB-3EE0F762C7D9}"/>
               </a:ext>
             </a:extLst>
           </p:cNvPr>
@@ -6882,7 +6882,7 @@
           <p:cNvPr id="9" name="">
             <a:extLst xmlns:a="http://schemas.openxmlformats.org/drawingml/2006/main">
               <a:ext uri="{FF2B5EF4-FFF2-40B4-BE49-F238E27FC236}">
-                <a16:creationId xmlns:a16="http://schemas.microsoft.com/office/drawing/2014/main" id="{5E4764A0-81CD-4C08-9D95-87F5A5952D3D}"/>
+                <a16:creationId xmlns:a16="http://schemas.microsoft.com/office/drawing/2014/main" id="{6E61EC0F-1EED-4C18-BE35-6AB62A47A1C5}"/>
               </a:ext>
             </a:extLst>
           </p:cNvPr>
@@ -6936,7 +6936,7 @@
                 <a:ea typeface="Aptos"/>
                 <a:cs typeface="Aptos"/>
               </a:rPr>
-              <a:t>AI + software como núcleo</a:t>
+              <a:t>Dolor operativo claro</a:t>
             </a:r>
           </a:p>
         </p:txBody>
@@ -6946,7 +6946,7 @@
           <p:cNvPr id="10" name="">
             <a:extLst xmlns:a="http://schemas.openxmlformats.org/drawingml/2006/main">
               <a:ext uri="{FF2B5EF4-FFF2-40B4-BE49-F238E27FC236}">
-                <a16:creationId xmlns:a16="http://schemas.microsoft.com/office/drawing/2014/main" id="{28C0CD84-8609-4C11-A8C9-61B16032142F}"/>
+                <a16:creationId xmlns:a16="http://schemas.microsoft.com/office/drawing/2014/main" id="{136407C9-FDC8-4B6C-B97D-A32AEC1A2DEE}"/>
               </a:ext>
             </a:extLst>
           </p:cNvPr>
@@ -6979,7 +6979,7 @@
           <p:cNvPr id="11" name="">
             <a:extLst xmlns:a="http://schemas.openxmlformats.org/drawingml/2006/main">
               <a:ext uri="{FF2B5EF4-FFF2-40B4-BE49-F238E27FC236}">
-                <a16:creationId xmlns:a16="http://schemas.microsoft.com/office/drawing/2014/main" id="{4557D168-DFD3-4742-95C4-53A0D3224308}"/>
+                <a16:creationId xmlns:a16="http://schemas.microsoft.com/office/drawing/2014/main" id="{DE8C57AF-71B0-48BA-9E9D-6663B3C9251C}"/>
               </a:ext>
             </a:extLst>
           </p:cNvPr>
@@ -7014,7 +7014,7 @@
           <p:cNvPr id="12" name="">
             <a:extLst xmlns:a="http://schemas.openxmlformats.org/drawingml/2006/main">
               <a:ext uri="{FF2B5EF4-FFF2-40B4-BE49-F238E27FC236}">
-                <a16:creationId xmlns:a16="http://schemas.microsoft.com/office/drawing/2014/main" id="{2610525F-1082-462F-A706-993696B31247}"/>
+                <a16:creationId xmlns:a16="http://schemas.microsoft.com/office/drawing/2014/main" id="{A85FB4BB-2FA5-4CDE-9823-9DAEB4194690}"/>
               </a:ext>
             </a:extLst>
           </p:cNvPr>
@@ -7078,7 +7078,7 @@
           <p:cNvPr id="13" name="">
             <a:extLst xmlns:a="http://schemas.openxmlformats.org/drawingml/2006/main">
               <a:ext uri="{FF2B5EF4-FFF2-40B4-BE49-F238E27FC236}">
-                <a16:creationId xmlns:a16="http://schemas.microsoft.com/office/drawing/2014/main" id="{50B797EE-9307-481C-88F2-AD6870BD9972}"/>
+                <a16:creationId xmlns:a16="http://schemas.microsoft.com/office/drawing/2014/main" id="{327ADDC5-6BE9-4DD5-AA52-63A22C3E63B4}"/>
               </a:ext>
             </a:extLst>
           </p:cNvPr>
@@ -7132,7 +7132,7 @@
                 <a:ea typeface="Aptos"/>
                 <a:cs typeface="Aptos"/>
               </a:rPr>
-              <a:t>Experiencias interactivas para adopción</a:t>
+              <a:t>Demanda creciente por IA</a:t>
             </a:r>
           </a:p>
         </p:txBody>
@@ -7142,7 +7142,7 @@
           <p:cNvPr id="14" name="">
             <a:extLst xmlns:a="http://schemas.openxmlformats.org/drawingml/2006/main">
               <a:ext uri="{FF2B5EF4-FFF2-40B4-BE49-F238E27FC236}">
-                <a16:creationId xmlns:a16="http://schemas.microsoft.com/office/drawing/2014/main" id="{27FB9579-06C2-40D0-9DC9-430CC626E3BD}"/>
+                <a16:creationId xmlns:a16="http://schemas.microsoft.com/office/drawing/2014/main" id="{7A24E860-B99C-4AF4-817C-89E835C3578E}"/>
               </a:ext>
             </a:extLst>
           </p:cNvPr>
@@ -7175,7 +7175,7 @@
           <p:cNvPr id="15" name="">
             <a:extLst xmlns:a="http://schemas.openxmlformats.org/drawingml/2006/main">
               <a:ext uri="{FF2B5EF4-FFF2-40B4-BE49-F238E27FC236}">
-                <a16:creationId xmlns:a16="http://schemas.microsoft.com/office/drawing/2014/main" id="{FCA8200A-5E4A-4970-B78C-CFF37D12E0B7}"/>
+                <a16:creationId xmlns:a16="http://schemas.microsoft.com/office/drawing/2014/main" id="{A6F431FB-85EE-47FF-90A4-D1C7A1B6FCB4}"/>
               </a:ext>
             </a:extLst>
           </p:cNvPr>
@@ -7210,7 +7210,7 @@
           <p:cNvPr id="16" name="">
             <a:extLst xmlns:a="http://schemas.openxmlformats.org/drawingml/2006/main">
               <a:ext uri="{FF2B5EF4-FFF2-40B4-BE49-F238E27FC236}">
-                <a16:creationId xmlns:a16="http://schemas.microsoft.com/office/drawing/2014/main" id="{774F726E-B6EB-416D-955D-B665CE7134C1}"/>
+                <a16:creationId xmlns:a16="http://schemas.microsoft.com/office/drawing/2014/main" id="{AFD9C2BA-B822-48DA-8E4A-DFDAF8E0BBCD}"/>
               </a:ext>
             </a:extLst>
           </p:cNvPr>
@@ -7274,7 +7274,7 @@
           <p:cNvPr id="17" name="">
             <a:extLst xmlns:a="http://schemas.openxmlformats.org/drawingml/2006/main">
               <a:ext uri="{FF2B5EF4-FFF2-40B4-BE49-F238E27FC236}">
-                <a16:creationId xmlns:a16="http://schemas.microsoft.com/office/drawing/2014/main" id="{542626EF-29E6-4555-AE12-29D5087E65F2}"/>
+                <a16:creationId xmlns:a16="http://schemas.microsoft.com/office/drawing/2014/main" id="{7873B7CD-2729-4581-B35B-9C8E98E03AD8}"/>
               </a:ext>
             </a:extLst>
           </p:cNvPr>
@@ -7328,7 +7328,7 @@
                 <a:ea typeface="Aptos"/>
                 <a:cs typeface="Aptos"/>
               </a:rPr>
-              <a:t>Robótica y automatización como frontera</a:t>
+              <a:t>Necesidad de ejecución técnica</a:t>
             </a:r>
           </a:p>
         </p:txBody>
@@ -7338,7 +7338,7 @@
           <p:cNvPr id="18" name="">
             <a:extLst xmlns:a="http://schemas.openxmlformats.org/drawingml/2006/main">
               <a:ext uri="{FF2B5EF4-FFF2-40B4-BE49-F238E27FC236}">
-                <a16:creationId xmlns:a16="http://schemas.microsoft.com/office/drawing/2014/main" id="{4ECD9513-9E41-4544-AD7C-83EE372665E6}"/>
+                <a16:creationId xmlns:a16="http://schemas.microsoft.com/office/drawing/2014/main" id="{3C504C50-6A5A-4DB1-9A1C-6EE2451E28F7}"/>
               </a:ext>
             </a:extLst>
           </p:cNvPr>
@@ -7402,7 +7402,7 @@
           <p:cNvPr id="19" name="">
             <a:extLst xmlns:a="http://schemas.openxmlformats.org/drawingml/2006/main">
               <a:ext uri="{FF2B5EF4-FFF2-40B4-BE49-F238E27FC236}">
-                <a16:creationId xmlns:a16="http://schemas.microsoft.com/office/drawing/2014/main" id="{5A4BC0D1-C483-4435-BCC4-DBE45932680F}"/>
+                <a16:creationId xmlns:a16="http://schemas.microsoft.com/office/drawing/2014/main" id="{49B19066-86F0-40AD-80E3-7F2B09570EC9}"/>
               </a:ext>
             </a:extLst>
           </p:cNvPr>
@@ -7435,7 +7435,7 @@
           <p:cNvPr id="20" name="">
             <a:extLst xmlns:a="http://schemas.openxmlformats.org/drawingml/2006/main">
               <a:ext uri="{FF2B5EF4-FFF2-40B4-BE49-F238E27FC236}">
-                <a16:creationId xmlns:a16="http://schemas.microsoft.com/office/drawing/2014/main" id="{EC17DC1F-E56C-41FE-8894-F49793EEF206}"/>
+                <a16:creationId xmlns:a16="http://schemas.microsoft.com/office/drawing/2014/main" id="{71C3ABFF-6C75-4C75-9097-C27E63D6E4BD}"/>
               </a:ext>
             </a:extLst>
           </p:cNvPr>
@@ -7499,7 +7499,7 @@
           <p:cNvPr id="21" name="">
             <a:extLst xmlns:a="http://schemas.openxmlformats.org/drawingml/2006/main">
               <a:ext uri="{FF2B5EF4-FFF2-40B4-BE49-F238E27FC236}">
-                <a16:creationId xmlns:a16="http://schemas.microsoft.com/office/drawing/2014/main" id="{C86EAEC6-E5A1-4BF6-921F-E7AFD8A40E92}"/>
+                <a16:creationId xmlns:a16="http://schemas.microsoft.com/office/drawing/2014/main" id="{D603F8D4-C2C3-4976-A8B5-264C67F5CA67}"/>
               </a:ext>
             </a:extLst>
           </p:cNvPr>
@@ -7561,7 +7561,7 @@
     </p:spTree>
     <p:extLst>
       <p:ext uri="{BB962C8B-B14F-4D97-AF65-F5344CB8AC3E}">
-        <p14:creationId xmlns:p14="http://schemas.microsoft.com/office/powerpoint/2010/main" val="161858412"/>
+        <p14:creationId xmlns:p14="http://schemas.microsoft.com/office/powerpoint/2010/main" val="1940562906"/>
       </p:ext>
     </p:extLst>
   </p:cSld>
@@ -7589,7 +7589,7 @@
           <p:nvPr/>
         </p:nvPicPr>
         <p:blipFill>
-          <a:blip xmlns:r="http://schemas.openxmlformats.org/officeDocument/2006/relationships" xmlns:a="http://schemas.openxmlformats.org/drawingml/2006/main" r:embed="R66f8ca0628d74f89"/>
+          <a:blip xmlns:r="http://schemas.openxmlformats.org/officeDocument/2006/relationships" xmlns:a="http://schemas.openxmlformats.org/drawingml/2006/main" r:embed="Re5da587c0f964ba2"/>
           <a:srcRect xmlns:a="http://schemas.openxmlformats.org/drawingml/2006/main" l="0" t="27" r="0" b="27"/>
           <a:stretch xmlns:a="http://schemas.openxmlformats.org/drawingml/2006/main">
             <a:fillRect l="0" t="0" r="0" b="0"/>
@@ -7610,7 +7610,7 @@
           <p:cNvPr id="2" name="">
             <a:extLst xmlns:a="http://schemas.openxmlformats.org/drawingml/2006/main">
               <a:ext uri="{FF2B5EF4-FFF2-40B4-BE49-F238E27FC236}">
-                <a16:creationId xmlns:a16="http://schemas.microsoft.com/office/drawing/2014/main" id="{9464961F-6FCD-4A97-81D7-E8988C675191}"/>
+                <a16:creationId xmlns:a16="http://schemas.microsoft.com/office/drawing/2014/main" id="{40AAD390-093E-4D91-BCB6-D1381E31E8DD}"/>
               </a:ext>
             </a:extLst>
           </p:cNvPr>
@@ -7647,7 +7647,7 @@
           <p:cNvPr id="3" name="">
             <a:extLst xmlns:a="http://schemas.openxmlformats.org/drawingml/2006/main">
               <a:ext uri="{FF2B5EF4-FFF2-40B4-BE49-F238E27FC236}">
-                <a16:creationId xmlns:a16="http://schemas.microsoft.com/office/drawing/2014/main" id="{81F425E8-8EEA-46CC-AEDF-7A716D450FD9}"/>
+                <a16:creationId xmlns:a16="http://schemas.microsoft.com/office/drawing/2014/main" id="{425DC291-333E-4711-9D4C-780AA2144D4E}"/>
               </a:ext>
             </a:extLst>
           </p:cNvPr>
@@ -7684,7 +7684,7 @@
           <p:cNvPr id="4" name="">
             <a:extLst xmlns:a="http://schemas.openxmlformats.org/drawingml/2006/main">
               <a:ext uri="{FF2B5EF4-FFF2-40B4-BE49-F238E27FC236}">
-                <a16:creationId xmlns:a16="http://schemas.microsoft.com/office/drawing/2014/main" id="{116FD328-CD09-4471-B9C9-C002FAEB4BEF}"/>
+                <a16:creationId xmlns:a16="http://schemas.microsoft.com/office/drawing/2014/main" id="{629F260D-53B1-4308-81AA-B2E9264F25A4}"/>
               </a:ext>
             </a:extLst>
           </p:cNvPr>
@@ -7748,7 +7748,7 @@
           <p:cNvPr id="5" name="">
             <a:extLst xmlns:a="http://schemas.openxmlformats.org/drawingml/2006/main">
               <a:ext uri="{FF2B5EF4-FFF2-40B4-BE49-F238E27FC236}">
-                <a16:creationId xmlns:a16="http://schemas.microsoft.com/office/drawing/2014/main" id="{F87B6D23-B25E-4B21-9690-F9334118451B}"/>
+                <a16:creationId xmlns:a16="http://schemas.microsoft.com/office/drawing/2014/main" id="{321A84C0-47A4-4803-A418-221AA1821BDF}"/>
               </a:ext>
             </a:extLst>
           </p:cNvPr>
@@ -7812,7 +7812,7 @@
           <p:cNvPr id="6" name="">
             <a:extLst xmlns:a="http://schemas.openxmlformats.org/drawingml/2006/main">
               <a:ext uri="{FF2B5EF4-FFF2-40B4-BE49-F238E27FC236}">
-                <a16:creationId xmlns:a16="http://schemas.microsoft.com/office/drawing/2014/main" id="{5EE09E84-C4A0-4B17-85FA-2E6C159146D1}"/>
+                <a16:creationId xmlns:a16="http://schemas.microsoft.com/office/drawing/2014/main" id="{776310BB-8DA9-4FF2-8419-F4710DB334B7}"/>
               </a:ext>
             </a:extLst>
           </p:cNvPr>
@@ -7876,7 +7876,7 @@
           <p:cNvPr id="7" name="">
             <a:extLst xmlns:a="http://schemas.openxmlformats.org/drawingml/2006/main">
               <a:ext uri="{FF2B5EF4-FFF2-40B4-BE49-F238E27FC236}">
-                <a16:creationId xmlns:a16="http://schemas.microsoft.com/office/drawing/2014/main" id="{82BB3D64-195A-4CA2-A3CE-1C218D253EBD}"/>
+                <a16:creationId xmlns:a16="http://schemas.microsoft.com/office/drawing/2014/main" id="{8F3B9D64-5490-4597-B2E2-B0BAD82618A4}"/>
               </a:ext>
             </a:extLst>
           </p:cNvPr>
@@ -7911,7 +7911,7 @@
           <p:cNvPr id="8" name="">
             <a:extLst xmlns:a="http://schemas.openxmlformats.org/drawingml/2006/main">
               <a:ext uri="{FF2B5EF4-FFF2-40B4-BE49-F238E27FC236}">
-                <a16:creationId xmlns:a16="http://schemas.microsoft.com/office/drawing/2014/main" id="{D01FA10E-9ECF-4E0A-8D76-80C02C22C0B7}"/>
+                <a16:creationId xmlns:a16="http://schemas.microsoft.com/office/drawing/2014/main" id="{987FE089-5B63-4679-BF22-64DE6BC9F418}"/>
               </a:ext>
             </a:extLst>
           </p:cNvPr>
@@ -7975,7 +7975,7 @@
           <p:cNvPr id="9" name="">
             <a:extLst xmlns:a="http://schemas.openxmlformats.org/drawingml/2006/main">
               <a:ext uri="{FF2B5EF4-FFF2-40B4-BE49-F238E27FC236}">
-                <a16:creationId xmlns:a16="http://schemas.microsoft.com/office/drawing/2014/main" id="{9C7207AE-F6B0-44A1-ABFD-8F8082469A68}"/>
+                <a16:creationId xmlns:a16="http://schemas.microsoft.com/office/drawing/2014/main" id="{D53DA467-4933-4119-BB15-5692EDDC1149}"/>
               </a:ext>
             </a:extLst>
           </p:cNvPr>
@@ -8039,7 +8039,7 @@
           <p:cNvPr id="10" name="">
             <a:extLst xmlns:a="http://schemas.openxmlformats.org/drawingml/2006/main">
               <a:ext uri="{FF2B5EF4-FFF2-40B4-BE49-F238E27FC236}">
-                <a16:creationId xmlns:a16="http://schemas.microsoft.com/office/drawing/2014/main" id="{0E17CF7F-A7E5-485B-AD7F-CE51A34D9E9A}"/>
+                <a16:creationId xmlns:a16="http://schemas.microsoft.com/office/drawing/2014/main" id="{7215FB39-3BFE-40D5-8A1B-60E83C23D528}"/>
               </a:ext>
             </a:extLst>
           </p:cNvPr>
@@ -8074,7 +8074,7 @@
           <p:cNvPr id="11" name="">
             <a:extLst xmlns:a="http://schemas.openxmlformats.org/drawingml/2006/main">
               <a:ext uri="{FF2B5EF4-FFF2-40B4-BE49-F238E27FC236}">
-                <a16:creationId xmlns:a16="http://schemas.microsoft.com/office/drawing/2014/main" id="{9BC9FF2E-193A-4DF8-8812-7A4D5B8232A2}"/>
+                <a16:creationId xmlns:a16="http://schemas.microsoft.com/office/drawing/2014/main" id="{577D5DF5-C7A2-4615-ABBD-C2343DD75AB1}"/>
               </a:ext>
             </a:extLst>
           </p:cNvPr>
@@ -8138,7 +8138,7 @@
           <p:cNvPr id="12" name="">
             <a:extLst xmlns:a="http://schemas.openxmlformats.org/drawingml/2006/main">
               <a:ext uri="{FF2B5EF4-FFF2-40B4-BE49-F238E27FC236}">
-                <a16:creationId xmlns:a16="http://schemas.microsoft.com/office/drawing/2014/main" id="{16C903C6-C0AF-4FBF-BDC8-1C078D124950}"/>
+                <a16:creationId xmlns:a16="http://schemas.microsoft.com/office/drawing/2014/main" id="{073267CC-5F83-4D6A-BB16-845793067C52}"/>
               </a:ext>
             </a:extLst>
           </p:cNvPr>
@@ -8202,7 +8202,7 @@
           <p:cNvPr id="13" name="">
             <a:extLst xmlns:a="http://schemas.openxmlformats.org/drawingml/2006/main">
               <a:ext uri="{FF2B5EF4-FFF2-40B4-BE49-F238E27FC236}">
-                <a16:creationId xmlns:a16="http://schemas.microsoft.com/office/drawing/2014/main" id="{35E8F129-D6AF-44D5-AD5C-123C3D2159FC}"/>
+                <a16:creationId xmlns:a16="http://schemas.microsoft.com/office/drawing/2014/main" id="{56397B6A-5F77-45CF-B933-E3375781B5D4}"/>
               </a:ext>
             </a:extLst>
           </p:cNvPr>
@@ -8237,7 +8237,7 @@
           <p:cNvPr id="14" name="">
             <a:extLst xmlns:a="http://schemas.openxmlformats.org/drawingml/2006/main">
               <a:ext uri="{FF2B5EF4-FFF2-40B4-BE49-F238E27FC236}">
-                <a16:creationId xmlns:a16="http://schemas.microsoft.com/office/drawing/2014/main" id="{7A2BF7BC-60EE-473C-9AAA-A9AD19A021FE}"/>
+                <a16:creationId xmlns:a16="http://schemas.microsoft.com/office/drawing/2014/main" id="{95C4C626-82BC-4249-BAF9-3E5F3557DD6E}"/>
               </a:ext>
             </a:extLst>
           </p:cNvPr>
@@ -8301,7 +8301,7 @@
           <p:cNvPr id="15" name="">
             <a:extLst xmlns:a="http://schemas.openxmlformats.org/drawingml/2006/main">
               <a:ext uri="{FF2B5EF4-FFF2-40B4-BE49-F238E27FC236}">
-                <a16:creationId xmlns:a16="http://schemas.microsoft.com/office/drawing/2014/main" id="{329131A3-2B91-4579-B39E-A681F94E3EDA}"/>
+                <a16:creationId xmlns:a16="http://schemas.microsoft.com/office/drawing/2014/main" id="{0F71F858-4789-4530-809F-99A0CF299D3A}"/>
               </a:ext>
             </a:extLst>
           </p:cNvPr>
@@ -8365,7 +8365,7 @@
           <p:cNvPr id="16" name="">
             <a:extLst xmlns:a="http://schemas.openxmlformats.org/drawingml/2006/main">
               <a:ext uri="{FF2B5EF4-FFF2-40B4-BE49-F238E27FC236}">
-                <a16:creationId xmlns:a16="http://schemas.microsoft.com/office/drawing/2014/main" id="{E2C0B02A-4FCB-45E7-8DC7-CB12ADA0D629}"/>
+                <a16:creationId xmlns:a16="http://schemas.microsoft.com/office/drawing/2014/main" id="{ED07885A-899B-4749-91FA-B81E8442346B}"/>
               </a:ext>
             </a:extLst>
           </p:cNvPr>
@@ -8400,7 +8400,7 @@
           <p:cNvPr id="17" name="">
             <a:extLst xmlns:a="http://schemas.openxmlformats.org/drawingml/2006/main">
               <a:ext uri="{FF2B5EF4-FFF2-40B4-BE49-F238E27FC236}">
-                <a16:creationId xmlns:a16="http://schemas.microsoft.com/office/drawing/2014/main" id="{4DEA75AD-325A-42AB-985A-E4D0468DCD80}"/>
+                <a16:creationId xmlns:a16="http://schemas.microsoft.com/office/drawing/2014/main" id="{85A9A07A-D494-4499-B24C-F9BB1796C148}"/>
               </a:ext>
             </a:extLst>
           </p:cNvPr>
@@ -8464,7 +8464,7 @@
           <p:cNvPr id="18" name="">
             <a:extLst xmlns:a="http://schemas.openxmlformats.org/drawingml/2006/main">
               <a:ext uri="{FF2B5EF4-FFF2-40B4-BE49-F238E27FC236}">
-                <a16:creationId xmlns:a16="http://schemas.microsoft.com/office/drawing/2014/main" id="{7461C6DE-C457-4A9C-B0D3-514574710897}"/>
+                <a16:creationId xmlns:a16="http://schemas.microsoft.com/office/drawing/2014/main" id="{9B84F31B-E0E3-4604-AFE4-566A0550E08A}"/>
               </a:ext>
             </a:extLst>
           </p:cNvPr>
@@ -8528,7 +8528,7 @@
           <p:cNvPr id="19" name="">
             <a:extLst xmlns:a="http://schemas.openxmlformats.org/drawingml/2006/main">
               <a:ext uri="{FF2B5EF4-FFF2-40B4-BE49-F238E27FC236}">
-                <a16:creationId xmlns:a16="http://schemas.microsoft.com/office/drawing/2014/main" id="{9932EB7C-41CB-42D0-8DD3-E83D0D8E175E}"/>
+                <a16:creationId xmlns:a16="http://schemas.microsoft.com/office/drawing/2014/main" id="{7EC11CB7-E276-4F38-9923-89C39BB8A43D}"/>
               </a:ext>
             </a:extLst>
           </p:cNvPr>
@@ -8592,7 +8592,7 @@
           <p:cNvPr id="20" name="">
             <a:extLst xmlns:a="http://schemas.openxmlformats.org/drawingml/2006/main">
               <a:ext uri="{FF2B5EF4-FFF2-40B4-BE49-F238E27FC236}">
-                <a16:creationId xmlns:a16="http://schemas.microsoft.com/office/drawing/2014/main" id="{483AE8E1-1B5F-45EA-99C8-234EB10938C4}"/>
+                <a16:creationId xmlns:a16="http://schemas.microsoft.com/office/drawing/2014/main" id="{3676BCD4-3C75-4107-894A-1BDB80D8F87B}"/>
               </a:ext>
             </a:extLst>
           </p:cNvPr>
@@ -8625,7 +8625,7 @@
           <p:cNvPr id="21" name="">
             <a:extLst xmlns:a="http://schemas.openxmlformats.org/drawingml/2006/main">
               <a:ext uri="{FF2B5EF4-FFF2-40B4-BE49-F238E27FC236}">
-                <a16:creationId xmlns:a16="http://schemas.microsoft.com/office/drawing/2014/main" id="{5C121F3D-396E-4787-8CC2-CF341A7F35F1}"/>
+                <a16:creationId xmlns:a16="http://schemas.microsoft.com/office/drawing/2014/main" id="{D5241654-2DF9-4161-A2D1-72C3BA402E64}"/>
               </a:ext>
             </a:extLst>
           </p:cNvPr>
@@ -8658,7 +8658,7 @@
           <p:cNvPr id="22" name="">
             <a:extLst xmlns:a="http://schemas.openxmlformats.org/drawingml/2006/main">
               <a:ext uri="{FF2B5EF4-FFF2-40B4-BE49-F238E27FC236}">
-                <a16:creationId xmlns:a16="http://schemas.microsoft.com/office/drawing/2014/main" id="{3E96550C-E44E-4DDF-9881-2A2C2846C66B}"/>
+                <a16:creationId xmlns:a16="http://schemas.microsoft.com/office/drawing/2014/main" id="{F18C3B80-1748-4BFC-9F96-B2CBB2FD0F40}"/>
               </a:ext>
             </a:extLst>
           </p:cNvPr>
@@ -8722,7 +8722,7 @@
           <p:cNvPr id="23" name="">
             <a:extLst xmlns:a="http://schemas.openxmlformats.org/drawingml/2006/main">
               <a:ext uri="{FF2B5EF4-FFF2-40B4-BE49-F238E27FC236}">
-                <a16:creationId xmlns:a16="http://schemas.microsoft.com/office/drawing/2014/main" id="{CD0F6518-C33D-4FDF-B1A9-E9E742CE7D9C}"/>
+                <a16:creationId xmlns:a16="http://schemas.microsoft.com/office/drawing/2014/main" id="{F2C0C1BB-6C25-49FF-93FA-7CB7FC83AA53}"/>
               </a:ext>
             </a:extLst>
           </p:cNvPr>
@@ -8755,7 +8755,7 @@
           <p:cNvPr id="24" name="">
             <a:extLst xmlns:a="http://schemas.openxmlformats.org/drawingml/2006/main">
               <a:ext uri="{FF2B5EF4-FFF2-40B4-BE49-F238E27FC236}">
-                <a16:creationId xmlns:a16="http://schemas.microsoft.com/office/drawing/2014/main" id="{32BA541C-3E99-42A0-ABA1-6E800D908EBB}"/>
+                <a16:creationId xmlns:a16="http://schemas.microsoft.com/office/drawing/2014/main" id="{FDB16230-CC85-4B70-96B9-DF3D19AD1488}"/>
               </a:ext>
             </a:extLst>
           </p:cNvPr>
@@ -8788,7 +8788,7 @@
           <p:cNvPr id="25" name="">
             <a:extLst xmlns:a="http://schemas.openxmlformats.org/drawingml/2006/main">
               <a:ext uri="{FF2B5EF4-FFF2-40B4-BE49-F238E27FC236}">
-                <a16:creationId xmlns:a16="http://schemas.microsoft.com/office/drawing/2014/main" id="{F8731AF2-A203-4088-A18C-66B25A7321BF}"/>
+                <a16:creationId xmlns:a16="http://schemas.microsoft.com/office/drawing/2014/main" id="{575583D9-86E7-4841-9035-FAC7855207E8}"/>
               </a:ext>
             </a:extLst>
           </p:cNvPr>
@@ -8852,7 +8852,7 @@
           <p:cNvPr id="26" name="">
             <a:extLst xmlns:a="http://schemas.openxmlformats.org/drawingml/2006/main">
               <a:ext uri="{FF2B5EF4-FFF2-40B4-BE49-F238E27FC236}">
-                <a16:creationId xmlns:a16="http://schemas.microsoft.com/office/drawing/2014/main" id="{107D983E-E816-48AB-A513-84E194F23E05}"/>
+                <a16:creationId xmlns:a16="http://schemas.microsoft.com/office/drawing/2014/main" id="{443EF72E-E836-48DB-AB36-B5C09E96DACF}"/>
               </a:ext>
             </a:extLst>
           </p:cNvPr>
@@ -8885,7 +8885,7 @@
           <p:cNvPr id="27" name="">
             <a:extLst xmlns:a="http://schemas.openxmlformats.org/drawingml/2006/main">
               <a:ext uri="{FF2B5EF4-FFF2-40B4-BE49-F238E27FC236}">
-                <a16:creationId xmlns:a16="http://schemas.microsoft.com/office/drawing/2014/main" id="{A076F7AC-FF91-4545-AFD8-66A2D42C9FFE}"/>
+                <a16:creationId xmlns:a16="http://schemas.microsoft.com/office/drawing/2014/main" id="{42B4BB25-9F94-4B79-A2DC-5A3E238F576D}"/>
               </a:ext>
             </a:extLst>
           </p:cNvPr>
@@ -8918,7 +8918,7 @@
           <p:cNvPr id="28" name="">
             <a:extLst xmlns:a="http://schemas.openxmlformats.org/drawingml/2006/main">
               <a:ext uri="{FF2B5EF4-FFF2-40B4-BE49-F238E27FC236}">
-                <a16:creationId xmlns:a16="http://schemas.microsoft.com/office/drawing/2014/main" id="{2F6BAC17-F1D9-404E-BEB3-C4140A3CBE5C}"/>
+                <a16:creationId xmlns:a16="http://schemas.microsoft.com/office/drawing/2014/main" id="{68B50617-7335-4728-A192-0410C0F901A2}"/>
               </a:ext>
             </a:extLst>
           </p:cNvPr>
@@ -8982,7 +8982,7 @@
           <p:cNvPr id="29" name="">
             <a:extLst xmlns:a="http://schemas.openxmlformats.org/drawingml/2006/main">
               <a:ext uri="{FF2B5EF4-FFF2-40B4-BE49-F238E27FC236}">
-                <a16:creationId xmlns:a16="http://schemas.microsoft.com/office/drawing/2014/main" id="{F52F4EBD-5EE1-4792-8680-D58AB3DE7B6C}"/>
+                <a16:creationId xmlns:a16="http://schemas.microsoft.com/office/drawing/2014/main" id="{E770998A-4A68-4FE2-9A30-ABDDABDD3C55}"/>
               </a:ext>
             </a:extLst>
           </p:cNvPr>
@@ -9015,7 +9015,7 @@
           <p:cNvPr id="30" name="">
             <a:extLst xmlns:a="http://schemas.openxmlformats.org/drawingml/2006/main">
               <a:ext uri="{FF2B5EF4-FFF2-40B4-BE49-F238E27FC236}">
-                <a16:creationId xmlns:a16="http://schemas.microsoft.com/office/drawing/2014/main" id="{875861F0-6065-40C5-89AC-7A0F15414D6F}"/>
+                <a16:creationId xmlns:a16="http://schemas.microsoft.com/office/drawing/2014/main" id="{528D7769-BE83-4D77-9F96-7260C4EFD040}"/>
               </a:ext>
             </a:extLst>
           </p:cNvPr>
@@ -9079,7 +9079,7 @@
           <p:cNvPr id="31" name="">
             <a:extLst xmlns:a="http://schemas.openxmlformats.org/drawingml/2006/main">
               <a:ext uri="{FF2B5EF4-FFF2-40B4-BE49-F238E27FC236}">
-                <a16:creationId xmlns:a16="http://schemas.microsoft.com/office/drawing/2014/main" id="{8966AF0C-0F8E-4096-BC08-891F07374286}"/>
+                <a16:creationId xmlns:a16="http://schemas.microsoft.com/office/drawing/2014/main" id="{645EF7BE-C869-4104-A916-7D346576EF74}"/>
               </a:ext>
             </a:extLst>
           </p:cNvPr>
@@ -9141,7 +9141,7 @@
     </p:spTree>
     <p:extLst>
       <p:ext uri="{BB962C8B-B14F-4D97-AF65-F5344CB8AC3E}">
-        <p14:creationId xmlns:p14="http://schemas.microsoft.com/office/powerpoint/2010/main" val="661304783"/>
+        <p14:creationId xmlns:p14="http://schemas.microsoft.com/office/powerpoint/2010/main" val="1139772314"/>
       </p:ext>
     </p:extLst>
   </p:cSld>
@@ -9169,7 +9169,7 @@
           <p:nvPr/>
         </p:nvPicPr>
         <p:blipFill>
-          <a:blip xmlns:r="http://schemas.openxmlformats.org/officeDocument/2006/relationships" xmlns:a="http://schemas.openxmlformats.org/drawingml/2006/main" r:embed="R43203c3d6b514a28"/>
+          <a:blip xmlns:r="http://schemas.openxmlformats.org/officeDocument/2006/relationships" xmlns:a="http://schemas.openxmlformats.org/drawingml/2006/main" r:embed="R5f94ae52d70f4978"/>
           <a:srcRect xmlns:a="http://schemas.openxmlformats.org/drawingml/2006/main" l="0" t="7813" r="0" b="7813"/>
           <a:stretch xmlns:a="http://schemas.openxmlformats.org/drawingml/2006/main">
             <a:fillRect l="0" t="0" r="0" b="0"/>
@@ -9190,7 +9190,7 @@
           <p:cNvPr id="2" name="">
             <a:extLst xmlns:a="http://schemas.openxmlformats.org/drawingml/2006/main">
               <a:ext uri="{FF2B5EF4-FFF2-40B4-BE49-F238E27FC236}">
-                <a16:creationId xmlns:a16="http://schemas.microsoft.com/office/drawing/2014/main" id="{6E35A6F2-40A2-4BF3-966E-885C74440E1B}"/>
+                <a16:creationId xmlns:a16="http://schemas.microsoft.com/office/drawing/2014/main" id="{01C96B25-DEC3-47E3-8C4E-17948CD95AC6}"/>
               </a:ext>
             </a:extLst>
           </p:cNvPr>
@@ -9227,7 +9227,7 @@
           <p:cNvPr id="3" name="">
             <a:extLst xmlns:a="http://schemas.openxmlformats.org/drawingml/2006/main">
               <a:ext uri="{FF2B5EF4-FFF2-40B4-BE49-F238E27FC236}">
-                <a16:creationId xmlns:a16="http://schemas.microsoft.com/office/drawing/2014/main" id="{A4E3A516-37E6-4B49-A22F-FEBF5D50F8E9}"/>
+                <a16:creationId xmlns:a16="http://schemas.microsoft.com/office/drawing/2014/main" id="{328A2CED-BAE8-42B9-A7C2-B627D4E5E86D}"/>
               </a:ext>
             </a:extLst>
           </p:cNvPr>
@@ -9264,7 +9264,7 @@
           <p:cNvPr id="4" name="">
             <a:extLst xmlns:a="http://schemas.openxmlformats.org/drawingml/2006/main">
               <a:ext uri="{FF2B5EF4-FFF2-40B4-BE49-F238E27FC236}">
-                <a16:creationId xmlns:a16="http://schemas.microsoft.com/office/drawing/2014/main" id="{E853B830-85AF-46B3-9F36-7B4ED38A5BB6}"/>
+                <a16:creationId xmlns:a16="http://schemas.microsoft.com/office/drawing/2014/main" id="{8BDC9CC8-1AC5-4004-9DDD-8D90D9591F18}"/>
               </a:ext>
             </a:extLst>
           </p:cNvPr>
@@ -9328,7 +9328,7 @@
           <p:cNvPr id="5" name="">
             <a:extLst xmlns:a="http://schemas.openxmlformats.org/drawingml/2006/main">
               <a:ext uri="{FF2B5EF4-FFF2-40B4-BE49-F238E27FC236}">
-                <a16:creationId xmlns:a16="http://schemas.microsoft.com/office/drawing/2014/main" id="{18D4A86B-FED6-4B71-A0D0-969A79058A52}"/>
+                <a16:creationId xmlns:a16="http://schemas.microsoft.com/office/drawing/2014/main" id="{084BB657-C345-4D89-8264-6C5CB8BDFBFE}"/>
               </a:ext>
             </a:extLst>
           </p:cNvPr>
@@ -9392,7 +9392,7 @@
           <p:cNvPr id="6" name="">
             <a:extLst xmlns:a="http://schemas.openxmlformats.org/drawingml/2006/main">
               <a:ext uri="{FF2B5EF4-FFF2-40B4-BE49-F238E27FC236}">
-                <a16:creationId xmlns:a16="http://schemas.microsoft.com/office/drawing/2014/main" id="{61D238A3-10C0-4256-9F0F-DFB23D5691A2}"/>
+                <a16:creationId xmlns:a16="http://schemas.microsoft.com/office/drawing/2014/main" id="{97372C67-214E-4499-84E6-D7CBBCC0A3CD}"/>
               </a:ext>
             </a:extLst>
           </p:cNvPr>
@@ -9456,7 +9456,7 @@
           <p:cNvPr id="7" name="">
             <a:extLst xmlns:a="http://schemas.openxmlformats.org/drawingml/2006/main">
               <a:ext uri="{FF2B5EF4-FFF2-40B4-BE49-F238E27FC236}">
-                <a16:creationId xmlns:a16="http://schemas.microsoft.com/office/drawing/2014/main" id="{90559AB8-EC56-415F-AA6E-4C34C9E78E2C}"/>
+                <a16:creationId xmlns:a16="http://schemas.microsoft.com/office/drawing/2014/main" id="{5C32FFEB-108A-4902-87CC-049C2663CEBD}"/>
               </a:ext>
             </a:extLst>
           </p:cNvPr>
@@ -9491,7 +9491,7 @@
           <p:cNvPr id="8" name="">
             <a:extLst xmlns:a="http://schemas.openxmlformats.org/drawingml/2006/main">
               <a:ext uri="{FF2B5EF4-FFF2-40B4-BE49-F238E27FC236}">
-                <a16:creationId xmlns:a16="http://schemas.microsoft.com/office/drawing/2014/main" id="{A63D3A5B-760F-4B8F-AC8B-63407D9527B6}"/>
+                <a16:creationId xmlns:a16="http://schemas.microsoft.com/office/drawing/2014/main" id="{EF7F67A9-DB02-4BE3-B2AE-75072763E202}"/>
               </a:ext>
             </a:extLst>
           </p:cNvPr>
@@ -9555,7 +9555,7 @@
           <p:cNvPr id="9" name="">
             <a:extLst xmlns:a="http://schemas.openxmlformats.org/drawingml/2006/main">
               <a:ext uri="{FF2B5EF4-FFF2-40B4-BE49-F238E27FC236}">
-                <a16:creationId xmlns:a16="http://schemas.microsoft.com/office/drawing/2014/main" id="{F09F3F6B-7EB1-46CF-B34F-00F4E0182507}"/>
+                <a16:creationId xmlns:a16="http://schemas.microsoft.com/office/drawing/2014/main" id="{0158CC02-3A2A-44DB-AE97-CBF2AE4C0E68}"/>
               </a:ext>
             </a:extLst>
           </p:cNvPr>
@@ -9619,7 +9619,7 @@
           <p:cNvPr id="10" name="">
             <a:extLst xmlns:a="http://schemas.openxmlformats.org/drawingml/2006/main">
               <a:ext uri="{FF2B5EF4-FFF2-40B4-BE49-F238E27FC236}">
-                <a16:creationId xmlns:a16="http://schemas.microsoft.com/office/drawing/2014/main" id="{764F3DB0-72D1-4C51-AC5A-FE40438C0710}"/>
+                <a16:creationId xmlns:a16="http://schemas.microsoft.com/office/drawing/2014/main" id="{74950B45-3E2B-44BA-BA19-6A82447FF42E}"/>
               </a:ext>
             </a:extLst>
           </p:cNvPr>
@@ -9652,7 +9652,7 @@
           <p:cNvPr id="11" name="">
             <a:extLst xmlns:a="http://schemas.openxmlformats.org/drawingml/2006/main">
               <a:ext uri="{FF2B5EF4-FFF2-40B4-BE49-F238E27FC236}">
-                <a16:creationId xmlns:a16="http://schemas.microsoft.com/office/drawing/2014/main" id="{C8C521BC-E5F5-4320-886D-7D5242732BAE}"/>
+                <a16:creationId xmlns:a16="http://schemas.microsoft.com/office/drawing/2014/main" id="{9CE604A3-3D75-48EE-AC57-06DB5D6E9AAE}"/>
               </a:ext>
             </a:extLst>
           </p:cNvPr>
@@ -9687,7 +9687,7 @@
           <p:cNvPr id="12" name="">
             <a:extLst xmlns:a="http://schemas.openxmlformats.org/drawingml/2006/main">
               <a:ext uri="{FF2B5EF4-FFF2-40B4-BE49-F238E27FC236}">
-                <a16:creationId xmlns:a16="http://schemas.microsoft.com/office/drawing/2014/main" id="{E375ADE6-81B9-4717-A377-D149943CF7E3}"/>
+                <a16:creationId xmlns:a16="http://schemas.microsoft.com/office/drawing/2014/main" id="{5BCE736F-A854-4F87-A54D-A49DA1429DB3}"/>
               </a:ext>
             </a:extLst>
           </p:cNvPr>
@@ -9751,7 +9751,7 @@
           <p:cNvPr id="13" name="">
             <a:extLst xmlns:a="http://schemas.openxmlformats.org/drawingml/2006/main">
               <a:ext uri="{FF2B5EF4-FFF2-40B4-BE49-F238E27FC236}">
-                <a16:creationId xmlns:a16="http://schemas.microsoft.com/office/drawing/2014/main" id="{02DBBEEE-A1F6-44B4-B884-3750E164ECAA}"/>
+                <a16:creationId xmlns:a16="http://schemas.microsoft.com/office/drawing/2014/main" id="{61C978D5-803E-43AF-A6AC-75BF021CB390}"/>
               </a:ext>
             </a:extLst>
           </p:cNvPr>
@@ -9815,7 +9815,7 @@
           <p:cNvPr id="14" name="">
             <a:extLst xmlns:a="http://schemas.openxmlformats.org/drawingml/2006/main">
               <a:ext uri="{FF2B5EF4-FFF2-40B4-BE49-F238E27FC236}">
-                <a16:creationId xmlns:a16="http://schemas.microsoft.com/office/drawing/2014/main" id="{17CC56BB-FC1B-4CFB-9037-1036F2812E89}"/>
+                <a16:creationId xmlns:a16="http://schemas.microsoft.com/office/drawing/2014/main" id="{C6EA5C46-6D14-42D5-8C54-107C88557520}"/>
               </a:ext>
             </a:extLst>
           </p:cNvPr>
@@ -9848,7 +9848,7 @@
           <p:cNvPr id="15" name="">
             <a:extLst xmlns:a="http://schemas.openxmlformats.org/drawingml/2006/main">
               <a:ext uri="{FF2B5EF4-FFF2-40B4-BE49-F238E27FC236}">
-                <a16:creationId xmlns:a16="http://schemas.microsoft.com/office/drawing/2014/main" id="{C56CBE4D-8A77-423A-80B2-4631D31A703A}"/>
+                <a16:creationId xmlns:a16="http://schemas.microsoft.com/office/drawing/2014/main" id="{AAF97706-203F-46C7-B459-A5D39275E9E7}"/>
               </a:ext>
             </a:extLst>
           </p:cNvPr>
@@ -9883,7 +9883,7 @@
           <p:cNvPr id="16" name="">
             <a:extLst xmlns:a="http://schemas.openxmlformats.org/drawingml/2006/main">
               <a:ext uri="{FF2B5EF4-FFF2-40B4-BE49-F238E27FC236}">
-                <a16:creationId xmlns:a16="http://schemas.microsoft.com/office/drawing/2014/main" id="{4570A1C2-839B-4C1F-A832-A42C5B949108}"/>
+                <a16:creationId xmlns:a16="http://schemas.microsoft.com/office/drawing/2014/main" id="{E0C49496-B9EC-4618-A918-F552DABFFA09}"/>
               </a:ext>
             </a:extLst>
           </p:cNvPr>
@@ -9947,7 +9947,7 @@
           <p:cNvPr id="17" name="">
             <a:extLst xmlns:a="http://schemas.openxmlformats.org/drawingml/2006/main">
               <a:ext uri="{FF2B5EF4-FFF2-40B4-BE49-F238E27FC236}">
-                <a16:creationId xmlns:a16="http://schemas.microsoft.com/office/drawing/2014/main" id="{B7B983A2-F140-4F99-98CC-2ACBAE5A565D}"/>
+                <a16:creationId xmlns:a16="http://schemas.microsoft.com/office/drawing/2014/main" id="{6C269742-F043-44CD-AFA3-CE6A4B165755}"/>
               </a:ext>
             </a:extLst>
           </p:cNvPr>
@@ -10011,7 +10011,7 @@
           <p:cNvPr id="18" name="">
             <a:extLst xmlns:a="http://schemas.openxmlformats.org/drawingml/2006/main">
               <a:ext uri="{FF2B5EF4-FFF2-40B4-BE49-F238E27FC236}">
-                <a16:creationId xmlns:a16="http://schemas.microsoft.com/office/drawing/2014/main" id="{1FBCC75E-70AF-4B10-9A9D-4F422F7C0FE4}"/>
+                <a16:creationId xmlns:a16="http://schemas.microsoft.com/office/drawing/2014/main" id="{0646C7FF-A5FC-418F-94F7-ABB2E37C663C}"/>
               </a:ext>
             </a:extLst>
           </p:cNvPr>
@@ -10044,7 +10044,7 @@
           <p:cNvPr id="19" name="">
             <a:extLst xmlns:a="http://schemas.openxmlformats.org/drawingml/2006/main">
               <a:ext uri="{FF2B5EF4-FFF2-40B4-BE49-F238E27FC236}">
-                <a16:creationId xmlns:a16="http://schemas.microsoft.com/office/drawing/2014/main" id="{757F4C94-2A90-47AB-8355-62D4261490F9}"/>
+                <a16:creationId xmlns:a16="http://schemas.microsoft.com/office/drawing/2014/main" id="{3D528916-87A4-42BB-80DE-2D644D95F151}"/>
               </a:ext>
             </a:extLst>
           </p:cNvPr>
@@ -10079,7 +10079,7 @@
           <p:cNvPr id="20" name="">
             <a:extLst xmlns:a="http://schemas.openxmlformats.org/drawingml/2006/main">
               <a:ext uri="{FF2B5EF4-FFF2-40B4-BE49-F238E27FC236}">
-                <a16:creationId xmlns:a16="http://schemas.microsoft.com/office/drawing/2014/main" id="{356FBEED-F03C-4364-AB89-1558F7B7F482}"/>
+                <a16:creationId xmlns:a16="http://schemas.microsoft.com/office/drawing/2014/main" id="{A6A7A196-12D0-4F85-B199-272824CA0982}"/>
               </a:ext>
             </a:extLst>
           </p:cNvPr>
@@ -10143,7 +10143,7 @@
           <p:cNvPr id="21" name="">
             <a:extLst xmlns:a="http://schemas.openxmlformats.org/drawingml/2006/main">
               <a:ext uri="{FF2B5EF4-FFF2-40B4-BE49-F238E27FC236}">
-                <a16:creationId xmlns:a16="http://schemas.microsoft.com/office/drawing/2014/main" id="{7964E8C7-A136-443B-B7AF-6D5421F27C95}"/>
+                <a16:creationId xmlns:a16="http://schemas.microsoft.com/office/drawing/2014/main" id="{7421BE09-51AA-4232-BB78-CECE597AF439}"/>
               </a:ext>
             </a:extLst>
           </p:cNvPr>
@@ -10207,7 +10207,7 @@
           <p:cNvPr id="22" name="">
             <a:extLst xmlns:a="http://schemas.openxmlformats.org/drawingml/2006/main">
               <a:ext uri="{FF2B5EF4-FFF2-40B4-BE49-F238E27FC236}">
-                <a16:creationId xmlns:a16="http://schemas.microsoft.com/office/drawing/2014/main" id="{A01767ED-BC4C-4B7A-9E02-8054FB5A8A4A}"/>
+                <a16:creationId xmlns:a16="http://schemas.microsoft.com/office/drawing/2014/main" id="{687B2EDE-2B1A-426D-9F5B-CB3B03BEBA40}"/>
               </a:ext>
             </a:extLst>
           </p:cNvPr>
@@ -10271,7 +10271,7 @@
           <p:cNvPr id="23" name="">
             <a:extLst xmlns:a="http://schemas.openxmlformats.org/drawingml/2006/main">
               <a:ext uri="{FF2B5EF4-FFF2-40B4-BE49-F238E27FC236}">
-                <a16:creationId xmlns:a16="http://schemas.microsoft.com/office/drawing/2014/main" id="{BC94E5F1-44FB-47CB-B60C-5F4B1640EC5C}"/>
+                <a16:creationId xmlns:a16="http://schemas.microsoft.com/office/drawing/2014/main" id="{FF1E7AB6-E731-4236-B21A-E3A8FB734AF7}"/>
               </a:ext>
             </a:extLst>
           </p:cNvPr>
@@ -10335,7 +10335,7 @@
           <p:cNvPr id="24" name="">
             <a:extLst xmlns:a="http://schemas.openxmlformats.org/drawingml/2006/main">
               <a:ext uri="{FF2B5EF4-FFF2-40B4-BE49-F238E27FC236}">
-                <a16:creationId xmlns:a16="http://schemas.microsoft.com/office/drawing/2014/main" id="{7CA35382-A8F8-47EF-BB3E-D56670498882}"/>
+                <a16:creationId xmlns:a16="http://schemas.microsoft.com/office/drawing/2014/main" id="{CB255421-571D-429E-8175-290A7DFBE332}"/>
               </a:ext>
             </a:extLst>
           </p:cNvPr>
@@ -10368,7 +10368,7 @@
           <p:cNvPr id="25" name="">
             <a:extLst xmlns:a="http://schemas.openxmlformats.org/drawingml/2006/main">
               <a:ext uri="{FF2B5EF4-FFF2-40B4-BE49-F238E27FC236}">
-                <a16:creationId xmlns:a16="http://schemas.microsoft.com/office/drawing/2014/main" id="{991A38D5-7E7E-4B06-8863-F9AA313A3A2E}"/>
+                <a16:creationId xmlns:a16="http://schemas.microsoft.com/office/drawing/2014/main" id="{38FDD28F-1AC5-4E0A-955E-24CBA32F5F5E}"/>
               </a:ext>
             </a:extLst>
           </p:cNvPr>
@@ -10432,7 +10432,7 @@
           <p:cNvPr id="26" name="">
             <a:extLst xmlns:a="http://schemas.openxmlformats.org/drawingml/2006/main">
               <a:ext uri="{FF2B5EF4-FFF2-40B4-BE49-F238E27FC236}">
-                <a16:creationId xmlns:a16="http://schemas.microsoft.com/office/drawing/2014/main" id="{FF7FE730-5D63-4BC3-A924-9A27E7326F7A}"/>
+                <a16:creationId xmlns:a16="http://schemas.microsoft.com/office/drawing/2014/main" id="{BD4AD56B-1DDA-4A2C-9879-7CBD348FF2BB}"/>
               </a:ext>
             </a:extLst>
           </p:cNvPr>
@@ -10494,7 +10494,7 @@
     </p:spTree>
     <p:extLst>
       <p:ext uri="{BB962C8B-B14F-4D97-AF65-F5344CB8AC3E}">
-        <p14:creationId xmlns:p14="http://schemas.microsoft.com/office/powerpoint/2010/main" val="2127644319"/>
+        <p14:creationId xmlns:p14="http://schemas.microsoft.com/office/powerpoint/2010/main" val="1550167767"/>
       </p:ext>
     </p:extLst>
   </p:cSld>
@@ -10522,7 +10522,7 @@
           <p:nvPr/>
         </p:nvPicPr>
         <p:blipFill>
-          <a:blip xmlns:r="http://schemas.openxmlformats.org/officeDocument/2006/relationships" xmlns:a="http://schemas.openxmlformats.org/drawingml/2006/main" r:embed="Ra6e0cca346784799"/>
+          <a:blip xmlns:r="http://schemas.openxmlformats.org/officeDocument/2006/relationships" xmlns:a="http://schemas.openxmlformats.org/drawingml/2006/main" r:embed="Ra4461308fd894911"/>
           <a:srcRect xmlns:a="http://schemas.openxmlformats.org/drawingml/2006/main" l="0" t="7813" r="0" b="7813"/>
           <a:stretch xmlns:a="http://schemas.openxmlformats.org/drawingml/2006/main">
             <a:fillRect l="0" t="0" r="0" b="0"/>
@@ -10543,7 +10543,7 @@
           <p:cNvPr id="2" name="">
             <a:extLst xmlns:a="http://schemas.openxmlformats.org/drawingml/2006/main">
               <a:ext uri="{FF2B5EF4-FFF2-40B4-BE49-F238E27FC236}">
-                <a16:creationId xmlns:a16="http://schemas.microsoft.com/office/drawing/2014/main" id="{E82F071E-FD08-4D82-9E64-3F997E9B9BA7}"/>
+                <a16:creationId xmlns:a16="http://schemas.microsoft.com/office/drawing/2014/main" id="{BA538D03-796F-494E-9DFC-A101DC20280D}"/>
               </a:ext>
             </a:extLst>
           </p:cNvPr>
@@ -10580,7 +10580,7 @@
           <p:cNvPr id="3" name="">
             <a:extLst xmlns:a="http://schemas.openxmlformats.org/drawingml/2006/main">
               <a:ext uri="{FF2B5EF4-FFF2-40B4-BE49-F238E27FC236}">
-                <a16:creationId xmlns:a16="http://schemas.microsoft.com/office/drawing/2014/main" id="{49AB3D6E-C924-4599-892E-161BDC710108}"/>
+                <a16:creationId xmlns:a16="http://schemas.microsoft.com/office/drawing/2014/main" id="{F57406F1-666F-4AEF-821E-152C27B79121}"/>
               </a:ext>
             </a:extLst>
           </p:cNvPr>
@@ -10617,7 +10617,7 @@
           <p:cNvPr id="4" name="">
             <a:extLst xmlns:a="http://schemas.openxmlformats.org/drawingml/2006/main">
               <a:ext uri="{FF2B5EF4-FFF2-40B4-BE49-F238E27FC236}">
-                <a16:creationId xmlns:a16="http://schemas.microsoft.com/office/drawing/2014/main" id="{AEC7C752-41C3-4AA9-9517-4208CE6E6DB5}"/>
+                <a16:creationId xmlns:a16="http://schemas.microsoft.com/office/drawing/2014/main" id="{3D85BFB2-D544-492C-ABB1-097D87BCE1C9}"/>
               </a:ext>
             </a:extLst>
           </p:cNvPr>
@@ -10681,7 +10681,7 @@
           <p:cNvPr id="5" name="">
             <a:extLst xmlns:a="http://schemas.openxmlformats.org/drawingml/2006/main">
               <a:ext uri="{FF2B5EF4-FFF2-40B4-BE49-F238E27FC236}">
-                <a16:creationId xmlns:a16="http://schemas.microsoft.com/office/drawing/2014/main" id="{AF918B58-70FF-4DDE-B177-419388569EE7}"/>
+                <a16:creationId xmlns:a16="http://schemas.microsoft.com/office/drawing/2014/main" id="{564F4FEA-A564-41A8-B50E-32D5D1FE291C}"/>
               </a:ext>
             </a:extLst>
           </p:cNvPr>
@@ -10745,7 +10745,7 @@
           <p:cNvPr id="6" name="">
             <a:extLst xmlns:a="http://schemas.openxmlformats.org/drawingml/2006/main">
               <a:ext uri="{FF2B5EF4-FFF2-40B4-BE49-F238E27FC236}">
-                <a16:creationId xmlns:a16="http://schemas.microsoft.com/office/drawing/2014/main" id="{F94B7512-1D03-436D-8E7C-E2A5C2895F0E}"/>
+                <a16:creationId xmlns:a16="http://schemas.microsoft.com/office/drawing/2014/main" id="{4DFF4110-CF70-458E-9CEE-45D83627E892}"/>
               </a:ext>
             </a:extLst>
           </p:cNvPr>
@@ -10809,7 +10809,7 @@
           <p:cNvPr id="7" name="">
             <a:extLst xmlns:a="http://schemas.openxmlformats.org/drawingml/2006/main">
               <a:ext uri="{FF2B5EF4-FFF2-40B4-BE49-F238E27FC236}">
-                <a16:creationId xmlns:a16="http://schemas.microsoft.com/office/drawing/2014/main" id="{51E4BCDC-62C0-44AB-9400-5AEDF1DF0BDD}"/>
+                <a16:creationId xmlns:a16="http://schemas.microsoft.com/office/drawing/2014/main" id="{785A5450-229B-4F38-8278-B6F7E49CF74F}"/>
               </a:ext>
             </a:extLst>
           </p:cNvPr>
@@ -10844,7 +10844,7 @@
           <p:cNvPr id="8" name="">
             <a:extLst xmlns:a="http://schemas.openxmlformats.org/drawingml/2006/main">
               <a:ext uri="{FF2B5EF4-FFF2-40B4-BE49-F238E27FC236}">
-                <a16:creationId xmlns:a16="http://schemas.microsoft.com/office/drawing/2014/main" id="{A496A089-9685-46AB-BA61-64DF54F328AA}"/>
+                <a16:creationId xmlns:a16="http://schemas.microsoft.com/office/drawing/2014/main" id="{654A1D09-0E81-4461-8649-4F40619BC86C}"/>
               </a:ext>
             </a:extLst>
           </p:cNvPr>
@@ -10908,7 +10908,7 @@
           <p:cNvPr id="9" name="">
             <a:extLst xmlns:a="http://schemas.openxmlformats.org/drawingml/2006/main">
               <a:ext uri="{FF2B5EF4-FFF2-40B4-BE49-F238E27FC236}">
-                <a16:creationId xmlns:a16="http://schemas.microsoft.com/office/drawing/2014/main" id="{826B6730-C12E-44A2-845D-767F95F5F393}"/>
+                <a16:creationId xmlns:a16="http://schemas.microsoft.com/office/drawing/2014/main" id="{ADB99DBA-4A41-42E1-83A0-6C434AA24119}"/>
               </a:ext>
             </a:extLst>
           </p:cNvPr>
@@ -10943,7 +10943,7 @@
           <p:cNvPr id="10" name="">
             <a:extLst xmlns:a="http://schemas.openxmlformats.org/drawingml/2006/main">
               <a:ext uri="{FF2B5EF4-FFF2-40B4-BE49-F238E27FC236}">
-                <a16:creationId xmlns:a16="http://schemas.microsoft.com/office/drawing/2014/main" id="{BCC82F2D-0AE7-4369-A23F-A6C296B9DEB4}"/>
+                <a16:creationId xmlns:a16="http://schemas.microsoft.com/office/drawing/2014/main" id="{FD4DE990-5633-42E9-B24D-1903FA41AA90}"/>
               </a:ext>
             </a:extLst>
           </p:cNvPr>
@@ -11007,7 +11007,7 @@
           <p:cNvPr id="11" name="">
             <a:extLst xmlns:a="http://schemas.openxmlformats.org/drawingml/2006/main">
               <a:ext uri="{FF2B5EF4-FFF2-40B4-BE49-F238E27FC236}">
-                <a16:creationId xmlns:a16="http://schemas.microsoft.com/office/drawing/2014/main" id="{CB76B878-8C71-41EE-94C8-959D7E4072BF}"/>
+                <a16:creationId xmlns:a16="http://schemas.microsoft.com/office/drawing/2014/main" id="{7AD74B30-3039-4FE1-B343-E5992F375EF8}"/>
               </a:ext>
             </a:extLst>
           </p:cNvPr>
@@ -11042,7 +11042,7 @@
           <p:cNvPr id="12" name="">
             <a:extLst xmlns:a="http://schemas.openxmlformats.org/drawingml/2006/main">
               <a:ext uri="{FF2B5EF4-FFF2-40B4-BE49-F238E27FC236}">
-                <a16:creationId xmlns:a16="http://schemas.microsoft.com/office/drawing/2014/main" id="{E0073F5D-9765-44B7-A1F4-8C56A0F7B54A}"/>
+                <a16:creationId xmlns:a16="http://schemas.microsoft.com/office/drawing/2014/main" id="{B10F79C4-4AB7-4166-9764-AA5F1EA85464}"/>
               </a:ext>
             </a:extLst>
           </p:cNvPr>
@@ -11106,7 +11106,7 @@
           <p:cNvPr id="13" name="">
             <a:extLst xmlns:a="http://schemas.openxmlformats.org/drawingml/2006/main">
               <a:ext uri="{FF2B5EF4-FFF2-40B4-BE49-F238E27FC236}">
-                <a16:creationId xmlns:a16="http://schemas.microsoft.com/office/drawing/2014/main" id="{362DD20F-3BD1-4418-A278-CF84926D94CC}"/>
+                <a16:creationId xmlns:a16="http://schemas.microsoft.com/office/drawing/2014/main" id="{BDEFCAA8-FD15-4349-9711-CCEEF914A1BD}"/>
               </a:ext>
             </a:extLst>
           </p:cNvPr>
@@ -11141,7 +11141,7 @@
           <p:cNvPr id="14" name="">
             <a:extLst xmlns:a="http://schemas.openxmlformats.org/drawingml/2006/main">
               <a:ext uri="{FF2B5EF4-FFF2-40B4-BE49-F238E27FC236}">
-                <a16:creationId xmlns:a16="http://schemas.microsoft.com/office/drawing/2014/main" id="{199D417A-95DE-412A-A0B3-05465844DDCD}"/>
+                <a16:creationId xmlns:a16="http://schemas.microsoft.com/office/drawing/2014/main" id="{B01BB72B-C413-475B-8588-95FC16DFFBAA}"/>
               </a:ext>
             </a:extLst>
           </p:cNvPr>
@@ -11205,7 +11205,7 @@
           <p:cNvPr id="15" name="">
             <a:extLst xmlns:a="http://schemas.openxmlformats.org/drawingml/2006/main">
               <a:ext uri="{FF2B5EF4-FFF2-40B4-BE49-F238E27FC236}">
-                <a16:creationId xmlns:a16="http://schemas.microsoft.com/office/drawing/2014/main" id="{E25DCEB6-79C0-4C28-A1BC-02F9EF4D9125}"/>
+                <a16:creationId xmlns:a16="http://schemas.microsoft.com/office/drawing/2014/main" id="{D123AE9A-981E-4B5A-AED0-BFBFA24D05BA}"/>
               </a:ext>
             </a:extLst>
           </p:cNvPr>
@@ -11240,7 +11240,7 @@
           <p:cNvPr id="16" name="">
             <a:extLst xmlns:a="http://schemas.openxmlformats.org/drawingml/2006/main">
               <a:ext uri="{FF2B5EF4-FFF2-40B4-BE49-F238E27FC236}">
-                <a16:creationId xmlns:a16="http://schemas.microsoft.com/office/drawing/2014/main" id="{B050AC90-01BB-4DD0-9FC7-9BA228410887}"/>
+                <a16:creationId xmlns:a16="http://schemas.microsoft.com/office/drawing/2014/main" id="{74729867-A698-48FB-8244-10AEDD535128}"/>
               </a:ext>
             </a:extLst>
           </p:cNvPr>
@@ -11304,7 +11304,7 @@
           <p:cNvPr id="17" name="">
             <a:extLst xmlns:a="http://schemas.openxmlformats.org/drawingml/2006/main">
               <a:ext uri="{FF2B5EF4-FFF2-40B4-BE49-F238E27FC236}">
-                <a16:creationId xmlns:a16="http://schemas.microsoft.com/office/drawing/2014/main" id="{10645555-D0E0-402C-A51E-59DE4C371557}"/>
+                <a16:creationId xmlns:a16="http://schemas.microsoft.com/office/drawing/2014/main" id="{E34FC2BE-616B-4826-90D2-CE83A312D8C3}"/>
               </a:ext>
             </a:extLst>
           </p:cNvPr>
@@ -11339,7 +11339,7 @@
           <p:cNvPr id="18" name="">
             <a:extLst xmlns:a="http://schemas.openxmlformats.org/drawingml/2006/main">
               <a:ext uri="{FF2B5EF4-FFF2-40B4-BE49-F238E27FC236}">
-                <a16:creationId xmlns:a16="http://schemas.microsoft.com/office/drawing/2014/main" id="{7701059E-246C-4E2D-A270-095E50CAC7D2}"/>
+                <a16:creationId xmlns:a16="http://schemas.microsoft.com/office/drawing/2014/main" id="{C89B233E-FB9B-4005-AB10-A1CE48A7DBD1}"/>
               </a:ext>
             </a:extLst>
           </p:cNvPr>
@@ -11403,7 +11403,7 @@
           <p:cNvPr id="19" name="">
             <a:extLst xmlns:a="http://schemas.openxmlformats.org/drawingml/2006/main">
               <a:ext uri="{FF2B5EF4-FFF2-40B4-BE49-F238E27FC236}">
-                <a16:creationId xmlns:a16="http://schemas.microsoft.com/office/drawing/2014/main" id="{349A0DF3-6496-4DB4-AE58-29C3DC088FF7}"/>
+                <a16:creationId xmlns:a16="http://schemas.microsoft.com/office/drawing/2014/main" id="{EF62F4A6-CCE1-4DCD-8878-BCC99F5A49DA}"/>
               </a:ext>
             </a:extLst>
           </p:cNvPr>
@@ -11467,7 +11467,7 @@
           <p:cNvPr id="20" name="">
             <a:extLst xmlns:a="http://schemas.openxmlformats.org/drawingml/2006/main">
               <a:ext uri="{FF2B5EF4-FFF2-40B4-BE49-F238E27FC236}">
-                <a16:creationId xmlns:a16="http://schemas.microsoft.com/office/drawing/2014/main" id="{07CF53FB-A01D-4FCB-91D9-298A51A761AF}"/>
+                <a16:creationId xmlns:a16="http://schemas.microsoft.com/office/drawing/2014/main" id="{2B5F69AE-F751-4CF7-B27B-C95915A486F7}"/>
               </a:ext>
             </a:extLst>
           </p:cNvPr>
@@ -11500,7 +11500,7 @@
           <p:cNvPr id="21" name="">
             <a:extLst xmlns:a="http://schemas.openxmlformats.org/drawingml/2006/main">
               <a:ext uri="{FF2B5EF4-FFF2-40B4-BE49-F238E27FC236}">
-                <a16:creationId xmlns:a16="http://schemas.microsoft.com/office/drawing/2014/main" id="{C63B4DE7-FCEC-4F31-9F26-66D8543FB592}"/>
+                <a16:creationId xmlns:a16="http://schemas.microsoft.com/office/drawing/2014/main" id="{5BF4A642-10A1-4F75-91CE-A28614F31CAF}"/>
               </a:ext>
             </a:extLst>
           </p:cNvPr>
@@ -11564,7 +11564,7 @@
           <p:cNvPr id="22" name="">
             <a:extLst xmlns:a="http://schemas.openxmlformats.org/drawingml/2006/main">
               <a:ext uri="{FF2B5EF4-FFF2-40B4-BE49-F238E27FC236}">
-                <a16:creationId xmlns:a16="http://schemas.microsoft.com/office/drawing/2014/main" id="{4E35709F-080B-41CB-986D-FEA0E7293389}"/>
+                <a16:creationId xmlns:a16="http://schemas.microsoft.com/office/drawing/2014/main" id="{F60165CA-8FC8-48AF-91D5-6E5E1875F9DE}"/>
               </a:ext>
             </a:extLst>
           </p:cNvPr>
@@ -11626,7 +11626,7 @@
     </p:spTree>
     <p:extLst>
       <p:ext uri="{BB962C8B-B14F-4D97-AF65-F5344CB8AC3E}">
-        <p14:creationId xmlns:p14="http://schemas.microsoft.com/office/powerpoint/2010/main" val="1765403744"/>
+        <p14:creationId xmlns:p14="http://schemas.microsoft.com/office/powerpoint/2010/main" val="199275816"/>
       </p:ext>
     </p:extLst>
   </p:cSld>
@@ -11654,7 +11654,7 @@
           <p:nvPr/>
         </p:nvPicPr>
         <p:blipFill>
-          <a:blip xmlns:r="http://schemas.openxmlformats.org/officeDocument/2006/relationships" xmlns:a="http://schemas.openxmlformats.org/drawingml/2006/main" r:embed="Rb04b64f900724dd4"/>
+          <a:blip xmlns:r="http://schemas.openxmlformats.org/officeDocument/2006/relationships" xmlns:a="http://schemas.openxmlformats.org/drawingml/2006/main" r:embed="Rd3db058a6a6947e9"/>
           <a:srcRect xmlns:a="http://schemas.openxmlformats.org/drawingml/2006/main" l="0" t="27" r="0" b="27"/>
           <a:stretch xmlns:a="http://schemas.openxmlformats.org/drawingml/2006/main">
             <a:fillRect l="0" t="0" r="0" b="0"/>
@@ -11675,7 +11675,7 @@
           <p:cNvPr id="2" name="">
             <a:extLst xmlns:a="http://schemas.openxmlformats.org/drawingml/2006/main">
               <a:ext uri="{FF2B5EF4-FFF2-40B4-BE49-F238E27FC236}">
-                <a16:creationId xmlns:a16="http://schemas.microsoft.com/office/drawing/2014/main" id="{1995E36B-7D30-406F-9337-790336C53133}"/>
+                <a16:creationId xmlns:a16="http://schemas.microsoft.com/office/drawing/2014/main" id="{F354B584-93C6-414F-B180-069054DC08ED}"/>
               </a:ext>
             </a:extLst>
           </p:cNvPr>
@@ -11712,7 +11712,7 @@
           <p:cNvPr id="3" name="">
             <a:extLst xmlns:a="http://schemas.openxmlformats.org/drawingml/2006/main">
               <a:ext uri="{FF2B5EF4-FFF2-40B4-BE49-F238E27FC236}">
-                <a16:creationId xmlns:a16="http://schemas.microsoft.com/office/drawing/2014/main" id="{26B483CF-BEFA-49EB-8183-B322DC804F66}"/>
+                <a16:creationId xmlns:a16="http://schemas.microsoft.com/office/drawing/2014/main" id="{11233DB5-336D-4FA1-83BF-D5EDBC787873}"/>
               </a:ext>
             </a:extLst>
           </p:cNvPr>
@@ -11749,7 +11749,7 @@
           <p:cNvPr id="4" name="">
             <a:extLst xmlns:a="http://schemas.openxmlformats.org/drawingml/2006/main">
               <a:ext uri="{FF2B5EF4-FFF2-40B4-BE49-F238E27FC236}">
-                <a16:creationId xmlns:a16="http://schemas.microsoft.com/office/drawing/2014/main" id="{24EFEBC3-E5B1-48EE-AE0C-22EE8E748E32}"/>
+                <a16:creationId xmlns:a16="http://schemas.microsoft.com/office/drawing/2014/main" id="{435089B3-55F6-45F4-83F8-CC9F2DDBB2BB}"/>
               </a:ext>
             </a:extLst>
           </p:cNvPr>
@@ -11813,7 +11813,7 @@
           <p:cNvPr id="5" name="">
             <a:extLst xmlns:a="http://schemas.openxmlformats.org/drawingml/2006/main">
               <a:ext uri="{FF2B5EF4-FFF2-40B4-BE49-F238E27FC236}">
-                <a16:creationId xmlns:a16="http://schemas.microsoft.com/office/drawing/2014/main" id="{715B8F56-7AF4-4618-AE1E-3CF4FC27C02A}"/>
+                <a16:creationId xmlns:a16="http://schemas.microsoft.com/office/drawing/2014/main" id="{14D9299B-3253-43C5-8C6F-DF7F7A5FEBC0}"/>
               </a:ext>
             </a:extLst>
           </p:cNvPr>
@@ -11877,7 +11877,7 @@
           <p:cNvPr id="6" name="">
             <a:extLst xmlns:a="http://schemas.openxmlformats.org/drawingml/2006/main">
               <a:ext uri="{FF2B5EF4-FFF2-40B4-BE49-F238E27FC236}">
-                <a16:creationId xmlns:a16="http://schemas.microsoft.com/office/drawing/2014/main" id="{3C917423-FA0C-4598-AC14-006C45373901}"/>
+                <a16:creationId xmlns:a16="http://schemas.microsoft.com/office/drawing/2014/main" id="{BF7CB305-FC29-4A38-B005-23F50FE09355}"/>
               </a:ext>
             </a:extLst>
           </p:cNvPr>
@@ -11941,7 +11941,7 @@
           <p:cNvPr id="7" name="">
             <a:extLst xmlns:a="http://schemas.openxmlformats.org/drawingml/2006/main">
               <a:ext uri="{FF2B5EF4-FFF2-40B4-BE49-F238E27FC236}">
-                <a16:creationId xmlns:a16="http://schemas.microsoft.com/office/drawing/2014/main" id="{C971C7D7-BB48-41DB-900D-CCFD1DBA1633}"/>
+                <a16:creationId xmlns:a16="http://schemas.microsoft.com/office/drawing/2014/main" id="{5A7148FD-54D1-4004-B0C4-D0139CC64DBB}"/>
               </a:ext>
             </a:extLst>
           </p:cNvPr>
@@ -11976,7 +11976,7 @@
           <p:cNvPr id="8" name="">
             <a:extLst xmlns:a="http://schemas.openxmlformats.org/drawingml/2006/main">
               <a:ext uri="{FF2B5EF4-FFF2-40B4-BE49-F238E27FC236}">
-                <a16:creationId xmlns:a16="http://schemas.microsoft.com/office/drawing/2014/main" id="{69D3E92F-9670-49FD-A309-CB813B88A213}"/>
+                <a16:creationId xmlns:a16="http://schemas.microsoft.com/office/drawing/2014/main" id="{7DA7620B-9137-468F-8423-573D9FA753D9}"/>
               </a:ext>
             </a:extLst>
           </p:cNvPr>
@@ -12040,7 +12040,7 @@
           <p:cNvPr id="9" name="">
             <a:extLst xmlns:a="http://schemas.openxmlformats.org/drawingml/2006/main">
               <a:ext uri="{FF2B5EF4-FFF2-40B4-BE49-F238E27FC236}">
-                <a16:creationId xmlns:a16="http://schemas.microsoft.com/office/drawing/2014/main" id="{36386521-8324-422F-935C-438FA04C15DF}"/>
+                <a16:creationId xmlns:a16="http://schemas.microsoft.com/office/drawing/2014/main" id="{798A34FD-22A5-454E-B0B8-CE8DF3E3A461}"/>
               </a:ext>
             </a:extLst>
           </p:cNvPr>
@@ -12104,7 +12104,7 @@
           <p:cNvPr id="10" name="">
             <a:extLst xmlns:a="http://schemas.openxmlformats.org/drawingml/2006/main">
               <a:ext uri="{FF2B5EF4-FFF2-40B4-BE49-F238E27FC236}">
-                <a16:creationId xmlns:a16="http://schemas.microsoft.com/office/drawing/2014/main" id="{844EE5A1-39B6-4258-B8BC-9D3721ED19A3}"/>
+                <a16:creationId xmlns:a16="http://schemas.microsoft.com/office/drawing/2014/main" id="{03EF7C1C-1EBE-47BE-B78B-04AC4EF82326}"/>
               </a:ext>
             </a:extLst>
           </p:cNvPr>
@@ -12137,7 +12137,7 @@
           <p:cNvPr id="11" name="">
             <a:extLst xmlns:a="http://schemas.openxmlformats.org/drawingml/2006/main">
               <a:ext uri="{FF2B5EF4-FFF2-40B4-BE49-F238E27FC236}">
-                <a16:creationId xmlns:a16="http://schemas.microsoft.com/office/drawing/2014/main" id="{8737B2B0-6C49-4B1E-B861-B082BD58F984}"/>
+                <a16:creationId xmlns:a16="http://schemas.microsoft.com/office/drawing/2014/main" id="{328499A1-2526-499F-B0AD-46F78418A752}"/>
               </a:ext>
             </a:extLst>
           </p:cNvPr>
@@ -12172,7 +12172,7 @@
           <p:cNvPr id="12" name="">
             <a:extLst xmlns:a="http://schemas.openxmlformats.org/drawingml/2006/main">
               <a:ext uri="{FF2B5EF4-FFF2-40B4-BE49-F238E27FC236}">
-                <a16:creationId xmlns:a16="http://schemas.microsoft.com/office/drawing/2014/main" id="{6CBF9014-D835-494F-B9C2-AC057DFC061A}"/>
+                <a16:creationId xmlns:a16="http://schemas.microsoft.com/office/drawing/2014/main" id="{829A43B8-61B4-42C4-8810-F1379F2154F7}"/>
               </a:ext>
             </a:extLst>
           </p:cNvPr>
@@ -12236,7 +12236,7 @@
           <p:cNvPr id="13" name="">
             <a:extLst xmlns:a="http://schemas.openxmlformats.org/drawingml/2006/main">
               <a:ext uri="{FF2B5EF4-FFF2-40B4-BE49-F238E27FC236}">
-                <a16:creationId xmlns:a16="http://schemas.microsoft.com/office/drawing/2014/main" id="{074E6E0A-862B-423C-B22A-E2C285686304}"/>
+                <a16:creationId xmlns:a16="http://schemas.microsoft.com/office/drawing/2014/main" id="{1680FE53-9B41-49EF-AC8F-CECC2F958680}"/>
               </a:ext>
             </a:extLst>
           </p:cNvPr>
@@ -12300,7 +12300,7 @@
           <p:cNvPr id="14" name="">
             <a:extLst xmlns:a="http://schemas.openxmlformats.org/drawingml/2006/main">
               <a:ext uri="{FF2B5EF4-FFF2-40B4-BE49-F238E27FC236}">
-                <a16:creationId xmlns:a16="http://schemas.microsoft.com/office/drawing/2014/main" id="{D4768FCA-901B-48C4-B53A-F0E291C235FF}"/>
+                <a16:creationId xmlns:a16="http://schemas.microsoft.com/office/drawing/2014/main" id="{9C2F6814-F96D-4B24-85B6-02CEA3352B6A}"/>
               </a:ext>
             </a:extLst>
           </p:cNvPr>
@@ -12333,7 +12333,7 @@
           <p:cNvPr id="15" name="">
             <a:extLst xmlns:a="http://schemas.openxmlformats.org/drawingml/2006/main">
               <a:ext uri="{FF2B5EF4-FFF2-40B4-BE49-F238E27FC236}">
-                <a16:creationId xmlns:a16="http://schemas.microsoft.com/office/drawing/2014/main" id="{39D25BDF-8E36-4318-9E78-0FF53D0F52B6}"/>
+                <a16:creationId xmlns:a16="http://schemas.microsoft.com/office/drawing/2014/main" id="{6A613F55-2BCF-4E21-BF3A-C2409339664B}"/>
               </a:ext>
             </a:extLst>
           </p:cNvPr>
@@ -12368,7 +12368,7 @@
           <p:cNvPr id="16" name="">
             <a:extLst xmlns:a="http://schemas.openxmlformats.org/drawingml/2006/main">
               <a:ext uri="{FF2B5EF4-FFF2-40B4-BE49-F238E27FC236}">
-                <a16:creationId xmlns:a16="http://schemas.microsoft.com/office/drawing/2014/main" id="{206E2542-51AA-4582-8A33-3D3C3DD7A725}"/>
+                <a16:creationId xmlns:a16="http://schemas.microsoft.com/office/drawing/2014/main" id="{C4140F83-6048-4F39-B30E-3C8D1FFBAE11}"/>
               </a:ext>
             </a:extLst>
           </p:cNvPr>
@@ -12432,7 +12432,7 @@
           <p:cNvPr id="17" name="">
             <a:extLst xmlns:a="http://schemas.openxmlformats.org/drawingml/2006/main">
               <a:ext uri="{FF2B5EF4-FFF2-40B4-BE49-F238E27FC236}">
-                <a16:creationId xmlns:a16="http://schemas.microsoft.com/office/drawing/2014/main" id="{FDD661B7-F207-4953-980A-F3F3A358600E}"/>
+                <a16:creationId xmlns:a16="http://schemas.microsoft.com/office/drawing/2014/main" id="{AC88417C-79D7-4F33-A95C-1AA936470CE2}"/>
               </a:ext>
             </a:extLst>
           </p:cNvPr>
@@ -12496,7 +12496,7 @@
           <p:cNvPr id="18" name="">
             <a:extLst xmlns:a="http://schemas.openxmlformats.org/drawingml/2006/main">
               <a:ext uri="{FF2B5EF4-FFF2-40B4-BE49-F238E27FC236}">
-                <a16:creationId xmlns:a16="http://schemas.microsoft.com/office/drawing/2014/main" id="{E217133A-F8C1-4C5B-8082-20F1129AF8FF}"/>
+                <a16:creationId xmlns:a16="http://schemas.microsoft.com/office/drawing/2014/main" id="{401A5D20-4E1E-44E9-91CA-AD568166FFF8}"/>
               </a:ext>
             </a:extLst>
           </p:cNvPr>
@@ -12529,7 +12529,7 @@
           <p:cNvPr id="19" name="">
             <a:extLst xmlns:a="http://schemas.openxmlformats.org/drawingml/2006/main">
               <a:ext uri="{FF2B5EF4-FFF2-40B4-BE49-F238E27FC236}">
-                <a16:creationId xmlns:a16="http://schemas.microsoft.com/office/drawing/2014/main" id="{9769F091-581F-471F-AE8B-903FE7F988B2}"/>
+                <a16:creationId xmlns:a16="http://schemas.microsoft.com/office/drawing/2014/main" id="{35F2EF3B-AE66-465F-90A3-384D192675C1}"/>
               </a:ext>
             </a:extLst>
           </p:cNvPr>
@@ -12564,7 +12564,7 @@
           <p:cNvPr id="20" name="">
             <a:extLst xmlns:a="http://schemas.openxmlformats.org/drawingml/2006/main">
               <a:ext uri="{FF2B5EF4-FFF2-40B4-BE49-F238E27FC236}">
-                <a16:creationId xmlns:a16="http://schemas.microsoft.com/office/drawing/2014/main" id="{72C67C64-BDF7-474E-8863-34F33FB0C4AE}"/>
+                <a16:creationId xmlns:a16="http://schemas.microsoft.com/office/drawing/2014/main" id="{74CC02B3-D9CC-42A1-A452-A3306AB0B3D4}"/>
               </a:ext>
             </a:extLst>
           </p:cNvPr>
@@ -12628,7 +12628,7 @@
           <p:cNvPr id="21" name="">
             <a:extLst xmlns:a="http://schemas.openxmlformats.org/drawingml/2006/main">
               <a:ext uri="{FF2B5EF4-FFF2-40B4-BE49-F238E27FC236}">
-                <a16:creationId xmlns:a16="http://schemas.microsoft.com/office/drawing/2014/main" id="{90F8D647-1B9D-40DA-B902-B492BF78D8C8}"/>
+                <a16:creationId xmlns:a16="http://schemas.microsoft.com/office/drawing/2014/main" id="{35D69A2A-E778-4060-9BFD-64BDDDA3125E}"/>
               </a:ext>
             </a:extLst>
           </p:cNvPr>
@@ -12692,7 +12692,7 @@
           <p:cNvPr id="22" name="">
             <a:extLst xmlns:a="http://schemas.openxmlformats.org/drawingml/2006/main">
               <a:ext uri="{FF2B5EF4-FFF2-40B4-BE49-F238E27FC236}">
-                <a16:creationId xmlns:a16="http://schemas.microsoft.com/office/drawing/2014/main" id="{EF87AB4E-9F9A-4220-9C56-3B8D8842EC8B}"/>
+                <a16:creationId xmlns:a16="http://schemas.microsoft.com/office/drawing/2014/main" id="{8862FFB2-3863-44F8-81F4-AA826B62A088}"/>
               </a:ext>
             </a:extLst>
           </p:cNvPr>
@@ -12756,7 +12756,7 @@
           <p:cNvPr id="23" name="">
             <a:extLst xmlns:a="http://schemas.openxmlformats.org/drawingml/2006/main">
               <a:ext uri="{FF2B5EF4-FFF2-40B4-BE49-F238E27FC236}">
-                <a16:creationId xmlns:a16="http://schemas.microsoft.com/office/drawing/2014/main" id="{312BA286-8588-4664-8635-F0D4597EE48A}"/>
+                <a16:creationId xmlns:a16="http://schemas.microsoft.com/office/drawing/2014/main" id="{69B4B03C-75A9-4128-92BE-EFC86E27CCE9}"/>
               </a:ext>
             </a:extLst>
           </p:cNvPr>
@@ -12820,7 +12820,7 @@
           <p:cNvPr id="24" name="">
             <a:extLst xmlns:a="http://schemas.openxmlformats.org/drawingml/2006/main">
               <a:ext uri="{FF2B5EF4-FFF2-40B4-BE49-F238E27FC236}">
-                <a16:creationId xmlns:a16="http://schemas.microsoft.com/office/drawing/2014/main" id="{10758D8F-DA71-4402-9AA0-0CE354116143}"/>
+                <a16:creationId xmlns:a16="http://schemas.microsoft.com/office/drawing/2014/main" id="{BC4AB8AE-FB34-4670-9FEB-499C2E955743}"/>
               </a:ext>
             </a:extLst>
           </p:cNvPr>
@@ -12853,7 +12853,7 @@
           <p:cNvPr id="25" name="">
             <a:extLst xmlns:a="http://schemas.openxmlformats.org/drawingml/2006/main">
               <a:ext uri="{FF2B5EF4-FFF2-40B4-BE49-F238E27FC236}">
-                <a16:creationId xmlns:a16="http://schemas.microsoft.com/office/drawing/2014/main" id="{8AEE91E7-EE28-4E93-A1EA-C3F5101934A4}"/>
+                <a16:creationId xmlns:a16="http://schemas.microsoft.com/office/drawing/2014/main" id="{380BAFF6-2EEE-408B-93B6-0593E881F3D2}"/>
               </a:ext>
             </a:extLst>
           </p:cNvPr>
@@ -12917,7 +12917,7 @@
           <p:cNvPr id="26" name="">
             <a:extLst xmlns:a="http://schemas.openxmlformats.org/drawingml/2006/main">
               <a:ext uri="{FF2B5EF4-FFF2-40B4-BE49-F238E27FC236}">
-                <a16:creationId xmlns:a16="http://schemas.microsoft.com/office/drawing/2014/main" id="{6E015783-89A1-4E83-9DE8-AE48A60A54AA}"/>
+                <a16:creationId xmlns:a16="http://schemas.microsoft.com/office/drawing/2014/main" id="{6C72864C-34C6-4CC5-A263-5A037B4CBD39}"/>
               </a:ext>
             </a:extLst>
           </p:cNvPr>
@@ -12979,7 +12979,7 @@
     </p:spTree>
     <p:extLst>
       <p:ext uri="{BB962C8B-B14F-4D97-AF65-F5344CB8AC3E}">
-        <p14:creationId xmlns:p14="http://schemas.microsoft.com/office/powerpoint/2010/main" val="1915069386"/>
+        <p14:creationId xmlns:p14="http://schemas.microsoft.com/office/powerpoint/2010/main" val="174640059"/>
       </p:ext>
     </p:extLst>
   </p:cSld>
@@ -13007,7 +13007,7 @@
           <p:nvPr/>
         </p:nvPicPr>
         <p:blipFill>
-          <a:blip xmlns:r="http://schemas.openxmlformats.org/officeDocument/2006/relationships" xmlns:a="http://schemas.openxmlformats.org/drawingml/2006/main" r:embed="Rfb8bee0fb0c34d71"/>
+          <a:blip xmlns:r="http://schemas.openxmlformats.org/officeDocument/2006/relationships" xmlns:a="http://schemas.openxmlformats.org/drawingml/2006/main" r:embed="R35a25116d60e46cf"/>
           <a:srcRect xmlns:a="http://schemas.openxmlformats.org/drawingml/2006/main" l="0" t="27" r="0" b="27"/>
           <a:stretch xmlns:a="http://schemas.openxmlformats.org/drawingml/2006/main">
             <a:fillRect l="0" t="0" r="0" b="0"/>
@@ -13028,7 +13028,7 @@
           <p:cNvPr id="2" name="">
             <a:extLst xmlns:a="http://schemas.openxmlformats.org/drawingml/2006/main">
               <a:ext uri="{FF2B5EF4-FFF2-40B4-BE49-F238E27FC236}">
-                <a16:creationId xmlns:a16="http://schemas.microsoft.com/office/drawing/2014/main" id="{CE645B36-724E-4C4B-A7B5-56D3A0DEFC1A}"/>
+                <a16:creationId xmlns:a16="http://schemas.microsoft.com/office/drawing/2014/main" id="{C1CFCC10-5846-4542-B7F9-DBB0913E1B76}"/>
               </a:ext>
             </a:extLst>
           </p:cNvPr>
@@ -13065,7 +13065,7 @@
           <p:cNvPr id="3" name="">
             <a:extLst xmlns:a="http://schemas.openxmlformats.org/drawingml/2006/main">
               <a:ext uri="{FF2B5EF4-FFF2-40B4-BE49-F238E27FC236}">
-                <a16:creationId xmlns:a16="http://schemas.microsoft.com/office/drawing/2014/main" id="{6D795C58-DC5F-4A8F-8499-D5D9429F122F}"/>
+                <a16:creationId xmlns:a16="http://schemas.microsoft.com/office/drawing/2014/main" id="{FB4428E1-1182-4757-A252-8FE2A1EB77E1}"/>
               </a:ext>
             </a:extLst>
           </p:cNvPr>
@@ -13102,7 +13102,7 @@
           <p:cNvPr id="4" name="">
             <a:extLst xmlns:a="http://schemas.openxmlformats.org/drawingml/2006/main">
               <a:ext uri="{FF2B5EF4-FFF2-40B4-BE49-F238E27FC236}">
-                <a16:creationId xmlns:a16="http://schemas.microsoft.com/office/drawing/2014/main" id="{F02722CF-08F8-4118-887C-59EBD52358EA}"/>
+                <a16:creationId xmlns:a16="http://schemas.microsoft.com/office/drawing/2014/main" id="{D60D6215-4816-4EB9-9DED-18D4E6395910}"/>
               </a:ext>
             </a:extLst>
           </p:cNvPr>
@@ -13166,7 +13166,7 @@
           <p:cNvPr id="5" name="">
             <a:extLst xmlns:a="http://schemas.openxmlformats.org/drawingml/2006/main">
               <a:ext uri="{FF2B5EF4-FFF2-40B4-BE49-F238E27FC236}">
-                <a16:creationId xmlns:a16="http://schemas.microsoft.com/office/drawing/2014/main" id="{DD507589-0053-4E13-A46F-BEA7707F3429}"/>
+                <a16:creationId xmlns:a16="http://schemas.microsoft.com/office/drawing/2014/main" id="{E9682BC7-601B-41FF-8E24-890CED20DE77}"/>
               </a:ext>
             </a:extLst>
           </p:cNvPr>
@@ -13230,7 +13230,7 @@
           <p:cNvPr id="6" name="">
             <a:extLst xmlns:a="http://schemas.openxmlformats.org/drawingml/2006/main">
               <a:ext uri="{FF2B5EF4-FFF2-40B4-BE49-F238E27FC236}">
-                <a16:creationId xmlns:a16="http://schemas.microsoft.com/office/drawing/2014/main" id="{C51BEB9B-4C13-44D5-AD3E-C8F23E4732D1}"/>
+                <a16:creationId xmlns:a16="http://schemas.microsoft.com/office/drawing/2014/main" id="{D48BDABA-6311-4E27-A134-EBCB047681CD}"/>
               </a:ext>
             </a:extLst>
           </p:cNvPr>
@@ -13294,7 +13294,7 @@
           <p:cNvPr id="7" name="">
             <a:extLst xmlns:a="http://schemas.openxmlformats.org/drawingml/2006/main">
               <a:ext uri="{FF2B5EF4-FFF2-40B4-BE49-F238E27FC236}">
-                <a16:creationId xmlns:a16="http://schemas.microsoft.com/office/drawing/2014/main" id="{8300D06C-8C35-43B8-ABB1-BA5FBC663441}"/>
+                <a16:creationId xmlns:a16="http://schemas.microsoft.com/office/drawing/2014/main" id="{176B5156-8767-4088-9ABE-ACB7B0D49689}"/>
               </a:ext>
             </a:extLst>
           </p:cNvPr>
@@ -13329,7 +13329,7 @@
           <p:cNvPr id="8" name="">
             <a:extLst xmlns:a="http://schemas.openxmlformats.org/drawingml/2006/main">
               <a:ext uri="{FF2B5EF4-FFF2-40B4-BE49-F238E27FC236}">
-                <a16:creationId xmlns:a16="http://schemas.microsoft.com/office/drawing/2014/main" id="{11F61D3D-8340-439F-B432-BEB32C8E57F6}"/>
+                <a16:creationId xmlns:a16="http://schemas.microsoft.com/office/drawing/2014/main" id="{62566836-1DBD-4CCC-A9BD-65B306218CC8}"/>
               </a:ext>
             </a:extLst>
           </p:cNvPr>
@@ -13416,7 +13416,7 @@
           <p:cNvPr id="9" name="">
             <a:extLst xmlns:a="http://schemas.openxmlformats.org/drawingml/2006/main">
               <a:ext uri="{FF2B5EF4-FFF2-40B4-BE49-F238E27FC236}">
-                <a16:creationId xmlns:a16="http://schemas.microsoft.com/office/drawing/2014/main" id="{80209EB8-9440-4D41-982A-8286FF0ABBA1}"/>
+                <a16:creationId xmlns:a16="http://schemas.microsoft.com/office/drawing/2014/main" id="{17954CB5-628E-45A4-976A-3AC3B6BAAA03}"/>
               </a:ext>
             </a:extLst>
           </p:cNvPr>
@@ -13480,7 +13480,7 @@
           <p:cNvPr id="10" name="">
             <a:extLst xmlns:a="http://schemas.openxmlformats.org/drawingml/2006/main">
               <a:ext uri="{FF2B5EF4-FFF2-40B4-BE49-F238E27FC236}">
-                <a16:creationId xmlns:a16="http://schemas.microsoft.com/office/drawing/2014/main" id="{FCEDDDB9-DD5E-4159-85CF-6BEF1EFBDE53}"/>
+                <a16:creationId xmlns:a16="http://schemas.microsoft.com/office/drawing/2014/main" id="{3B52083C-E00F-4904-B519-57FB578568FD}"/>
               </a:ext>
             </a:extLst>
           </p:cNvPr>
@@ -13515,7 +13515,7 @@
           <p:cNvPr id="11" name="">
             <a:extLst xmlns:a="http://schemas.openxmlformats.org/drawingml/2006/main">
               <a:ext uri="{FF2B5EF4-FFF2-40B4-BE49-F238E27FC236}">
-                <a16:creationId xmlns:a16="http://schemas.microsoft.com/office/drawing/2014/main" id="{46E900CE-5AF5-4F54-A202-D75F6FF0E9B8}"/>
+                <a16:creationId xmlns:a16="http://schemas.microsoft.com/office/drawing/2014/main" id="{E161BB34-7CAC-494A-8291-6E0067D99130}"/>
               </a:ext>
             </a:extLst>
           </p:cNvPr>
@@ -13579,7 +13579,7 @@
           <p:cNvPr id="12" name="">
             <a:extLst xmlns:a="http://schemas.openxmlformats.org/drawingml/2006/main">
               <a:ext uri="{FF2B5EF4-FFF2-40B4-BE49-F238E27FC236}">
-                <a16:creationId xmlns:a16="http://schemas.microsoft.com/office/drawing/2014/main" id="{B85EEB06-26A1-49FA-8B93-01B6ABBC911D}"/>
+                <a16:creationId xmlns:a16="http://schemas.microsoft.com/office/drawing/2014/main" id="{2386E379-2DE0-42C7-810C-8D97D962AB35}"/>
               </a:ext>
             </a:extLst>
           </p:cNvPr>
@@ -13612,7 +13612,7 @@
           <p:cNvPr id="13" name="">
             <a:extLst xmlns:a="http://schemas.openxmlformats.org/drawingml/2006/main">
               <a:ext uri="{FF2B5EF4-FFF2-40B4-BE49-F238E27FC236}">
-                <a16:creationId xmlns:a16="http://schemas.microsoft.com/office/drawing/2014/main" id="{B5BBFFFC-EC2A-474F-94C8-79D4A2323510}"/>
+                <a16:creationId xmlns:a16="http://schemas.microsoft.com/office/drawing/2014/main" id="{B9FD4520-A212-4AED-9C82-A948B50CDEAB}"/>
               </a:ext>
             </a:extLst>
           </p:cNvPr>
@@ -13647,7 +13647,7 @@
           <p:cNvPr id="14" name="">
             <a:extLst xmlns:a="http://schemas.openxmlformats.org/drawingml/2006/main">
               <a:ext uri="{FF2B5EF4-FFF2-40B4-BE49-F238E27FC236}">
-                <a16:creationId xmlns:a16="http://schemas.microsoft.com/office/drawing/2014/main" id="{61301CA2-6070-48A2-9622-7BFC3EC5BE48}"/>
+                <a16:creationId xmlns:a16="http://schemas.microsoft.com/office/drawing/2014/main" id="{87B3DC2B-A67D-4AD1-8C5E-63830A831BA7}"/>
               </a:ext>
             </a:extLst>
           </p:cNvPr>
@@ -13711,7 +13711,7 @@
           <p:cNvPr id="15" name="">
             <a:extLst xmlns:a="http://schemas.openxmlformats.org/drawingml/2006/main">
               <a:ext uri="{FF2B5EF4-FFF2-40B4-BE49-F238E27FC236}">
-                <a16:creationId xmlns:a16="http://schemas.microsoft.com/office/drawing/2014/main" id="{41E98AD7-3BEE-4A1A-887B-189C84732DF7}"/>
+                <a16:creationId xmlns:a16="http://schemas.microsoft.com/office/drawing/2014/main" id="{4C58476B-9345-4B1E-880F-159AF115C0B5}"/>
               </a:ext>
             </a:extLst>
           </p:cNvPr>
@@ -13744,7 +13744,7 @@
           <p:cNvPr id="16" name="">
             <a:extLst xmlns:a="http://schemas.openxmlformats.org/drawingml/2006/main">
               <a:ext uri="{FF2B5EF4-FFF2-40B4-BE49-F238E27FC236}">
-                <a16:creationId xmlns:a16="http://schemas.microsoft.com/office/drawing/2014/main" id="{A18CCAD6-0069-4BBE-9132-E2F10AB0E451}"/>
+                <a16:creationId xmlns:a16="http://schemas.microsoft.com/office/drawing/2014/main" id="{EA343DA8-B187-4C19-B711-DA17B45EB720}"/>
               </a:ext>
             </a:extLst>
           </p:cNvPr>
@@ -13779,7 +13779,7 @@
           <p:cNvPr id="17" name="">
             <a:extLst xmlns:a="http://schemas.openxmlformats.org/drawingml/2006/main">
               <a:ext uri="{FF2B5EF4-FFF2-40B4-BE49-F238E27FC236}">
-                <a16:creationId xmlns:a16="http://schemas.microsoft.com/office/drawing/2014/main" id="{864E7D60-3119-4C10-9AB7-D040EC7DD04B}"/>
+                <a16:creationId xmlns:a16="http://schemas.microsoft.com/office/drawing/2014/main" id="{62CFC235-60D7-4D29-9924-1BA504313B61}"/>
               </a:ext>
             </a:extLst>
           </p:cNvPr>
@@ -13843,7 +13843,7 @@
           <p:cNvPr id="18" name="">
             <a:extLst xmlns:a="http://schemas.openxmlformats.org/drawingml/2006/main">
               <a:ext uri="{FF2B5EF4-FFF2-40B4-BE49-F238E27FC236}">
-                <a16:creationId xmlns:a16="http://schemas.microsoft.com/office/drawing/2014/main" id="{35F3FAF6-19BF-4693-8596-7AB4382B1CF0}"/>
+                <a16:creationId xmlns:a16="http://schemas.microsoft.com/office/drawing/2014/main" id="{87BB642B-8BC1-42D2-92C3-C707C125E12A}"/>
               </a:ext>
             </a:extLst>
           </p:cNvPr>
@@ -13876,7 +13876,7 @@
           <p:cNvPr id="19" name="">
             <a:extLst xmlns:a="http://schemas.openxmlformats.org/drawingml/2006/main">
               <a:ext uri="{FF2B5EF4-FFF2-40B4-BE49-F238E27FC236}">
-                <a16:creationId xmlns:a16="http://schemas.microsoft.com/office/drawing/2014/main" id="{2772CD0D-429C-4AB1-9AFF-9BE0A48DA110}"/>
+                <a16:creationId xmlns:a16="http://schemas.microsoft.com/office/drawing/2014/main" id="{398FF1CE-B290-4AFC-9087-A29A52050141}"/>
               </a:ext>
             </a:extLst>
           </p:cNvPr>
@@ -13911,7 +13911,7 @@
           <p:cNvPr id="20" name="">
             <a:extLst xmlns:a="http://schemas.openxmlformats.org/drawingml/2006/main">
               <a:ext uri="{FF2B5EF4-FFF2-40B4-BE49-F238E27FC236}">
-                <a16:creationId xmlns:a16="http://schemas.microsoft.com/office/drawing/2014/main" id="{69A8588D-1713-4751-8EED-6AD0B23A7C37}"/>
+                <a16:creationId xmlns:a16="http://schemas.microsoft.com/office/drawing/2014/main" id="{F26361A7-C71C-4F61-9423-018D00AD4AA6}"/>
               </a:ext>
             </a:extLst>
           </p:cNvPr>
@@ -13975,7 +13975,7 @@
           <p:cNvPr id="21" name="">
             <a:extLst xmlns:a="http://schemas.openxmlformats.org/drawingml/2006/main">
               <a:ext uri="{FF2B5EF4-FFF2-40B4-BE49-F238E27FC236}">
-                <a16:creationId xmlns:a16="http://schemas.microsoft.com/office/drawing/2014/main" id="{87A22466-8FEF-4CFF-83DE-F010058BAA02}"/>
+                <a16:creationId xmlns:a16="http://schemas.microsoft.com/office/drawing/2014/main" id="{7D7730AE-C656-4B57-80A8-72739EE98537}"/>
               </a:ext>
             </a:extLst>
           </p:cNvPr>
@@ -14008,7 +14008,7 @@
           <p:cNvPr id="22" name="">
             <a:extLst xmlns:a="http://schemas.openxmlformats.org/drawingml/2006/main">
               <a:ext uri="{FF2B5EF4-FFF2-40B4-BE49-F238E27FC236}">
-                <a16:creationId xmlns:a16="http://schemas.microsoft.com/office/drawing/2014/main" id="{C260D860-221B-4869-B911-FC629FD98DD2}"/>
+                <a16:creationId xmlns:a16="http://schemas.microsoft.com/office/drawing/2014/main" id="{DDA24446-845A-43D5-A349-780CBE688133}"/>
               </a:ext>
             </a:extLst>
           </p:cNvPr>
@@ -14043,7 +14043,7 @@
           <p:cNvPr id="23" name="">
             <a:extLst xmlns:a="http://schemas.openxmlformats.org/drawingml/2006/main">
               <a:ext uri="{FF2B5EF4-FFF2-40B4-BE49-F238E27FC236}">
-                <a16:creationId xmlns:a16="http://schemas.microsoft.com/office/drawing/2014/main" id="{1F1C1CB3-51C4-4670-A8E9-F5036AE15670}"/>
+                <a16:creationId xmlns:a16="http://schemas.microsoft.com/office/drawing/2014/main" id="{2DD65134-3AE9-42A8-B2A8-954423228F85}"/>
               </a:ext>
             </a:extLst>
           </p:cNvPr>
@@ -14107,7 +14107,7 @@
           <p:cNvPr id="24" name="">
             <a:extLst xmlns:a="http://schemas.openxmlformats.org/drawingml/2006/main">
               <a:ext uri="{FF2B5EF4-FFF2-40B4-BE49-F238E27FC236}">
-                <a16:creationId xmlns:a16="http://schemas.microsoft.com/office/drawing/2014/main" id="{03157B53-9FF2-44B1-9580-1750CFF3D08E}"/>
+                <a16:creationId xmlns:a16="http://schemas.microsoft.com/office/drawing/2014/main" id="{A862DBC6-4B2F-45D0-BE3E-8D5FEE64CCD1}"/>
               </a:ext>
             </a:extLst>
           </p:cNvPr>
@@ -14140,7 +14140,7 @@
           <p:cNvPr id="25" name="">
             <a:extLst xmlns:a="http://schemas.openxmlformats.org/drawingml/2006/main">
               <a:ext uri="{FF2B5EF4-FFF2-40B4-BE49-F238E27FC236}">
-                <a16:creationId xmlns:a16="http://schemas.microsoft.com/office/drawing/2014/main" id="{1E6256AC-7B4E-4FAC-BF0B-2503B08A4ECC}"/>
+                <a16:creationId xmlns:a16="http://schemas.microsoft.com/office/drawing/2014/main" id="{EDF3BCE4-7741-435F-B9B6-8698362B803A}"/>
               </a:ext>
             </a:extLst>
           </p:cNvPr>
@@ -14173,7 +14173,7 @@
           <p:cNvPr id="26" name="">
             <a:extLst xmlns:a="http://schemas.openxmlformats.org/drawingml/2006/main">
               <a:ext uri="{FF2B5EF4-FFF2-40B4-BE49-F238E27FC236}">
-                <a16:creationId xmlns:a16="http://schemas.microsoft.com/office/drawing/2014/main" id="{E3C735F4-25AF-486F-B0D6-69F28FCC3446}"/>
+                <a16:creationId xmlns:a16="http://schemas.microsoft.com/office/drawing/2014/main" id="{913BEE18-E7CD-496A-B62B-E146FB8C08B0}"/>
               </a:ext>
             </a:extLst>
           </p:cNvPr>
@@ -14237,7 +14237,7 @@
           <p:cNvPr id="27" name="">
             <a:extLst xmlns:a="http://schemas.openxmlformats.org/drawingml/2006/main">
               <a:ext uri="{FF2B5EF4-FFF2-40B4-BE49-F238E27FC236}">
-                <a16:creationId xmlns:a16="http://schemas.microsoft.com/office/drawing/2014/main" id="{D1912798-91C8-461E-9B0A-478A36FCD476}"/>
+                <a16:creationId xmlns:a16="http://schemas.microsoft.com/office/drawing/2014/main" id="{1877DFF0-35BC-4F81-AAAF-44CE4B9A0284}"/>
               </a:ext>
             </a:extLst>
           </p:cNvPr>
@@ -14270,7 +14270,7 @@
           <p:cNvPr id="28" name="">
             <a:extLst xmlns:a="http://schemas.openxmlformats.org/drawingml/2006/main">
               <a:ext uri="{FF2B5EF4-FFF2-40B4-BE49-F238E27FC236}">
-                <a16:creationId xmlns:a16="http://schemas.microsoft.com/office/drawing/2014/main" id="{FE9D0A1D-739F-465C-AB06-96DD07F277F4}"/>
+                <a16:creationId xmlns:a16="http://schemas.microsoft.com/office/drawing/2014/main" id="{CC155FC3-1FB8-4FFE-8048-A0FA9F5507C3}"/>
               </a:ext>
             </a:extLst>
           </p:cNvPr>
@@ -14334,7 +14334,7 @@
           <p:cNvPr id="29" name="">
             <a:extLst xmlns:a="http://schemas.openxmlformats.org/drawingml/2006/main">
               <a:ext uri="{FF2B5EF4-FFF2-40B4-BE49-F238E27FC236}">
-                <a16:creationId xmlns:a16="http://schemas.microsoft.com/office/drawing/2014/main" id="{F8DE9EFB-4698-4269-8E7F-D23D1D925B12}"/>
+                <a16:creationId xmlns:a16="http://schemas.microsoft.com/office/drawing/2014/main" id="{4DAB5650-7F58-42E9-A880-63C566208FE8}"/>
               </a:ext>
             </a:extLst>
           </p:cNvPr>
@@ -14396,7 +14396,7 @@
     </p:spTree>
     <p:extLst>
       <p:ext uri="{BB962C8B-B14F-4D97-AF65-F5344CB8AC3E}">
-        <p14:creationId xmlns:p14="http://schemas.microsoft.com/office/powerpoint/2010/main" val="694798692"/>
+        <p14:creationId xmlns:p14="http://schemas.microsoft.com/office/powerpoint/2010/main" val="1020638842"/>
       </p:ext>
     </p:extLst>
   </p:cSld>
@@ -14424,7 +14424,7 @@
           <p:nvPr/>
         </p:nvPicPr>
         <p:blipFill>
-          <a:blip xmlns:r="http://schemas.openxmlformats.org/officeDocument/2006/relationships" xmlns:a="http://schemas.openxmlformats.org/drawingml/2006/main" r:embed="R2ff62a413bdb4213"/>
+          <a:blip xmlns:r="http://schemas.openxmlformats.org/officeDocument/2006/relationships" xmlns:a="http://schemas.openxmlformats.org/drawingml/2006/main" r:embed="R92e0d8806320441c"/>
           <a:srcRect xmlns:a="http://schemas.openxmlformats.org/drawingml/2006/main" l="0" t="27" r="0" b="27"/>
           <a:stretch xmlns:a="http://schemas.openxmlformats.org/drawingml/2006/main">
             <a:fillRect l="0" t="0" r="0" b="0"/>
@@ -14445,7 +14445,7 @@
           <p:cNvPr id="2" name="">
             <a:extLst xmlns:a="http://schemas.openxmlformats.org/drawingml/2006/main">
               <a:ext uri="{FF2B5EF4-FFF2-40B4-BE49-F238E27FC236}">
-                <a16:creationId xmlns:a16="http://schemas.microsoft.com/office/drawing/2014/main" id="{A3CF6F8C-3699-4185-8825-A0EAD16BE197}"/>
+                <a16:creationId xmlns:a16="http://schemas.microsoft.com/office/drawing/2014/main" id="{B39EEB43-95DF-4FF1-9403-8BA2D729B938}"/>
               </a:ext>
             </a:extLst>
           </p:cNvPr>
@@ -14482,7 +14482,7 @@
           <p:cNvPr id="3" name="">
             <a:extLst xmlns:a="http://schemas.openxmlformats.org/drawingml/2006/main">
               <a:ext uri="{FF2B5EF4-FFF2-40B4-BE49-F238E27FC236}">
-                <a16:creationId xmlns:a16="http://schemas.microsoft.com/office/drawing/2014/main" id="{68DBC356-5D0A-4480-93C4-5264B1796624}"/>
+                <a16:creationId xmlns:a16="http://schemas.microsoft.com/office/drawing/2014/main" id="{A6BD6C19-4A8C-41A3-A932-FE6E14026DCB}"/>
               </a:ext>
             </a:extLst>
           </p:cNvPr>
@@ -14519,7 +14519,7 @@
           <p:cNvPr id="4" name="">
             <a:extLst xmlns:a="http://schemas.openxmlformats.org/drawingml/2006/main">
               <a:ext uri="{FF2B5EF4-FFF2-40B4-BE49-F238E27FC236}">
-                <a16:creationId xmlns:a16="http://schemas.microsoft.com/office/drawing/2014/main" id="{A585A944-923D-4D23-87DA-751F9B9E6EBB}"/>
+                <a16:creationId xmlns:a16="http://schemas.microsoft.com/office/drawing/2014/main" id="{8CC22EFB-12A2-4F59-999B-8B2A3FF1F7F2}"/>
               </a:ext>
             </a:extLst>
           </p:cNvPr>
@@ -14583,7 +14583,7 @@
           <p:cNvPr id="5" name="">
             <a:extLst xmlns:a="http://schemas.openxmlformats.org/drawingml/2006/main">
               <a:ext uri="{FF2B5EF4-FFF2-40B4-BE49-F238E27FC236}">
-                <a16:creationId xmlns:a16="http://schemas.microsoft.com/office/drawing/2014/main" id="{AC679EE7-2689-4086-AD1C-CC4B695BB669}"/>
+                <a16:creationId xmlns:a16="http://schemas.microsoft.com/office/drawing/2014/main" id="{DE92DAEE-478A-4CFB-B30A-ABDEE6E60897}"/>
               </a:ext>
             </a:extLst>
           </p:cNvPr>
@@ -14647,7 +14647,7 @@
           <p:cNvPr id="6" name="">
             <a:extLst xmlns:a="http://schemas.openxmlformats.org/drawingml/2006/main">
               <a:ext uri="{FF2B5EF4-FFF2-40B4-BE49-F238E27FC236}">
-                <a16:creationId xmlns:a16="http://schemas.microsoft.com/office/drawing/2014/main" id="{3D13370B-E737-4A22-9D99-4074EF8EB690}"/>
+                <a16:creationId xmlns:a16="http://schemas.microsoft.com/office/drawing/2014/main" id="{0AA62E31-A20D-4A46-AA48-F60212275527}"/>
               </a:ext>
             </a:extLst>
           </p:cNvPr>
@@ -14711,7 +14711,7 @@
           <p:cNvPr id="7" name="">
             <a:extLst xmlns:a="http://schemas.openxmlformats.org/drawingml/2006/main">
               <a:ext uri="{FF2B5EF4-FFF2-40B4-BE49-F238E27FC236}">
-                <a16:creationId xmlns:a16="http://schemas.microsoft.com/office/drawing/2014/main" id="{99D54DD7-322C-4D63-A058-545DFD578D53}"/>
+                <a16:creationId xmlns:a16="http://schemas.microsoft.com/office/drawing/2014/main" id="{BA1194C6-6DEF-4FE4-9FD4-CE65CA02CB20}"/>
               </a:ext>
             </a:extLst>
           </p:cNvPr>
@@ -14746,7 +14746,7 @@
           <p:cNvPr id="8" name="">
             <a:extLst xmlns:a="http://schemas.openxmlformats.org/drawingml/2006/main">
               <a:ext uri="{FF2B5EF4-FFF2-40B4-BE49-F238E27FC236}">
-                <a16:creationId xmlns:a16="http://schemas.microsoft.com/office/drawing/2014/main" id="{D424CD8D-F0E1-4C1C-99FB-BC897F3839D1}"/>
+                <a16:creationId xmlns:a16="http://schemas.microsoft.com/office/drawing/2014/main" id="{4103BEF2-3AF8-44A0-8FA6-4D96FFE62516}"/>
               </a:ext>
             </a:extLst>
           </p:cNvPr>
@@ -14810,7 +14810,7 @@
           <p:cNvPr id="9" name="">
             <a:extLst xmlns:a="http://schemas.openxmlformats.org/drawingml/2006/main">
               <a:ext uri="{FF2B5EF4-FFF2-40B4-BE49-F238E27FC236}">
-                <a16:creationId xmlns:a16="http://schemas.microsoft.com/office/drawing/2014/main" id="{3366D032-D474-45E0-9F2C-E61006DB0446}"/>
+                <a16:creationId xmlns:a16="http://schemas.microsoft.com/office/drawing/2014/main" id="{EBB2AE13-E924-4CD8-8E24-9922607384AA}"/>
               </a:ext>
             </a:extLst>
           </p:cNvPr>
@@ -14874,7 +14874,7 @@
           <p:cNvPr id="10" name="">
             <a:extLst xmlns:a="http://schemas.openxmlformats.org/drawingml/2006/main">
               <a:ext uri="{FF2B5EF4-FFF2-40B4-BE49-F238E27FC236}">
-                <a16:creationId xmlns:a16="http://schemas.microsoft.com/office/drawing/2014/main" id="{2FB732BD-48F3-4095-9FE2-950B5B5DB349}"/>
+                <a16:creationId xmlns:a16="http://schemas.microsoft.com/office/drawing/2014/main" id="{DFE62475-B380-4550-A741-AE8A2E02D32C}"/>
               </a:ext>
             </a:extLst>
           </p:cNvPr>
@@ -14907,7 +14907,7 @@
           <p:cNvPr id="11" name="">
             <a:extLst xmlns:a="http://schemas.openxmlformats.org/drawingml/2006/main">
               <a:ext uri="{FF2B5EF4-FFF2-40B4-BE49-F238E27FC236}">
-                <a16:creationId xmlns:a16="http://schemas.microsoft.com/office/drawing/2014/main" id="{A1D4481B-5C5B-41C3-9D15-2ADB8CCBA7A6}"/>
+                <a16:creationId xmlns:a16="http://schemas.microsoft.com/office/drawing/2014/main" id="{A03797F9-4CF4-47E7-BA5A-BD6A0194A744}"/>
               </a:ext>
             </a:extLst>
           </p:cNvPr>
@@ -14942,7 +14942,7 @@
           <p:cNvPr id="12" name="">
             <a:extLst xmlns:a="http://schemas.openxmlformats.org/drawingml/2006/main">
               <a:ext uri="{FF2B5EF4-FFF2-40B4-BE49-F238E27FC236}">
-                <a16:creationId xmlns:a16="http://schemas.microsoft.com/office/drawing/2014/main" id="{216DDC12-A058-4FD4-BE74-B46CF4C10D3E}"/>
+                <a16:creationId xmlns:a16="http://schemas.microsoft.com/office/drawing/2014/main" id="{415DC7FB-D452-4CA0-894C-3E01365174AD}"/>
               </a:ext>
             </a:extLst>
           </p:cNvPr>
@@ -15006,7 +15006,7 @@
           <p:cNvPr id="13" name="">
             <a:extLst xmlns:a="http://schemas.openxmlformats.org/drawingml/2006/main">
               <a:ext uri="{FF2B5EF4-FFF2-40B4-BE49-F238E27FC236}">
-                <a16:creationId xmlns:a16="http://schemas.microsoft.com/office/drawing/2014/main" id="{256B59E5-0721-49B1-BA2B-D3FFFA4CC895}"/>
+                <a16:creationId xmlns:a16="http://schemas.microsoft.com/office/drawing/2014/main" id="{E9B44A44-7054-4873-84E2-04FE1061ACC4}"/>
               </a:ext>
             </a:extLst>
           </p:cNvPr>
@@ -15070,7 +15070,7 @@
           <p:cNvPr id="14" name="">
             <a:extLst xmlns:a="http://schemas.openxmlformats.org/drawingml/2006/main">
               <a:ext uri="{FF2B5EF4-FFF2-40B4-BE49-F238E27FC236}">
-                <a16:creationId xmlns:a16="http://schemas.microsoft.com/office/drawing/2014/main" id="{AB1143D6-B52F-4348-AE57-CBAA65A85502}"/>
+                <a16:creationId xmlns:a16="http://schemas.microsoft.com/office/drawing/2014/main" id="{28CC9438-8669-4EE1-888A-B68F15AD3B9E}"/>
               </a:ext>
             </a:extLst>
           </p:cNvPr>
@@ -15103,7 +15103,7 @@
           <p:cNvPr id="15" name="">
             <a:extLst xmlns:a="http://schemas.openxmlformats.org/drawingml/2006/main">
               <a:ext uri="{FF2B5EF4-FFF2-40B4-BE49-F238E27FC236}">
-                <a16:creationId xmlns:a16="http://schemas.microsoft.com/office/drawing/2014/main" id="{3978694A-30F7-41CC-ACE2-AA881C9A0900}"/>
+                <a16:creationId xmlns:a16="http://schemas.microsoft.com/office/drawing/2014/main" id="{F41B343F-BFA5-4305-AE9B-E6A311F10D92}"/>
               </a:ext>
             </a:extLst>
           </p:cNvPr>
@@ -15138,7 +15138,7 @@
           <p:cNvPr id="16" name="">
             <a:extLst xmlns:a="http://schemas.openxmlformats.org/drawingml/2006/main">
               <a:ext uri="{FF2B5EF4-FFF2-40B4-BE49-F238E27FC236}">
-                <a16:creationId xmlns:a16="http://schemas.microsoft.com/office/drawing/2014/main" id="{8ACC972B-2555-459D-80A4-F507533AE8A9}"/>
+                <a16:creationId xmlns:a16="http://schemas.microsoft.com/office/drawing/2014/main" id="{B3298F96-D35B-4BB9-9403-13C5B2D50453}"/>
               </a:ext>
             </a:extLst>
           </p:cNvPr>
@@ -15202,7 +15202,7 @@
           <p:cNvPr id="17" name="">
             <a:extLst xmlns:a="http://schemas.openxmlformats.org/drawingml/2006/main">
               <a:ext uri="{FF2B5EF4-FFF2-40B4-BE49-F238E27FC236}">
-                <a16:creationId xmlns:a16="http://schemas.microsoft.com/office/drawing/2014/main" id="{570ED729-5425-4E45-9B15-DE0FA7EB51E5}"/>
+                <a16:creationId xmlns:a16="http://schemas.microsoft.com/office/drawing/2014/main" id="{D0B60403-6625-4627-B7D3-271528E42D3A}"/>
               </a:ext>
             </a:extLst>
           </p:cNvPr>
@@ -15266,7 +15266,7 @@
           <p:cNvPr id="18" name="">
             <a:extLst xmlns:a="http://schemas.openxmlformats.org/drawingml/2006/main">
               <a:ext uri="{FF2B5EF4-FFF2-40B4-BE49-F238E27FC236}">
-                <a16:creationId xmlns:a16="http://schemas.microsoft.com/office/drawing/2014/main" id="{027FD8F7-7B21-4EF5-9DB4-435FD29B97A1}"/>
+                <a16:creationId xmlns:a16="http://schemas.microsoft.com/office/drawing/2014/main" id="{DBD05FA8-CE46-4093-A337-144253F85C54}"/>
               </a:ext>
             </a:extLst>
           </p:cNvPr>
@@ -15299,7 +15299,7 @@
           <p:cNvPr id="19" name="">
             <a:extLst xmlns:a="http://schemas.openxmlformats.org/drawingml/2006/main">
               <a:ext uri="{FF2B5EF4-FFF2-40B4-BE49-F238E27FC236}">
-                <a16:creationId xmlns:a16="http://schemas.microsoft.com/office/drawing/2014/main" id="{B3A6A308-B004-43BA-ADB3-FE81AE3E56C7}"/>
+                <a16:creationId xmlns:a16="http://schemas.microsoft.com/office/drawing/2014/main" id="{95152D6C-285C-4D74-8E72-F00F0289234D}"/>
               </a:ext>
             </a:extLst>
           </p:cNvPr>
@@ -15334,7 +15334,7 @@
           <p:cNvPr id="20" name="">
             <a:extLst xmlns:a="http://schemas.openxmlformats.org/drawingml/2006/main">
               <a:ext uri="{FF2B5EF4-FFF2-40B4-BE49-F238E27FC236}">
-                <a16:creationId xmlns:a16="http://schemas.microsoft.com/office/drawing/2014/main" id="{57E55927-2E16-491A-8CFD-96F360736C3A}"/>
+                <a16:creationId xmlns:a16="http://schemas.microsoft.com/office/drawing/2014/main" id="{6C7D7003-C10E-487D-B7E5-7E63146263A3}"/>
               </a:ext>
             </a:extLst>
           </p:cNvPr>
@@ -15398,7 +15398,7 @@
           <p:cNvPr id="21" name="">
             <a:extLst xmlns:a="http://schemas.openxmlformats.org/drawingml/2006/main">
               <a:ext uri="{FF2B5EF4-FFF2-40B4-BE49-F238E27FC236}">
-                <a16:creationId xmlns:a16="http://schemas.microsoft.com/office/drawing/2014/main" id="{1C5D58E0-5204-4523-B6A1-3A3329BF0392}"/>
+                <a16:creationId xmlns:a16="http://schemas.microsoft.com/office/drawing/2014/main" id="{15172756-2908-488E-B594-CBEC44D6E6B1}"/>
               </a:ext>
             </a:extLst>
           </p:cNvPr>
@@ -15462,7 +15462,7 @@
           <p:cNvPr id="22" name="">
             <a:extLst xmlns:a="http://schemas.openxmlformats.org/drawingml/2006/main">
               <a:ext uri="{FF2B5EF4-FFF2-40B4-BE49-F238E27FC236}">
-                <a16:creationId xmlns:a16="http://schemas.microsoft.com/office/drawing/2014/main" id="{0E3DA905-0D89-43B2-A521-D2D608F007B4}"/>
+                <a16:creationId xmlns:a16="http://schemas.microsoft.com/office/drawing/2014/main" id="{7CA0A31B-AC2C-4144-8530-5D8277D06A88}"/>
               </a:ext>
             </a:extLst>
           </p:cNvPr>
@@ -15526,7 +15526,7 @@
           <p:cNvPr id="23" name="">
             <a:extLst xmlns:a="http://schemas.openxmlformats.org/drawingml/2006/main">
               <a:ext uri="{FF2B5EF4-FFF2-40B4-BE49-F238E27FC236}">
-                <a16:creationId xmlns:a16="http://schemas.microsoft.com/office/drawing/2014/main" id="{2EF7674C-1F2D-430E-A166-F451663155B0}"/>
+                <a16:creationId xmlns:a16="http://schemas.microsoft.com/office/drawing/2014/main" id="{A89B1C7F-760D-4B2C-95B3-05DBD6F14E73}"/>
               </a:ext>
             </a:extLst>
           </p:cNvPr>
@@ -15590,7 +15590,7 @@
           <p:cNvPr id="24" name="">
             <a:extLst xmlns:a="http://schemas.openxmlformats.org/drawingml/2006/main">
               <a:ext uri="{FF2B5EF4-FFF2-40B4-BE49-F238E27FC236}">
-                <a16:creationId xmlns:a16="http://schemas.microsoft.com/office/drawing/2014/main" id="{06821C6C-07DC-4593-98D0-F657EB2AF74C}"/>
+                <a16:creationId xmlns:a16="http://schemas.microsoft.com/office/drawing/2014/main" id="{8F0C9112-CD8A-4B6F-BA61-190BE0A9CB0D}"/>
               </a:ext>
             </a:extLst>
           </p:cNvPr>
@@ -15623,7 +15623,7 @@
           <p:cNvPr id="25" name="">
             <a:extLst xmlns:a="http://schemas.openxmlformats.org/drawingml/2006/main">
               <a:ext uri="{FF2B5EF4-FFF2-40B4-BE49-F238E27FC236}">
-                <a16:creationId xmlns:a16="http://schemas.microsoft.com/office/drawing/2014/main" id="{4FB4C8C5-BAC6-46B7-9760-C0F03B274F9B}"/>
+                <a16:creationId xmlns:a16="http://schemas.microsoft.com/office/drawing/2014/main" id="{3DBEEB14-361D-46B0-9C2D-AFFED2F508ED}"/>
               </a:ext>
             </a:extLst>
           </p:cNvPr>
@@ -15687,7 +15687,7 @@
           <p:cNvPr id="26" name="">
             <a:extLst xmlns:a="http://schemas.openxmlformats.org/drawingml/2006/main">
               <a:ext uri="{FF2B5EF4-FFF2-40B4-BE49-F238E27FC236}">
-                <a16:creationId xmlns:a16="http://schemas.microsoft.com/office/drawing/2014/main" id="{4C55C432-F9DC-4E11-A1B4-C0C0D5622AFA}"/>
+                <a16:creationId xmlns:a16="http://schemas.microsoft.com/office/drawing/2014/main" id="{A7FAEA83-5D0E-47CE-8AA2-DBB410CF9A4E}"/>
               </a:ext>
             </a:extLst>
           </p:cNvPr>
@@ -15749,7 +15749,7 @@
     </p:spTree>
     <p:extLst>
       <p:ext uri="{BB962C8B-B14F-4D97-AF65-F5344CB8AC3E}">
-        <p14:creationId xmlns:p14="http://schemas.microsoft.com/office/powerpoint/2010/main" val="1906997076"/>
+        <p14:creationId xmlns:p14="http://schemas.microsoft.com/office/powerpoint/2010/main" val="1471309761"/>
       </p:ext>
     </p:extLst>
   </p:cSld>
@@ -15777,7 +15777,7 @@
           <p:nvPr/>
         </p:nvPicPr>
         <p:blipFill>
-          <a:blip xmlns:r="http://schemas.openxmlformats.org/officeDocument/2006/relationships" xmlns:a="http://schemas.openxmlformats.org/drawingml/2006/main" r:embed="R39d98dc718634992"/>
+          <a:blip xmlns:r="http://schemas.openxmlformats.org/officeDocument/2006/relationships" xmlns:a="http://schemas.openxmlformats.org/drawingml/2006/main" r:embed="Rb599d61e97744856"/>
           <a:srcRect xmlns:a="http://schemas.openxmlformats.org/drawingml/2006/main" l="0" t="7813" r="0" b="7813"/>
           <a:stretch xmlns:a="http://schemas.openxmlformats.org/drawingml/2006/main">
             <a:fillRect l="0" t="0" r="0" b="0"/>
@@ -15798,7 +15798,7 @@
           <p:cNvPr id="2" name="">
             <a:extLst xmlns:a="http://schemas.openxmlformats.org/drawingml/2006/main">
               <a:ext uri="{FF2B5EF4-FFF2-40B4-BE49-F238E27FC236}">
-                <a16:creationId xmlns:a16="http://schemas.microsoft.com/office/drawing/2014/main" id="{BE58ED1B-25E0-4752-B4AA-B861DD7C14AB}"/>
+                <a16:creationId xmlns:a16="http://schemas.microsoft.com/office/drawing/2014/main" id="{EB3BA06C-9094-4BA6-88D1-2780BB415E83}"/>
               </a:ext>
             </a:extLst>
           </p:cNvPr>
@@ -15835,7 +15835,7 @@
           <p:cNvPr id="3" name="">
             <a:extLst xmlns:a="http://schemas.openxmlformats.org/drawingml/2006/main">
               <a:ext uri="{FF2B5EF4-FFF2-40B4-BE49-F238E27FC236}">
-                <a16:creationId xmlns:a16="http://schemas.microsoft.com/office/drawing/2014/main" id="{2705682D-9CC1-425D-87D6-3A6D3F9F9939}"/>
+                <a16:creationId xmlns:a16="http://schemas.microsoft.com/office/drawing/2014/main" id="{93627F94-C022-4EBA-B337-E9CAB0C43F82}"/>
               </a:ext>
             </a:extLst>
           </p:cNvPr>
@@ -15872,7 +15872,7 @@
           <p:cNvPr id="4" name="">
             <a:extLst xmlns:a="http://schemas.openxmlformats.org/drawingml/2006/main">
               <a:ext uri="{FF2B5EF4-FFF2-40B4-BE49-F238E27FC236}">
-                <a16:creationId xmlns:a16="http://schemas.microsoft.com/office/drawing/2014/main" id="{2B180913-5F2C-4BFB-8D6B-7DC760C4CF07}"/>
+                <a16:creationId xmlns:a16="http://schemas.microsoft.com/office/drawing/2014/main" id="{271E86DE-9405-4894-8F6C-2254664CBC26}"/>
               </a:ext>
             </a:extLst>
           </p:cNvPr>
@@ -15936,7 +15936,7 @@
           <p:cNvPr id="5" name="">
             <a:extLst xmlns:a="http://schemas.openxmlformats.org/drawingml/2006/main">
               <a:ext uri="{FF2B5EF4-FFF2-40B4-BE49-F238E27FC236}">
-                <a16:creationId xmlns:a16="http://schemas.microsoft.com/office/drawing/2014/main" id="{AB862D1F-1F48-45A4-890D-1ECD6F81A5E6}"/>
+                <a16:creationId xmlns:a16="http://schemas.microsoft.com/office/drawing/2014/main" id="{45E3B2C1-F98F-4AB4-A9DA-413752317720}"/>
               </a:ext>
             </a:extLst>
           </p:cNvPr>
@@ -16000,7 +16000,7 @@
           <p:cNvPr id="6" name="">
             <a:extLst xmlns:a="http://schemas.openxmlformats.org/drawingml/2006/main">
               <a:ext uri="{FF2B5EF4-FFF2-40B4-BE49-F238E27FC236}">
-                <a16:creationId xmlns:a16="http://schemas.microsoft.com/office/drawing/2014/main" id="{34D4370A-7CE2-4024-B733-08C66EBB686E}"/>
+                <a16:creationId xmlns:a16="http://schemas.microsoft.com/office/drawing/2014/main" id="{580EA774-9CC0-4B0C-AB80-DB59F2B40750}"/>
               </a:ext>
             </a:extLst>
           </p:cNvPr>
@@ -16064,7 +16064,7 @@
           <p:cNvPr id="7" name="">
             <a:extLst xmlns:a="http://schemas.openxmlformats.org/drawingml/2006/main">
               <a:ext uri="{FF2B5EF4-FFF2-40B4-BE49-F238E27FC236}">
-                <a16:creationId xmlns:a16="http://schemas.microsoft.com/office/drawing/2014/main" id="{9BDEB56D-DC10-4139-A8E9-E3BDD0D4FCEE}"/>
+                <a16:creationId xmlns:a16="http://schemas.microsoft.com/office/drawing/2014/main" id="{2B2BE006-E781-4161-976C-9FA0C4989113}"/>
               </a:ext>
             </a:extLst>
           </p:cNvPr>
@@ -16099,7 +16099,7 @@
           <p:cNvPr id="8" name="">
             <a:extLst xmlns:a="http://schemas.openxmlformats.org/drawingml/2006/main">
               <a:ext uri="{FF2B5EF4-FFF2-40B4-BE49-F238E27FC236}">
-                <a16:creationId xmlns:a16="http://schemas.microsoft.com/office/drawing/2014/main" id="{48E36B2A-94D3-49CC-B2F9-527B83A6475F}"/>
+                <a16:creationId xmlns:a16="http://schemas.microsoft.com/office/drawing/2014/main" id="{208A526D-8318-42EF-A740-FCE412B971E7}"/>
               </a:ext>
             </a:extLst>
           </p:cNvPr>
@@ -16163,7 +16163,7 @@
           <p:cNvPr id="9" name="">
             <a:extLst xmlns:a="http://schemas.openxmlformats.org/drawingml/2006/main">
               <a:ext uri="{FF2B5EF4-FFF2-40B4-BE49-F238E27FC236}">
-                <a16:creationId xmlns:a16="http://schemas.microsoft.com/office/drawing/2014/main" id="{B9A261FF-AEC6-4B81-90B7-748F3E7D4DB4}"/>
+                <a16:creationId xmlns:a16="http://schemas.microsoft.com/office/drawing/2014/main" id="{C61E18F6-501E-4BB8-9ECF-1B20C43FB42E}"/>
               </a:ext>
             </a:extLst>
           </p:cNvPr>
@@ -16227,7 +16227,7 @@
           <p:cNvPr id="10" name="">
             <a:extLst xmlns:a="http://schemas.openxmlformats.org/drawingml/2006/main">
               <a:ext uri="{FF2B5EF4-FFF2-40B4-BE49-F238E27FC236}">
-                <a16:creationId xmlns:a16="http://schemas.microsoft.com/office/drawing/2014/main" id="{E7D4E63A-1E3E-4FB2-8A14-FC94AA7B425C}"/>
+                <a16:creationId xmlns:a16="http://schemas.microsoft.com/office/drawing/2014/main" id="{2F7908A7-B477-48AC-AB3C-9341AABA11D2}"/>
               </a:ext>
             </a:extLst>
           </p:cNvPr>
@@ -16262,7 +16262,7 @@
           <p:cNvPr id="11" name="">
             <a:extLst xmlns:a="http://schemas.openxmlformats.org/drawingml/2006/main">
               <a:ext uri="{FF2B5EF4-FFF2-40B4-BE49-F238E27FC236}">
-                <a16:creationId xmlns:a16="http://schemas.microsoft.com/office/drawing/2014/main" id="{9F060FE6-B0DF-49FB-9630-4462B17DBCF7}"/>
+                <a16:creationId xmlns:a16="http://schemas.microsoft.com/office/drawing/2014/main" id="{7FA63366-F28C-4ED2-BF8C-5982F303AFD9}"/>
               </a:ext>
             </a:extLst>
           </p:cNvPr>
@@ -16326,7 +16326,7 @@
           <p:cNvPr id="12" name="">
             <a:extLst xmlns:a="http://schemas.openxmlformats.org/drawingml/2006/main">
               <a:ext uri="{FF2B5EF4-FFF2-40B4-BE49-F238E27FC236}">
-                <a16:creationId xmlns:a16="http://schemas.microsoft.com/office/drawing/2014/main" id="{6F1532C0-42B7-41F0-B915-0B1A46E57BF4}"/>
+                <a16:creationId xmlns:a16="http://schemas.microsoft.com/office/drawing/2014/main" id="{0B04749E-8A8A-4942-B199-79FAE192EB0C}"/>
               </a:ext>
             </a:extLst>
           </p:cNvPr>
@@ -16390,7 +16390,7 @@
           <p:cNvPr id="13" name="">
             <a:extLst xmlns:a="http://schemas.openxmlformats.org/drawingml/2006/main">
               <a:ext uri="{FF2B5EF4-FFF2-40B4-BE49-F238E27FC236}">
-                <a16:creationId xmlns:a16="http://schemas.microsoft.com/office/drawing/2014/main" id="{A18F9616-94E3-4F2B-B47B-0FE5238C56DB}"/>
+                <a16:creationId xmlns:a16="http://schemas.microsoft.com/office/drawing/2014/main" id="{1F39FA34-E781-41B6-934E-6B3277F5D05C}"/>
               </a:ext>
             </a:extLst>
           </p:cNvPr>
@@ -16425,7 +16425,7 @@
           <p:cNvPr id="14" name="">
             <a:extLst xmlns:a="http://schemas.openxmlformats.org/drawingml/2006/main">
               <a:ext uri="{FF2B5EF4-FFF2-40B4-BE49-F238E27FC236}">
-                <a16:creationId xmlns:a16="http://schemas.microsoft.com/office/drawing/2014/main" id="{7450E1CB-CE99-4D1B-96BD-44326398D28C}"/>
+                <a16:creationId xmlns:a16="http://schemas.microsoft.com/office/drawing/2014/main" id="{58A5933D-D158-4078-8DFC-07E39531242C}"/>
               </a:ext>
             </a:extLst>
           </p:cNvPr>
@@ -16489,7 +16489,7 @@
           <p:cNvPr id="15" name="">
             <a:extLst xmlns:a="http://schemas.openxmlformats.org/drawingml/2006/main">
               <a:ext uri="{FF2B5EF4-FFF2-40B4-BE49-F238E27FC236}">
-                <a16:creationId xmlns:a16="http://schemas.microsoft.com/office/drawing/2014/main" id="{FDF446A8-E225-4659-9D9A-F30A770BDDD5}"/>
+                <a16:creationId xmlns:a16="http://schemas.microsoft.com/office/drawing/2014/main" id="{F26CFBD9-853F-4156-8A6E-AAA93591AFEB}"/>
               </a:ext>
             </a:extLst>
           </p:cNvPr>
@@ -16553,7 +16553,7 @@
           <p:cNvPr id="16" name="">
             <a:extLst xmlns:a="http://schemas.openxmlformats.org/drawingml/2006/main">
               <a:ext uri="{FF2B5EF4-FFF2-40B4-BE49-F238E27FC236}">
-                <a16:creationId xmlns:a16="http://schemas.microsoft.com/office/drawing/2014/main" id="{145B1464-2170-4138-8674-D56CF4317AB6}"/>
+                <a16:creationId xmlns:a16="http://schemas.microsoft.com/office/drawing/2014/main" id="{3F5EBBB9-0357-46B0-A75C-A1D0AC34E010}"/>
               </a:ext>
             </a:extLst>
           </p:cNvPr>
@@ -16588,7 +16588,7 @@
           <p:cNvPr id="17" name="">
             <a:extLst xmlns:a="http://schemas.openxmlformats.org/drawingml/2006/main">
               <a:ext uri="{FF2B5EF4-FFF2-40B4-BE49-F238E27FC236}">
-                <a16:creationId xmlns:a16="http://schemas.microsoft.com/office/drawing/2014/main" id="{D081642D-00AD-4A78-A981-12688C4FE245}"/>
+                <a16:creationId xmlns:a16="http://schemas.microsoft.com/office/drawing/2014/main" id="{C89BFEFF-9587-43E7-A96C-2228AF9150E4}"/>
               </a:ext>
             </a:extLst>
           </p:cNvPr>
@@ -16652,7 +16652,7 @@
           <p:cNvPr id="18" name="">
             <a:extLst xmlns:a="http://schemas.openxmlformats.org/drawingml/2006/main">
               <a:ext uri="{FF2B5EF4-FFF2-40B4-BE49-F238E27FC236}">
-                <a16:creationId xmlns:a16="http://schemas.microsoft.com/office/drawing/2014/main" id="{30F4BF8F-820A-4EE9-868E-3849D356647A}"/>
+                <a16:creationId xmlns:a16="http://schemas.microsoft.com/office/drawing/2014/main" id="{42DAA23F-5CF5-424D-9C7A-2A072C8D81CF}"/>
               </a:ext>
             </a:extLst>
           </p:cNvPr>
@@ -16716,7 +16716,7 @@
           <p:cNvPr id="19" name="">
             <a:extLst xmlns:a="http://schemas.openxmlformats.org/drawingml/2006/main">
               <a:ext uri="{FF2B5EF4-FFF2-40B4-BE49-F238E27FC236}">
-                <a16:creationId xmlns:a16="http://schemas.microsoft.com/office/drawing/2014/main" id="{C96B56D3-2964-487C-89BD-56237B3F0841}"/>
+                <a16:creationId xmlns:a16="http://schemas.microsoft.com/office/drawing/2014/main" id="{90693556-ECBB-4BD0-9E62-FED27A7A1F62}"/>
               </a:ext>
             </a:extLst>
           </p:cNvPr>
@@ -16751,7 +16751,7 @@
           <p:cNvPr id="20" name="">
             <a:extLst xmlns:a="http://schemas.openxmlformats.org/drawingml/2006/main">
               <a:ext uri="{FF2B5EF4-FFF2-40B4-BE49-F238E27FC236}">
-                <a16:creationId xmlns:a16="http://schemas.microsoft.com/office/drawing/2014/main" id="{85ED77E1-24F1-40ED-A6C0-C8C47E8E5B13}"/>
+                <a16:creationId xmlns:a16="http://schemas.microsoft.com/office/drawing/2014/main" id="{D90CB639-D63D-4611-A9E8-8CBD453A97EE}"/>
               </a:ext>
             </a:extLst>
           </p:cNvPr>
@@ -16815,7 +16815,7 @@
           <p:cNvPr id="21" name="">
             <a:extLst xmlns:a="http://schemas.openxmlformats.org/drawingml/2006/main">
               <a:ext uri="{FF2B5EF4-FFF2-40B4-BE49-F238E27FC236}">
-                <a16:creationId xmlns:a16="http://schemas.microsoft.com/office/drawing/2014/main" id="{2ED20D4C-C242-4C25-8F00-DB2A0DB6A69E}"/>
+                <a16:creationId xmlns:a16="http://schemas.microsoft.com/office/drawing/2014/main" id="{331DAF7E-6D22-4860-BF13-10A3D46C759B}"/>
               </a:ext>
             </a:extLst>
           </p:cNvPr>
@@ -16879,7 +16879,7 @@
           <p:cNvPr id="22" name="">
             <a:extLst xmlns:a="http://schemas.openxmlformats.org/drawingml/2006/main">
               <a:ext uri="{FF2B5EF4-FFF2-40B4-BE49-F238E27FC236}">
-                <a16:creationId xmlns:a16="http://schemas.microsoft.com/office/drawing/2014/main" id="{96B655B5-A6AE-43B4-941B-AB246297BCC5}"/>
+                <a16:creationId xmlns:a16="http://schemas.microsoft.com/office/drawing/2014/main" id="{9CFC8ABE-9635-442F-BA64-7382CC998C84}"/>
               </a:ext>
             </a:extLst>
           </p:cNvPr>
@@ -16912,7 +16912,7 @@
           <p:cNvPr id="23" name="">
             <a:extLst xmlns:a="http://schemas.openxmlformats.org/drawingml/2006/main">
               <a:ext uri="{FF2B5EF4-FFF2-40B4-BE49-F238E27FC236}">
-                <a16:creationId xmlns:a16="http://schemas.microsoft.com/office/drawing/2014/main" id="{062C80BE-4E39-4D30-BE26-6B4D729FF465}"/>
+                <a16:creationId xmlns:a16="http://schemas.microsoft.com/office/drawing/2014/main" id="{012143F8-4E71-4986-9EB2-4A1141B09185}"/>
               </a:ext>
             </a:extLst>
           </p:cNvPr>
@@ -16947,7 +16947,7 @@
           <p:cNvPr id="24" name="">
             <a:extLst xmlns:a="http://schemas.openxmlformats.org/drawingml/2006/main">
               <a:ext uri="{FF2B5EF4-FFF2-40B4-BE49-F238E27FC236}">
-                <a16:creationId xmlns:a16="http://schemas.microsoft.com/office/drawing/2014/main" id="{9072F729-8970-4900-954F-D132E1F0EA17}"/>
+                <a16:creationId xmlns:a16="http://schemas.microsoft.com/office/drawing/2014/main" id="{41F90928-27E8-4403-BA47-1A59FA437379}"/>
               </a:ext>
             </a:extLst>
           </p:cNvPr>
@@ -17011,7 +17011,7 @@
           <p:cNvPr id="25" name="">
             <a:extLst xmlns:a="http://schemas.openxmlformats.org/drawingml/2006/main">
               <a:ext uri="{FF2B5EF4-FFF2-40B4-BE49-F238E27FC236}">
-                <a16:creationId xmlns:a16="http://schemas.microsoft.com/office/drawing/2014/main" id="{AF3055E0-B70A-4290-99FF-9A2E68E63682}"/>
+                <a16:creationId xmlns:a16="http://schemas.microsoft.com/office/drawing/2014/main" id="{C08768FB-BECF-4A06-A902-98A2F7D6BB74}"/>
               </a:ext>
             </a:extLst>
           </p:cNvPr>
@@ -17075,7 +17075,7 @@
           <p:cNvPr id="26" name="">
             <a:extLst xmlns:a="http://schemas.openxmlformats.org/drawingml/2006/main">
               <a:ext uri="{FF2B5EF4-FFF2-40B4-BE49-F238E27FC236}">
-                <a16:creationId xmlns:a16="http://schemas.microsoft.com/office/drawing/2014/main" id="{0B8A8940-F11B-456D-9905-ECD12F7D9549}"/>
+                <a16:creationId xmlns:a16="http://schemas.microsoft.com/office/drawing/2014/main" id="{3CFFFED4-CC86-42A8-B9D3-E7339D0433E9}"/>
               </a:ext>
             </a:extLst>
           </p:cNvPr>
@@ -17108,7 +17108,7 @@
           <p:cNvPr id="27" name="">
             <a:extLst xmlns:a="http://schemas.openxmlformats.org/drawingml/2006/main">
               <a:ext uri="{FF2B5EF4-FFF2-40B4-BE49-F238E27FC236}">
-                <a16:creationId xmlns:a16="http://schemas.microsoft.com/office/drawing/2014/main" id="{C953653D-7751-4A12-8B1C-A28764DF3A49}"/>
+                <a16:creationId xmlns:a16="http://schemas.microsoft.com/office/drawing/2014/main" id="{38F1AC5E-D876-4FB4-99C7-4D5F79A19538}"/>
               </a:ext>
             </a:extLst>
           </p:cNvPr>
@@ -17143,7 +17143,7 @@
           <p:cNvPr id="28" name="">
             <a:extLst xmlns:a="http://schemas.openxmlformats.org/drawingml/2006/main">
               <a:ext uri="{FF2B5EF4-FFF2-40B4-BE49-F238E27FC236}">
-                <a16:creationId xmlns:a16="http://schemas.microsoft.com/office/drawing/2014/main" id="{BA3AD2F0-3594-4219-A83F-007DB6A1F98A}"/>
+                <a16:creationId xmlns:a16="http://schemas.microsoft.com/office/drawing/2014/main" id="{2B284E77-5631-4809-ADC7-2B4689D80C12}"/>
               </a:ext>
             </a:extLst>
           </p:cNvPr>
@@ -17207,7 +17207,7 @@
           <p:cNvPr id="29" name="">
             <a:extLst xmlns:a="http://schemas.openxmlformats.org/drawingml/2006/main">
               <a:ext uri="{FF2B5EF4-FFF2-40B4-BE49-F238E27FC236}">
-                <a16:creationId xmlns:a16="http://schemas.microsoft.com/office/drawing/2014/main" id="{830E2E53-AED9-4BB7-8B28-691FFDD15CAB}"/>
+                <a16:creationId xmlns:a16="http://schemas.microsoft.com/office/drawing/2014/main" id="{C19366A6-0951-409D-8DFB-B90302EF4063}"/>
               </a:ext>
             </a:extLst>
           </p:cNvPr>
@@ -17271,7 +17271,7 @@
           <p:cNvPr id="30" name="">
             <a:extLst xmlns:a="http://schemas.openxmlformats.org/drawingml/2006/main">
               <a:ext uri="{FF2B5EF4-FFF2-40B4-BE49-F238E27FC236}">
-                <a16:creationId xmlns:a16="http://schemas.microsoft.com/office/drawing/2014/main" id="{78DF734C-E671-4BFE-801B-A366C9F8D98C}"/>
+                <a16:creationId xmlns:a16="http://schemas.microsoft.com/office/drawing/2014/main" id="{26D2D8DE-2DF2-4C65-8453-12F510C2280D}"/>
               </a:ext>
             </a:extLst>
           </p:cNvPr>
@@ -17304,7 +17304,7 @@
           <p:cNvPr id="31" name="">
             <a:extLst xmlns:a="http://schemas.openxmlformats.org/drawingml/2006/main">
               <a:ext uri="{FF2B5EF4-FFF2-40B4-BE49-F238E27FC236}">
-                <a16:creationId xmlns:a16="http://schemas.microsoft.com/office/drawing/2014/main" id="{FE0A710D-9DA3-4ABF-98C6-DA8515B7FDEA}"/>
+                <a16:creationId xmlns:a16="http://schemas.microsoft.com/office/drawing/2014/main" id="{CDCD253D-953F-42CB-9962-A653893DFE3E}"/>
               </a:ext>
             </a:extLst>
           </p:cNvPr>
@@ -17339,7 +17339,7 @@
           <p:cNvPr id="32" name="">
             <a:extLst xmlns:a="http://schemas.openxmlformats.org/drawingml/2006/main">
               <a:ext uri="{FF2B5EF4-FFF2-40B4-BE49-F238E27FC236}">
-                <a16:creationId xmlns:a16="http://schemas.microsoft.com/office/drawing/2014/main" id="{70A2560F-F6FA-40E1-A12B-673089C8D761}"/>
+                <a16:creationId xmlns:a16="http://schemas.microsoft.com/office/drawing/2014/main" id="{3993C273-5C82-4B2A-9B3E-6772EB28311A}"/>
               </a:ext>
             </a:extLst>
           </p:cNvPr>
@@ -17403,7 +17403,7 @@
           <p:cNvPr id="33" name="">
             <a:extLst xmlns:a="http://schemas.openxmlformats.org/drawingml/2006/main">
               <a:ext uri="{FF2B5EF4-FFF2-40B4-BE49-F238E27FC236}">
-                <a16:creationId xmlns:a16="http://schemas.microsoft.com/office/drawing/2014/main" id="{72F64A18-295A-45AE-828D-491AD31D6083}"/>
+                <a16:creationId xmlns:a16="http://schemas.microsoft.com/office/drawing/2014/main" id="{D5914335-73D0-45D4-A327-5FABFF4C0634}"/>
               </a:ext>
             </a:extLst>
           </p:cNvPr>
@@ -17467,7 +17467,7 @@
           <p:cNvPr id="34" name="">
             <a:extLst xmlns:a="http://schemas.openxmlformats.org/drawingml/2006/main">
               <a:ext uri="{FF2B5EF4-FFF2-40B4-BE49-F238E27FC236}">
-                <a16:creationId xmlns:a16="http://schemas.microsoft.com/office/drawing/2014/main" id="{1D07030D-D993-4F35-AA76-9F602C6E35F2}"/>
+                <a16:creationId xmlns:a16="http://schemas.microsoft.com/office/drawing/2014/main" id="{5D096CBA-8E08-47D2-8ED1-780D4BFDC7BA}"/>
               </a:ext>
             </a:extLst>
           </p:cNvPr>
@@ -17531,7 +17531,7 @@
           <p:cNvPr id="35" name="">
             <a:extLst xmlns:a="http://schemas.openxmlformats.org/drawingml/2006/main">
               <a:ext uri="{FF2B5EF4-FFF2-40B4-BE49-F238E27FC236}">
-                <a16:creationId xmlns:a16="http://schemas.microsoft.com/office/drawing/2014/main" id="{36A021CA-82F8-48E1-9F8F-54BB59F3996D}"/>
+                <a16:creationId xmlns:a16="http://schemas.microsoft.com/office/drawing/2014/main" id="{07B9CC1F-4093-4670-A26D-9291B1BC9A83}"/>
               </a:ext>
             </a:extLst>
           </p:cNvPr>
@@ -17564,7 +17564,7 @@
           <p:cNvPr id="36" name="">
             <a:extLst xmlns:a="http://schemas.openxmlformats.org/drawingml/2006/main">
               <a:ext uri="{FF2B5EF4-FFF2-40B4-BE49-F238E27FC236}">
-                <a16:creationId xmlns:a16="http://schemas.microsoft.com/office/drawing/2014/main" id="{0B3F581C-C4C9-49EA-9229-38604AD92F37}"/>
+                <a16:creationId xmlns:a16="http://schemas.microsoft.com/office/drawing/2014/main" id="{F69E606A-8B33-4A32-ACF0-CA40088628BE}"/>
               </a:ext>
             </a:extLst>
           </p:cNvPr>
@@ -17628,7 +17628,7 @@
           <p:cNvPr id="37" name="">
             <a:extLst xmlns:a="http://schemas.openxmlformats.org/drawingml/2006/main">
               <a:ext uri="{FF2B5EF4-FFF2-40B4-BE49-F238E27FC236}">
-                <a16:creationId xmlns:a16="http://schemas.microsoft.com/office/drawing/2014/main" id="{7B11AB57-68EE-405A-A38D-93467E71EC33}"/>
+                <a16:creationId xmlns:a16="http://schemas.microsoft.com/office/drawing/2014/main" id="{0287B654-FA89-4FC0-BA6A-CC1F383C0C4C}"/>
               </a:ext>
             </a:extLst>
           </p:cNvPr>
@@ -17690,7 +17690,7 @@
     </p:spTree>
     <p:extLst>
       <p:ext uri="{BB962C8B-B14F-4D97-AF65-F5344CB8AC3E}">
-        <p14:creationId xmlns:p14="http://schemas.microsoft.com/office/powerpoint/2010/main" val="508056716"/>
+        <p14:creationId xmlns:p14="http://schemas.microsoft.com/office/powerpoint/2010/main" val="1905198644"/>
       </p:ext>
     </p:extLst>
   </p:cSld>
